--- a/output/Presentacion_Final_ELI556_Atacama_POA_Tarea2_revisado.pptx
+++ b/output/Presentacion_Final_ELI556_Atacama_POA_Tarea2_revisado.pptx
@@ -4196,8 +4196,8 @@
         </p:nvSpPr>
         <p:spPr>
           <a:xfrm>
-            <a:off x="566928" y="1773936"/>
-            <a:ext cx="5190591" cy="3227831"/>
+            <a:off x="566928" y="1828800"/>
+            <a:ext cx="5190591" cy="3172967"/>
           </a:xfrm>
           <a:prstGeom prst="rect">
             <a:avLst/>
@@ -4212,11 +4212,11 @@
           <a:p>
             <a:pPr algn="l">
               <a:lnSpc>
-                <a:spcPct val="108000"/>
+                <a:spcPct val="110000"/>
               </a:lnSpc>
             </a:pPr>
             <a:r>
-              <a:rPr sz="1400">
+              <a:rPr sz="1700">
                 <a:solidFill>
                   <a:srgbClr val="FBFCFD"/>
                 </a:solidFill>
@@ -4227,18 +4227,18 @@
           <a:p>
             <a:pPr algn="l">
               <a:lnSpc>
-                <a:spcPct val="108000"/>
+                <a:spcPct val="110000"/>
               </a:lnSpc>
             </a:pPr>
           </a:p>
           <a:p>
             <a:pPr algn="l">
               <a:lnSpc>
-                <a:spcPct val="108000"/>
+                <a:spcPct val="110000"/>
               </a:lnSpc>
             </a:pPr>
             <a:r>
-              <a:rPr sz="1400">
+              <a:rPr sz="1700">
                 <a:solidFill>
                   <a:srgbClr val="FBFCFD"/>
                 </a:solidFill>
@@ -4249,18 +4249,18 @@
           <a:p>
             <a:pPr algn="l">
               <a:lnSpc>
-                <a:spcPct val="108000"/>
+                <a:spcPct val="110000"/>
               </a:lnSpc>
             </a:pPr>
           </a:p>
           <a:p>
             <a:pPr algn="l">
               <a:lnSpc>
-                <a:spcPct val="108000"/>
+                <a:spcPct val="110000"/>
               </a:lnSpc>
             </a:pPr>
             <a:r>
-              <a:rPr sz="1400">
+              <a:rPr sz="1700">
                 <a:solidFill>
                   <a:srgbClr val="FBFCFD"/>
                 </a:solidFill>
@@ -4271,18 +4271,18 @@
           <a:p>
             <a:pPr algn="l">
               <a:lnSpc>
-                <a:spcPct val="108000"/>
+                <a:spcPct val="110000"/>
               </a:lnSpc>
             </a:pPr>
           </a:p>
           <a:p>
             <a:pPr algn="l">
               <a:lnSpc>
-                <a:spcPct val="108000"/>
+                <a:spcPct val="110000"/>
               </a:lnSpc>
             </a:pPr>
             <a:r>
-              <a:rPr sz="1400">
+              <a:rPr sz="1700">
                 <a:solidFill>
                   <a:srgbClr val="FBFCFD"/>
                 </a:solidFill>
@@ -4290,7 +4290,7 @@
               <a:t>• T</a:t>
             </a:r>
             <a:r>
-              <a:rPr sz="1000">
+              <a:rPr sz="1300">
                 <a:solidFill>
                   <a:srgbClr val="FBFCFD"/>
                 </a:solidFill>
@@ -4298,7 +4298,7 @@
               <a:t>c</a:t>
             </a:r>
             <a:r>
-              <a:rPr sz="1400">
+              <a:rPr sz="1700">
                 <a:solidFill>
                   <a:srgbClr val="FBFCFD"/>
                 </a:solidFill>
@@ -4438,8 +4438,8 @@
         </p:nvSpPr>
         <p:spPr>
           <a:xfrm>
-            <a:off x="6434175" y="1773936"/>
-            <a:ext cx="5190591" cy="3227831"/>
+            <a:off x="6434175" y="1828800"/>
+            <a:ext cx="5190591" cy="3172967"/>
           </a:xfrm>
           <a:prstGeom prst="rect">
             <a:avLst/>
@@ -4454,11 +4454,11 @@
           <a:p>
             <a:pPr algn="l">
               <a:lnSpc>
-                <a:spcPct val="108000"/>
+                <a:spcPct val="110000"/>
               </a:lnSpc>
             </a:pPr>
             <a:r>
-              <a:rPr sz="1400">
+              <a:rPr sz="1700">
                 <a:solidFill>
                   <a:srgbClr val="FBFCFD"/>
                 </a:solidFill>
@@ -4469,18 +4469,18 @@
           <a:p>
             <a:pPr algn="l">
               <a:lnSpc>
-                <a:spcPct val="108000"/>
+                <a:spcPct val="110000"/>
               </a:lnSpc>
             </a:pPr>
           </a:p>
           <a:p>
             <a:pPr algn="l">
               <a:lnSpc>
-                <a:spcPct val="108000"/>
+                <a:spcPct val="110000"/>
               </a:lnSpc>
             </a:pPr>
             <a:r>
-              <a:rPr sz="1400">
+              <a:rPr sz="1700">
                 <a:solidFill>
                   <a:srgbClr val="FBFCFD"/>
                 </a:solidFill>
@@ -4491,18 +4491,18 @@
           <a:p>
             <a:pPr algn="l">
               <a:lnSpc>
-                <a:spcPct val="108000"/>
+                <a:spcPct val="110000"/>
               </a:lnSpc>
             </a:pPr>
           </a:p>
           <a:p>
             <a:pPr algn="l">
               <a:lnSpc>
-                <a:spcPct val="108000"/>
+                <a:spcPct val="110000"/>
               </a:lnSpc>
             </a:pPr>
             <a:r>
-              <a:rPr sz="1400">
+              <a:rPr sz="1700">
                 <a:solidFill>
                   <a:srgbClr val="FBFCFD"/>
                 </a:solidFill>
@@ -4513,18 +4513,18 @@
           <a:p>
             <a:pPr algn="l">
               <a:lnSpc>
-                <a:spcPct val="108000"/>
+                <a:spcPct val="110000"/>
               </a:lnSpc>
             </a:pPr>
           </a:p>
           <a:p>
             <a:pPr algn="l">
               <a:lnSpc>
-                <a:spcPct val="108000"/>
+                <a:spcPct val="110000"/>
               </a:lnSpc>
             </a:pPr>
             <a:r>
-              <a:rPr sz="1400">
+              <a:rPr sz="1700">
                 <a:solidFill>
                   <a:srgbClr val="FBFCFD"/>
                 </a:solidFill>
@@ -4532,7 +4532,7 @@
               <a:t>• T</a:t>
             </a:r>
             <a:r>
-              <a:rPr sz="1000">
+              <a:rPr sz="1300">
                 <a:solidFill>
                   <a:srgbClr val="FBFCFD"/>
                 </a:solidFill>
@@ -4540,7 +4540,7 @@
               <a:t>c</a:t>
             </a:r>
             <a:r>
-              <a:rPr sz="1400">
+              <a:rPr sz="1700">
                 <a:solidFill>
                   <a:srgbClr val="FBFCFD"/>
                 </a:solidFill>
@@ -4619,11 +4619,11 @@
           <a:p>
             <a:pPr algn="l">
               <a:lnSpc>
-                <a:spcPct val="105000"/>
+                <a:spcPct val="108000"/>
               </a:lnSpc>
             </a:pPr>
             <a:r>
-              <a:rPr sz="1400" b="1">
+              <a:rPr sz="1750" b="1">
                 <a:solidFill>
                   <a:srgbClr val="FBFCFD"/>
                 </a:solidFill>
@@ -4631,7 +4631,7 @@
               <a:t>Límite explícito del método:</a:t>
             </a:r>
             <a:r>
-              <a:rPr sz="1400">
+              <a:rPr sz="1750">
                 <a:solidFill>
                   <a:srgbClr val="FBFCFD"/>
                 </a:solidFill>
@@ -4639,7 +4639,7 @@
               <a:t> el filtro alinea estaciones, geometría solar e inclinación óptima (tilt = latitud, azimut 0° N); las </a:t>
             </a:r>
             <a:r>
-              <a:rPr sz="1400" b="1">
+              <a:rPr sz="1750" b="1">
                 <a:solidFill>
                   <a:srgbClr val="FBFCFD"/>
                 </a:solidFill>
@@ -4647,7 +4647,7 @@
               <a:t>magnitudes medidas</a:t>
             </a:r>
             <a:r>
-              <a:rPr sz="1400">
+              <a:rPr sz="1750">
                 <a:solidFill>
                   <a:srgbClr val="FBFCFD"/>
                 </a:solidFill>
@@ -4941,11 +4941,11 @@
           <a:p>
             <a:pPr algn="l">
               <a:lnSpc>
-                <a:spcPct val="105000"/>
+                <a:spcPct val="108000"/>
               </a:lnSpc>
             </a:pPr>
             <a:r>
-              <a:rPr sz="1400" b="1">
+              <a:rPr sz="1750" b="1">
                 <a:solidFill>
                   <a:srgbClr val="FBFCFD"/>
                 </a:solidFill>
@@ -4953,7 +4953,7 @@
               <a:t>Proceso de emulación temporal:</a:t>
             </a:r>
             <a:r>
-              <a:rPr sz="1400">
+              <a:rPr sz="1750">
                 <a:solidFill>
                   <a:srgbClr val="FBFCFD"/>
                 </a:solidFill>
@@ -5292,8 +5292,8 @@
         </p:nvSpPr>
         <p:spPr>
           <a:xfrm>
-            <a:off x="365760" y="1298448"/>
-            <a:ext cx="3520440" cy="566928"/>
+            <a:off x="365760" y="1280160"/>
+            <a:ext cx="3520440" cy="658368"/>
           </a:xfrm>
           <a:prstGeom prst="rect">
             <a:avLst/>
@@ -5308,7 +5308,7 @@
           <a:p>
             <a:pPr algn="ctr"/>
             <a:r>
-              <a:rPr sz="2800" b="1">
+              <a:rPr sz="3800" b="1">
                 <a:solidFill>
                   <a:srgbClr val="00D2FF"/>
                 </a:solidFill>
@@ -5326,8 +5326,8 @@
         </p:nvSpPr>
         <p:spPr>
           <a:xfrm>
-            <a:off x="420624" y="1993392"/>
-            <a:ext cx="3410712" cy="502920"/>
+            <a:off x="420624" y="1920240"/>
+            <a:ext cx="3410712" cy="566928"/>
           </a:xfrm>
           <a:prstGeom prst="rect">
             <a:avLst/>
@@ -5342,7 +5342,7 @@
           <a:p>
             <a:pPr algn="ctr"/>
             <a:r>
-              <a:rPr sz="1250">
+              <a:rPr sz="1550">
                 <a:solidFill>
                   <a:srgbClr val="9AA5B1"/>
                 </a:solidFill>
@@ -5353,7 +5353,7 @@
           <a:p>
             <a:pPr algn="ctr"/>
             <a:r>
-              <a:rPr sz="1250">
+              <a:rPr sz="1550">
                 <a:solidFill>
                   <a:srgbClr val="9AA5B1"/>
                 </a:solidFill>
@@ -5416,8 +5416,8 @@
         </p:nvSpPr>
         <p:spPr>
           <a:xfrm>
-            <a:off x="4334256" y="1298448"/>
-            <a:ext cx="3520440" cy="566928"/>
+            <a:off x="4334256" y="1280160"/>
+            <a:ext cx="3520440" cy="658368"/>
           </a:xfrm>
           <a:prstGeom prst="rect">
             <a:avLst/>
@@ -5432,7 +5432,7 @@
           <a:p>
             <a:pPr algn="ctr"/>
             <a:r>
-              <a:rPr sz="2800" b="1">
+              <a:rPr sz="3800" b="1">
                 <a:solidFill>
                   <a:srgbClr val="F1C40F"/>
                 </a:solidFill>
@@ -5450,8 +5450,8 @@
         </p:nvSpPr>
         <p:spPr>
           <a:xfrm>
-            <a:off x="4389120" y="1993392"/>
-            <a:ext cx="3410712" cy="502920"/>
+            <a:off x="4389120" y="1920240"/>
+            <a:ext cx="3410712" cy="566928"/>
           </a:xfrm>
           <a:prstGeom prst="rect">
             <a:avLst/>
@@ -5466,7 +5466,7 @@
           <a:p>
             <a:pPr algn="ctr"/>
             <a:r>
-              <a:rPr sz="1250">
+              <a:rPr sz="1550">
                 <a:solidFill>
                   <a:srgbClr val="9AA5B1"/>
                 </a:solidFill>
@@ -5477,7 +5477,7 @@
           <a:p>
             <a:pPr algn="ctr"/>
             <a:r>
-              <a:rPr sz="1250">
+              <a:rPr sz="1550">
                 <a:solidFill>
                   <a:srgbClr val="9AA5B1"/>
                 </a:solidFill>
@@ -5540,8 +5540,8 @@
         </p:nvSpPr>
         <p:spPr>
           <a:xfrm>
-            <a:off x="8302752" y="1298448"/>
-            <a:ext cx="3520440" cy="566928"/>
+            <a:off x="8302752" y="1280160"/>
+            <a:ext cx="3520440" cy="658368"/>
           </a:xfrm>
           <a:prstGeom prst="rect">
             <a:avLst/>
@@ -5556,7 +5556,7 @@
           <a:p>
             <a:pPr algn="ctr"/>
             <a:r>
-              <a:rPr sz="2800" b="1">
+              <a:rPr sz="3800" b="1">
                 <a:solidFill>
                   <a:srgbClr val="FF5E3A"/>
                 </a:solidFill>
@@ -5574,8 +5574,8 @@
         </p:nvSpPr>
         <p:spPr>
           <a:xfrm>
-            <a:off x="8357616" y="1993392"/>
-            <a:ext cx="3410712" cy="502920"/>
+            <a:off x="8357616" y="1920240"/>
+            <a:ext cx="3410712" cy="566928"/>
           </a:xfrm>
           <a:prstGeom prst="rect">
             <a:avLst/>
@@ -5590,7 +5590,7 @@
           <a:p>
             <a:pPr algn="ctr"/>
             <a:r>
-              <a:rPr sz="1250">
+              <a:rPr sz="1550">
                 <a:solidFill>
                   <a:srgbClr val="9AA5B1"/>
                 </a:solidFill>
@@ -5601,7 +5601,7 @@
           <a:p>
             <a:pPr algn="ctr"/>
             <a:r>
-              <a:rPr sz="1250">
+              <a:rPr sz="1550">
                 <a:solidFill>
                   <a:srgbClr val="9AA5B1"/>
                 </a:solidFill>
@@ -5741,8 +5741,8 @@
         </p:nvSpPr>
         <p:spPr>
           <a:xfrm>
-            <a:off x="566928" y="3374136"/>
-            <a:ext cx="5190591" cy="2587752"/>
+            <a:off x="566928" y="3429000"/>
+            <a:ext cx="5190591" cy="2532888"/>
           </a:xfrm>
           <a:prstGeom prst="rect">
             <a:avLst/>
@@ -5757,7 +5757,7 @@
           <a:p>
             <a:pPr algn="l">
               <a:lnSpc>
-                <a:spcPct val="108000"/>
+                <a:spcPct val="110000"/>
               </a:lnSpc>
             </a:pPr>
             <a:r>
@@ -5788,14 +5788,14 @@
           <a:p>
             <a:pPr algn="l">
               <a:lnSpc>
-                <a:spcPct val="108000"/>
+                <a:spcPct val="110000"/>
               </a:lnSpc>
             </a:pPr>
           </a:p>
           <a:p>
             <a:pPr algn="l">
               <a:lnSpc>
-                <a:spcPct val="108000"/>
+                <a:spcPct val="110000"/>
               </a:lnSpc>
             </a:pPr>
             <a:r>
@@ -5858,14 +5858,14 @@
           <a:p>
             <a:pPr algn="l">
               <a:lnSpc>
-                <a:spcPct val="108000"/>
+                <a:spcPct val="110000"/>
               </a:lnSpc>
             </a:pPr>
           </a:p>
           <a:p>
             <a:pPr algn="l">
               <a:lnSpc>
-                <a:spcPct val="108000"/>
+                <a:spcPct val="110000"/>
               </a:lnSpc>
             </a:pPr>
             <a:r>
@@ -6025,8 +6025,8 @@
         </p:nvSpPr>
         <p:spPr>
           <a:xfrm>
-            <a:off x="6434175" y="3374136"/>
-            <a:ext cx="5190591" cy="2587752"/>
+            <a:off x="6434175" y="3429000"/>
+            <a:ext cx="5190591" cy="2532888"/>
           </a:xfrm>
           <a:prstGeom prst="rect">
             <a:avLst/>
@@ -6041,7 +6041,7 @@
           <a:p>
             <a:pPr algn="l">
               <a:lnSpc>
-                <a:spcPct val="108000"/>
+                <a:spcPct val="110000"/>
               </a:lnSpc>
             </a:pPr>
             <a:r>
@@ -6088,14 +6088,14 @@
           <a:p>
             <a:pPr algn="l">
               <a:lnSpc>
-                <a:spcPct val="108000"/>
+                <a:spcPct val="110000"/>
               </a:lnSpc>
             </a:pPr>
           </a:p>
           <a:p>
             <a:pPr algn="l">
               <a:lnSpc>
-                <a:spcPct val="108000"/>
+                <a:spcPct val="110000"/>
               </a:lnSpc>
             </a:pPr>
             <a:r>
@@ -6126,14 +6126,14 @@
           <a:p>
             <a:pPr algn="l">
               <a:lnSpc>
-                <a:spcPct val="108000"/>
+                <a:spcPct val="110000"/>
               </a:lnSpc>
             </a:pPr>
           </a:p>
           <a:p>
             <a:pPr algn="l">
               <a:lnSpc>
-                <a:spcPct val="108000"/>
+                <a:spcPct val="110000"/>
               </a:lnSpc>
             </a:pPr>
             <a:r>
@@ -6447,11 +6447,11 @@
           <a:p>
             <a:pPr algn="l">
               <a:lnSpc>
-                <a:spcPct val="105000"/>
+                <a:spcPct val="108000"/>
               </a:lnSpc>
             </a:pPr>
             <a:r>
-              <a:rPr sz="1400" b="1">
+              <a:rPr sz="1750" b="1">
                 <a:solidFill>
                   <a:srgbClr val="FBFCFD"/>
                 </a:solidFill>
@@ -6459,7 +6459,7 @@
               <a:t>Estimación de la radiación y temperatura:</a:t>
             </a:r>
             <a:r>
-              <a:rPr sz="1400">
+              <a:rPr sz="1750">
                 <a:solidFill>
                   <a:srgbClr val="FBFCFD"/>
                 </a:solidFill>
@@ -6753,11 +6753,11 @@
           <a:p>
             <a:pPr algn="l">
               <a:lnSpc>
-                <a:spcPct val="105000"/>
+                <a:spcPct val="108000"/>
               </a:lnSpc>
             </a:pPr>
             <a:r>
-              <a:rPr sz="1400" b="1">
+              <a:rPr sz="1750" b="1">
                 <a:solidFill>
                   <a:srgbClr val="FBFCFD"/>
                 </a:solidFill>
@@ -6765,7 +6765,7 @@
               <a:t>Caracterización física de los módulos:</a:t>
             </a:r>
             <a:r>
-              <a:rPr sz="1400">
+              <a:rPr sz="1750">
                 <a:solidFill>
                   <a:srgbClr val="FBFCFD"/>
                 </a:solidFill>
@@ -8239,8 +8239,8 @@
         </p:nvSpPr>
         <p:spPr>
           <a:xfrm>
-            <a:off x="6373368" y="4928616"/>
-            <a:ext cx="5251399" cy="1124711"/>
+            <a:off x="6373368" y="4983480"/>
+            <a:ext cx="5251399" cy="1069847"/>
           </a:xfrm>
           <a:prstGeom prst="rect">
             <a:avLst/>
@@ -8255,7 +8255,7 @@
           <a:p>
             <a:pPr algn="l">
               <a:lnSpc>
-                <a:spcPct val="108000"/>
+                <a:spcPct val="110000"/>
               </a:lnSpc>
             </a:pPr>
             <a:r>
@@ -8318,7 +8318,7 @@
           <a:p>
             <a:pPr algn="l">
               <a:lnSpc>
-                <a:spcPct val="108000"/>
+                <a:spcPct val="110000"/>
               </a:lnSpc>
             </a:pPr>
             <a:r>
@@ -8632,11 +8632,11 @@
           <a:p>
             <a:pPr algn="l">
               <a:lnSpc>
-                <a:spcPct val="105000"/>
+                <a:spcPct val="108000"/>
               </a:lnSpc>
             </a:pPr>
             <a:r>
-              <a:rPr sz="1400" b="1">
+              <a:rPr sz="1750" b="1">
                 <a:solidFill>
                   <a:srgbClr val="FBFCFD"/>
                 </a:solidFill>
@@ -8644,7 +8644,7 @@
               <a:t>Cálculo de la producción eléctrica anual:</a:t>
             </a:r>
             <a:r>
-              <a:rPr sz="1400">
+              <a:rPr sz="1750">
                 <a:solidFill>
                   <a:srgbClr val="FBFCFD"/>
                 </a:solidFill>
@@ -8975,8 +8975,8 @@
         </p:nvSpPr>
         <p:spPr>
           <a:xfrm>
-            <a:off x="566928" y="1773936"/>
-            <a:ext cx="5190591" cy="4233672"/>
+            <a:off x="566928" y="1828800"/>
+            <a:ext cx="5190591" cy="4178808"/>
           </a:xfrm>
           <a:prstGeom prst="rect">
             <a:avLst/>
@@ -8991,11 +8991,11 @@
           <a:p>
             <a:pPr algn="l">
               <a:lnSpc>
-                <a:spcPct val="108000"/>
+                <a:spcPct val="110000"/>
               </a:lnSpc>
             </a:pPr>
             <a:r>
-              <a:rPr sz="1400">
+              <a:rPr sz="1700">
                 <a:solidFill>
                   <a:srgbClr val="FBFCFD"/>
                 </a:solidFill>
@@ -9003,7 +9003,7 @@
               <a:t>• </a:t>
             </a:r>
             <a:r>
-              <a:rPr sz="1400" b="1">
+              <a:rPr sz="1700" b="1">
                 <a:solidFill>
                   <a:srgbClr val="FBFCFD"/>
                 </a:solidFill>
@@ -9011,7 +9011,7 @@
               <a:t>Irradiación excepcional:</a:t>
             </a:r>
             <a:r>
-              <a:rPr sz="1400">
+              <a:rPr sz="1700">
                 <a:solidFill>
                   <a:srgbClr val="FBFCFD"/>
                 </a:solidFill>
@@ -9022,18 +9022,18 @@
           <a:p>
             <a:pPr algn="l">
               <a:lnSpc>
-                <a:spcPct val="108000"/>
+                <a:spcPct val="110000"/>
               </a:lnSpc>
             </a:pPr>
           </a:p>
           <a:p>
             <a:pPr algn="l">
               <a:lnSpc>
-                <a:spcPct val="108000"/>
+                <a:spcPct val="110000"/>
               </a:lnSpc>
             </a:pPr>
             <a:r>
-              <a:rPr sz="1400">
+              <a:rPr sz="1700">
                 <a:solidFill>
                   <a:srgbClr val="FBFCFD"/>
                 </a:solidFill>
@@ -9041,7 +9041,7 @@
               <a:t>• </a:t>
             </a:r>
             <a:r>
-              <a:rPr sz="1400" b="1">
+              <a:rPr sz="1700" b="1">
                 <a:solidFill>
                   <a:srgbClr val="FBFCFD"/>
                 </a:solidFill>
@@ -9049,7 +9049,7 @@
               <a:t>Cielos limpios y altitud:</a:t>
             </a:r>
             <a:r>
-              <a:rPr sz="1400">
+              <a:rPr sz="1700">
                 <a:solidFill>
                   <a:srgbClr val="FBFCFD"/>
                 </a:solidFill>
@@ -9060,18 +9060,18 @@
           <a:p>
             <a:pPr algn="l">
               <a:lnSpc>
-                <a:spcPct val="108000"/>
+                <a:spcPct val="110000"/>
               </a:lnSpc>
             </a:pPr>
           </a:p>
           <a:p>
             <a:pPr algn="l">
               <a:lnSpc>
-                <a:spcPct val="108000"/>
+                <a:spcPct val="110000"/>
               </a:lnSpc>
             </a:pPr>
             <a:r>
-              <a:rPr sz="1400">
+              <a:rPr sz="1700">
                 <a:solidFill>
                   <a:srgbClr val="FBFCFD"/>
                 </a:solidFill>
@@ -9079,7 +9079,7 @@
               <a:t>• </a:t>
             </a:r>
             <a:r>
-              <a:rPr sz="1400" b="1">
+              <a:rPr sz="1700" b="1">
                 <a:solidFill>
                   <a:srgbClr val="FBFCFD"/>
                 </a:solidFill>
@@ -9087,7 +9087,7 @@
               <a:t>Sitio simulado:</a:t>
             </a:r>
             <a:r>
-              <a:rPr sz="1400">
+              <a:rPr sz="1700">
                 <a:solidFill>
                   <a:srgbClr val="FBFCFD"/>
                 </a:solidFill>
@@ -9098,18 +9098,18 @@
           <a:p>
             <a:pPr algn="l">
               <a:lnSpc>
-                <a:spcPct val="108000"/>
+                <a:spcPct val="110000"/>
               </a:lnSpc>
             </a:pPr>
           </a:p>
           <a:p>
             <a:pPr algn="l">
               <a:lnSpc>
-                <a:spcPct val="108000"/>
+                <a:spcPct val="110000"/>
               </a:lnSpc>
             </a:pPr>
             <a:r>
-              <a:rPr sz="1400">
+              <a:rPr sz="1700">
                 <a:solidFill>
                   <a:srgbClr val="FBFCFD"/>
                 </a:solidFill>
@@ -9117,7 +9117,7 @@
               <a:t>• </a:t>
             </a:r>
             <a:r>
-              <a:rPr sz="1400" b="1">
+              <a:rPr sz="1700" b="1">
                 <a:solidFill>
                   <a:srgbClr val="FBFCFD"/>
                 </a:solidFill>
@@ -9125,7 +9125,7 @@
               <a:t>Base experimental:</a:t>
             </a:r>
             <a:r>
-              <a:rPr sz="1400">
+              <a:rPr sz="1700">
                 <a:solidFill>
                   <a:srgbClr val="FBFCFD"/>
                 </a:solidFill>
@@ -9265,8 +9265,8 @@
         </p:nvSpPr>
         <p:spPr>
           <a:xfrm>
-            <a:off x="6434175" y="1773936"/>
-            <a:ext cx="5190591" cy="4233672"/>
+            <a:off x="6434175" y="1828800"/>
+            <a:ext cx="5190591" cy="4178808"/>
           </a:xfrm>
           <a:prstGeom prst="rect">
             <a:avLst/>
@@ -9281,11 +9281,11 @@
           <a:p>
             <a:pPr algn="l">
               <a:lnSpc>
-                <a:spcPct val="108000"/>
+                <a:spcPct val="110000"/>
               </a:lnSpc>
             </a:pPr>
             <a:r>
-              <a:rPr sz="1400">
+              <a:rPr sz="1700">
                 <a:solidFill>
                   <a:srgbClr val="FBFCFD"/>
                 </a:solidFill>
@@ -9293,7 +9293,7 @@
               <a:t>• </a:t>
             </a:r>
             <a:r>
-              <a:rPr sz="1400" b="1">
+              <a:rPr sz="1700" b="1">
                 <a:solidFill>
                   <a:srgbClr val="FBFCFD"/>
                 </a:solidFill>
@@ -9301,7 +9301,7 @@
               <a:t>Calentamiento severo:</a:t>
             </a:r>
             <a:r>
-              <a:rPr sz="1400">
+              <a:rPr sz="1700">
                 <a:solidFill>
                   <a:srgbClr val="FBFCFD"/>
                 </a:solidFill>
@@ -9312,18 +9312,18 @@
           <a:p>
             <a:pPr algn="l">
               <a:lnSpc>
-                <a:spcPct val="108000"/>
+                <a:spcPct val="110000"/>
               </a:lnSpc>
             </a:pPr>
           </a:p>
           <a:p>
             <a:pPr algn="l">
               <a:lnSpc>
-                <a:spcPct val="108000"/>
+                <a:spcPct val="110000"/>
               </a:lnSpc>
             </a:pPr>
             <a:r>
-              <a:rPr sz="1400">
+              <a:rPr sz="1700">
                 <a:solidFill>
                   <a:srgbClr val="FBFCFD"/>
                 </a:solidFill>
@@ -9331,7 +9331,7 @@
               <a:t>• </a:t>
             </a:r>
             <a:r>
-              <a:rPr sz="1400" b="1">
+              <a:rPr sz="1700" b="1">
                 <a:solidFill>
                   <a:srgbClr val="FBFCFD"/>
                 </a:solidFill>
@@ -9339,7 +9339,7 @@
               <a:t>Degradación térmica:</a:t>
             </a:r>
             <a:r>
-              <a:rPr sz="1400">
+              <a:rPr sz="1700">
                 <a:solidFill>
                   <a:srgbClr val="FBFCFD"/>
                 </a:solidFill>
@@ -9347,7 +9347,7 @@
               <a:t> La potencia máxima y el voltaje de circuito abierto caen al aumentar la temperatura de celda (T</a:t>
             </a:r>
             <a:r>
-              <a:rPr sz="1000">
+              <a:rPr sz="1300">
                 <a:solidFill>
                   <a:srgbClr val="FBFCFD"/>
                 </a:solidFill>
@@ -9355,7 +9355,7 @@
               <a:t>c</a:t>
             </a:r>
             <a:r>
-              <a:rPr sz="1400">
+              <a:rPr sz="1700">
                 <a:solidFill>
                   <a:srgbClr val="FBFCFD"/>
                 </a:solidFill>
@@ -9366,18 +9366,18 @@
           <a:p>
             <a:pPr algn="l">
               <a:lnSpc>
-                <a:spcPct val="108000"/>
+                <a:spcPct val="110000"/>
               </a:lnSpc>
             </a:pPr>
           </a:p>
           <a:p>
             <a:pPr algn="l">
               <a:lnSpc>
-                <a:spcPct val="108000"/>
+                <a:spcPct val="110000"/>
               </a:lnSpc>
             </a:pPr>
             <a:r>
-              <a:rPr sz="1400">
+              <a:rPr sz="1700">
                 <a:solidFill>
                   <a:srgbClr val="FBFCFD"/>
                 </a:solidFill>
@@ -9385,7 +9385,7 @@
               <a:t>• </a:t>
             </a:r>
             <a:r>
-              <a:rPr sz="1400" b="1">
+              <a:rPr sz="1700" b="1">
                 <a:solidFill>
                   <a:srgbClr val="FBFCFD"/>
                 </a:solidFill>
@@ -9393,7 +9393,7 @@
               <a:t>Objetivo:</a:t>
             </a:r>
             <a:r>
-              <a:rPr sz="1400">
+              <a:rPr sz="1700">
                 <a:solidFill>
                   <a:srgbClr val="FBFCFD"/>
                 </a:solidFill>
@@ -9401,7 +9401,7 @@
               <a:t> Modelar dinámicamente registro a registro (cadencia 5 min) y cuantificar qué tecnología — </a:t>
             </a:r>
             <a:r>
-              <a:rPr sz="1400" b="1">
+              <a:rPr sz="1700" b="1">
                 <a:solidFill>
                   <a:srgbClr val="FBFCFD"/>
                 </a:solidFill>
@@ -9409,7 +9409,7 @@
               <a:t>m-Si</a:t>
             </a:r>
             <a:r>
-              <a:rPr sz="1400">
+              <a:rPr sz="1700">
                 <a:solidFill>
                   <a:srgbClr val="FBFCFD"/>
                 </a:solidFill>
@@ -9417,7 +9417,7 @@
               <a:t> o </a:t>
             </a:r>
             <a:r>
-              <a:rPr sz="1400" b="1">
+              <a:rPr sz="1700" b="1">
                 <a:solidFill>
                   <a:srgbClr val="FBFCFD"/>
                 </a:solidFill>
@@ -9425,7 +9425,7 @@
               <a:t>HIT</a:t>
             </a:r>
             <a:r>
-              <a:rPr sz="1400">
+              <a:rPr sz="1700">
                 <a:solidFill>
                   <a:srgbClr val="FBFCFD"/>
                 </a:solidFill>
@@ -9436,18 +9436,18 @@
           <a:p>
             <a:pPr algn="l">
               <a:lnSpc>
-                <a:spcPct val="108000"/>
+                <a:spcPct val="110000"/>
               </a:lnSpc>
             </a:pPr>
           </a:p>
           <a:p>
             <a:pPr algn="l">
               <a:lnSpc>
-                <a:spcPct val="108000"/>
+                <a:spcPct val="110000"/>
               </a:lnSpc>
             </a:pPr>
             <a:r>
-              <a:rPr sz="1400">
+              <a:rPr sz="1700">
                 <a:solidFill>
                   <a:srgbClr val="FBFCFD"/>
                 </a:solidFill>
@@ -9455,7 +9455,7 @@
               <a:t>• </a:t>
             </a:r>
             <a:r>
-              <a:rPr sz="1400" b="1">
+              <a:rPr sz="1700" b="1">
                 <a:solidFill>
                   <a:srgbClr val="FBFCFD"/>
                 </a:solidFill>
@@ -9463,7 +9463,7 @@
               <a:t>Pregunta guía:</a:t>
             </a:r>
             <a:r>
-              <a:rPr sz="1400">
+              <a:rPr sz="1700">
                 <a:solidFill>
                   <a:srgbClr val="FBFCFD"/>
                 </a:solidFill>
@@ -9940,8 +9940,8 @@
         </p:nvSpPr>
         <p:spPr>
           <a:xfrm>
-            <a:off x="7059168" y="1773936"/>
-            <a:ext cx="4565599" cy="667512"/>
+            <a:off x="7059168" y="1828800"/>
+            <a:ext cx="4565599" cy="612648"/>
           </a:xfrm>
           <a:prstGeom prst="rect">
             <a:avLst/>
@@ -9956,7 +9956,7 @@
           <a:p>
             <a:pPr algn="l">
               <a:lnSpc>
-                <a:spcPct val="108000"/>
+                <a:spcPct val="110000"/>
               </a:lnSpc>
             </a:pPr>
             <a:r>
@@ -10108,8 +10108,8 @@
         </p:nvSpPr>
         <p:spPr>
           <a:xfrm>
-            <a:off x="7059168" y="3374136"/>
-            <a:ext cx="4565599" cy="2679192"/>
+            <a:off x="7059168" y="3429000"/>
+            <a:ext cx="4565599" cy="2624328"/>
           </a:xfrm>
           <a:prstGeom prst="rect">
             <a:avLst/>
@@ -10124,7 +10124,7 @@
           <a:p>
             <a:pPr algn="l">
               <a:lnSpc>
-                <a:spcPct val="108000"/>
+                <a:spcPct val="110000"/>
               </a:lnSpc>
             </a:pPr>
             <a:r>
@@ -10155,14 +10155,14 @@
           <a:p>
             <a:pPr algn="l">
               <a:lnSpc>
-                <a:spcPct val="108000"/>
+                <a:spcPct val="110000"/>
               </a:lnSpc>
             </a:pPr>
           </a:p>
           <a:p>
             <a:pPr algn="l">
               <a:lnSpc>
-                <a:spcPct val="108000"/>
+                <a:spcPct val="110000"/>
               </a:lnSpc>
             </a:pPr>
             <a:r>
@@ -10193,14 +10193,14 @@
           <a:p>
             <a:pPr algn="l">
               <a:lnSpc>
-                <a:spcPct val="108000"/>
+                <a:spcPct val="110000"/>
               </a:lnSpc>
             </a:pPr>
           </a:p>
           <a:p>
             <a:pPr algn="l">
               <a:lnSpc>
-                <a:spcPct val="108000"/>
+                <a:spcPct val="110000"/>
               </a:lnSpc>
             </a:pPr>
             <a:r>
@@ -10745,8 +10745,8 @@
         </p:nvSpPr>
         <p:spPr>
           <a:xfrm>
-            <a:off x="7059168" y="1773936"/>
-            <a:ext cx="4565599" cy="667512"/>
+            <a:off x="7059168" y="1828800"/>
+            <a:ext cx="4565599" cy="612648"/>
           </a:xfrm>
           <a:prstGeom prst="rect">
             <a:avLst/>
@@ -10761,7 +10761,7 @@
           <a:p>
             <a:pPr algn="l">
               <a:lnSpc>
-                <a:spcPct val="108000"/>
+                <a:spcPct val="110000"/>
               </a:lnSpc>
             </a:pPr>
             <a:r>
@@ -10929,8 +10929,8 @@
         </p:nvSpPr>
         <p:spPr>
           <a:xfrm>
-            <a:off x="7059168" y="3374136"/>
-            <a:ext cx="4565599" cy="2679192"/>
+            <a:off x="7059168" y="3429000"/>
+            <a:ext cx="4565599" cy="2624328"/>
           </a:xfrm>
           <a:prstGeom prst="rect">
             <a:avLst/>
@@ -10945,7 +10945,7 @@
           <a:p>
             <a:pPr algn="l">
               <a:lnSpc>
-                <a:spcPct val="108000"/>
+                <a:spcPct val="110000"/>
               </a:lnSpc>
             </a:pPr>
             <a:r>
@@ -11040,14 +11040,14 @@
           <a:p>
             <a:pPr algn="l">
               <a:lnSpc>
-                <a:spcPct val="108000"/>
+                <a:spcPct val="110000"/>
               </a:lnSpc>
             </a:pPr>
           </a:p>
           <a:p>
             <a:pPr algn="l">
               <a:lnSpc>
-                <a:spcPct val="108000"/>
+                <a:spcPct val="110000"/>
               </a:lnSpc>
             </a:pPr>
             <a:r>
@@ -11078,14 +11078,14 @@
           <a:p>
             <a:pPr algn="l">
               <a:lnSpc>
-                <a:spcPct val="108000"/>
+                <a:spcPct val="110000"/>
               </a:lnSpc>
             </a:pPr>
           </a:p>
           <a:p>
             <a:pPr algn="l">
               <a:lnSpc>
-                <a:spcPct val="108000"/>
+                <a:spcPct val="110000"/>
               </a:lnSpc>
             </a:pPr>
             <a:r>
@@ -11484,8 +11484,8 @@
         </p:nvSpPr>
         <p:spPr>
           <a:xfrm>
-            <a:off x="566928" y="1773936"/>
-            <a:ext cx="5190591" cy="4233672"/>
+            <a:off x="566928" y="1828800"/>
+            <a:ext cx="5190591" cy="4178808"/>
           </a:xfrm>
           <a:prstGeom prst="rect">
             <a:avLst/>
@@ -11500,7 +11500,7 @@
           <a:p>
             <a:pPr algn="l">
               <a:lnSpc>
-                <a:spcPct val="108000"/>
+                <a:spcPct val="110000"/>
               </a:lnSpc>
             </a:pPr>
             <a:r>
@@ -11547,14 +11547,14 @@
           <a:p>
             <a:pPr algn="l">
               <a:lnSpc>
-                <a:spcPct val="108000"/>
+                <a:spcPct val="110000"/>
               </a:lnSpc>
             </a:pPr>
           </a:p>
           <a:p>
             <a:pPr algn="l">
               <a:lnSpc>
-                <a:spcPct val="108000"/>
+                <a:spcPct val="110000"/>
               </a:lnSpc>
             </a:pPr>
             <a:r>
@@ -11601,14 +11601,14 @@
           <a:p>
             <a:pPr algn="l">
               <a:lnSpc>
-                <a:spcPct val="108000"/>
+                <a:spcPct val="110000"/>
               </a:lnSpc>
             </a:pPr>
           </a:p>
           <a:p>
             <a:pPr algn="l">
               <a:lnSpc>
-                <a:spcPct val="108000"/>
+                <a:spcPct val="110000"/>
               </a:lnSpc>
             </a:pPr>
             <a:r>
@@ -11784,8 +11784,8 @@
         </p:nvSpPr>
         <p:spPr>
           <a:xfrm>
-            <a:off x="6434175" y="1773936"/>
-            <a:ext cx="5190591" cy="4233672"/>
+            <a:off x="6434175" y="1828800"/>
+            <a:ext cx="5190591" cy="4178808"/>
           </a:xfrm>
           <a:prstGeom prst="rect">
             <a:avLst/>
@@ -11800,7 +11800,7 @@
           <a:p>
             <a:pPr algn="l">
               <a:lnSpc>
-                <a:spcPct val="108000"/>
+                <a:spcPct val="110000"/>
               </a:lnSpc>
             </a:pPr>
             <a:r>
@@ -11895,14 +11895,14 @@
           <a:p>
             <a:pPr algn="l">
               <a:lnSpc>
-                <a:spcPct val="108000"/>
+                <a:spcPct val="110000"/>
               </a:lnSpc>
             </a:pPr>
           </a:p>
           <a:p>
             <a:pPr algn="l">
               <a:lnSpc>
-                <a:spcPct val="108000"/>
+                <a:spcPct val="110000"/>
               </a:lnSpc>
             </a:pPr>
             <a:r>
@@ -11965,14 +11965,14 @@
           <a:p>
             <a:pPr algn="l">
               <a:lnSpc>
-                <a:spcPct val="108000"/>
+                <a:spcPct val="110000"/>
               </a:lnSpc>
             </a:pPr>
           </a:p>
           <a:p>
             <a:pPr algn="l">
               <a:lnSpc>
-                <a:spcPct val="108000"/>
+                <a:spcPct val="110000"/>
               </a:lnSpc>
             </a:pPr>
             <a:r>
@@ -12501,8 +12501,8 @@
         </p:nvSpPr>
         <p:spPr>
           <a:xfrm>
-            <a:off x="7516368" y="1773936"/>
-            <a:ext cx="4108399" cy="667512"/>
+            <a:off x="7516368" y="1828800"/>
+            <a:ext cx="4108399" cy="612648"/>
           </a:xfrm>
           <a:prstGeom prst="rect">
             <a:avLst/>
@@ -12517,7 +12517,7 @@
           <a:p>
             <a:pPr algn="l">
               <a:lnSpc>
-                <a:spcPct val="108000"/>
+                <a:spcPct val="110000"/>
               </a:lnSpc>
             </a:pPr>
             <a:r>
@@ -12548,7 +12548,7 @@
           <a:p>
             <a:pPr algn="l">
               <a:lnSpc>
-                <a:spcPct val="108000"/>
+                <a:spcPct val="110000"/>
               </a:lnSpc>
             </a:pPr>
             <a:r>
@@ -12708,8 +12708,8 @@
         </p:nvSpPr>
         <p:spPr>
           <a:xfrm>
-            <a:off x="7516368" y="3374136"/>
-            <a:ext cx="4108399" cy="2679192"/>
+            <a:off x="7516368" y="3429000"/>
+            <a:ext cx="4108399" cy="2624328"/>
           </a:xfrm>
           <a:prstGeom prst="rect">
             <a:avLst/>
@@ -12724,7 +12724,7 @@
           <a:p>
             <a:pPr algn="l">
               <a:lnSpc>
-                <a:spcPct val="108000"/>
+                <a:spcPct val="110000"/>
               </a:lnSpc>
             </a:pPr>
             <a:r>
@@ -12755,14 +12755,14 @@
           <a:p>
             <a:pPr algn="l">
               <a:lnSpc>
-                <a:spcPct val="108000"/>
+                <a:spcPct val="110000"/>
               </a:lnSpc>
             </a:pPr>
           </a:p>
           <a:p>
             <a:pPr algn="l">
               <a:lnSpc>
-                <a:spcPct val="108000"/>
+                <a:spcPct val="110000"/>
               </a:lnSpc>
             </a:pPr>
             <a:r>
@@ -12793,14 +12793,14 @@
           <a:p>
             <a:pPr algn="l">
               <a:lnSpc>
-                <a:spcPct val="108000"/>
+                <a:spcPct val="110000"/>
               </a:lnSpc>
             </a:pPr>
           </a:p>
           <a:p>
             <a:pPr algn="l">
               <a:lnSpc>
-                <a:spcPct val="108000"/>
+                <a:spcPct val="110000"/>
               </a:lnSpc>
             </a:pPr>
             <a:r>
@@ -13074,8 +13074,8 @@
         </p:nvSpPr>
         <p:spPr>
           <a:xfrm>
-            <a:off x="365760" y="1298448"/>
-            <a:ext cx="2613583" cy="566928"/>
+            <a:off x="365760" y="1280160"/>
+            <a:ext cx="2613583" cy="658368"/>
           </a:xfrm>
           <a:prstGeom prst="rect">
             <a:avLst/>
@@ -13090,7 +13090,7 @@
           <a:p>
             <a:pPr algn="ctr"/>
             <a:r>
-              <a:rPr sz="2800" b="1">
+              <a:rPr sz="3800" b="1">
                 <a:solidFill>
                   <a:srgbClr val="F1C40F"/>
                 </a:solidFill>
@@ -13108,8 +13108,8 @@
         </p:nvSpPr>
         <p:spPr>
           <a:xfrm>
-            <a:off x="420624" y="1993392"/>
-            <a:ext cx="2503855" cy="502920"/>
+            <a:off x="420624" y="1920240"/>
+            <a:ext cx="2503855" cy="566928"/>
           </a:xfrm>
           <a:prstGeom prst="rect">
             <a:avLst/>
@@ -13124,7 +13124,7 @@
           <a:p>
             <a:pPr algn="ctr"/>
             <a:r>
-              <a:rPr sz="1250">
+              <a:rPr sz="1550">
                 <a:solidFill>
                   <a:srgbClr val="9AA5B1"/>
                 </a:solidFill>
@@ -13135,7 +13135,7 @@
           <a:p>
             <a:pPr algn="ctr"/>
             <a:r>
-              <a:rPr sz="1250">
+              <a:rPr sz="1550">
                 <a:solidFill>
                   <a:srgbClr val="9AA5B1"/>
                 </a:solidFill>
@@ -13198,8 +13198,8 @@
         </p:nvSpPr>
         <p:spPr>
           <a:xfrm>
-            <a:off x="3345103" y="1298448"/>
-            <a:ext cx="2613583" cy="566928"/>
+            <a:off x="3345103" y="1280160"/>
+            <a:ext cx="2613583" cy="658368"/>
           </a:xfrm>
           <a:prstGeom prst="rect">
             <a:avLst/>
@@ -13214,7 +13214,7 @@
           <a:p>
             <a:pPr algn="ctr"/>
             <a:r>
-              <a:rPr sz="2800" b="1">
+              <a:rPr sz="3800" b="1">
                 <a:solidFill>
                   <a:srgbClr val="00D2FF"/>
                 </a:solidFill>
@@ -13232,8 +13232,8 @@
         </p:nvSpPr>
         <p:spPr>
           <a:xfrm>
-            <a:off x="3399967" y="1993392"/>
-            <a:ext cx="2503855" cy="502920"/>
+            <a:off x="3399967" y="1920240"/>
+            <a:ext cx="2503855" cy="566928"/>
           </a:xfrm>
           <a:prstGeom prst="rect">
             <a:avLst/>
@@ -13248,7 +13248,7 @@
           <a:p>
             <a:pPr algn="ctr"/>
             <a:r>
-              <a:rPr sz="1250">
+              <a:rPr sz="1550">
                 <a:solidFill>
                   <a:srgbClr val="9AA5B1"/>
                 </a:solidFill>
@@ -13259,7 +13259,7 @@
           <a:p>
             <a:pPr algn="ctr"/>
             <a:r>
-              <a:rPr sz="1250">
+              <a:rPr sz="1550">
                 <a:solidFill>
                   <a:srgbClr val="9AA5B1"/>
                 </a:solidFill>
@@ -13322,8 +13322,8 @@
         </p:nvSpPr>
         <p:spPr>
           <a:xfrm>
-            <a:off x="365760" y="2898648"/>
-            <a:ext cx="5592927" cy="566928"/>
+            <a:off x="365760" y="2880360"/>
+            <a:ext cx="5592927" cy="658368"/>
           </a:xfrm>
           <a:prstGeom prst="rect">
             <a:avLst/>
@@ -13338,7 +13338,7 @@
           <a:p>
             <a:pPr algn="ctr"/>
             <a:r>
-              <a:rPr sz="2800" b="1">
+              <a:rPr sz="3800" b="1">
                 <a:solidFill>
                   <a:srgbClr val="2ECC71"/>
                 </a:solidFill>
@@ -13356,8 +13356,8 @@
         </p:nvSpPr>
         <p:spPr>
           <a:xfrm>
-            <a:off x="420624" y="3593592"/>
-            <a:ext cx="5483199" cy="502920"/>
+            <a:off x="420624" y="3520440"/>
+            <a:ext cx="5483199" cy="566928"/>
           </a:xfrm>
           <a:prstGeom prst="rect">
             <a:avLst/>
@@ -13372,7 +13372,7 @@
           <a:p>
             <a:pPr algn="ctr"/>
             <a:r>
-              <a:rPr sz="1250">
+              <a:rPr sz="1550">
                 <a:solidFill>
                   <a:srgbClr val="9AA5B1"/>
                 </a:solidFill>
@@ -13512,8 +13512,8 @@
         </p:nvSpPr>
         <p:spPr>
           <a:xfrm>
-            <a:off x="566928" y="4974336"/>
-            <a:ext cx="5190591" cy="1033272"/>
+            <a:off x="566928" y="5029200"/>
+            <a:ext cx="5190591" cy="978408"/>
           </a:xfrm>
           <a:prstGeom prst="rect">
             <a:avLst/>
@@ -13528,11 +13528,11 @@
           <a:p>
             <a:pPr algn="l">
               <a:lnSpc>
-                <a:spcPct val="108000"/>
+                <a:spcPct val="110000"/>
               </a:lnSpc>
             </a:pPr>
             <a:r>
-              <a:rPr sz="1400">
+              <a:rPr sz="1700">
                 <a:solidFill>
                   <a:srgbClr val="FBFCFD"/>
                 </a:solidFill>
@@ -13932,8 +13932,8 @@
         </p:nvSpPr>
         <p:spPr>
           <a:xfrm>
-            <a:off x="365760" y="1298448"/>
-            <a:ext cx="3637178" cy="566928"/>
+            <a:off x="365760" y="1280160"/>
+            <a:ext cx="3637178" cy="658368"/>
           </a:xfrm>
           <a:prstGeom prst="rect">
             <a:avLst/>
@@ -13948,7 +13948,7 @@
           <a:p>
             <a:pPr algn="ctr"/>
             <a:r>
-              <a:rPr sz="2800" b="1">
+              <a:rPr sz="3800" b="1">
                 <a:solidFill>
                   <a:srgbClr val="F1C40F"/>
                 </a:solidFill>
@@ -13966,8 +13966,8 @@
         </p:nvSpPr>
         <p:spPr>
           <a:xfrm>
-            <a:off x="420624" y="1993392"/>
-            <a:ext cx="3527450" cy="502920"/>
+            <a:off x="420624" y="1920240"/>
+            <a:ext cx="3527450" cy="566928"/>
           </a:xfrm>
           <a:prstGeom prst="rect">
             <a:avLst/>
@@ -13982,7 +13982,7 @@
           <a:p>
             <a:pPr algn="ctr"/>
             <a:r>
-              <a:rPr sz="1250">
+              <a:rPr sz="1550">
                 <a:solidFill>
                   <a:srgbClr val="9AA5B1"/>
                 </a:solidFill>
@@ -13993,7 +13993,7 @@
           <a:p>
             <a:pPr algn="ctr"/>
             <a:r>
-              <a:rPr sz="1250">
+              <a:rPr sz="1550">
                 <a:solidFill>
                   <a:srgbClr val="9AA5B1"/>
                 </a:solidFill>
@@ -14056,8 +14056,8 @@
         </p:nvSpPr>
         <p:spPr>
           <a:xfrm>
-            <a:off x="4277258" y="1298448"/>
-            <a:ext cx="3637178" cy="566928"/>
+            <a:off x="4277258" y="1280160"/>
+            <a:ext cx="3637178" cy="658368"/>
           </a:xfrm>
           <a:prstGeom prst="rect">
             <a:avLst/>
@@ -14072,7 +14072,7 @@
           <a:p>
             <a:pPr algn="ctr"/>
             <a:r>
-              <a:rPr sz="2800" b="1">
+              <a:rPr sz="3800" b="1">
                 <a:solidFill>
                   <a:srgbClr val="2ECC71"/>
                 </a:solidFill>
@@ -14090,8 +14090,8 @@
         </p:nvSpPr>
         <p:spPr>
           <a:xfrm>
-            <a:off x="4332122" y="1993392"/>
-            <a:ext cx="3527450" cy="502920"/>
+            <a:off x="4332122" y="1920240"/>
+            <a:ext cx="3527450" cy="566928"/>
           </a:xfrm>
           <a:prstGeom prst="rect">
             <a:avLst/>
@@ -14106,7 +14106,7 @@
           <a:p>
             <a:pPr algn="ctr"/>
             <a:r>
-              <a:rPr sz="1250">
+              <a:rPr sz="1550">
                 <a:solidFill>
                   <a:srgbClr val="9AA5B1"/>
                 </a:solidFill>
@@ -14117,7 +14117,7 @@
           <a:p>
             <a:pPr algn="ctr"/>
             <a:r>
-              <a:rPr sz="1250">
+              <a:rPr sz="1550">
                 <a:solidFill>
                   <a:srgbClr val="9AA5B1"/>
                 </a:solidFill>
@@ -14180,8 +14180,8 @@
         </p:nvSpPr>
         <p:spPr>
           <a:xfrm>
-            <a:off x="8188756" y="1298448"/>
-            <a:ext cx="3637178" cy="566928"/>
+            <a:off x="8188756" y="1280160"/>
+            <a:ext cx="3637178" cy="658368"/>
           </a:xfrm>
           <a:prstGeom prst="rect">
             <a:avLst/>
@@ -14196,7 +14196,7 @@
           <a:p>
             <a:pPr algn="ctr"/>
             <a:r>
-              <a:rPr sz="2800" b="1">
+              <a:rPr sz="3800" b="1">
                 <a:solidFill>
                   <a:srgbClr val="00D2FF"/>
                 </a:solidFill>
@@ -14214,8 +14214,8 @@
         </p:nvSpPr>
         <p:spPr>
           <a:xfrm>
-            <a:off x="8243620" y="1993392"/>
-            <a:ext cx="3527450" cy="502920"/>
+            <a:off x="8243620" y="1920240"/>
+            <a:ext cx="3527450" cy="566928"/>
           </a:xfrm>
           <a:prstGeom prst="rect">
             <a:avLst/>
@@ -14230,7 +14230,7 @@
           <a:p>
             <a:pPr algn="ctr"/>
             <a:r>
-              <a:rPr sz="1250">
+              <a:rPr sz="1550">
                 <a:solidFill>
                   <a:srgbClr val="9AA5B1"/>
                 </a:solidFill>
@@ -14241,7 +14241,7 @@
           <a:p>
             <a:pPr algn="ctr"/>
             <a:r>
-              <a:rPr sz="1250">
+              <a:rPr sz="1550">
                 <a:solidFill>
                   <a:srgbClr val="9AA5B1"/>
                 </a:solidFill>
@@ -14381,8 +14381,8 @@
         </p:nvSpPr>
         <p:spPr>
           <a:xfrm>
-            <a:off x="566928" y="3374136"/>
-            <a:ext cx="5190591" cy="2633472"/>
+            <a:off x="566928" y="3429000"/>
+            <a:ext cx="5190591" cy="2578608"/>
           </a:xfrm>
           <a:prstGeom prst="rect">
             <a:avLst/>
@@ -14397,11 +14397,11 @@
           <a:p>
             <a:pPr algn="l">
               <a:lnSpc>
-                <a:spcPct val="108000"/>
+                <a:spcPct val="110000"/>
               </a:lnSpc>
             </a:pPr>
             <a:r>
-              <a:rPr sz="1400">
+              <a:rPr sz="1700">
                 <a:solidFill>
                   <a:srgbClr val="FBFCFD"/>
                 </a:solidFill>
@@ -14409,7 +14409,7 @@
               <a:t>• </a:t>
             </a:r>
             <a:r>
-              <a:rPr sz="1400" b="1">
+              <a:rPr sz="1700" b="1">
                 <a:solidFill>
                   <a:srgbClr val="FBFCFD"/>
                 </a:solidFill>
@@ -14417,7 +14417,7 @@
               <a:t>Recurso escalado:</a:t>
             </a:r>
             <a:r>
-              <a:rPr sz="1400">
+              <a:rPr sz="1700">
                 <a:solidFill>
                   <a:srgbClr val="FBFCFD"/>
                 </a:solidFill>
@@ -14428,18 +14428,18 @@
           <a:p>
             <a:pPr algn="l">
               <a:lnSpc>
-                <a:spcPct val="108000"/>
+                <a:spcPct val="110000"/>
               </a:lnSpc>
             </a:pPr>
           </a:p>
           <a:p>
             <a:pPr algn="l">
               <a:lnSpc>
-                <a:spcPct val="108000"/>
+                <a:spcPct val="110000"/>
               </a:lnSpc>
             </a:pPr>
             <a:r>
-              <a:rPr sz="1400">
+              <a:rPr sz="1700">
                 <a:solidFill>
                   <a:srgbClr val="FBFCFD"/>
                 </a:solidFill>
@@ -14447,7 +14447,7 @@
               <a:t>• ΔPR +2.39 pts → ≈ +60 kWh/kWp·año → </a:t>
             </a:r>
             <a:r>
-              <a:rPr sz="1400" b="1">
+              <a:rPr sz="1700" b="1">
                 <a:solidFill>
                   <a:srgbClr val="FBFCFD"/>
                 </a:solidFill>
@@ -14455,7 +14455,7 @@
               <a:t>~6,000 MWh</a:t>
             </a:r>
             <a:r>
-              <a:rPr sz="1400">
+              <a:rPr sz="1700">
                 <a:solidFill>
                   <a:srgbClr val="FBFCFD"/>
                 </a:solidFill>
@@ -14466,18 +14466,18 @@
           <a:p>
             <a:pPr algn="l">
               <a:lnSpc>
-                <a:spcPct val="108000"/>
+                <a:spcPct val="110000"/>
               </a:lnSpc>
             </a:pPr>
           </a:p>
           <a:p>
             <a:pPr algn="l">
               <a:lnSpc>
-                <a:spcPct val="108000"/>
+                <a:spcPct val="110000"/>
               </a:lnSpc>
             </a:pPr>
             <a:r>
-              <a:rPr sz="1400">
+              <a:rPr sz="1700">
                 <a:solidFill>
                   <a:srgbClr val="FBFCFD"/>
                 </a:solidFill>
@@ -14485,7 +14485,7 @@
               <a:t>• Precio de venta ≈ 45 USD/MWh → </a:t>
             </a:r>
             <a:r>
-              <a:rPr sz="1400" b="1">
+              <a:rPr sz="1700" b="1">
                 <a:solidFill>
                   <a:srgbClr val="FBFCFD"/>
                 </a:solidFill>
@@ -14493,7 +14493,7 @@
               <a:t>~USD 270k/año</a:t>
             </a:r>
             <a:r>
-              <a:rPr sz="1400">
+              <a:rPr sz="1700">
                 <a:solidFill>
                   <a:srgbClr val="FBFCFD"/>
                 </a:solidFill>
@@ -14633,8 +14633,8 @@
         </p:nvSpPr>
         <p:spPr>
           <a:xfrm>
-            <a:off x="6434175" y="3374136"/>
-            <a:ext cx="5190591" cy="2633472"/>
+            <a:off x="6434175" y="3429000"/>
+            <a:ext cx="5190591" cy="2578608"/>
           </a:xfrm>
           <a:prstGeom prst="rect">
             <a:avLst/>
@@ -14649,11 +14649,11 @@
           <a:p>
             <a:pPr algn="l">
               <a:lnSpc>
-                <a:spcPct val="108000"/>
+                <a:spcPct val="110000"/>
               </a:lnSpc>
             </a:pPr>
             <a:r>
-              <a:rPr sz="1400">
+              <a:rPr sz="1700">
                 <a:solidFill>
                   <a:srgbClr val="FBFCFD"/>
                 </a:solidFill>
@@ -14661,7 +14661,7 @@
               <a:t>• La prima CAPEX de los módulos HIT se </a:t>
             </a:r>
             <a:r>
-              <a:rPr sz="1400" b="1">
+              <a:rPr sz="1700" b="1">
                 <a:solidFill>
                   <a:srgbClr val="FBFCFD"/>
                 </a:solidFill>
@@ -14669,7 +14669,7 @@
               <a:t>amortiza con holgura</a:t>
             </a:r>
             <a:r>
-              <a:rPr sz="1400">
+              <a:rPr sz="1700">
                 <a:solidFill>
                   <a:srgbClr val="FBFCFD"/>
                 </a:solidFill>
@@ -14680,18 +14680,18 @@
           <a:p>
             <a:pPr algn="l">
               <a:lnSpc>
-                <a:spcPct val="108000"/>
+                <a:spcPct val="110000"/>
               </a:lnSpc>
             </a:pPr>
           </a:p>
           <a:p>
             <a:pPr algn="l">
               <a:lnSpc>
-                <a:spcPct val="108000"/>
+                <a:spcPct val="110000"/>
               </a:lnSpc>
             </a:pPr>
             <a:r>
-              <a:rPr sz="1400">
+              <a:rPr sz="1700">
                 <a:solidFill>
                   <a:srgbClr val="FBFCFD"/>
                 </a:solidFill>
@@ -14702,18 +14702,18 @@
           <a:p>
             <a:pPr algn="l">
               <a:lnSpc>
-                <a:spcPct val="108000"/>
+                <a:spcPct val="110000"/>
               </a:lnSpc>
             </a:pPr>
           </a:p>
           <a:p>
             <a:pPr algn="l">
               <a:lnSpc>
-                <a:spcPct val="108000"/>
+                <a:spcPct val="110000"/>
               </a:lnSpc>
             </a:pPr>
             <a:r>
-              <a:rPr sz="1400">
+              <a:rPr sz="1700">
                 <a:solidFill>
                   <a:srgbClr val="FBFCFD"/>
                 </a:solidFill>
@@ -15044,8 +15044,8 @@
         </p:nvSpPr>
         <p:spPr>
           <a:xfrm>
-            <a:off x="566928" y="1773936"/>
-            <a:ext cx="5190591" cy="4233672"/>
+            <a:off x="566928" y="1828800"/>
+            <a:ext cx="5190591" cy="4178808"/>
           </a:xfrm>
           <a:prstGeom prst="rect">
             <a:avLst/>
@@ -15060,11 +15060,11 @@
           <a:p>
             <a:pPr algn="l">
               <a:lnSpc>
-                <a:spcPct val="108000"/>
+                <a:spcPct val="110000"/>
               </a:lnSpc>
             </a:pPr>
             <a:r>
-              <a:rPr sz="1350">
+              <a:rPr sz="1650">
                 <a:solidFill>
                   <a:srgbClr val="FBFCFD"/>
                 </a:solidFill>
@@ -15072,7 +15072,7 @@
               <a:t>• </a:t>
             </a:r>
             <a:r>
-              <a:rPr sz="1350" b="1">
+              <a:rPr sz="1650" b="1">
                 <a:solidFill>
                   <a:srgbClr val="FBFCFD"/>
                 </a:solidFill>
@@ -15080,7 +15080,7 @@
               <a:t>Magnitudes de Florida:</a:t>
             </a:r>
             <a:r>
-              <a:rPr sz="1350">
+              <a:rPr sz="1650">
                 <a:solidFill>
                   <a:srgbClr val="FBFCFD"/>
                 </a:solidFill>
@@ -15091,18 +15091,18 @@
           <a:p>
             <a:pPr algn="l">
               <a:lnSpc>
-                <a:spcPct val="108000"/>
+                <a:spcPct val="110000"/>
               </a:lnSpc>
             </a:pPr>
           </a:p>
           <a:p>
             <a:pPr algn="l">
               <a:lnSpc>
-                <a:spcPct val="108000"/>
+                <a:spcPct val="110000"/>
               </a:lnSpc>
             </a:pPr>
             <a:r>
-              <a:rPr sz="1350">
+              <a:rPr sz="1650">
                 <a:solidFill>
                   <a:srgbClr val="FBFCFD"/>
                 </a:solidFill>
@@ -15110,7 +15110,7 @@
               <a:t>• </a:t>
             </a:r>
             <a:r>
-              <a:rPr sz="1350" b="1">
+              <a:rPr sz="1650" b="1">
                 <a:solidFill>
                   <a:srgbClr val="FBFCFD"/>
                 </a:solidFill>
@@ -15118,7 +15118,7 @@
               <a:t>Cobertura temporal:</a:t>
             </a:r>
             <a:r>
-              <a:rPr sz="1350">
+              <a:rPr sz="1650">
                 <a:solidFill>
                   <a:srgbClr val="FBFCFD"/>
                 </a:solidFill>
@@ -15129,18 +15129,18 @@
           <a:p>
             <a:pPr algn="l">
               <a:lnSpc>
-                <a:spcPct val="108000"/>
+                <a:spcPct val="110000"/>
               </a:lnSpc>
             </a:pPr>
           </a:p>
           <a:p>
             <a:pPr algn="l">
               <a:lnSpc>
-                <a:spcPct val="108000"/>
+                <a:spcPct val="110000"/>
               </a:lnSpc>
             </a:pPr>
             <a:r>
-              <a:rPr sz="1350">
+              <a:rPr sz="1650">
                 <a:solidFill>
                   <a:srgbClr val="FBFCFD"/>
                 </a:solidFill>
@@ -15148,7 +15148,7 @@
               <a:t>• </a:t>
             </a:r>
             <a:r>
-              <a:rPr sz="1350" b="1">
+              <a:rPr sz="1650" b="1">
                 <a:solidFill>
                   <a:srgbClr val="FBFCFD"/>
                 </a:solidFill>
@@ -15156,7 +15156,7 @@
               <a:t>α</a:t>
             </a:r>
             <a:r>
-              <a:rPr sz="950" b="1">
+              <a:rPr sz="1250" b="1">
                 <a:solidFill>
                   <a:srgbClr val="FBFCFD"/>
                 </a:solidFill>
@@ -15164,7 +15164,7 @@
               <a:t>Isc</a:t>
             </a:r>
             <a:r>
-              <a:rPr sz="1350" b="1">
+              <a:rPr sz="1650" b="1">
                 <a:solidFill>
                   <a:srgbClr val="FBFCFD"/>
                 </a:solidFill>
@@ -15172,7 +15172,7 @@
               <a:t> de literatura:</a:t>
             </a:r>
             <a:r>
-              <a:rPr sz="1350">
+              <a:rPr sz="1650">
                 <a:solidFill>
                   <a:srgbClr val="FBFCFD"/>
                 </a:solidFill>
@@ -15312,8 +15312,8 @@
         </p:nvSpPr>
         <p:spPr>
           <a:xfrm>
-            <a:off x="6434175" y="1773936"/>
-            <a:ext cx="5190591" cy="4233672"/>
+            <a:off x="6434175" y="1828800"/>
+            <a:ext cx="5190591" cy="4178808"/>
           </a:xfrm>
           <a:prstGeom prst="rect">
             <a:avLst/>
@@ -15328,11 +15328,11 @@
           <a:p>
             <a:pPr algn="l">
               <a:lnSpc>
-                <a:spcPct val="108000"/>
+                <a:spcPct val="110000"/>
               </a:lnSpc>
             </a:pPr>
             <a:r>
-              <a:rPr sz="1350">
+              <a:rPr sz="1650">
                 <a:solidFill>
                   <a:srgbClr val="FBFCFD"/>
                 </a:solidFill>
@@ -15340,7 +15340,7 @@
               <a:t>• </a:t>
             </a:r>
             <a:r>
-              <a:rPr sz="1350" b="1">
+              <a:rPr sz="1650" b="1">
                 <a:solidFill>
                   <a:srgbClr val="FBFCFD"/>
                 </a:solidFill>
@@ -15348,7 +15348,7 @@
               <a:t>Sin pérdidas ópticas/espectrales:</a:t>
             </a:r>
             <a:r>
-              <a:rPr sz="1350">
+              <a:rPr sz="1650">
                 <a:solidFill>
                   <a:srgbClr val="FBFCFD"/>
                 </a:solidFill>
@@ -15359,18 +15359,18 @@
           <a:p>
             <a:pPr algn="l">
               <a:lnSpc>
-                <a:spcPct val="108000"/>
+                <a:spcPct val="110000"/>
               </a:lnSpc>
             </a:pPr>
           </a:p>
           <a:p>
             <a:pPr algn="l">
               <a:lnSpc>
-                <a:spcPct val="108000"/>
+                <a:spcPct val="110000"/>
               </a:lnSpc>
             </a:pPr>
             <a:r>
-              <a:rPr sz="1350">
+              <a:rPr sz="1650">
                 <a:solidFill>
                   <a:srgbClr val="FBFCFD"/>
                 </a:solidFill>
@@ -15378,7 +15378,7 @@
               <a:t>• </a:t>
             </a:r>
             <a:r>
-              <a:rPr sz="1350" b="1">
+              <a:rPr sz="1650" b="1">
                 <a:solidFill>
                   <a:srgbClr val="FBFCFD"/>
                 </a:solidFill>
@@ -15386,7 +15386,7 @@
               <a:t>Albedo fijo 0.25</a:t>
             </a:r>
             <a:r>
-              <a:rPr sz="1350">
+              <a:rPr sz="1650">
                 <a:solidFill>
                   <a:srgbClr val="FBFCFD"/>
                 </a:solidFill>
@@ -15394,7 +15394,7 @@
               <a:t> (default pvlib) y </a:t>
             </a:r>
             <a:r>
-              <a:rPr sz="1350" b="1">
+              <a:rPr sz="1650" b="1">
                 <a:solidFill>
                   <a:srgbClr val="FBFCFD"/>
                 </a:solidFill>
@@ -15402,7 +15402,7 @@
               <a:t>viento fijo 1 m/s</a:t>
             </a:r>
             <a:r>
-              <a:rPr sz="1350">
+              <a:rPr sz="1650">
                 <a:solidFill>
                   <a:srgbClr val="FBFCFD"/>
                 </a:solidFill>
@@ -15413,18 +15413,18 @@
           <a:p>
             <a:pPr algn="l">
               <a:lnSpc>
-                <a:spcPct val="108000"/>
+                <a:spcPct val="110000"/>
               </a:lnSpc>
             </a:pPr>
           </a:p>
           <a:p>
             <a:pPr algn="l">
               <a:lnSpc>
-                <a:spcPct val="108000"/>
+                <a:spcPct val="110000"/>
               </a:lnSpc>
             </a:pPr>
             <a:r>
-              <a:rPr sz="1350">
+              <a:rPr sz="1650">
                 <a:solidFill>
                   <a:srgbClr val="FBFCFD"/>
                 </a:solidFill>
@@ -15432,7 +15432,7 @@
               <a:t>• </a:t>
             </a:r>
             <a:r>
-              <a:rPr sz="1350" b="1">
+              <a:rPr sz="1650" b="1">
                 <a:solidFill>
                   <a:srgbClr val="FBFCFD"/>
                 </a:solidFill>
@@ -15440,7 +15440,7 @@
               <a:t>P</a:t>
             </a:r>
             <a:r>
-              <a:rPr sz="950" b="1">
+              <a:rPr sz="1250" b="1">
                 <a:solidFill>
                   <a:srgbClr val="FBFCFD"/>
                 </a:solidFill>
@@ -15448,7 +15448,7 @@
               <a:t>STC</a:t>
             </a:r>
             <a:r>
-              <a:rPr sz="1350" b="1">
+              <a:rPr sz="1650" b="1">
                 <a:solidFill>
                   <a:srgbClr val="FBFCFD"/>
                 </a:solidFill>
@@ -15456,7 +15456,7 @@
               <a:t> del SDM</a:t>
             </a:r>
             <a:r>
-              <a:rPr sz="1350">
+              <a:rPr sz="1650">
                 <a:solidFill>
                   <a:srgbClr val="FBFCFD"/>
                 </a:solidFill>
@@ -15467,18 +15467,18 @@
           <a:p>
             <a:pPr algn="l">
               <a:lnSpc>
-                <a:spcPct val="108000"/>
+                <a:spcPct val="110000"/>
               </a:lnSpc>
             </a:pPr>
           </a:p>
           <a:p>
             <a:pPr algn="l">
               <a:lnSpc>
-                <a:spcPct val="108000"/>
+                <a:spcPct val="110000"/>
               </a:lnSpc>
             </a:pPr>
             <a:r>
-              <a:rPr sz="1350">
+              <a:rPr sz="1650">
                 <a:solidFill>
                   <a:srgbClr val="FBFCFD"/>
                 </a:solidFill>
@@ -15486,7 +15486,7 @@
               <a:t>• </a:t>
             </a:r>
             <a:r>
-              <a:rPr sz="1350" b="1">
+              <a:rPr sz="1650" b="1">
                 <a:solidFill>
                   <a:srgbClr val="FBFCFD"/>
                 </a:solidFill>
@@ -15494,7 +15494,7 @@
               <a:t>Sin soiling ni mismatch:</a:t>
             </a:r>
             <a:r>
-              <a:rPr sz="1350">
+              <a:rPr sz="1650">
                 <a:solidFill>
                   <a:srgbClr val="FBFCFD"/>
                 </a:solidFill>
@@ -15825,8 +15825,8 @@
         </p:nvSpPr>
         <p:spPr>
           <a:xfrm>
-            <a:off x="566928" y="1773936"/>
-            <a:ext cx="5190591" cy="4233672"/>
+            <a:off x="566928" y="1828800"/>
+            <a:ext cx="5190591" cy="4178808"/>
           </a:xfrm>
           <a:prstGeom prst="rect">
             <a:avLst/>
@@ -15841,11 +15841,11 @@
           <a:p>
             <a:pPr algn="l">
               <a:lnSpc>
-                <a:spcPct val="108000"/>
+                <a:spcPct val="110000"/>
               </a:lnSpc>
             </a:pPr>
             <a:r>
-              <a:rPr sz="1350">
+              <a:rPr sz="1650">
                 <a:solidFill>
                   <a:srgbClr val="FBFCFD"/>
                 </a:solidFill>
@@ -15853,7 +15853,7 @@
               <a:t>1. </a:t>
             </a:r>
             <a:r>
-              <a:rPr sz="1350" b="1">
+              <a:rPr sz="1650" b="1">
                 <a:solidFill>
                   <a:srgbClr val="FBFCFD"/>
                 </a:solidFill>
@@ -15861,7 +15861,7 @@
               <a:t>Fidelidad metodológica:</a:t>
             </a:r>
             <a:r>
-              <a:rPr sz="1350">
+              <a:rPr sz="1650">
                 <a:solidFill>
                   <a:srgbClr val="FBFCFD"/>
                 </a:solidFill>
@@ -15872,18 +15872,18 @@
           <a:p>
             <a:pPr algn="l">
               <a:lnSpc>
-                <a:spcPct val="108000"/>
+                <a:spcPct val="110000"/>
               </a:lnSpc>
             </a:pPr>
           </a:p>
           <a:p>
             <a:pPr algn="l">
               <a:lnSpc>
-                <a:spcPct val="108000"/>
+                <a:spcPct val="110000"/>
               </a:lnSpc>
             </a:pPr>
             <a:r>
-              <a:rPr sz="1350">
+              <a:rPr sz="1650">
                 <a:solidFill>
                   <a:srgbClr val="FBFCFD"/>
                 </a:solidFill>
@@ -15891,7 +15891,7 @@
               <a:t>2. </a:t>
             </a:r>
             <a:r>
-              <a:rPr sz="1350" b="1">
+              <a:rPr sz="1650" b="1">
                 <a:solidFill>
                   <a:srgbClr val="FBFCFD"/>
                 </a:solidFill>
@@ -15899,7 +15899,7 @@
               <a:t>Pipeline de datos robusto:</a:t>
             </a:r>
             <a:r>
-              <a:rPr sz="1350">
+              <a:rPr sz="1650">
                 <a:solidFill>
                   <a:srgbClr val="FBFCFD"/>
                 </a:solidFill>
@@ -15910,18 +15910,18 @@
           <a:p>
             <a:pPr algn="l">
               <a:lnSpc>
-                <a:spcPct val="108000"/>
+                <a:spcPct val="110000"/>
               </a:lnSpc>
             </a:pPr>
           </a:p>
           <a:p>
             <a:pPr algn="l">
               <a:lnSpc>
-                <a:spcPct val="108000"/>
+                <a:spcPct val="110000"/>
               </a:lnSpc>
             </a:pPr>
             <a:r>
-              <a:rPr sz="1350">
+              <a:rPr sz="1650">
                 <a:solidFill>
                   <a:srgbClr val="FBFCFD"/>
                 </a:solidFill>
@@ -15929,7 +15929,7 @@
               <a:t>3. </a:t>
             </a:r>
             <a:r>
-              <a:rPr sz="1350" b="1">
+              <a:rPr sz="1650" b="1">
                 <a:solidFill>
                   <a:srgbClr val="FBFCFD"/>
                 </a:solidFill>
@@ -15937,7 +15937,7 @@
               <a:t>Ajuste robusto:</a:t>
             </a:r>
             <a:r>
-              <a:rPr sz="1350">
+              <a:rPr sz="1650">
                 <a:solidFill>
                   <a:srgbClr val="FBFCFD"/>
                 </a:solidFill>
@@ -15945,7 +15945,7 @@
               <a:t> el SDM de 5 parámetros reprodujo la potencia medida con R² ≈ 0.99 y RMSE ≈ 3 % de P</a:t>
             </a:r>
             <a:r>
-              <a:rPr sz="950">
+              <a:rPr sz="1250">
                 <a:solidFill>
                   <a:srgbClr val="FBFCFD"/>
                 </a:solidFill>
@@ -15953,7 +15953,7 @@
               <a:t>STC</a:t>
             </a:r>
             <a:r>
-              <a:rPr sz="1350">
+              <a:rPr sz="1650">
                 <a:solidFill>
                   <a:srgbClr val="FBFCFD"/>
                 </a:solidFill>
@@ -15964,18 +15964,18 @@
           <a:p>
             <a:pPr algn="l">
               <a:lnSpc>
-                <a:spcPct val="108000"/>
+                <a:spcPct val="110000"/>
               </a:lnSpc>
             </a:pPr>
           </a:p>
           <a:p>
             <a:pPr algn="l">
               <a:lnSpc>
-                <a:spcPct val="108000"/>
+                <a:spcPct val="110000"/>
               </a:lnSpc>
             </a:pPr>
             <a:r>
-              <a:rPr sz="1350">
+              <a:rPr sz="1650">
                 <a:solidFill>
                   <a:srgbClr val="FBFCFD"/>
                 </a:solidFill>
@@ -15983,7 +15983,7 @@
               <a:t>4. </a:t>
             </a:r>
             <a:r>
-              <a:rPr sz="1350" b="1">
+              <a:rPr sz="1650" b="1">
                 <a:solidFill>
                   <a:srgbClr val="FBFCFD"/>
                 </a:solidFill>
@@ -15991,7 +15991,7 @@
               <a:t>HIT vencedor:</a:t>
             </a:r>
             <a:r>
-              <a:rPr sz="1350">
+              <a:rPr sz="1650">
                 <a:solidFill>
                   <a:srgbClr val="FBFCFD"/>
                 </a:solidFill>
@@ -16131,8 +16131,8 @@
         </p:nvSpPr>
         <p:spPr>
           <a:xfrm>
-            <a:off x="6434175" y="1773936"/>
-            <a:ext cx="5190591" cy="4233672"/>
+            <a:off x="6434175" y="1828800"/>
+            <a:ext cx="5190591" cy="4178808"/>
           </a:xfrm>
           <a:prstGeom prst="rect">
             <a:avLst/>
@@ -16147,11 +16147,11 @@
           <a:p>
             <a:pPr algn="l">
               <a:lnSpc>
-                <a:spcPct val="108000"/>
+                <a:spcPct val="110000"/>
               </a:lnSpc>
             </a:pPr>
             <a:r>
-              <a:rPr sz="1350">
+              <a:rPr sz="1650">
                 <a:solidFill>
                   <a:srgbClr val="FBFCFD"/>
                 </a:solidFill>
@@ -16159,7 +16159,7 @@
               <a:t>• </a:t>
             </a:r>
             <a:r>
-              <a:rPr sz="1350" b="1">
+              <a:rPr sz="1650" b="1">
                 <a:solidFill>
                   <a:srgbClr val="FBFCFD"/>
                 </a:solidFill>
@@ -16167,7 +16167,7 @@
               <a:t>Aplicar IAM y corrección espectral AM</a:t>
             </a:r>
             <a:r>
-              <a:rPr sz="1350">
+              <a:rPr sz="1650">
                 <a:solidFill>
                   <a:srgbClr val="FBFCFD"/>
                 </a:solidFill>
@@ -16178,18 +16178,18 @@
           <a:p>
             <a:pPr algn="l">
               <a:lnSpc>
-                <a:spcPct val="108000"/>
+                <a:spcPct val="110000"/>
               </a:lnSpc>
             </a:pPr>
           </a:p>
           <a:p>
             <a:pPr algn="l">
               <a:lnSpc>
-                <a:spcPct val="108000"/>
+                <a:spcPct val="110000"/>
               </a:lnSpc>
             </a:pPr>
             <a:r>
-              <a:rPr sz="1350">
+              <a:rPr sz="1650">
                 <a:solidFill>
                   <a:srgbClr val="FBFCFD"/>
                 </a:solidFill>
@@ -16197,7 +16197,7 @@
               <a:t>• </a:t>
             </a:r>
             <a:r>
-              <a:rPr sz="1350" b="1">
+              <a:rPr sz="1650" b="1">
                 <a:solidFill>
                   <a:srgbClr val="FBFCFD"/>
                 </a:solidFill>
@@ -16205,7 +16205,7 @@
               <a:t>Escalar el recurso a magnitudes de Atacama</a:t>
             </a:r>
             <a:r>
-              <a:rPr sz="1350">
+              <a:rPr sz="1650">
                 <a:solidFill>
                   <a:srgbClr val="FBFCFD"/>
                 </a:solidFill>
@@ -16216,18 +16216,18 @@
           <a:p>
             <a:pPr algn="l">
               <a:lnSpc>
-                <a:spcPct val="108000"/>
+                <a:spcPct val="110000"/>
               </a:lnSpc>
             </a:pPr>
           </a:p>
           <a:p>
             <a:pPr algn="l">
               <a:lnSpc>
-                <a:spcPct val="108000"/>
+                <a:spcPct val="110000"/>
               </a:lnSpc>
             </a:pPr>
             <a:r>
-              <a:rPr sz="1350">
+              <a:rPr sz="1650">
                 <a:solidFill>
                   <a:srgbClr val="FBFCFD"/>
                 </a:solidFill>
@@ -16235,7 +16235,7 @@
               <a:t>• </a:t>
             </a:r>
             <a:r>
-              <a:rPr sz="1350" b="1">
+              <a:rPr sz="1650" b="1">
                 <a:solidFill>
                   <a:srgbClr val="FBFCFD"/>
                 </a:solidFill>
@@ -16243,7 +16243,7 @@
               <a:t>Bifacialidad:</a:t>
             </a:r>
             <a:r>
-              <a:rPr sz="1350">
+              <a:rPr sz="1650">
                 <a:solidFill>
                   <a:srgbClr val="FBFCFD"/>
                 </a:solidFill>
@@ -16254,18 +16254,18 @@
           <a:p>
             <a:pPr algn="l">
               <a:lnSpc>
-                <a:spcPct val="108000"/>
+                <a:spcPct val="110000"/>
               </a:lnSpc>
             </a:pPr>
           </a:p>
           <a:p>
             <a:pPr algn="l">
               <a:lnSpc>
-                <a:spcPct val="108000"/>
+                <a:spcPct val="110000"/>
               </a:lnSpc>
             </a:pPr>
             <a:r>
-              <a:rPr sz="1350">
+              <a:rPr sz="1650">
                 <a:solidFill>
                   <a:srgbClr val="FBFCFD"/>
                 </a:solidFill>
@@ -16273,7 +16273,7 @@
               <a:t>• </a:t>
             </a:r>
             <a:r>
-              <a:rPr sz="1350" b="1">
+              <a:rPr sz="1650" b="1">
                 <a:solidFill>
                   <a:srgbClr val="FBFCFD"/>
                 </a:solidFill>
@@ -16281,7 +16281,7 @@
               <a:t>Soiling desértico:</a:t>
             </a:r>
             <a:r>
-              <a:rPr sz="1350">
+              <a:rPr sz="1650">
                 <a:solidFill>
                   <a:srgbClr val="FBFCFD"/>
                 </a:solidFill>
@@ -16292,18 +16292,18 @@
           <a:p>
             <a:pPr algn="l">
               <a:lnSpc>
-                <a:spcPct val="108000"/>
+                <a:spcPct val="110000"/>
               </a:lnSpc>
             </a:pPr>
           </a:p>
           <a:p>
             <a:pPr algn="l">
               <a:lnSpc>
-                <a:spcPct val="108000"/>
+                <a:spcPct val="110000"/>
               </a:lnSpc>
             </a:pPr>
             <a:r>
-              <a:rPr sz="1350">
+              <a:rPr sz="1650">
                 <a:solidFill>
                   <a:srgbClr val="FBFCFD"/>
                 </a:solidFill>
@@ -16311,7 +16311,7 @@
               <a:t>• </a:t>
             </a:r>
             <a:r>
-              <a:rPr sz="1350" b="1">
+              <a:rPr sz="1650" b="1">
                 <a:solidFill>
                   <a:srgbClr val="FBFCFD"/>
                 </a:solidFill>
@@ -16319,7 +16319,7 @@
               <a:t>Modelo de doble diodo:</a:t>
             </a:r>
             <a:r>
-              <a:rPr sz="1350">
+              <a:rPr sz="1650">
                 <a:solidFill>
                   <a:srgbClr val="FBFCFD"/>
                 </a:solidFill>
@@ -16650,8 +16650,8 @@
         </p:nvSpPr>
         <p:spPr>
           <a:xfrm>
-            <a:off x="566928" y="1773936"/>
-            <a:ext cx="11057839" cy="4279392"/>
+            <a:off x="566928" y="1828800"/>
+            <a:ext cx="11057839" cy="4224528"/>
           </a:xfrm>
           <a:prstGeom prst="rect">
             <a:avLst/>
@@ -16666,11 +16666,11 @@
           <a:p>
             <a:pPr algn="l">
               <a:lnSpc>
-                <a:spcPct val="108000"/>
+                <a:spcPct val="110000"/>
               </a:lnSpc>
             </a:pPr>
             <a:r>
-              <a:rPr sz="1450">
+              <a:rPr sz="1750">
                 <a:solidFill>
                   <a:srgbClr val="FBFCFD"/>
                 </a:solidFill>
@@ -16681,18 +16681,18 @@
           <a:p>
             <a:pPr algn="l">
               <a:lnSpc>
-                <a:spcPct val="108000"/>
+                <a:spcPct val="110000"/>
               </a:lnSpc>
             </a:pPr>
           </a:p>
           <a:p>
             <a:pPr algn="l">
               <a:lnSpc>
-                <a:spcPct val="108000"/>
+                <a:spcPct val="110000"/>
               </a:lnSpc>
             </a:pPr>
             <a:r>
-              <a:rPr sz="1450">
+              <a:rPr sz="1750">
                 <a:solidFill>
                   <a:srgbClr val="FBFCFD"/>
                 </a:solidFill>
@@ -16703,18 +16703,18 @@
           <a:p>
             <a:pPr algn="l">
               <a:lnSpc>
-                <a:spcPct val="108000"/>
+                <a:spcPct val="110000"/>
               </a:lnSpc>
             </a:pPr>
           </a:p>
           <a:p>
             <a:pPr algn="l">
               <a:lnSpc>
-                <a:spcPct val="108000"/>
+                <a:spcPct val="110000"/>
               </a:lnSpc>
             </a:pPr>
             <a:r>
-              <a:rPr sz="1450">
+              <a:rPr sz="1750">
                 <a:solidFill>
                   <a:srgbClr val="FBFCFD"/>
                 </a:solidFill>
@@ -16725,18 +16725,18 @@
           <a:p>
             <a:pPr algn="l">
               <a:lnSpc>
-                <a:spcPct val="108000"/>
+                <a:spcPct val="110000"/>
               </a:lnSpc>
             </a:pPr>
           </a:p>
           <a:p>
             <a:pPr algn="l">
               <a:lnSpc>
-                <a:spcPct val="108000"/>
+                <a:spcPct val="110000"/>
               </a:lnSpc>
             </a:pPr>
             <a:r>
-              <a:rPr sz="1450">
+              <a:rPr sz="1750">
                 <a:solidFill>
                   <a:srgbClr val="FBFCFD"/>
                 </a:solidFill>
@@ -16747,18 +16747,18 @@
           <a:p>
             <a:pPr algn="l">
               <a:lnSpc>
-                <a:spcPct val="108000"/>
+                <a:spcPct val="110000"/>
               </a:lnSpc>
             </a:pPr>
           </a:p>
           <a:p>
             <a:pPr algn="l">
               <a:lnSpc>
-                <a:spcPct val="108000"/>
+                <a:spcPct val="110000"/>
               </a:lnSpc>
             </a:pPr>
             <a:r>
-              <a:rPr sz="1450">
+              <a:rPr sz="1750">
                 <a:solidFill>
                   <a:srgbClr val="FBFCFD"/>
                 </a:solidFill>
@@ -16769,18 +16769,18 @@
           <a:p>
             <a:pPr algn="l">
               <a:lnSpc>
-                <a:spcPct val="108000"/>
+                <a:spcPct val="110000"/>
               </a:lnSpc>
             </a:pPr>
           </a:p>
           <a:p>
             <a:pPr algn="l">
               <a:lnSpc>
-                <a:spcPct val="108000"/>
+                <a:spcPct val="110000"/>
               </a:lnSpc>
             </a:pPr>
             <a:r>
-              <a:rPr sz="1450">
+              <a:rPr sz="1750">
                 <a:solidFill>
                   <a:srgbClr val="FBFCFD"/>
                 </a:solidFill>
@@ -16791,18 +16791,18 @@
           <a:p>
             <a:pPr algn="l">
               <a:lnSpc>
-                <a:spcPct val="108000"/>
+                <a:spcPct val="110000"/>
               </a:lnSpc>
             </a:pPr>
           </a:p>
           <a:p>
             <a:pPr algn="l">
               <a:lnSpc>
-                <a:spcPct val="108000"/>
+                <a:spcPct val="110000"/>
               </a:lnSpc>
             </a:pPr>
             <a:r>
-              <a:rPr sz="1450">
+              <a:rPr sz="1750">
                 <a:solidFill>
                   <a:srgbClr val="FBFCFD"/>
                 </a:solidFill>
@@ -17149,7 +17149,7 @@
           <a:p>
             <a:pPr algn="l"/>
             <a:r>
-              <a:rPr sz="1300">
+              <a:rPr sz="1600">
                 <a:solidFill>
                   <a:srgbClr val="FBFCFD"/>
                 </a:solidFill>
@@ -17211,7 +17211,7 @@
               </a:lnSpc>
             </a:pPr>
             <a:r>
-              <a:rPr sz="1350">
+              <a:rPr sz="1650">
                 <a:solidFill>
                   <a:srgbClr val="F1C40F"/>
                 </a:solidFill>
@@ -17226,7 +17226,7 @@
               </a:lnSpc>
             </a:pPr>
             <a:r>
-              <a:rPr sz="1350">
+              <a:rPr sz="1650">
                 <a:solidFill>
                   <a:srgbClr val="F1C40F"/>
                 </a:solidFill>
@@ -17234,7 +17234,7 @@
               <a:t>• G</a:t>
             </a:r>
             <a:r>
-              <a:rPr sz="950">
+              <a:rPr sz="1250">
                 <a:solidFill>
                   <a:srgbClr val="F1C40F"/>
                 </a:solidFill>
@@ -17242,7 +17242,7 @@
               <a:t>b</a:t>
             </a:r>
             <a:r>
-              <a:rPr sz="1350">
+              <a:rPr sz="1650">
                 <a:solidFill>
                   <a:srgbClr val="F1C40F"/>
                 </a:solidFill>
@@ -17250,7 +17250,7 @@
               <a:t> / G</a:t>
             </a:r>
             <a:r>
-              <a:rPr sz="950">
+              <a:rPr sz="1250">
                 <a:solidFill>
                   <a:srgbClr val="F1C40F"/>
                 </a:solidFill>
@@ -17258,7 +17258,7 @@
               <a:t>d</a:t>
             </a:r>
             <a:r>
-              <a:rPr sz="1350">
+              <a:rPr sz="1650">
                 <a:solidFill>
                   <a:srgbClr val="F1C40F"/>
                 </a:solidFill>
@@ -17273,7 +17273,7 @@
               </a:lnSpc>
             </a:pPr>
             <a:r>
-              <a:rPr sz="1350">
+              <a:rPr sz="1650">
                 <a:solidFill>
                   <a:srgbClr val="F1C40F"/>
                 </a:solidFill>
@@ -17288,7 +17288,7 @@
               </a:lnSpc>
             </a:pPr>
             <a:r>
-              <a:rPr sz="1350">
+              <a:rPr sz="1650">
                 <a:solidFill>
                   <a:srgbClr val="F1C40F"/>
                 </a:solidFill>
@@ -17296,7 +17296,7 @@
               <a:t>• ρ: albedo = 0.25 (default </a:t>
             </a:r>
             <a:r>
-              <a:rPr sz="1250">
+              <a:rPr sz="1550">
                 <a:solidFill>
                   <a:srgbClr val="7FDBFF"/>
                 </a:solidFill>
@@ -17305,7 +17305,7 @@
               <a:t>pvlib</a:t>
             </a:r>
             <a:r>
-              <a:rPr sz="1350">
+              <a:rPr sz="1650">
                 <a:solidFill>
                   <a:srgbClr val="F1C40F"/>
                 </a:solidFill>
@@ -17320,7 +17320,7 @@
               </a:lnSpc>
             </a:pPr>
             <a:r>
-              <a:rPr sz="1350">
+              <a:rPr sz="1650">
                 <a:solidFill>
                   <a:srgbClr val="F1C40F"/>
                 </a:solidFill>
@@ -17328,7 +17328,7 @@
               <a:t>• R</a:t>
             </a:r>
             <a:r>
-              <a:rPr sz="950">
+              <a:rPr sz="1250">
                 <a:solidFill>
                   <a:srgbClr val="F1C40F"/>
                 </a:solidFill>
@@ -17336,7 +17336,7 @@
               <a:t>beam</a:t>
             </a:r>
             <a:r>
-              <a:rPr sz="1350">
+              <a:rPr sz="1650">
                 <a:solidFill>
                   <a:srgbClr val="F1C40F"/>
                 </a:solidFill>
@@ -17351,7 +17351,7 @@
               </a:lnSpc>
             </a:pPr>
             <a:r>
-              <a:rPr sz="1350">
+              <a:rPr sz="1650">
                 <a:solidFill>
                   <a:srgbClr val="F1C40F"/>
                 </a:solidFill>
@@ -17359,7 +17359,7 @@
               <a:t>• G</a:t>
             </a:r>
             <a:r>
-              <a:rPr sz="950">
+              <a:rPr sz="1250">
                 <a:solidFill>
                   <a:srgbClr val="F1C40F"/>
                 </a:solidFill>
@@ -17367,7 +17367,7 @@
               <a:t>d,perez</a:t>
             </a:r>
             <a:r>
-              <a:rPr sz="1350">
+              <a:rPr sz="1650">
                 <a:solidFill>
                   <a:srgbClr val="F1C40F"/>
                 </a:solidFill>
@@ -17382,7 +17382,7 @@
               </a:lnSpc>
             </a:pPr>
             <a:r>
-              <a:rPr sz="1350">
+              <a:rPr sz="1650">
                 <a:solidFill>
                   <a:srgbClr val="F1C40F"/>
                 </a:solidFill>
@@ -17390,7 +17390,7 @@
               <a:t>  brillo de horizonte), evaluada por </a:t>
             </a:r>
             <a:r>
-              <a:rPr sz="1250">
+              <a:rPr sz="1550">
                 <a:solidFill>
                   <a:srgbClr val="7FDBFF"/>
                 </a:solidFill>
@@ -17399,7 +17399,7 @@
               <a:t>pvlib.get_total_irradiance</a:t>
             </a:r>
             <a:r>
-              <a:rPr sz="1350">
+              <a:rPr sz="1650">
                 <a:solidFill>
                   <a:srgbClr val="F1C40F"/>
                 </a:solidFill>
@@ -17539,8 +17539,8 @@
         </p:nvSpPr>
         <p:spPr>
           <a:xfrm>
-            <a:off x="6434175" y="1773936"/>
-            <a:ext cx="5190591" cy="4233672"/>
+            <a:off x="6434175" y="1828800"/>
+            <a:ext cx="5190591" cy="4178808"/>
           </a:xfrm>
           <a:prstGeom prst="rect">
             <a:avLst/>
@@ -17555,11 +17555,11 @@
           <a:p>
             <a:pPr algn="l">
               <a:lnSpc>
-                <a:spcPct val="108000"/>
+                <a:spcPct val="110000"/>
               </a:lnSpc>
             </a:pPr>
             <a:r>
-              <a:rPr sz="1350">
+              <a:rPr sz="1650">
                 <a:solidFill>
                   <a:srgbClr val="FBFCFD"/>
                 </a:solidFill>
@@ -17567,7 +17567,7 @@
               <a:t>• </a:t>
             </a:r>
             <a:r>
-              <a:rPr sz="1250">
+              <a:rPr sz="1550">
                 <a:solidFill>
                   <a:srgbClr val="7FDBFF"/>
                 </a:solidFill>
@@ -17576,7 +17576,7 @@
               <a:t>location.get_solarposition(times)</a:t>
             </a:r>
             <a:r>
-              <a:rPr sz="1350">
+              <a:rPr sz="1650">
                 <a:solidFill>
                   <a:srgbClr val="FBFCFD"/>
                 </a:solidFill>
@@ -17587,18 +17587,18 @@
           <a:p>
             <a:pPr algn="l">
               <a:lnSpc>
-                <a:spcPct val="108000"/>
+                <a:spcPct val="110000"/>
               </a:lnSpc>
             </a:pPr>
           </a:p>
           <a:p>
             <a:pPr algn="l">
               <a:lnSpc>
-                <a:spcPct val="108000"/>
+                <a:spcPct val="110000"/>
               </a:lnSpc>
             </a:pPr>
             <a:r>
-              <a:rPr sz="1350">
+              <a:rPr sz="1650">
                 <a:solidFill>
                   <a:srgbClr val="FBFCFD"/>
                 </a:solidFill>
@@ -17606,7 +17606,7 @@
               <a:t>• </a:t>
             </a:r>
             <a:r>
-              <a:rPr sz="1250">
+              <a:rPr sz="1550">
                 <a:solidFill>
                   <a:srgbClr val="7FDBFF"/>
                 </a:solidFill>
@@ -17615,7 +17615,7 @@
               <a:t>irradiance.get_extra_radiation(times)</a:t>
             </a:r>
             <a:r>
-              <a:rPr sz="1350">
+              <a:rPr sz="1650">
                 <a:solidFill>
                   <a:srgbClr val="FBFCFD"/>
                 </a:solidFill>
@@ -17626,18 +17626,18 @@
           <a:p>
             <a:pPr algn="l">
               <a:lnSpc>
-                <a:spcPct val="108000"/>
+                <a:spcPct val="110000"/>
               </a:lnSpc>
             </a:pPr>
           </a:p>
           <a:p>
             <a:pPr algn="l">
               <a:lnSpc>
-                <a:spcPct val="108000"/>
+                <a:spcPct val="110000"/>
               </a:lnSpc>
             </a:pPr>
             <a:r>
-              <a:rPr sz="1350">
+              <a:rPr sz="1650">
                 <a:solidFill>
                   <a:srgbClr val="FBFCFD"/>
                 </a:solidFill>
@@ -17645,7 +17645,7 @@
               <a:t>• </a:t>
             </a:r>
             <a:r>
-              <a:rPr sz="1250">
+              <a:rPr sz="1550">
                 <a:solidFill>
                   <a:srgbClr val="7FDBFF"/>
                 </a:solidFill>
@@ -17654,7 +17654,7 @@
               <a:t>irradiance.get_total_irradiance(tilt, az, dni, ghi, dhi, ..., model='perez')</a:t>
             </a:r>
             <a:r>
-              <a:rPr sz="1350">
+              <a:rPr sz="1650">
                 <a:solidFill>
                   <a:srgbClr val="FBFCFD"/>
                 </a:solidFill>
@@ -17665,18 +17665,18 @@
           <a:p>
             <a:pPr algn="l">
               <a:lnSpc>
-                <a:spcPct val="108000"/>
+                <a:spcPct val="110000"/>
               </a:lnSpc>
             </a:pPr>
           </a:p>
           <a:p>
             <a:pPr algn="l">
               <a:lnSpc>
-                <a:spcPct val="108000"/>
+                <a:spcPct val="110000"/>
               </a:lnSpc>
             </a:pPr>
             <a:r>
-              <a:rPr sz="1350">
+              <a:rPr sz="1650">
                 <a:solidFill>
                   <a:srgbClr val="FBFCFD"/>
                 </a:solidFill>
@@ -17684,7 +17684,7 @@
               <a:t>• Salida: </a:t>
             </a:r>
             <a:r>
-              <a:rPr sz="1250">
+              <a:rPr sz="1550">
                 <a:solidFill>
                   <a:srgbClr val="7FDBFF"/>
                 </a:solidFill>
@@ -17693,7 +17693,7 @@
               <a:t>poa_global</a:t>
             </a:r>
             <a:r>
-              <a:rPr sz="1350">
+              <a:rPr sz="1650">
                 <a:solidFill>
                   <a:srgbClr val="FBFCFD"/>
                 </a:solidFill>
@@ -17701,7 +17701,7 @@
               <a:t> con </a:t>
             </a:r>
             <a:r>
-              <a:rPr sz="1250">
+              <a:rPr sz="1550">
                 <a:solidFill>
                   <a:srgbClr val="7FDBFF"/>
                 </a:solidFill>
@@ -17710,7 +17710,7 @@
               <a:t>clip(≥0)</a:t>
             </a:r>
             <a:r>
-              <a:rPr sz="1350">
+              <a:rPr sz="1650">
                 <a:solidFill>
                   <a:srgbClr val="FBFCFD"/>
                 </a:solidFill>
@@ -18066,7 +18066,7 @@
                     <a:p>
                       <a:pPr algn="ctr"/>
                       <a:r>
-                        <a:rPr sz="1300" b="1">
+                        <a:rPr sz="1700" b="1">
                           <a:solidFill>
                             <a:srgbClr val="F1C40F"/>
                           </a:solidFill>
@@ -18088,7 +18088,7 @@
                     <a:p>
                       <a:pPr algn="ctr"/>
                       <a:r>
-                        <a:rPr sz="1300" b="1">
+                        <a:rPr sz="1700" b="1">
                           <a:solidFill>
                             <a:srgbClr val="F1C40F"/>
                           </a:solidFill>
@@ -18110,7 +18110,7 @@
                     <a:p>
                       <a:pPr algn="ctr"/>
                       <a:r>
-                        <a:rPr sz="1300" b="1">
+                        <a:rPr sz="1700" b="1">
                           <a:solidFill>
                             <a:srgbClr val="F1C40F"/>
                           </a:solidFill>
@@ -18132,7 +18132,7 @@
                     <a:p>
                       <a:pPr algn="ctr"/>
                       <a:r>
-                        <a:rPr sz="1300" b="1">
+                        <a:rPr sz="1700" b="1">
                           <a:solidFill>
                             <a:srgbClr val="F1C40F"/>
                           </a:solidFill>
@@ -18154,7 +18154,7 @@
                     <a:p>
                       <a:pPr algn="ctr"/>
                       <a:r>
-                        <a:rPr sz="1300" b="1">
+                        <a:rPr sz="1700" b="1">
                           <a:solidFill>
                             <a:srgbClr val="F1C40F"/>
                           </a:solidFill>
@@ -18178,7 +18178,7 @@
                     <a:p>
                       <a:pPr algn="l"/>
                       <a:r>
-                        <a:rPr sz="1200">
+                        <a:rPr sz="1550">
                           <a:solidFill>
                             <a:srgbClr val="FBFCFD"/>
                           </a:solidFill>
@@ -18201,7 +18201,7 @@
                     <a:p>
                       <a:pPr algn="ctr"/>
                       <a:r>
-                        <a:rPr sz="1200">
+                        <a:rPr sz="1550">
                           <a:solidFill>
                             <a:srgbClr val="FBFCFD"/>
                           </a:solidFill>
@@ -18223,7 +18223,7 @@
                     <a:p>
                       <a:pPr algn="ctr"/>
                       <a:r>
-                        <a:rPr sz="1200">
+                        <a:rPr sz="1550">
                           <a:solidFill>
                             <a:srgbClr val="FBFCFD"/>
                           </a:solidFill>
@@ -18245,7 +18245,7 @@
                     <a:p>
                       <a:pPr algn="ctr"/>
                       <a:r>
-                        <a:rPr sz="1200">
+                        <a:rPr sz="1550">
                           <a:solidFill>
                             <a:srgbClr val="FBFCFD"/>
                           </a:solidFill>
@@ -18267,7 +18267,7 @@
                     <a:p>
                       <a:pPr algn="ctr"/>
                       <a:r>
-                        <a:rPr sz="1200">
+                        <a:rPr sz="1550">
                           <a:solidFill>
                             <a:srgbClr val="FBFCFD"/>
                           </a:solidFill>
@@ -18291,7 +18291,7 @@
                     <a:p>
                       <a:pPr algn="l"/>
                       <a:r>
-                        <a:rPr sz="1200">
+                        <a:rPr sz="1550">
                           <a:solidFill>
                             <a:srgbClr val="FBFCFD"/>
                           </a:solidFill>
@@ -18314,7 +18314,7 @@
                     <a:p>
                       <a:pPr algn="ctr"/>
                       <a:r>
-                        <a:rPr sz="1200">
+                        <a:rPr sz="1550">
                           <a:solidFill>
                             <a:srgbClr val="FBFCFD"/>
                           </a:solidFill>
@@ -18336,7 +18336,7 @@
                     <a:p>
                       <a:pPr algn="ctr"/>
                       <a:r>
-                        <a:rPr sz="1200">
+                        <a:rPr sz="1550">
                           <a:solidFill>
                             <a:srgbClr val="FBFCFD"/>
                           </a:solidFill>
@@ -18358,7 +18358,7 @@
                     <a:p>
                       <a:pPr algn="ctr"/>
                       <a:r>
-                        <a:rPr sz="1200">
+                        <a:rPr sz="1550">
                           <a:solidFill>
                             <a:srgbClr val="FBFCFD"/>
                           </a:solidFill>
@@ -18380,7 +18380,7 @@
                     <a:p>
                       <a:pPr algn="ctr"/>
                       <a:r>
-                        <a:rPr sz="1200">
+                        <a:rPr sz="1550">
                           <a:solidFill>
                             <a:srgbClr val="FBFCFD"/>
                           </a:solidFill>
@@ -18404,7 +18404,7 @@
                     <a:p>
                       <a:pPr algn="l"/>
                       <a:r>
-                        <a:rPr sz="1200">
+                        <a:rPr sz="1550">
                           <a:solidFill>
                             <a:srgbClr val="FBFCFD"/>
                           </a:solidFill>
@@ -18427,7 +18427,7 @@
                     <a:p>
                       <a:pPr algn="ctr"/>
                       <a:r>
-                        <a:rPr sz="1200">
+                        <a:rPr sz="1550">
                           <a:solidFill>
                             <a:srgbClr val="FBFCFD"/>
                           </a:solidFill>
@@ -18449,7 +18449,7 @@
                     <a:p>
                       <a:pPr algn="ctr"/>
                       <a:r>
-                        <a:rPr sz="1200">
+                        <a:rPr sz="1550">
                           <a:solidFill>
                             <a:srgbClr val="FBFCFD"/>
                           </a:solidFill>
@@ -18471,7 +18471,7 @@
                     <a:p>
                       <a:pPr algn="ctr"/>
                       <a:r>
-                        <a:rPr sz="1200">
+                        <a:rPr sz="1550">
                           <a:solidFill>
                             <a:srgbClr val="FBFCFD"/>
                           </a:solidFill>
@@ -18493,7 +18493,7 @@
                     <a:p>
                       <a:pPr algn="ctr"/>
                       <a:r>
-                        <a:rPr sz="1200">
+                        <a:rPr sz="1550">
                           <a:solidFill>
                             <a:srgbClr val="FBFCFD"/>
                           </a:solidFill>
@@ -18517,7 +18517,7 @@
                     <a:p>
                       <a:pPr algn="l"/>
                       <a:r>
-                        <a:rPr sz="1200">
+                        <a:rPr sz="1550">
                           <a:solidFill>
                             <a:srgbClr val="FBFCFD"/>
                           </a:solidFill>
@@ -18540,7 +18540,7 @@
                     <a:p>
                       <a:pPr algn="ctr"/>
                       <a:r>
-                        <a:rPr sz="1200">
+                        <a:rPr sz="1550">
                           <a:solidFill>
                             <a:srgbClr val="FBFCFD"/>
                           </a:solidFill>
@@ -18562,7 +18562,7 @@
                     <a:p>
                       <a:pPr algn="ctr"/>
                       <a:r>
-                        <a:rPr sz="1200">
+                        <a:rPr sz="1550">
                           <a:solidFill>
                             <a:srgbClr val="FBFCFD"/>
                           </a:solidFill>
@@ -18584,7 +18584,7 @@
                     <a:p>
                       <a:pPr algn="ctr"/>
                       <a:r>
-                        <a:rPr sz="1200">
+                        <a:rPr sz="1550">
                           <a:solidFill>
                             <a:srgbClr val="FBFCFD"/>
                           </a:solidFill>
@@ -18606,7 +18606,7 @@
                     <a:p>
                       <a:pPr algn="ctr"/>
                       <a:r>
-                        <a:rPr sz="1200">
+                        <a:rPr sz="1550">
                           <a:solidFill>
                             <a:srgbClr val="FBFCFD"/>
                           </a:solidFill>
@@ -18630,7 +18630,7 @@
                     <a:p>
                       <a:pPr algn="l"/>
                       <a:r>
-                        <a:rPr sz="1200">
+                        <a:rPr sz="1550">
                           <a:solidFill>
                             <a:srgbClr val="FBFCFD"/>
                           </a:solidFill>
@@ -18653,7 +18653,7 @@
                     <a:p>
                       <a:pPr algn="ctr"/>
                       <a:r>
-                        <a:rPr sz="1200">
+                        <a:rPr sz="1550">
                           <a:solidFill>
                             <a:srgbClr val="FBFCFD"/>
                           </a:solidFill>
@@ -18675,7 +18675,7 @@
                     <a:p>
                       <a:pPr algn="ctr"/>
                       <a:r>
-                        <a:rPr sz="1200">
+                        <a:rPr sz="1550">
                           <a:solidFill>
                             <a:srgbClr val="FBFCFD"/>
                           </a:solidFill>
@@ -18697,7 +18697,7 @@
                     <a:p>
                       <a:pPr algn="ctr"/>
                       <a:r>
-                        <a:rPr sz="1200">
+                        <a:rPr sz="1550">
                           <a:solidFill>
                             <a:srgbClr val="FBFCFD"/>
                           </a:solidFill>
@@ -18719,7 +18719,7 @@
                     <a:p>
                       <a:pPr algn="ctr"/>
                       <a:r>
-                        <a:rPr sz="1200">
+                        <a:rPr sz="1550">
                           <a:solidFill>
                             <a:srgbClr val="FBFCFD"/>
                           </a:solidFill>
@@ -18763,7 +18763,7 @@
           <a:p>
             <a:pPr algn="l"/>
             <a:r>
-              <a:rPr sz="1200">
+              <a:rPr sz="1550">
                 <a:solidFill>
                   <a:srgbClr val="9AA5B1"/>
                 </a:solidFill>
@@ -18771,7 +18771,7 @@
               <a:t>Criterio: máximo contraste térmico entre tecnologías comerciales viables, con datos experimentales completos en el dataset (</a:t>
             </a:r>
             <a:r>
-              <a:rPr sz="1100">
+              <a:rPr sz="1450">
                 <a:solidFill>
                   <a:srgbClr val="7FDBFF"/>
                 </a:solidFill>
@@ -18780,7 +18780,7 @@
               <a:t>mSi0166</a:t>
             </a:r>
             <a:r>
-              <a:rPr sz="1200">
+              <a:rPr sz="1550">
                 <a:solidFill>
                   <a:srgbClr val="9AA5B1"/>
                 </a:solidFill>
@@ -18788,7 +18788,7 @@
               <a:t> y </a:t>
             </a:r>
             <a:r>
-              <a:rPr sz="1100">
+              <a:rPr sz="1450">
                 <a:solidFill>
                   <a:srgbClr val="7FDBFF"/>
                 </a:solidFill>
@@ -18797,7 +18797,7 @@
               <a:t>HIT05667</a:t>
             </a:r>
             <a:r>
-              <a:rPr sz="1200">
+              <a:rPr sz="1550">
                 <a:solidFill>
                   <a:srgbClr val="9AA5B1"/>
                 </a:solidFill>
@@ -19196,7 +19196,7 @@
               </a:lnSpc>
             </a:pPr>
             <a:r>
-              <a:rPr sz="1350">
+              <a:rPr sz="1650">
                 <a:solidFill>
                   <a:srgbClr val="F1C40F"/>
                 </a:solidFill>
@@ -19204,7 +19204,7 @@
               <a:t>Ley de Snell y Bouguer [King et al., 2004]: θ</a:t>
             </a:r>
             <a:r>
-              <a:rPr sz="950">
+              <a:rPr sz="1250">
                 <a:solidFill>
                   <a:srgbClr val="F1C40F"/>
                 </a:solidFill>
@@ -19212,7 +19212,7 @@
               <a:t>r</a:t>
             </a:r>
             <a:r>
-              <a:rPr sz="1350">
+              <a:rPr sz="1650">
                 <a:solidFill>
                   <a:srgbClr val="F1C40F"/>
                 </a:solidFill>
@@ -19420,7 +19420,7 @@
               </a:lnSpc>
             </a:pPr>
             <a:r>
-              <a:rPr sz="1350">
+              <a:rPr sz="1650">
                 <a:solidFill>
                   <a:srgbClr val="F1C40F"/>
                 </a:solidFill>
@@ -19428,7 +19428,7 @@
               <a:t>Corrige el desajuste espectral según la atmósfera atravesada; a</a:t>
             </a:r>
             <a:r>
-              <a:rPr sz="950">
+              <a:rPr sz="1250">
                 <a:solidFill>
                   <a:srgbClr val="F1C40F"/>
                 </a:solidFill>
@@ -19436,7 +19436,7 @@
               <a:t>0</a:t>
             </a:r>
             <a:r>
-              <a:rPr sz="1350">
+              <a:rPr sz="1650">
                 <a:solidFill>
                   <a:srgbClr val="F1C40F"/>
                 </a:solidFill>
@@ -19444,7 +19444,7 @@
               <a:t>…a</a:t>
             </a:r>
             <a:r>
-              <a:rPr sz="950">
+              <a:rPr sz="1250">
                 <a:solidFill>
                   <a:srgbClr val="F1C40F"/>
                 </a:solidFill>
@@ -19452,7 +19452,7 @@
               <a:t>4</a:t>
             </a:r>
             <a:r>
-              <a:rPr sz="1350">
+              <a:rPr sz="1650">
                 <a:solidFill>
                   <a:srgbClr val="F1C40F"/>
                 </a:solidFill>
@@ -19531,11 +19531,11 @@
           <a:p>
             <a:pPr algn="l">
               <a:lnSpc>
-                <a:spcPct val="105000"/>
+                <a:spcPct val="108000"/>
               </a:lnSpc>
             </a:pPr>
             <a:r>
-              <a:rPr sz="1400" b="1">
+              <a:rPr sz="1750" b="1">
                 <a:solidFill>
                   <a:srgbClr val="FBFCFD"/>
                 </a:solidFill>
@@ -19543,7 +19543,7 @@
               <a:t>Estado en este estudio:</a:t>
             </a:r>
             <a:r>
-              <a:rPr sz="1400">
+              <a:rPr sz="1750">
                 <a:solidFill>
                   <a:srgbClr val="FBFCFD"/>
                 </a:solidFill>
@@ -19551,7 +19551,7 @@
               <a:t> ecuaciones revisadas en la literatura pero </a:t>
             </a:r>
             <a:r>
-              <a:rPr sz="1400" b="1">
+              <a:rPr sz="1750" b="1">
                 <a:solidFill>
                   <a:srgbClr val="FBFCFD"/>
                 </a:solidFill>
@@ -19559,7 +19559,7 @@
               <a:t>no ejecutadas por el pipeline</a:t>
             </a:r>
             <a:r>
-              <a:rPr sz="1400">
+              <a:rPr sz="1750">
                 <a:solidFill>
                   <a:srgbClr val="FBFCFD"/>
                 </a:solidFill>
@@ -19906,7 +19906,7 @@
           <a:p>
             <a:pPr algn="l"/>
             <a:r>
-              <a:rPr sz="1300">
+              <a:rPr sz="1600">
                 <a:solidFill>
                   <a:srgbClr val="FBFCFD"/>
                 </a:solidFill>
@@ -20070,8 +20070,8 @@
         </p:nvSpPr>
         <p:spPr>
           <a:xfrm>
-            <a:off x="566928" y="3739896"/>
-            <a:ext cx="5190591" cy="2267712"/>
+            <a:off x="566928" y="3794760"/>
+            <a:ext cx="5190591" cy="2212848"/>
           </a:xfrm>
           <a:prstGeom prst="rect">
             <a:avLst/>
@@ -20086,11 +20086,11 @@
           <a:p>
             <a:pPr algn="l">
               <a:lnSpc>
-                <a:spcPct val="108000"/>
+                <a:spcPct val="110000"/>
               </a:lnSpc>
             </a:pPr>
             <a:r>
-              <a:rPr sz="1350">
+              <a:rPr sz="1650">
                 <a:solidFill>
                   <a:srgbClr val="FBFCFD"/>
                 </a:solidFill>
@@ -20098,7 +20098,7 @@
               <a:t>• T</a:t>
             </a:r>
             <a:r>
-              <a:rPr sz="950">
+              <a:rPr sz="1250">
                 <a:solidFill>
                   <a:srgbClr val="FBFCFD"/>
                 </a:solidFill>
@@ -20106,7 +20106,7 @@
               <a:t>c</a:t>
             </a:r>
             <a:r>
-              <a:rPr sz="1350">
+              <a:rPr sz="1650">
                 <a:solidFill>
                   <a:srgbClr val="FBFCFD"/>
                 </a:solidFill>
@@ -20114,7 +20114,7 @@
               <a:t> / T</a:t>
             </a:r>
             <a:r>
-              <a:rPr sz="950">
+              <a:rPr sz="1250">
                 <a:solidFill>
                   <a:srgbClr val="FBFCFD"/>
                 </a:solidFill>
@@ -20122,7 +20122,7 @@
               <a:t>a</a:t>
             </a:r>
             <a:r>
-              <a:rPr sz="1350">
+              <a:rPr sz="1650">
                 <a:solidFill>
                   <a:srgbClr val="FBFCFD"/>
                 </a:solidFill>
@@ -20133,11 +20133,11 @@
           <a:p>
             <a:pPr algn="l">
               <a:lnSpc>
-                <a:spcPct val="108000"/>
+                <a:spcPct val="110000"/>
               </a:lnSpc>
             </a:pPr>
             <a:r>
-              <a:rPr sz="1350">
+              <a:rPr sz="1650">
                 <a:solidFill>
                   <a:srgbClr val="FBFCFD"/>
                 </a:solidFill>
@@ -20145,7 +20145,7 @@
               <a:t>• G</a:t>
             </a:r>
             <a:r>
-              <a:rPr sz="950">
+              <a:rPr sz="1250">
                 <a:solidFill>
                   <a:srgbClr val="FBFCFD"/>
                 </a:solidFill>
@@ -20153,7 +20153,7 @@
               <a:t>poa</a:t>
             </a:r>
             <a:r>
-              <a:rPr sz="1350">
+              <a:rPr sz="1650">
                 <a:solidFill>
                   <a:srgbClr val="FBFCFD"/>
                 </a:solidFill>
@@ -20164,11 +20164,11 @@
           <a:p>
             <a:pPr algn="l">
               <a:lnSpc>
-                <a:spcPct val="108000"/>
+                <a:spcPct val="110000"/>
               </a:lnSpc>
             </a:pPr>
             <a:r>
-              <a:rPr sz="1350">
+              <a:rPr sz="1650">
                 <a:solidFill>
                   <a:srgbClr val="FBFCFD"/>
                 </a:solidFill>
@@ -20176,7 +20176,7 @@
               <a:t>• v</a:t>
             </a:r>
             <a:r>
-              <a:rPr sz="950">
+              <a:rPr sz="1250">
                 <a:solidFill>
                   <a:srgbClr val="FBFCFD"/>
                 </a:solidFill>
@@ -20184,7 +20184,7 @@
               <a:t>w</a:t>
             </a:r>
             <a:r>
-              <a:rPr sz="1350">
+              <a:rPr sz="1650">
                 <a:solidFill>
                   <a:srgbClr val="FBFCFD"/>
                 </a:solidFill>
@@ -20195,11 +20195,11 @@
           <a:p>
             <a:pPr algn="l">
               <a:lnSpc>
-                <a:spcPct val="108000"/>
+                <a:spcPct val="110000"/>
               </a:lnSpc>
             </a:pPr>
             <a:r>
-              <a:rPr sz="1350">
+              <a:rPr sz="1650">
                 <a:solidFill>
                   <a:srgbClr val="FBFCFD"/>
                 </a:solidFill>
@@ -20339,8 +20339,8 @@
         </p:nvSpPr>
         <p:spPr>
           <a:xfrm>
-            <a:off x="6434175" y="3739896"/>
-            <a:ext cx="5190591" cy="2267712"/>
+            <a:off x="6434175" y="3794760"/>
+            <a:ext cx="5190591" cy="2212848"/>
           </a:xfrm>
           <a:prstGeom prst="rect">
             <a:avLst/>
@@ -20355,11 +20355,11 @@
           <a:p>
             <a:pPr algn="l">
               <a:lnSpc>
-                <a:spcPct val="108000"/>
+                <a:spcPct val="110000"/>
               </a:lnSpc>
             </a:pPr>
             <a:r>
-              <a:rPr sz="1350">
+              <a:rPr sz="1650">
                 <a:solidFill>
                   <a:srgbClr val="FBFCFD"/>
                 </a:solidFill>
@@ -20367,7 +20367,7 @@
               <a:t>• m-Si — </a:t>
             </a:r>
             <a:r>
-              <a:rPr sz="1250">
+              <a:rPr sz="1550">
                 <a:solidFill>
                   <a:srgbClr val="7FDBFF"/>
                 </a:solidFill>
@@ -20376,7 +20376,7 @@
               <a:t>open_rack_glass_polymer</a:t>
             </a:r>
             <a:r>
-              <a:rPr sz="1350">
+              <a:rPr sz="1650">
                 <a:solidFill>
                   <a:srgbClr val="FBFCFD"/>
                 </a:solidFill>
@@ -20387,18 +20387,18 @@
           <a:p>
             <a:pPr algn="l">
               <a:lnSpc>
-                <a:spcPct val="108000"/>
+                <a:spcPct val="110000"/>
               </a:lnSpc>
             </a:pPr>
           </a:p>
           <a:p>
             <a:pPr algn="l">
               <a:lnSpc>
-                <a:spcPct val="108000"/>
+                <a:spcPct val="110000"/>
               </a:lnSpc>
             </a:pPr>
             <a:r>
-              <a:rPr sz="1350">
+              <a:rPr sz="1650">
                 <a:solidFill>
                   <a:srgbClr val="FBFCFD"/>
                 </a:solidFill>
@@ -20406,7 +20406,7 @@
               <a:t>• HIT — </a:t>
             </a:r>
             <a:r>
-              <a:rPr sz="1250">
+              <a:rPr sz="1550">
                 <a:solidFill>
                   <a:srgbClr val="7FDBFF"/>
                 </a:solidFill>
@@ -20415,7 +20415,7 @@
               <a:t>open_rack_glass_glass</a:t>
             </a:r>
             <a:r>
-              <a:rPr sz="1350">
+              <a:rPr sz="1650">
                 <a:solidFill>
                   <a:srgbClr val="FBFCFD"/>
                 </a:solidFill>
@@ -20426,18 +20426,18 @@
           <a:p>
             <a:pPr algn="l">
               <a:lnSpc>
-                <a:spcPct val="108000"/>
+                <a:spcPct val="110000"/>
               </a:lnSpc>
             </a:pPr>
           </a:p>
           <a:p>
             <a:pPr algn="l">
               <a:lnSpc>
-                <a:spcPct val="108000"/>
+                <a:spcPct val="110000"/>
               </a:lnSpc>
             </a:pPr>
             <a:r>
-              <a:rPr sz="1350" b="1">
+              <a:rPr sz="1650" b="1">
                 <a:solidFill>
                   <a:srgbClr val="FBFCFD"/>
                 </a:solidFill>
@@ -20445,7 +20445,7 @@
               <a:t>Fuente:</a:t>
             </a:r>
             <a:r>
-              <a:rPr sz="1350">
+              <a:rPr sz="1650">
                 <a:solidFill>
                   <a:srgbClr val="FBFCFD"/>
                 </a:solidFill>
@@ -20453,7 +20453,7 @@
               <a:t> </a:t>
             </a:r>
             <a:r>
-              <a:rPr sz="1250">
+              <a:rPr sz="1550">
                 <a:solidFill>
                   <a:srgbClr val="7FDBFF"/>
                 </a:solidFill>
@@ -20462,7 +20462,7 @@
               <a:t>pvlib.temperature.TEMPERATURE_MODEL_PARAMETERS['sapm']</a:t>
             </a:r>
             <a:r>
-              <a:rPr sz="1350">
+              <a:rPr sz="1650">
                 <a:solidFill>
                   <a:srgbClr val="FBFCFD"/>
                 </a:solidFill>
@@ -20809,7 +20809,7 @@
           <a:p>
             <a:pPr algn="l"/>
             <a:r>
-              <a:rPr sz="1300">
+              <a:rPr sz="1600">
                 <a:solidFill>
                   <a:srgbClr val="FBFCFD"/>
                 </a:solidFill>
@@ -20817,7 +20817,7 @@
               <a:t>Corriente implícita del modelo de diodo simple con resistencias parásitas (resuelta con la función W de Lambert en </a:t>
             </a:r>
             <a:r>
-              <a:rPr sz="1200">
+              <a:rPr sz="1500">
                 <a:solidFill>
                   <a:srgbClr val="7FDBFF"/>
                 </a:solidFill>
@@ -20826,7 +20826,7 @@
               <a:t>pvlib.singlediode</a:t>
             </a:r>
             <a:r>
-              <a:rPr sz="1300">
+              <a:rPr sz="1600">
                 <a:solidFill>
                   <a:srgbClr val="FBFCFD"/>
                 </a:solidFill>
@@ -21034,7 +21034,7 @@
               </a:lnSpc>
             </a:pPr>
             <a:r>
-              <a:rPr sz="1350">
+              <a:rPr sz="1650">
                 <a:solidFill>
                   <a:srgbClr val="F1C40F"/>
                 </a:solidFill>
@@ -21042,7 +21042,7 @@
               <a:t>• N</a:t>
             </a:r>
             <a:r>
-              <a:rPr sz="950">
+              <a:rPr sz="1250">
                 <a:solidFill>
                   <a:srgbClr val="F1C40F"/>
                 </a:solidFill>
@@ -21050,7 +21050,7 @@
               <a:t>s</a:t>
             </a:r>
             <a:r>
-              <a:rPr sz="1350">
+              <a:rPr sz="1650">
                 <a:solidFill>
                   <a:srgbClr val="F1C40F"/>
                 </a:solidFill>
@@ -21065,7 +21065,7 @@
               </a:lnSpc>
             </a:pPr>
             <a:r>
-              <a:rPr sz="1350">
+              <a:rPr sz="1650">
                 <a:solidFill>
                   <a:srgbClr val="F1C40F"/>
                 </a:solidFill>
@@ -21073,7 +21073,7 @@
               <a:t>• n</a:t>
             </a:r>
             <a:r>
-              <a:rPr sz="950">
+              <a:rPr sz="1250">
                 <a:solidFill>
                   <a:srgbClr val="F1C40F"/>
                 </a:solidFill>
@@ -21081,7 +21081,7 @@
               <a:t>I</a:t>
             </a:r>
             <a:r>
-              <a:rPr sz="1350">
+              <a:rPr sz="1650">
                 <a:solidFill>
                   <a:srgbClr val="F1C40F"/>
                 </a:solidFill>
@@ -21221,8 +21221,8 @@
         </p:nvSpPr>
         <p:spPr>
           <a:xfrm>
-            <a:off x="6434175" y="3739896"/>
-            <a:ext cx="5190591" cy="2267712"/>
+            <a:off x="6434175" y="3794760"/>
+            <a:ext cx="5190591" cy="2212848"/>
           </a:xfrm>
           <a:prstGeom prst="rect">
             <a:avLst/>
@@ -21237,11 +21237,11 @@
           <a:p>
             <a:pPr algn="l">
               <a:lnSpc>
-                <a:spcPct val="108000"/>
+                <a:spcPct val="110000"/>
               </a:lnSpc>
             </a:pPr>
             <a:r>
-              <a:rPr sz="1350">
+              <a:rPr sz="1650">
                 <a:solidFill>
                   <a:srgbClr val="FBFCFD"/>
                 </a:solidFill>
@@ -21252,11 +21252,11 @@
           <a:p>
             <a:pPr algn="l">
               <a:lnSpc>
-                <a:spcPct val="108000"/>
+                <a:spcPct val="110000"/>
               </a:lnSpc>
             </a:pPr>
             <a:r>
-              <a:rPr sz="1350">
+              <a:rPr sz="1650">
                 <a:solidFill>
                   <a:srgbClr val="FBFCFD"/>
                 </a:solidFill>
@@ -21264,7 +21264,7 @@
               <a:t>• I</a:t>
             </a:r>
             <a:r>
-              <a:rPr sz="950">
+              <a:rPr sz="1250">
                 <a:solidFill>
                   <a:srgbClr val="FBFCFD"/>
                 </a:solidFill>
@@ -21272,7 +21272,7 @@
               <a:t>L</a:t>
             </a:r>
             <a:r>
-              <a:rPr sz="1350">
+              <a:rPr sz="1650">
                 <a:solidFill>
                   <a:srgbClr val="FBFCFD"/>
                 </a:solidFill>
@@ -21283,11 +21283,11 @@
           <a:p>
             <a:pPr algn="l">
               <a:lnSpc>
-                <a:spcPct val="108000"/>
+                <a:spcPct val="110000"/>
               </a:lnSpc>
             </a:pPr>
             <a:r>
-              <a:rPr sz="1350">
+              <a:rPr sz="1650">
                 <a:solidFill>
                   <a:srgbClr val="FBFCFD"/>
                 </a:solidFill>
@@ -21295,7 +21295,7 @@
               <a:t>• I</a:t>
             </a:r>
             <a:r>
-              <a:rPr sz="950">
+              <a:rPr sz="1250">
                 <a:solidFill>
                   <a:srgbClr val="FBFCFD"/>
                 </a:solidFill>
@@ -21303,7 +21303,7 @@
               <a:t>0</a:t>
             </a:r>
             <a:r>
-              <a:rPr sz="1350">
+              <a:rPr sz="1650">
                 <a:solidFill>
                   <a:srgbClr val="FBFCFD"/>
                 </a:solidFill>
@@ -21314,11 +21314,11 @@
           <a:p>
             <a:pPr algn="l">
               <a:lnSpc>
-                <a:spcPct val="108000"/>
+                <a:spcPct val="110000"/>
               </a:lnSpc>
             </a:pPr>
             <a:r>
-              <a:rPr sz="1350">
+              <a:rPr sz="1650">
                 <a:solidFill>
                   <a:srgbClr val="FBFCFD"/>
                 </a:solidFill>
@@ -21326,7 +21326,7 @@
               <a:t>• R</a:t>
             </a:r>
             <a:r>
-              <a:rPr sz="950">
+              <a:rPr sz="1250">
                 <a:solidFill>
                   <a:srgbClr val="FBFCFD"/>
                 </a:solidFill>
@@ -21334,7 +21334,7 @@
               <a:t>s</a:t>
             </a:r>
             <a:r>
-              <a:rPr sz="1350">
+              <a:rPr sz="1650">
                 <a:solidFill>
                   <a:srgbClr val="FBFCFD"/>
                 </a:solidFill>
@@ -21342,7 +21342,7 @@
               <a:t> / R</a:t>
             </a:r>
             <a:r>
-              <a:rPr sz="950">
+              <a:rPr sz="1250">
                 <a:solidFill>
                   <a:srgbClr val="FBFCFD"/>
                 </a:solidFill>
@@ -21350,7 +21350,7 @@
               <a:t>sh</a:t>
             </a:r>
             <a:r>
-              <a:rPr sz="1350">
+              <a:rPr sz="1650">
                 <a:solidFill>
                   <a:srgbClr val="FBFCFD"/>
                 </a:solidFill>
@@ -21361,11 +21361,11 @@
           <a:p>
             <a:pPr algn="l">
               <a:lnSpc>
-                <a:spcPct val="108000"/>
+                <a:spcPct val="110000"/>
               </a:lnSpc>
             </a:pPr>
             <a:r>
-              <a:rPr sz="1350">
+              <a:rPr sz="1650">
                 <a:solidFill>
                   <a:srgbClr val="FBFCFD"/>
                 </a:solidFill>
@@ -21373,7 +21373,7 @@
               <a:t>• k / q / T</a:t>
             </a:r>
             <a:r>
-              <a:rPr sz="950">
+              <a:rPr sz="1250">
                 <a:solidFill>
                   <a:srgbClr val="FBFCFD"/>
                 </a:solidFill>
@@ -21381,7 +21381,7 @@
               <a:t>c</a:t>
             </a:r>
             <a:r>
-              <a:rPr sz="1350">
+              <a:rPr sz="1650">
                 <a:solidFill>
                   <a:srgbClr val="FBFCFD"/>
                 </a:solidFill>
@@ -21728,7 +21728,7 @@
           <a:p>
             <a:pPr algn="l"/>
             <a:r>
-              <a:rPr sz="1250">
+              <a:rPr sz="1550">
                 <a:solidFill>
                   <a:srgbClr val="FBFCFD"/>
                 </a:solidFill>
@@ -21814,7 +21814,7 @@
               </a:lnSpc>
             </a:pPr>
             <a:r>
-              <a:rPr sz="1350">
+              <a:rPr sz="1550">
                 <a:solidFill>
                   <a:srgbClr val="F1C40F"/>
                 </a:solidFill>
@@ -21822,7 +21822,7 @@
               <a:t>• β</a:t>
             </a:r>
             <a:r>
-              <a:rPr sz="950">
+              <a:rPr sz="1150">
                 <a:solidFill>
                   <a:srgbClr val="F1C40F"/>
                 </a:solidFill>
@@ -21830,15 +21830,15 @@
               <a:t>Voc</a:t>
             </a:r>
             <a:r>
-              <a:rPr sz="1350">
+              <a:rPr sz="1550">
                 <a:solidFill>
                   <a:srgbClr val="F1C40F"/>
                 </a:solidFill>
               </a:rPr>
-              <a:t>: regresión lineal V</a:t>
-            </a:r>
-            <a:r>
-              <a:rPr sz="950">
+              <a:t> (medido): regresión lineal V</a:t>
+            </a:r>
+            <a:r>
+              <a:rPr sz="1150">
                 <a:solidFill>
                   <a:srgbClr val="F1C40F"/>
                 </a:solidFill>
@@ -21846,7 +21846,7 @@
               <a:t>oc</a:t>
             </a:r>
             <a:r>
-              <a:rPr sz="1350">
+              <a:rPr sz="1550">
                 <a:solidFill>
                   <a:srgbClr val="F1C40F"/>
                 </a:solidFill>
@@ -21854,7 +21854,7 @@
               <a:t> vs T</a:t>
             </a:r>
             <a:r>
-              <a:rPr sz="950">
+              <a:rPr sz="1150">
                 <a:solidFill>
                   <a:srgbClr val="F1C40F"/>
                 </a:solidFill>
@@ -21862,7 +21862,7 @@
               <a:t>c</a:t>
             </a:r>
             <a:r>
-              <a:rPr sz="1350">
+              <a:rPr sz="1550">
                 <a:solidFill>
                   <a:srgbClr val="F1C40F"/>
                 </a:solidFill>
@@ -21877,7 +21877,7 @@
               </a:lnSpc>
             </a:pPr>
             <a:r>
-              <a:rPr sz="1350">
+              <a:rPr sz="1550">
                 <a:solidFill>
                   <a:srgbClr val="F1C40F"/>
                 </a:solidFill>
@@ -21885,7 +21885,7 @@
               <a:t>• α</a:t>
             </a:r>
             <a:r>
-              <a:rPr sz="950">
+              <a:rPr sz="1150">
                 <a:solidFill>
                   <a:srgbClr val="F1C40F"/>
                 </a:solidFill>
@@ -21893,12 +21893,12 @@
               <a:t>Isc</a:t>
             </a:r>
             <a:r>
-              <a:rPr sz="1350">
+              <a:rPr sz="1550">
                 <a:solidFill>
                   <a:srgbClr val="F1C40F"/>
                 </a:solidFill>
               </a:rPr>
-              <a:t>: la regresión resultó negativa → resguardo físico +0.05 %/°C de literatura.</a:t>
+              <a:t> (literatura): la regresión resultó negativa → resguardo físico +0.05 %/°C de literatura.</a:t>
             </a:r>
           </a:p>
           <a:p>
@@ -21908,7 +21908,7 @@
               </a:lnSpc>
             </a:pPr>
             <a:r>
-              <a:rPr sz="1350">
+              <a:rPr sz="1550">
                 <a:solidFill>
                   <a:srgbClr val="F1C40F"/>
                 </a:solidFill>
@@ -21916,7 +21916,7 @@
               <a:t>• Promedios de la ventana → I</a:t>
             </a:r>
             <a:r>
-              <a:rPr sz="950">
+              <a:rPr sz="1150">
                 <a:solidFill>
                   <a:srgbClr val="F1C40F"/>
                 </a:solidFill>
@@ -21924,7 +21924,7 @@
               <a:t>sc,ref</a:t>
             </a:r>
             <a:r>
-              <a:rPr sz="1350">
+              <a:rPr sz="1550">
                 <a:solidFill>
                   <a:srgbClr val="F1C40F"/>
                 </a:solidFill>
@@ -21932,7 +21932,7 @@
               <a:t>, V</a:t>
             </a:r>
             <a:r>
-              <a:rPr sz="950">
+              <a:rPr sz="1150">
                 <a:solidFill>
                   <a:srgbClr val="F1C40F"/>
                 </a:solidFill>
@@ -21940,7 +21940,7 @@
               <a:t>oc,ref</a:t>
             </a:r>
             <a:r>
-              <a:rPr sz="1350">
+              <a:rPr sz="1550">
                 <a:solidFill>
                   <a:srgbClr val="F1C40F"/>
                 </a:solidFill>
@@ -21948,7 +21948,7 @@
               <a:t>, I</a:t>
             </a:r>
             <a:r>
-              <a:rPr sz="950">
+              <a:rPr sz="1150">
                 <a:solidFill>
                   <a:srgbClr val="F1C40F"/>
                 </a:solidFill>
@@ -21956,7 +21956,7 @@
               <a:t>mp,ref</a:t>
             </a:r>
             <a:r>
-              <a:rPr sz="1350">
+              <a:rPr sz="1550">
                 <a:solidFill>
                   <a:srgbClr val="F1C40F"/>
                 </a:solidFill>
@@ -21964,7 +21964,7 @@
               <a:t>, V</a:t>
             </a:r>
             <a:r>
-              <a:rPr sz="950">
+              <a:rPr sz="1150">
                 <a:solidFill>
                   <a:srgbClr val="F1C40F"/>
                 </a:solidFill>
@@ -21972,7 +21972,7 @@
               <a:t>mp,ref</a:t>
             </a:r>
             <a:r>
-              <a:rPr sz="1350">
+              <a:rPr sz="1550">
                 <a:solidFill>
                   <a:srgbClr val="F1C40F"/>
                 </a:solidFill>
@@ -22128,7 +22128,7 @@
           <a:p>
             <a:pPr algn="l"/>
             <a:r>
-              <a:rPr sz="1150">
+              <a:rPr sz="1450">
                 <a:solidFill>
                   <a:srgbClr val="7FDBFF"/>
                 </a:solidFill>
@@ -22137,7 +22137,7 @@
               <a:t>scipy.optimize.minimize</a:t>
             </a:r>
             <a:r>
-              <a:rPr sz="1250">
+              <a:rPr sz="1550">
                 <a:solidFill>
                   <a:srgbClr val="FBFCFD"/>
                 </a:solidFill>
@@ -22199,7 +22199,7 @@
               </a:lnSpc>
             </a:pPr>
             <a:r>
-              <a:rPr sz="1200">
+              <a:rPr sz="1500">
                 <a:solidFill>
                   <a:srgbClr val="F1C40F"/>
                 </a:solidFill>
@@ -22207,7 +22207,7 @@
               <a:t>• e</a:t>
             </a:r>
             <a:r>
-              <a:rPr sz="800">
+              <a:rPr sz="1100">
                 <a:solidFill>
                   <a:srgbClr val="F1C40F"/>
                 </a:solidFill>
@@ -22215,7 +22215,7 @@
               <a:t>Voc</a:t>
             </a:r>
             <a:r>
-              <a:rPr sz="1200">
+              <a:rPr sz="1500">
                 <a:solidFill>
                   <a:srgbClr val="F1C40F"/>
                 </a:solidFill>
@@ -22230,7 +22230,7 @@
               </a:lnSpc>
             </a:pPr>
             <a:r>
-              <a:rPr sz="1200">
+              <a:rPr sz="1500">
                 <a:solidFill>
                   <a:srgbClr val="F1C40F"/>
                 </a:solidFill>
@@ -22238,7 +22238,7 @@
               <a:t>• e</a:t>
             </a:r>
             <a:r>
-              <a:rPr sz="800">
+              <a:rPr sz="1100">
                 <a:solidFill>
                   <a:srgbClr val="F1C40F"/>
                 </a:solidFill>
@@ -22246,7 +22246,7 @@
               <a:t>Isc</a:t>
             </a:r>
             <a:r>
-              <a:rPr sz="1200">
+              <a:rPr sz="1500">
                 <a:solidFill>
                   <a:srgbClr val="F1C40F"/>
                 </a:solidFill>
@@ -22261,7 +22261,7 @@
               </a:lnSpc>
             </a:pPr>
             <a:r>
-              <a:rPr sz="1200">
+              <a:rPr sz="1500">
                 <a:solidFill>
                   <a:srgbClr val="F1C40F"/>
                 </a:solidFill>
@@ -22269,7 +22269,7 @@
               <a:t>• e</a:t>
             </a:r>
             <a:r>
-              <a:rPr sz="800">
+              <a:rPr sz="1100">
                 <a:solidFill>
                   <a:srgbClr val="F1C40F"/>
                 </a:solidFill>
@@ -22277,7 +22277,7 @@
               <a:t>MPP</a:t>
             </a:r>
             <a:r>
-              <a:rPr sz="1200">
+              <a:rPr sz="1500">
                 <a:solidFill>
                   <a:srgbClr val="F1C40F"/>
                 </a:solidFill>
@@ -22285,7 +22285,7 @@
               <a:t>: corriente correcta en (V</a:t>
             </a:r>
             <a:r>
-              <a:rPr sz="800">
+              <a:rPr sz="1100">
                 <a:solidFill>
                   <a:srgbClr val="F1C40F"/>
                 </a:solidFill>
@@ -22293,7 +22293,7 @@
               <a:t>mp</a:t>
             </a:r>
             <a:r>
-              <a:rPr sz="1200">
+              <a:rPr sz="1500">
                 <a:solidFill>
                   <a:srgbClr val="F1C40F"/>
                 </a:solidFill>
@@ -22301,7 +22301,7 @@
               <a:t>, I</a:t>
             </a:r>
             <a:r>
-              <a:rPr sz="800">
+              <a:rPr sz="1100">
                 <a:solidFill>
                   <a:srgbClr val="F1C40F"/>
                 </a:solidFill>
@@ -22309,7 +22309,7 @@
               <a:t>mp</a:t>
             </a:r>
             <a:r>
-              <a:rPr sz="1200">
+              <a:rPr sz="1500">
                 <a:solidFill>
                   <a:srgbClr val="F1C40F"/>
                 </a:solidFill>
@@ -22331,7 +22331,7 @@
               </a:lnSpc>
             </a:pPr>
             <a:r>
-              <a:rPr sz="1200" b="1">
+              <a:rPr sz="1500" b="1">
                 <a:solidFill>
                   <a:srgbClr val="F1C40F"/>
                 </a:solidFill>
@@ -22339,7 +22339,7 @@
               <a:t>Regularización física (bounds):</a:t>
             </a:r>
             <a:r>
-              <a:rPr sz="1200">
+              <a:rPr sz="1500">
                 <a:solidFill>
                   <a:srgbClr val="F1C40F"/>
                 </a:solidFill>
@@ -22347,7 +22347,7 @@
               <a:t> R</a:t>
             </a:r>
             <a:r>
-              <a:rPr sz="800">
+              <a:rPr sz="1100">
                 <a:solidFill>
                   <a:srgbClr val="F1C40F"/>
                 </a:solidFill>
@@ -22355,7 +22355,7 @@
               <a:t>s</a:t>
             </a:r>
             <a:r>
-              <a:rPr sz="1200">
+              <a:rPr sz="1500">
                 <a:solidFill>
                   <a:srgbClr val="F1C40F"/>
                 </a:solidFill>
@@ -22363,7 +22363,7 @@
               <a:t> ∈ [0.001, 2] Ω · R</a:t>
             </a:r>
             <a:r>
-              <a:rPr sz="800">
+              <a:rPr sz="1100">
                 <a:solidFill>
                   <a:srgbClr val="F1C40F"/>
                 </a:solidFill>
@@ -22371,7 +22371,7 @@
               <a:t>sh</a:t>
             </a:r>
             <a:r>
-              <a:rPr sz="1200">
+              <a:rPr sz="1500">
                 <a:solidFill>
                   <a:srgbClr val="F1C40F"/>
                 </a:solidFill>
@@ -22379,7 +22379,7 @@
               <a:t> ∈ [100, 10⁴] Ω · n</a:t>
             </a:r>
             <a:r>
-              <a:rPr sz="800">
+              <a:rPr sz="1100">
                 <a:solidFill>
                   <a:srgbClr val="F1C40F"/>
                 </a:solidFill>
@@ -22387,7 +22387,7 @@
               <a:t>I</a:t>
             </a:r>
             <a:r>
-              <a:rPr sz="1200">
+              <a:rPr sz="1500">
                 <a:solidFill>
                   <a:srgbClr val="F1C40F"/>
                 </a:solidFill>
@@ -22395,7 +22395,7 @@
               <a:t> ∈ [1, 2] · I</a:t>
             </a:r>
             <a:r>
-              <a:rPr sz="800">
+              <a:rPr sz="1100">
                 <a:solidFill>
                   <a:srgbClr val="F1C40F"/>
                 </a:solidFill>
@@ -22403,7 +22403,7 @@
               <a:t>L</a:t>
             </a:r>
             <a:r>
-              <a:rPr sz="1200">
+              <a:rPr sz="1500">
                 <a:solidFill>
                   <a:srgbClr val="F1C40F"/>
                 </a:solidFill>
@@ -22411,7 +22411,7 @@
               <a:t> ± 10 % · I</a:t>
             </a:r>
             <a:r>
-              <a:rPr sz="800">
+              <a:rPr sz="1100">
                 <a:solidFill>
                   <a:srgbClr val="F1C40F"/>
                 </a:solidFill>
@@ -22419,7 +22419,7 @@
               <a:t>0</a:t>
             </a:r>
             <a:r>
-              <a:rPr sz="1200">
+              <a:rPr sz="1500">
                 <a:solidFill>
                   <a:srgbClr val="F1C40F"/>
                 </a:solidFill>
@@ -22434,7 +22434,7 @@
               </a:lnSpc>
             </a:pPr>
             <a:r>
-              <a:rPr sz="1200" b="1">
+              <a:rPr sz="1500" b="1">
                 <a:solidFill>
                   <a:srgbClr val="F1C40F"/>
                 </a:solidFill>
@@ -22442,7 +22442,7 @@
               <a:t>Inicialización analítica:</a:t>
             </a:r>
             <a:r>
-              <a:rPr sz="1200">
+              <a:rPr sz="1500">
                 <a:solidFill>
                   <a:srgbClr val="F1C40F"/>
                 </a:solidFill>
@@ -22450,7 +22450,7 @@
               <a:t> a₀ = N</a:t>
             </a:r>
             <a:r>
-              <a:rPr sz="800">
+              <a:rPr sz="1100">
                 <a:solidFill>
                   <a:srgbClr val="F1C40F"/>
                 </a:solidFill>
@@ -22458,7 +22458,7 @@
               <a:t>s</a:t>
             </a:r>
             <a:r>
-              <a:rPr sz="1200">
+              <a:rPr sz="1500">
                 <a:solidFill>
                   <a:srgbClr val="F1C40F"/>
                 </a:solidFill>
@@ -22466,7 +22466,7 @@
               <a:t>·1.2·kT/q; I</a:t>
             </a:r>
             <a:r>
-              <a:rPr sz="800">
+              <a:rPr sz="1100">
                 <a:solidFill>
                   <a:srgbClr val="F1C40F"/>
                 </a:solidFill>
@@ -22474,7 +22474,7 @@
               <a:t>0,0</a:t>
             </a:r>
             <a:r>
-              <a:rPr sz="1200">
+              <a:rPr sz="1500">
                 <a:solidFill>
                   <a:srgbClr val="F1C40F"/>
                 </a:solidFill>
@@ -22482,7 +22482,7 @@
               <a:t> = I</a:t>
             </a:r>
             <a:r>
-              <a:rPr sz="800">
+              <a:rPr sz="1100">
                 <a:solidFill>
                   <a:srgbClr val="F1C40F"/>
                 </a:solidFill>
@@ -22490,7 +22490,7 @@
               <a:t>sc</a:t>
             </a:r>
             <a:r>
-              <a:rPr sz="1200">
+              <a:rPr sz="1500">
                 <a:solidFill>
                   <a:srgbClr val="F1C40F"/>
                 </a:solidFill>
@@ -22498,7 +22498,7 @@
               <a:t>·exp(−V</a:t>
             </a:r>
             <a:r>
-              <a:rPr sz="800">
+              <a:rPr sz="1100">
                 <a:solidFill>
                   <a:srgbClr val="F1C40F"/>
                 </a:solidFill>
@@ -22506,7 +22506,7 @@
               <a:t>oc</a:t>
             </a:r>
             <a:r>
-              <a:rPr sz="1200">
+              <a:rPr sz="1500">
                 <a:solidFill>
                   <a:srgbClr val="F1C40F"/>
                 </a:solidFill>
@@ -22521,7 +22521,7 @@
               </a:lnSpc>
             </a:pPr>
             <a:r>
-              <a:rPr sz="1200">
+              <a:rPr sz="1500">
                 <a:solidFill>
                   <a:srgbClr val="F1C40F"/>
                 </a:solidFill>
@@ -22852,7 +22852,7 @@
         </p:nvSpPr>
         <p:spPr>
           <a:xfrm>
-            <a:off x="566928" y="1719072"/>
+            <a:off x="566928" y="1847088"/>
             <a:ext cx="5190591" cy="320040"/>
           </a:xfrm>
           <a:prstGeom prst="rect">
@@ -22868,7 +22868,7 @@
           <a:p>
             <a:pPr algn="l"/>
             <a:r>
-              <a:rPr sz="1250">
+              <a:rPr sz="1550">
                 <a:solidFill>
                   <a:srgbClr val="FBFCFD"/>
                 </a:solidFill>
@@ -22876,7 +22876,7 @@
               <a:t>1. Corriente fotogenerada (I</a:t>
             </a:r>
             <a:r>
-              <a:rPr sz="850">
+              <a:rPr sz="1150">
                 <a:solidFill>
                   <a:srgbClr val="FBFCFD"/>
                 </a:solidFill>
@@ -22884,7 +22884,7 @@
               <a:t>L</a:t>
             </a:r>
             <a:r>
-              <a:rPr sz="1250">
+              <a:rPr sz="1550">
                 <a:solidFill>
                   <a:srgbClr val="FBFCFD"/>
                 </a:solidFill>
@@ -22910,7 +22910,7 @@
         </p:blipFill>
         <p:spPr>
           <a:xfrm>
-            <a:off x="731520" y="2103120"/>
+            <a:off x="731520" y="2194560"/>
             <a:ext cx="4391510" cy="502920"/>
           </a:xfrm>
           <a:prstGeom prst="rect">
@@ -22926,7 +22926,7 @@
         </p:nvSpPr>
         <p:spPr>
           <a:xfrm>
-            <a:off x="566928" y="2788920"/>
+            <a:off x="566928" y="2880360"/>
             <a:ext cx="5190591" cy="320040"/>
           </a:xfrm>
           <a:prstGeom prst="rect">
@@ -22942,7 +22942,7 @@
           <a:p>
             <a:pPr algn="l"/>
             <a:r>
-              <a:rPr sz="1250">
+              <a:rPr sz="1550">
                 <a:solidFill>
                   <a:srgbClr val="FBFCFD"/>
                 </a:solidFill>
@@ -22950,7 +22950,7 @@
               <a:t>2. Corriente de saturación inversa (I</a:t>
             </a:r>
             <a:r>
-              <a:rPr sz="850">
+              <a:rPr sz="1150">
                 <a:solidFill>
                   <a:srgbClr val="FBFCFD"/>
                 </a:solidFill>
@@ -22958,7 +22958,7 @@
               <a:t>0</a:t>
             </a:r>
             <a:r>
-              <a:rPr sz="1250">
+              <a:rPr sz="1550">
                 <a:solidFill>
                   <a:srgbClr val="FBFCFD"/>
                 </a:solidFill>
@@ -22984,7 +22984,7 @@
         </p:blipFill>
         <p:spPr>
           <a:xfrm>
-            <a:off x="731520" y="3182112"/>
+            <a:off x="731520" y="3273551"/>
             <a:ext cx="4160520" cy="594360"/>
           </a:xfrm>
           <a:prstGeom prst="rect">
@@ -23000,7 +23000,7 @@
         </p:nvSpPr>
         <p:spPr>
           <a:xfrm>
-            <a:off x="566928" y="3977640"/>
+            <a:off x="566928" y="4069080"/>
             <a:ext cx="5190591" cy="320040"/>
           </a:xfrm>
           <a:prstGeom prst="rect">
@@ -23016,7 +23016,7 @@
           <a:p>
             <a:pPr algn="l"/>
             <a:r>
-              <a:rPr sz="1250">
+              <a:rPr sz="1550">
                 <a:solidFill>
                   <a:srgbClr val="FBFCFD"/>
                 </a:solidFill>
@@ -23042,7 +23042,7 @@
         </p:blipFill>
         <p:spPr>
           <a:xfrm>
-            <a:off x="731520" y="4389120"/>
+            <a:off x="731520" y="4480560"/>
             <a:ext cx="1089660" cy="502920"/>
           </a:xfrm>
           <a:prstGeom prst="rect">
@@ -23180,7 +23180,7 @@
         </p:nvSpPr>
         <p:spPr>
           <a:xfrm>
-            <a:off x="6434175" y="1719072"/>
+            <a:off x="6434175" y="1847088"/>
             <a:ext cx="5190591" cy="320040"/>
           </a:xfrm>
           <a:prstGeom prst="rect">
@@ -23196,7 +23196,7 @@
           <a:p>
             <a:pPr algn="l"/>
             <a:r>
-              <a:rPr sz="1250">
+              <a:rPr sz="1550">
                 <a:solidFill>
                   <a:srgbClr val="FBFCFD"/>
                 </a:solidFill>
@@ -23204,7 +23204,7 @@
               <a:t>4. Resistencia shunt (R</a:t>
             </a:r>
             <a:r>
-              <a:rPr sz="850">
+              <a:rPr sz="1150">
                 <a:solidFill>
                   <a:srgbClr val="FBFCFD"/>
                 </a:solidFill>
@@ -23212,7 +23212,7 @@
               <a:t>sh</a:t>
             </a:r>
             <a:r>
-              <a:rPr sz="1250">
+              <a:rPr sz="1550">
                 <a:solidFill>
                   <a:srgbClr val="FBFCFD"/>
                 </a:solidFill>
@@ -23238,7 +23238,7 @@
         </p:blipFill>
         <p:spPr>
           <a:xfrm>
-            <a:off x="6598767" y="2103120"/>
+            <a:off x="6598767" y="2194560"/>
             <a:ext cx="2757637" cy="548640"/>
           </a:xfrm>
           <a:prstGeom prst="rect">
@@ -23254,7 +23254,7 @@
         </p:nvSpPr>
         <p:spPr>
           <a:xfrm>
-            <a:off x="6434175" y="2834640"/>
+            <a:off x="6434175" y="2926080"/>
             <a:ext cx="5190591" cy="320040"/>
           </a:xfrm>
           <a:prstGeom prst="rect">
@@ -23270,7 +23270,7 @@
           <a:p>
             <a:pPr algn="l"/>
             <a:r>
-              <a:rPr sz="1250">
+              <a:rPr sz="1550">
                 <a:solidFill>
                   <a:srgbClr val="FBFCFD"/>
                 </a:solidFill>
@@ -23278,7 +23278,7 @@
               <a:t>5. Energía de bandgap del Silicio (E</a:t>
             </a:r>
             <a:r>
-              <a:rPr sz="850">
+              <a:rPr sz="1150">
                 <a:solidFill>
                   <a:srgbClr val="FBFCFD"/>
                 </a:solidFill>
@@ -23286,7 +23286,7 @@
               <a:t>g</a:t>
             </a:r>
             <a:r>
-              <a:rPr sz="1250">
+              <a:rPr sz="1550">
                 <a:solidFill>
                   <a:srgbClr val="FBFCFD"/>
                 </a:solidFill>
@@ -23312,7 +23312,7 @@
         </p:blipFill>
         <p:spPr>
           <a:xfrm>
-            <a:off x="6598767" y="3200400"/>
+            <a:off x="6598767" y="3291840"/>
             <a:ext cx="3941010" cy="502920"/>
           </a:xfrm>
           <a:prstGeom prst="rect">
@@ -23328,7 +23328,7 @@
         </p:nvSpPr>
         <p:spPr>
           <a:xfrm>
-            <a:off x="6434175" y="3977640"/>
+            <a:off x="6434175" y="4069080"/>
             <a:ext cx="5190591" cy="2011680"/>
           </a:xfrm>
           <a:prstGeom prst="rect">
@@ -23348,7 +23348,7 @@
               </a:lnSpc>
             </a:pPr>
             <a:r>
-              <a:rPr sz="1350">
+              <a:rPr sz="1550">
                 <a:solidFill>
                   <a:srgbClr val="F1C40F"/>
                 </a:solidFill>
@@ -23363,7 +23363,7 @@
               </a:lnSpc>
             </a:pPr>
             <a:r>
-              <a:rPr sz="1350">
+              <a:rPr sz="1550">
                 <a:solidFill>
                   <a:srgbClr val="F1C40F"/>
                 </a:solidFill>
@@ -23371,7 +23371,7 @@
               <a:t>• R</a:t>
             </a:r>
             <a:r>
-              <a:rPr sz="950">
+              <a:rPr sz="1150">
                 <a:solidFill>
                   <a:srgbClr val="F1C40F"/>
                 </a:solidFill>
@@ -23379,7 +23379,7 @@
               <a:t>s</a:t>
             </a:r>
             <a:r>
-              <a:rPr sz="1350">
+              <a:rPr sz="1550">
                 <a:solidFill>
                   <a:srgbClr val="F1C40F"/>
                 </a:solidFill>
@@ -23387,7 +23387,7 @@
               <a:t> constante: R</a:t>
             </a:r>
             <a:r>
-              <a:rPr sz="950">
+              <a:rPr sz="1150">
                 <a:solidFill>
                   <a:srgbClr val="F1C40F"/>
                 </a:solidFill>
@@ -23395,7 +23395,7 @@
               <a:t>s</a:t>
             </a:r>
             <a:r>
-              <a:rPr sz="1350">
+              <a:rPr sz="1550">
                 <a:solidFill>
                   <a:srgbClr val="F1C40F"/>
                 </a:solidFill>
@@ -23403,7 +23403,7 @@
               <a:t> = R</a:t>
             </a:r>
             <a:r>
-              <a:rPr sz="950">
+              <a:rPr sz="1150">
                 <a:solidFill>
                   <a:srgbClr val="F1C40F"/>
                 </a:solidFill>
@@ -23411,7 +23411,7 @@
               <a:t>s,ref</a:t>
             </a:r>
             <a:r>
-              <a:rPr sz="1350">
+              <a:rPr sz="1550">
                 <a:solidFill>
                   <a:srgbClr val="F1C40F"/>
                 </a:solidFill>
@@ -23426,7 +23426,7 @@
               </a:lnSpc>
             </a:pPr>
             <a:r>
-              <a:rPr sz="1350">
+              <a:rPr sz="1550">
                 <a:solidFill>
                   <a:srgbClr val="F1C40F"/>
                 </a:solidFill>
@@ -23434,7 +23434,7 @@
               <a:t>• R</a:t>
             </a:r>
             <a:r>
-              <a:rPr sz="950">
+              <a:rPr sz="1150">
                 <a:solidFill>
                   <a:srgbClr val="F1C40F"/>
                 </a:solidFill>
@@ -23442,7 +23442,7 @@
               <a:t>sh</a:t>
             </a:r>
             <a:r>
-              <a:rPr sz="1350">
+              <a:rPr sz="1550">
                 <a:solidFill>
                   <a:srgbClr val="F1C40F"/>
                 </a:solidFill>
@@ -23457,7 +23457,7 @@
               </a:lnSpc>
             </a:pPr>
             <a:r>
-              <a:rPr sz="1350">
+              <a:rPr sz="1550">
                 <a:solidFill>
                   <a:srgbClr val="F1C40F"/>
                 </a:solidFill>
@@ -23465,7 +23465,7 @@
               <a:t>• E</a:t>
             </a:r>
             <a:r>
-              <a:rPr sz="950">
+              <a:rPr sz="1150">
                 <a:solidFill>
                   <a:srgbClr val="F1C40F"/>
                 </a:solidFill>
@@ -23473,7 +23473,7 @@
               <a:t>g,ref</a:t>
             </a:r>
             <a:r>
-              <a:rPr sz="1350">
+              <a:rPr sz="1550">
                 <a:solidFill>
                   <a:srgbClr val="F1C40F"/>
                 </a:solidFill>
@@ -23488,7 +23488,7 @@
               </a:lnSpc>
             </a:pPr>
             <a:r>
-              <a:rPr sz="1350">
+              <a:rPr sz="1550">
                 <a:solidFill>
                   <a:srgbClr val="F1C40F"/>
                 </a:solidFill>
@@ -23496,7 +23496,7 @@
               <a:t>• S = G</a:t>
             </a:r>
             <a:r>
-              <a:rPr sz="950">
+              <a:rPr sz="1150">
                 <a:solidFill>
                   <a:srgbClr val="F1C40F"/>
                 </a:solidFill>
@@ -23504,7 +23504,7 @@
               <a:t>poa</a:t>
             </a:r>
             <a:r>
-              <a:rPr sz="1350">
+              <a:rPr sz="1550">
                 <a:solidFill>
                   <a:srgbClr val="F1C40F"/>
                 </a:solidFill>
@@ -23519,7 +23519,7 @@
               </a:lnSpc>
             </a:pPr>
             <a:r>
-              <a:rPr sz="1350">
+              <a:rPr sz="1550">
                 <a:solidFill>
                   <a:srgbClr val="F1C40F"/>
                 </a:solidFill>
@@ -23527,7 +23527,7 @@
               <a:t>Implementado por </a:t>
             </a:r>
             <a:r>
-              <a:rPr sz="1250">
+              <a:rPr sz="1450">
                 <a:solidFill>
                   <a:srgbClr val="7FDBFF"/>
                 </a:solidFill>
@@ -23536,7 +23536,7 @@
               <a:t>pvlib.pvsystem.calcparams_desoto</a:t>
             </a:r>
             <a:r>
-              <a:rPr sz="1350">
+              <a:rPr sz="1550">
                 <a:solidFill>
                   <a:srgbClr val="F1C40F"/>
                 </a:solidFill>
@@ -23867,7 +23867,7 @@
         </p:nvSpPr>
         <p:spPr>
           <a:xfrm>
-            <a:off x="566928" y="1719072"/>
+            <a:off x="566928" y="1847088"/>
             <a:ext cx="11002975" cy="365760"/>
           </a:xfrm>
           <a:prstGeom prst="rect">
@@ -23883,7 +23883,7 @@
           <a:p>
             <a:pPr algn="l"/>
             <a:r>
-              <a:rPr sz="1300">
+              <a:rPr sz="1600">
                 <a:solidFill>
                   <a:srgbClr val="FBFCFD"/>
                 </a:solidFill>
@@ -23909,7 +23909,7 @@
         </p:blipFill>
         <p:spPr>
           <a:xfrm>
-            <a:off x="3566160" y="2121408"/>
+            <a:off x="3566160" y="2148840"/>
             <a:ext cx="4370498" cy="713232"/>
           </a:xfrm>
           <a:prstGeom prst="rect">
@@ -24047,8 +24047,8 @@
         </p:nvSpPr>
         <p:spPr>
           <a:xfrm>
-            <a:off x="566928" y="3739896"/>
-            <a:ext cx="5190591" cy="2267712"/>
+            <a:off x="566928" y="3794760"/>
+            <a:ext cx="5190591" cy="2212848"/>
           </a:xfrm>
           <a:prstGeom prst="rect">
             <a:avLst/>
@@ -24063,11 +24063,11 @@
           <a:p>
             <a:pPr algn="l">
               <a:lnSpc>
-                <a:spcPct val="108000"/>
+                <a:spcPct val="110000"/>
               </a:lnSpc>
             </a:pPr>
             <a:r>
-              <a:rPr sz="1350">
+              <a:rPr sz="1650">
                 <a:solidFill>
                   <a:srgbClr val="FBFCFD"/>
                 </a:solidFill>
@@ -24075,7 +24075,7 @@
               <a:t>• P</a:t>
             </a:r>
             <a:r>
-              <a:rPr sz="950">
+              <a:rPr sz="1250">
                 <a:solidFill>
                   <a:srgbClr val="FBFCFD"/>
                 </a:solidFill>
@@ -24083,7 +24083,7 @@
               <a:t>mp,t</a:t>
             </a:r>
             <a:r>
-              <a:rPr sz="1350">
+              <a:rPr sz="1650">
                 <a:solidFill>
                   <a:srgbClr val="FBFCFD"/>
                 </a:solidFill>
@@ -24094,11 +24094,11 @@
           <a:p>
             <a:pPr algn="l">
               <a:lnSpc>
-                <a:spcPct val="108000"/>
+                <a:spcPct val="110000"/>
               </a:lnSpc>
             </a:pPr>
             <a:r>
-              <a:rPr sz="1350">
+              <a:rPr sz="1650">
                 <a:solidFill>
                   <a:srgbClr val="FBFCFD"/>
                 </a:solidFill>
@@ -24106,7 +24106,7 @@
               <a:t>• P</a:t>
             </a:r>
             <a:r>
-              <a:rPr sz="950">
+              <a:rPr sz="1250">
                 <a:solidFill>
                   <a:srgbClr val="FBFCFD"/>
                 </a:solidFill>
@@ -24114,7 +24114,7 @@
               <a:t>STC</a:t>
             </a:r>
             <a:r>
-              <a:rPr sz="1350">
+              <a:rPr sz="1650">
                 <a:solidFill>
                   <a:srgbClr val="FBFCFD"/>
                 </a:solidFill>
@@ -24122,7 +24122,7 @@
               <a:t>: potencia nominal del </a:t>
             </a:r>
             <a:r>
-              <a:rPr sz="1350" b="1">
+              <a:rPr sz="1650" b="1">
                 <a:solidFill>
                   <a:srgbClr val="FBFCFD"/>
                 </a:solidFill>
@@ -24130,7 +24130,7 @@
               <a:t>mismo SDM</a:t>
             </a:r>
             <a:r>
-              <a:rPr sz="1350">
+              <a:rPr sz="1650">
                 <a:solidFill>
                   <a:srgbClr val="FBFCFD"/>
                 </a:solidFill>
@@ -24141,11 +24141,11 @@
           <a:p>
             <a:pPr algn="l">
               <a:lnSpc>
-                <a:spcPct val="108000"/>
+                <a:spcPct val="110000"/>
               </a:lnSpc>
             </a:pPr>
             <a:r>
-              <a:rPr sz="1350">
+              <a:rPr sz="1650">
                 <a:solidFill>
                   <a:srgbClr val="FBFCFD"/>
                 </a:solidFill>
@@ -24153,7 +24153,7 @@
               <a:t>• G</a:t>
             </a:r>
             <a:r>
-              <a:rPr sz="950">
+              <a:rPr sz="1250">
                 <a:solidFill>
                   <a:srgbClr val="FBFCFD"/>
                 </a:solidFill>
@@ -24161,7 +24161,7 @@
               <a:t>poa,t</a:t>
             </a:r>
             <a:r>
-              <a:rPr sz="1350">
+              <a:rPr sz="1650">
                 <a:solidFill>
                   <a:srgbClr val="FBFCFD"/>
                 </a:solidFill>
@@ -24172,11 +24172,11 @@
           <a:p>
             <a:pPr algn="l">
               <a:lnSpc>
-                <a:spcPct val="108000"/>
+                <a:spcPct val="110000"/>
               </a:lnSpc>
             </a:pPr>
             <a:r>
-              <a:rPr sz="1350">
+              <a:rPr sz="1650">
                 <a:solidFill>
                   <a:srgbClr val="FBFCFD"/>
                 </a:solidFill>
@@ -24184,7 +24184,7 @@
               <a:t>• G</a:t>
             </a:r>
             <a:r>
-              <a:rPr sz="950">
+              <a:rPr sz="1250">
                 <a:solidFill>
                   <a:srgbClr val="FBFCFD"/>
                 </a:solidFill>
@@ -24192,7 +24192,7 @@
               <a:t>ref</a:t>
             </a:r>
             <a:r>
-              <a:rPr sz="1350">
+              <a:rPr sz="1650">
                 <a:solidFill>
                   <a:srgbClr val="FBFCFD"/>
                 </a:solidFill>
@@ -24332,8 +24332,8 @@
         </p:nvSpPr>
         <p:spPr>
           <a:xfrm>
-            <a:off x="6434175" y="3739896"/>
-            <a:ext cx="5190591" cy="2267712"/>
+            <a:off x="6434175" y="3794760"/>
+            <a:ext cx="5190591" cy="2212848"/>
           </a:xfrm>
           <a:prstGeom prst="rect">
             <a:avLst/>
@@ -24348,11 +24348,11 @@
           <a:p>
             <a:pPr algn="l">
               <a:lnSpc>
-                <a:spcPct val="108000"/>
+                <a:spcPct val="110000"/>
               </a:lnSpc>
             </a:pPr>
             <a:r>
-              <a:rPr sz="1350">
+              <a:rPr sz="1650">
                 <a:solidFill>
                   <a:srgbClr val="FBFCFD"/>
                 </a:solidFill>
@@ -24360,7 +24360,7 @@
               <a:t>• </a:t>
             </a:r>
             <a:r>
-              <a:rPr sz="1350" b="1">
+              <a:rPr sz="1650" b="1">
                 <a:solidFill>
                   <a:srgbClr val="FBFCFD"/>
                 </a:solidFill>
@@ -24368,7 +24368,7 @@
               <a:t>Térmicas:</a:t>
             </a:r>
             <a:r>
-              <a:rPr sz="1350">
+              <a:rPr sz="1650">
                 <a:solidFill>
                   <a:srgbClr val="FBFCFD"/>
                 </a:solidFill>
@@ -24376,7 +24376,7 @@
               <a:t> caídas por elevada T</a:t>
             </a:r>
             <a:r>
-              <a:rPr sz="950">
+              <a:rPr sz="1250">
                 <a:solidFill>
                   <a:srgbClr val="FBFCFD"/>
                 </a:solidFill>
@@ -24384,7 +24384,7 @@
               <a:t>c</a:t>
             </a:r>
             <a:r>
-              <a:rPr sz="1350">
+              <a:rPr sz="1650">
                 <a:solidFill>
                   <a:srgbClr val="FBFCFD"/>
                 </a:solidFill>
@@ -24395,11 +24395,11 @@
           <a:p>
             <a:pPr algn="l">
               <a:lnSpc>
-                <a:spcPct val="108000"/>
+                <a:spcPct val="110000"/>
               </a:lnSpc>
             </a:pPr>
             <a:r>
-              <a:rPr sz="1350">
+              <a:rPr sz="1650">
                 <a:solidFill>
                   <a:srgbClr val="FBFCFD"/>
                 </a:solidFill>
@@ -24407,7 +24407,7 @@
               <a:t>• </a:t>
             </a:r>
             <a:r>
-              <a:rPr sz="1350" b="1">
+              <a:rPr sz="1650" b="1">
                 <a:solidFill>
                   <a:srgbClr val="FBFCFD"/>
                 </a:solidFill>
@@ -24415,7 +24415,7 @@
               <a:t>Óhmicas:</a:t>
             </a:r>
             <a:r>
-              <a:rPr sz="1350">
+              <a:rPr sz="1650">
                 <a:solidFill>
                   <a:srgbClr val="FBFCFD"/>
                 </a:solidFill>
@@ -24423,7 +24423,7 @@
               <a:t> pérdidas resistivas en R</a:t>
             </a:r>
             <a:r>
-              <a:rPr sz="950">
+              <a:rPr sz="1250">
                 <a:solidFill>
                   <a:srgbClr val="FBFCFD"/>
                 </a:solidFill>
@@ -24431,7 +24431,7 @@
               <a:t>s</a:t>
             </a:r>
             <a:r>
-              <a:rPr sz="1350">
+              <a:rPr sz="1650">
                 <a:solidFill>
                   <a:srgbClr val="FBFCFD"/>
                 </a:solidFill>
@@ -24442,11 +24442,11 @@
           <a:p>
             <a:pPr algn="l">
               <a:lnSpc>
-                <a:spcPct val="108000"/>
+                <a:spcPct val="110000"/>
               </a:lnSpc>
             </a:pPr>
             <a:r>
-              <a:rPr sz="1350">
+              <a:rPr sz="1650">
                 <a:solidFill>
                   <a:srgbClr val="FBFCFD"/>
                 </a:solidFill>
@@ -24454,7 +24454,7 @@
               <a:t>• </a:t>
             </a:r>
             <a:r>
-              <a:rPr sz="1350" b="1">
+              <a:rPr sz="1650" b="1">
                 <a:solidFill>
                   <a:srgbClr val="FBFCFD"/>
                 </a:solidFill>
@@ -24462,7 +24462,7 @@
               <a:t>De bajo G:</a:t>
             </a:r>
             <a:r>
-              <a:rPr sz="1350">
+              <a:rPr sz="1650">
                 <a:solidFill>
                   <a:srgbClr val="FBFCFD"/>
                 </a:solidFill>
@@ -24470,7 +24470,7 @@
               <a:t> comportamiento no lineal a baja irradiancia (R</a:t>
             </a:r>
             <a:r>
-              <a:rPr sz="950">
+              <a:rPr sz="1250">
                 <a:solidFill>
                   <a:srgbClr val="FBFCFD"/>
                 </a:solidFill>
@@ -24478,7 +24478,7 @@
               <a:t>sh</a:t>
             </a:r>
             <a:r>
-              <a:rPr sz="1350">
+              <a:rPr sz="1650">
                 <a:solidFill>
                   <a:srgbClr val="FBFCFD"/>
                 </a:solidFill>
@@ -24489,11 +24489,11 @@
           <a:p>
             <a:pPr algn="l">
               <a:lnSpc>
-                <a:spcPct val="108000"/>
+                <a:spcPct val="110000"/>
               </a:lnSpc>
             </a:pPr>
             <a:r>
-              <a:rPr sz="1350">
+              <a:rPr sz="1650">
                 <a:solidFill>
                   <a:srgbClr val="FBFCFD"/>
                 </a:solidFill>
@@ -24824,8 +24824,8 @@
         </p:nvSpPr>
         <p:spPr>
           <a:xfrm>
-            <a:off x="566928" y="1773936"/>
-            <a:ext cx="5190591" cy="1609344"/>
+            <a:off x="566928" y="1828800"/>
+            <a:ext cx="5190591" cy="1554480"/>
           </a:xfrm>
           <a:prstGeom prst="rect">
             <a:avLst/>
@@ -24840,11 +24840,11 @@
           <a:p>
             <a:pPr algn="l">
               <a:lnSpc>
-                <a:spcPct val="108000"/>
+                <a:spcPct val="110000"/>
               </a:lnSpc>
             </a:pPr>
             <a:r>
-              <a:rPr sz="1300">
+              <a:rPr sz="1650">
                 <a:solidFill>
                   <a:srgbClr val="FBFCFD"/>
                 </a:solidFill>
@@ -24852,7 +24852,7 @@
               <a:t>• </a:t>
             </a:r>
             <a:r>
-              <a:rPr sz="1200">
+              <a:rPr sz="1550">
                 <a:solidFill>
                   <a:srgbClr val="7FDBFF"/>
                 </a:solidFill>
@@ -24861,7 +24861,7 @@
               <a:t>Time Stamp</a:t>
             </a:r>
             <a:r>
-              <a:rPr sz="1300">
+              <a:rPr sz="1650">
                 <a:solidFill>
                   <a:srgbClr val="FBFCFD"/>
                 </a:solidFill>
@@ -24872,11 +24872,11 @@
           <a:p>
             <a:pPr algn="l">
               <a:lnSpc>
-                <a:spcPct val="108000"/>
+                <a:spcPct val="110000"/>
               </a:lnSpc>
             </a:pPr>
             <a:r>
-              <a:rPr sz="1300">
+              <a:rPr sz="1650">
                 <a:solidFill>
                   <a:srgbClr val="FBFCFD"/>
                 </a:solidFill>
@@ -25016,8 +25016,8 @@
         </p:nvSpPr>
         <p:spPr>
           <a:xfrm>
-            <a:off x="566928" y="4361688"/>
-            <a:ext cx="5190591" cy="1609344"/>
+            <a:off x="566928" y="4416552"/>
+            <a:ext cx="5190591" cy="1554480"/>
           </a:xfrm>
           <a:prstGeom prst="rect">
             <a:avLst/>
@@ -25032,11 +25032,11 @@
           <a:p>
             <a:pPr algn="l">
               <a:lnSpc>
-                <a:spcPct val="108000"/>
+                <a:spcPct val="110000"/>
               </a:lnSpc>
             </a:pPr>
             <a:r>
-              <a:rPr sz="1300">
+              <a:rPr sz="1650">
                 <a:solidFill>
                   <a:srgbClr val="FBFCFD"/>
                 </a:solidFill>
@@ -25044,7 +25044,7 @@
               <a:t>• </a:t>
             </a:r>
             <a:r>
-              <a:rPr sz="1200">
+              <a:rPr sz="1550">
                 <a:solidFill>
                   <a:srgbClr val="7FDBFF"/>
                 </a:solidFill>
@@ -25053,7 +25053,7 @@
               <a:t>Isc</a:t>
             </a:r>
             <a:r>
-              <a:rPr sz="1300">
+              <a:rPr sz="1650">
                 <a:solidFill>
                   <a:srgbClr val="FBFCFD"/>
                 </a:solidFill>
@@ -25061,7 +25061,7 @@
               <a:t> (5), </a:t>
             </a:r>
             <a:r>
-              <a:rPr sz="1200">
+              <a:rPr sz="1550">
                 <a:solidFill>
                   <a:srgbClr val="7FDBFF"/>
                 </a:solidFill>
@@ -25070,7 +25070,7 @@
               <a:t>Pmp</a:t>
             </a:r>
             <a:r>
-              <a:rPr sz="1300">
+              <a:rPr sz="1650">
                 <a:solidFill>
                   <a:srgbClr val="FBFCFD"/>
                 </a:solidFill>
@@ -25078,7 +25078,7 @@
               <a:t> (7), </a:t>
             </a:r>
             <a:r>
-              <a:rPr sz="1200">
+              <a:rPr sz="1550">
                 <a:solidFill>
                   <a:srgbClr val="7FDBFF"/>
                 </a:solidFill>
@@ -25087,7 +25087,7 @@
               <a:t>Imp</a:t>
             </a:r>
             <a:r>
-              <a:rPr sz="1300">
+              <a:rPr sz="1650">
                 <a:solidFill>
                   <a:srgbClr val="FBFCFD"/>
                 </a:solidFill>
@@ -25095,7 +25095,7 @@
               <a:t> (9), </a:t>
             </a:r>
             <a:r>
-              <a:rPr sz="1200">
+              <a:rPr sz="1550">
                 <a:solidFill>
                   <a:srgbClr val="7FDBFF"/>
                 </a:solidFill>
@@ -25104,7 +25104,7 @@
               <a:t>Vmp</a:t>
             </a:r>
             <a:r>
-              <a:rPr sz="1300">
+              <a:rPr sz="1650">
                 <a:solidFill>
                   <a:srgbClr val="FBFCFD"/>
                 </a:solidFill>
@@ -25112,7 +25112,7 @@
               <a:t> (11), </a:t>
             </a:r>
             <a:r>
-              <a:rPr sz="1200">
+              <a:rPr sz="1550">
                 <a:solidFill>
                   <a:srgbClr val="7FDBFF"/>
                 </a:solidFill>
@@ -25121,7 +25121,7 @@
               <a:t>Voc</a:t>
             </a:r>
             <a:r>
-              <a:rPr sz="1300">
+              <a:rPr sz="1650">
                 <a:solidFill>
                   <a:srgbClr val="FBFCFD"/>
                 </a:solidFill>
@@ -25132,11 +25132,11 @@
           <a:p>
             <a:pPr algn="l">
               <a:lnSpc>
-                <a:spcPct val="108000"/>
+                <a:spcPct val="110000"/>
               </a:lnSpc>
             </a:pPr>
             <a:r>
-              <a:rPr sz="1300">
+              <a:rPr sz="1650">
                 <a:solidFill>
                   <a:srgbClr val="FBFCFD"/>
                 </a:solidFill>
@@ -25144,7 +25144,7 @@
               <a:t>• </a:t>
             </a:r>
             <a:r>
-              <a:rPr sz="1200">
+              <a:rPr sz="1550">
                 <a:solidFill>
                   <a:srgbClr val="7FDBFF"/>
                 </a:solidFill>
@@ -25153,7 +25153,7 @@
               <a:t>FF</a:t>
             </a:r>
             <a:r>
-              <a:rPr sz="1300">
+              <a:rPr sz="1650">
                 <a:solidFill>
                   <a:srgbClr val="FBFCFD"/>
                 </a:solidFill>
@@ -25293,8 +25293,8 @@
         </p:nvSpPr>
         <p:spPr>
           <a:xfrm>
-            <a:off x="6434175" y="1773936"/>
-            <a:ext cx="5190591" cy="1609344"/>
+            <a:off x="6434175" y="1828800"/>
+            <a:ext cx="5190591" cy="1554480"/>
           </a:xfrm>
           <a:prstGeom prst="rect">
             <a:avLst/>
@@ -25309,11 +25309,11 @@
           <a:p>
             <a:pPr algn="l">
               <a:lnSpc>
-                <a:spcPct val="108000"/>
+                <a:spcPct val="110000"/>
               </a:lnSpc>
             </a:pPr>
             <a:r>
-              <a:rPr sz="1300">
+              <a:rPr sz="1650">
                 <a:solidFill>
                   <a:srgbClr val="FBFCFD"/>
                 </a:solidFill>
@@ -25321,7 +25321,7 @@
               <a:t>• </a:t>
             </a:r>
             <a:r>
-              <a:rPr sz="1200">
+              <a:rPr sz="1550">
                 <a:solidFill>
                   <a:srgbClr val="7FDBFF"/>
                 </a:solidFill>
@@ -25330,7 +25330,7 @@
               <a:t>Dry bulb temperature</a:t>
             </a:r>
             <a:r>
-              <a:rPr sz="1300">
+              <a:rPr sz="1650">
                 <a:solidFill>
                   <a:srgbClr val="FBFCFD"/>
                 </a:solidFill>
@@ -25338,7 +25338,7 @@
               <a:t> (20), </a:t>
             </a:r>
             <a:r>
-              <a:rPr sz="1200">
+              <a:rPr sz="1550">
                 <a:solidFill>
                   <a:srgbClr val="7FDBFF"/>
                 </a:solidFill>
@@ -25347,7 +25347,7 @@
               <a:t>Atmospheric pressure</a:t>
             </a:r>
             <a:r>
-              <a:rPr sz="1300">
+              <a:rPr sz="1650">
                 <a:solidFill>
                   <a:srgbClr val="FBFCFD"/>
                 </a:solidFill>
@@ -25358,11 +25358,11 @@
           <a:p>
             <a:pPr algn="l">
               <a:lnSpc>
-                <a:spcPct val="108000"/>
+                <a:spcPct val="110000"/>
               </a:lnSpc>
             </a:pPr>
             <a:r>
-              <a:rPr sz="1300">
+              <a:rPr sz="1650">
                 <a:solidFill>
                   <a:srgbClr val="FBFCFD"/>
                 </a:solidFill>
@@ -25370,7 +25370,7 @@
               <a:t>• </a:t>
             </a:r>
             <a:r>
-              <a:rPr sz="1200">
+              <a:rPr sz="1550">
                 <a:solidFill>
                   <a:srgbClr val="7FDBFF"/>
                 </a:solidFill>
@@ -25379,7 +25379,7 @@
               <a:t>DNI</a:t>
             </a:r>
             <a:r>
-              <a:rPr sz="1300">
+              <a:rPr sz="1650">
                 <a:solidFill>
                   <a:srgbClr val="FBFCFD"/>
                 </a:solidFill>
@@ -25387,7 +25387,7 @@
               <a:t> (27), </a:t>
             </a:r>
             <a:r>
-              <a:rPr sz="1200">
+              <a:rPr sz="1550">
                 <a:solidFill>
                   <a:srgbClr val="7FDBFF"/>
                 </a:solidFill>
@@ -25396,7 +25396,7 @@
               <a:t>GHI</a:t>
             </a:r>
             <a:r>
-              <a:rPr sz="1300">
+              <a:rPr sz="1650">
                 <a:solidFill>
                   <a:srgbClr val="FBFCFD"/>
                 </a:solidFill>
@@ -25404,7 +25404,7 @@
               <a:t> (30), </a:t>
             </a:r>
             <a:r>
-              <a:rPr sz="1200">
+              <a:rPr sz="1550">
                 <a:solidFill>
                   <a:srgbClr val="7FDBFF"/>
                 </a:solidFill>
@@ -25413,7 +25413,7 @@
               <a:t>DHI</a:t>
             </a:r>
             <a:r>
-              <a:rPr sz="1300">
+              <a:rPr sz="1650">
                 <a:solidFill>
                   <a:srgbClr val="FBFCFD"/>
                 </a:solidFill>
@@ -25424,11 +25424,11 @@
           <a:p>
             <a:pPr algn="l">
               <a:lnSpc>
-                <a:spcPct val="108000"/>
+                <a:spcPct val="110000"/>
               </a:lnSpc>
             </a:pPr>
             <a:r>
-              <a:rPr sz="1300">
+              <a:rPr sz="1650">
                 <a:solidFill>
                   <a:srgbClr val="FBFCFD"/>
                 </a:solidFill>
@@ -25436,7 +25436,7 @@
               <a:t>• </a:t>
             </a:r>
             <a:r>
-              <a:rPr sz="1200">
+              <a:rPr sz="1550">
                 <a:solidFill>
                   <a:srgbClr val="7FDBFF"/>
                 </a:solidFill>
@@ -25445,7 +25445,7 @@
               <a:t>POA CMP22</a:t>
             </a:r>
             <a:r>
-              <a:rPr sz="1300">
+              <a:rPr sz="1650">
                 <a:solidFill>
                   <a:srgbClr val="FBFCFD"/>
                 </a:solidFill>
@@ -25585,8 +25585,8 @@
         </p:nvSpPr>
         <p:spPr>
           <a:xfrm>
-            <a:off x="6434175" y="4361688"/>
-            <a:ext cx="5190591" cy="1609344"/>
+            <a:off x="6434175" y="4416552"/>
+            <a:ext cx="5190591" cy="1554480"/>
           </a:xfrm>
           <a:prstGeom prst="rect">
             <a:avLst/>
@@ -25601,11 +25601,11 @@
           <a:p>
             <a:pPr algn="l">
               <a:lnSpc>
-                <a:spcPct val="108000"/>
+                <a:spcPct val="110000"/>
               </a:lnSpc>
             </a:pPr>
             <a:r>
-              <a:rPr sz="1300">
+              <a:rPr sz="1650">
                 <a:solidFill>
                   <a:srgbClr val="FBFCFD"/>
                 </a:solidFill>
@@ -25613,7 +25613,7 @@
               <a:t>• </a:t>
             </a:r>
             <a:r>
-              <a:rPr sz="1200">
+              <a:rPr sz="1550">
                 <a:solidFill>
                   <a:srgbClr val="7FDBFF"/>
                 </a:solidFill>
@@ -25622,7 +25622,7 @@
               <a:t>Solar QA residual</a:t>
             </a:r>
             <a:r>
-              <a:rPr sz="1300">
+              <a:rPr sz="1650">
                 <a:solidFill>
                   <a:srgbClr val="FBFCFD"/>
                 </a:solidFill>
@@ -25633,11 +25633,11 @@
           <a:p>
             <a:pPr algn="l">
               <a:lnSpc>
-                <a:spcPct val="108000"/>
+                <a:spcPct val="110000"/>
               </a:lnSpc>
             </a:pPr>
             <a:r>
-              <a:rPr sz="1300">
+              <a:rPr sz="1650">
                 <a:solidFill>
                   <a:srgbClr val="FBFCFD"/>
                 </a:solidFill>
@@ -25645,7 +25645,7 @@
               <a:t>• </a:t>
             </a:r>
             <a:r>
-              <a:rPr sz="1200">
+              <a:rPr sz="1550">
                 <a:solidFill>
                   <a:srgbClr val="7FDBFF"/>
                 </a:solidFill>
@@ -25654,7 +25654,7 @@
               <a:t>PV module soiling derate</a:t>
             </a:r>
             <a:r>
-              <a:rPr sz="1300">
+              <a:rPr sz="1650">
                 <a:solidFill>
                   <a:srgbClr val="FBFCFD"/>
                 </a:solidFill>
@@ -25662,7 +25662,7 @@
               <a:t>, lluvia acumulada, humedad relativa, T dorso del módulo, T gabinete MT5, horarios de mantenimiento (</a:t>
             </a:r>
             <a:r>
-              <a:rPr sz="1200">
+              <a:rPr sz="1550">
                 <a:solidFill>
                   <a:srgbClr val="7FDBFF"/>
                 </a:solidFill>
@@ -25671,7 +25671,7 @@
               <a:t>99:99</a:t>
             </a:r>
             <a:r>
-              <a:rPr sz="1300">
+              <a:rPr sz="1650">
                 <a:solidFill>
                   <a:srgbClr val="FBFCFD"/>
                 </a:solidFill>
@@ -26002,8 +26002,8 @@
         </p:nvSpPr>
         <p:spPr>
           <a:xfrm>
-            <a:off x="566928" y="1773936"/>
-            <a:ext cx="5190591" cy="4233672"/>
+            <a:off x="566928" y="1828800"/>
+            <a:ext cx="5190591" cy="4178808"/>
           </a:xfrm>
           <a:prstGeom prst="rect">
             <a:avLst/>
@@ -26018,11 +26018,11 @@
           <a:p>
             <a:pPr algn="l">
               <a:lnSpc>
-                <a:spcPct val="108000"/>
+                <a:spcPct val="110000"/>
               </a:lnSpc>
             </a:pPr>
             <a:r>
-              <a:rPr sz="1350">
+              <a:rPr sz="1650">
                 <a:solidFill>
                   <a:srgbClr val="FBFCFD"/>
                 </a:solidFill>
@@ -26030,7 +26030,7 @@
               <a:t>• </a:t>
             </a:r>
             <a:r>
-              <a:rPr sz="1350" b="1">
+              <a:rPr sz="1650" b="1">
                 <a:solidFill>
                   <a:srgbClr val="FBFCFD"/>
                 </a:solidFill>
@@ -26038,7 +26038,7 @@
               <a:t>Modelo de un Diodo Simple (SDM) [De Soto et al., 2006]:</a:t>
             </a:r>
             <a:r>
-              <a:rPr sz="1350">
+              <a:rPr sz="1650">
                 <a:solidFill>
                   <a:srgbClr val="FBFCFD"/>
                 </a:solidFill>
@@ -26046,7 +26046,7 @@
               <a:t> circuito equivalente con pérdidas óhmicas en serie (R</a:t>
             </a:r>
             <a:r>
-              <a:rPr sz="950">
+              <a:rPr sz="1250">
                 <a:solidFill>
                   <a:srgbClr val="FBFCFD"/>
                 </a:solidFill>
@@ -26054,7 +26054,7 @@
               <a:t>s</a:t>
             </a:r>
             <a:r>
-              <a:rPr sz="1350">
+              <a:rPr sz="1650">
                 <a:solidFill>
                   <a:srgbClr val="FBFCFD"/>
                 </a:solidFill>
@@ -26062,7 +26062,7 @@
               <a:t>) y fugas shunt (R</a:t>
             </a:r>
             <a:r>
-              <a:rPr sz="950">
+              <a:rPr sz="1250">
                 <a:solidFill>
                   <a:srgbClr val="FBFCFD"/>
                 </a:solidFill>
@@ -26070,7 +26070,7 @@
               <a:t>sh</a:t>
             </a:r>
             <a:r>
-              <a:rPr sz="1350">
+              <a:rPr sz="1650">
                 <a:solidFill>
                   <a:srgbClr val="FBFCFD"/>
                 </a:solidFill>
@@ -26081,18 +26081,18 @@
           <a:p>
             <a:pPr algn="l">
               <a:lnSpc>
-                <a:spcPct val="108000"/>
+                <a:spcPct val="110000"/>
               </a:lnSpc>
             </a:pPr>
           </a:p>
           <a:p>
             <a:pPr algn="l">
               <a:lnSpc>
-                <a:spcPct val="108000"/>
+                <a:spcPct val="110000"/>
               </a:lnSpc>
             </a:pPr>
             <a:r>
-              <a:rPr sz="1350">
+              <a:rPr sz="1650">
                 <a:solidFill>
                   <a:srgbClr val="FBFCFD"/>
                 </a:solidFill>
@@ -26100,7 +26100,7 @@
               <a:t>• </a:t>
             </a:r>
             <a:r>
-              <a:rPr sz="1350" b="1">
+              <a:rPr sz="1650" b="1">
                 <a:solidFill>
                   <a:srgbClr val="FBFCFD"/>
                 </a:solidFill>
@@ -26108,7 +26108,7 @@
               <a:t>Modelo Térmico de Sandia (SAPM) [King et al., 2004]:</a:t>
             </a:r>
             <a:r>
-              <a:rPr sz="1350">
+              <a:rPr sz="1650">
                 <a:solidFill>
                   <a:srgbClr val="FBFCFD"/>
                 </a:solidFill>
@@ -26119,18 +26119,18 @@
           <a:p>
             <a:pPr algn="l">
               <a:lnSpc>
-                <a:spcPct val="108000"/>
+                <a:spcPct val="110000"/>
               </a:lnSpc>
             </a:pPr>
           </a:p>
           <a:p>
             <a:pPr algn="l">
               <a:lnSpc>
-                <a:spcPct val="108000"/>
+                <a:spcPct val="110000"/>
               </a:lnSpc>
             </a:pPr>
             <a:r>
-              <a:rPr sz="1350">
+              <a:rPr sz="1650">
                 <a:solidFill>
                   <a:srgbClr val="FBFCFD"/>
                 </a:solidFill>
@@ -26138,7 +26138,7 @@
               <a:t>• </a:t>
             </a:r>
             <a:r>
-              <a:rPr sz="1350" b="1">
+              <a:rPr sz="1650" b="1">
                 <a:solidFill>
                   <a:srgbClr val="FBFCFD"/>
                 </a:solidFill>
@@ -26146,7 +26146,7 @@
               <a:t>Transposición de Perez (1990):</a:t>
             </a:r>
             <a:r>
-              <a:rPr sz="1350">
+              <a:rPr sz="1650">
                 <a:solidFill>
                   <a:srgbClr val="FBFCFD"/>
                 </a:solidFill>
@@ -26157,18 +26157,18 @@
           <a:p>
             <a:pPr algn="l">
               <a:lnSpc>
-                <a:spcPct val="108000"/>
+                <a:spcPct val="110000"/>
               </a:lnSpc>
             </a:pPr>
           </a:p>
           <a:p>
             <a:pPr algn="l">
               <a:lnSpc>
-                <a:spcPct val="108000"/>
+                <a:spcPct val="110000"/>
               </a:lnSpc>
             </a:pPr>
             <a:r>
-              <a:rPr sz="1350">
+              <a:rPr sz="1650">
                 <a:solidFill>
                   <a:srgbClr val="FBFCFD"/>
                 </a:solidFill>
@@ -26176,7 +26176,7 @@
               <a:t>• </a:t>
             </a:r>
             <a:r>
-              <a:rPr sz="1350" b="1">
+              <a:rPr sz="1650" b="1">
                 <a:solidFill>
                   <a:srgbClr val="FBFCFD"/>
                 </a:solidFill>
@@ -26184,7 +26184,7 @@
               <a:t>Escalamiento De Soto (2006):</a:t>
             </a:r>
             <a:r>
-              <a:rPr sz="1350">
+              <a:rPr sz="1650">
                 <a:solidFill>
                   <a:srgbClr val="FBFCFD"/>
                 </a:solidFill>
@@ -26195,18 +26195,18 @@
           <a:p>
             <a:pPr algn="l">
               <a:lnSpc>
-                <a:spcPct val="108000"/>
+                <a:spcPct val="110000"/>
               </a:lnSpc>
             </a:pPr>
           </a:p>
           <a:p>
             <a:pPr algn="l">
               <a:lnSpc>
-                <a:spcPct val="108000"/>
+                <a:spcPct val="110000"/>
               </a:lnSpc>
             </a:pPr>
             <a:r>
-              <a:rPr sz="1350">
+              <a:rPr sz="1650">
                 <a:solidFill>
                   <a:srgbClr val="FBFCFD"/>
                 </a:solidFill>
@@ -26214,7 +26214,7 @@
               <a:t>• </a:t>
             </a:r>
             <a:r>
-              <a:rPr sz="1350" b="1">
+              <a:rPr sz="1650" b="1">
                 <a:solidFill>
                   <a:srgbClr val="FBFCFD"/>
                 </a:solidFill>
@@ -26222,7 +26222,7 @@
               <a:t>Marco revisado NO aplicado:</a:t>
             </a:r>
             <a:r>
-              <a:rPr sz="1350">
+              <a:rPr sz="1650">
                 <a:solidFill>
                   <a:srgbClr val="FBFCFD"/>
                 </a:solidFill>
@@ -26662,11 +26662,11 @@
           <a:p>
             <a:pPr algn="l">
               <a:lnSpc>
-                <a:spcPct val="105000"/>
+                <a:spcPct val="108000"/>
               </a:lnSpc>
             </a:pPr>
             <a:r>
-              <a:rPr sz="1400" b="1">
+              <a:rPr sz="1750" b="1">
                 <a:solidFill>
                   <a:srgbClr val="FBFCFD"/>
                 </a:solidFill>
@@ -26674,7 +26674,7 @@
               <a:t>Flujo lógico de la simulación:</a:t>
             </a:r>
             <a:r>
-              <a:rPr sz="1400">
+              <a:rPr sz="1750">
                 <a:solidFill>
                   <a:srgbClr val="FBFCFD"/>
                 </a:solidFill>
@@ -26928,8 +26928,8 @@
         </p:nvSpPr>
         <p:spPr>
           <a:xfrm>
-            <a:off x="365760" y="1298448"/>
-            <a:ext cx="2714167" cy="566928"/>
+            <a:off x="365760" y="1280160"/>
+            <a:ext cx="2714167" cy="658368"/>
           </a:xfrm>
           <a:prstGeom prst="rect">
             <a:avLst/>
@@ -26944,7 +26944,7 @@
           <a:p>
             <a:pPr algn="ctr"/>
             <a:r>
-              <a:rPr sz="2800" b="1">
+              <a:rPr sz="3800" b="1">
                 <a:solidFill>
                   <a:srgbClr val="00D2FF"/>
                 </a:solidFill>
@@ -26962,8 +26962,8 @@
         </p:nvSpPr>
         <p:spPr>
           <a:xfrm>
-            <a:off x="420624" y="1947672"/>
-            <a:ext cx="2604439" cy="502920"/>
+            <a:off x="420624" y="1874520"/>
+            <a:ext cx="2604439" cy="566928"/>
           </a:xfrm>
           <a:prstGeom prst="rect">
             <a:avLst/>
@@ -26978,7 +26978,7 @@
           <a:p>
             <a:pPr algn="ctr"/>
             <a:r>
-              <a:rPr sz="1250">
+              <a:rPr sz="1550">
                 <a:solidFill>
                   <a:srgbClr val="9AA5B1"/>
                 </a:solidFill>
@@ -26989,7 +26989,7 @@
           <a:p>
             <a:pPr algn="ctr"/>
             <a:r>
-              <a:rPr sz="1250">
+              <a:rPr sz="1550">
                 <a:solidFill>
                   <a:srgbClr val="9AA5B1"/>
                 </a:solidFill>
@@ -27052,8 +27052,8 @@
         </p:nvSpPr>
         <p:spPr>
           <a:xfrm>
-            <a:off x="3281095" y="1298448"/>
-            <a:ext cx="2714167" cy="566928"/>
+            <a:off x="3281095" y="1280160"/>
+            <a:ext cx="2714167" cy="658368"/>
           </a:xfrm>
           <a:prstGeom prst="rect">
             <a:avLst/>
@@ -27068,7 +27068,7 @@
           <a:p>
             <a:pPr algn="ctr"/>
             <a:r>
-              <a:rPr sz="2800" b="1">
+              <a:rPr sz="3800" b="1">
                 <a:solidFill>
                   <a:srgbClr val="F1C40F"/>
                 </a:solidFill>
@@ -27086,8 +27086,8 @@
         </p:nvSpPr>
         <p:spPr>
           <a:xfrm>
-            <a:off x="3335959" y="1947672"/>
-            <a:ext cx="2604439" cy="502920"/>
+            <a:off x="3335959" y="1874520"/>
+            <a:ext cx="2604439" cy="566928"/>
           </a:xfrm>
           <a:prstGeom prst="rect">
             <a:avLst/>
@@ -27102,7 +27102,7 @@
           <a:p>
             <a:pPr algn="ctr"/>
             <a:r>
-              <a:rPr sz="1250">
+              <a:rPr sz="1550">
                 <a:solidFill>
                   <a:srgbClr val="9AA5B1"/>
                 </a:solidFill>
@@ -27113,7 +27113,7 @@
           <a:p>
             <a:pPr algn="ctr"/>
             <a:r>
-              <a:rPr sz="1250">
+              <a:rPr sz="1550">
                 <a:solidFill>
                   <a:srgbClr val="9AA5B1"/>
                 </a:solidFill>
@@ -27176,8 +27176,8 @@
         </p:nvSpPr>
         <p:spPr>
           <a:xfrm>
-            <a:off x="6196431" y="1298448"/>
-            <a:ext cx="2714167" cy="566928"/>
+            <a:off x="6196431" y="1280160"/>
+            <a:ext cx="2714167" cy="658368"/>
           </a:xfrm>
           <a:prstGeom prst="rect">
             <a:avLst/>
@@ -27192,7 +27192,7 @@
           <a:p>
             <a:pPr algn="ctr"/>
             <a:r>
-              <a:rPr sz="2800" b="1">
+              <a:rPr sz="3800" b="1">
                 <a:solidFill>
                   <a:srgbClr val="FF5E3A"/>
                 </a:solidFill>
@@ -27210,8 +27210,8 @@
         </p:nvSpPr>
         <p:spPr>
           <a:xfrm>
-            <a:off x="6251295" y="1947672"/>
-            <a:ext cx="2604439" cy="502920"/>
+            <a:off x="6251295" y="1874520"/>
+            <a:ext cx="2604439" cy="566928"/>
           </a:xfrm>
           <a:prstGeom prst="rect">
             <a:avLst/>
@@ -27226,7 +27226,7 @@
           <a:p>
             <a:pPr algn="ctr"/>
             <a:r>
-              <a:rPr sz="1250">
+              <a:rPr sz="1550">
                 <a:solidFill>
                   <a:srgbClr val="9AA5B1"/>
                 </a:solidFill>
@@ -27237,7 +27237,7 @@
           <a:p>
             <a:pPr algn="ctr"/>
             <a:r>
-              <a:rPr sz="1250">
+              <a:rPr sz="1550">
                 <a:solidFill>
                   <a:srgbClr val="9AA5B1"/>
                 </a:solidFill>
@@ -27300,8 +27300,8 @@
         </p:nvSpPr>
         <p:spPr>
           <a:xfrm>
-            <a:off x="9111767" y="1298448"/>
-            <a:ext cx="2714167" cy="566928"/>
+            <a:off x="9111767" y="1280160"/>
+            <a:ext cx="2714167" cy="658368"/>
           </a:xfrm>
           <a:prstGeom prst="rect">
             <a:avLst/>
@@ -27316,7 +27316,7 @@
           <a:p>
             <a:pPr algn="ctr"/>
             <a:r>
-              <a:rPr sz="2800" b="1">
+              <a:rPr sz="3800" b="1">
                 <a:solidFill>
                   <a:srgbClr val="2ECC71"/>
                 </a:solidFill>
@@ -27334,8 +27334,8 @@
         </p:nvSpPr>
         <p:spPr>
           <a:xfrm>
-            <a:off x="9166631" y="1947672"/>
-            <a:ext cx="2604439" cy="502920"/>
+            <a:off x="9166631" y="1874520"/>
+            <a:ext cx="2604439" cy="566928"/>
           </a:xfrm>
           <a:prstGeom prst="rect">
             <a:avLst/>
@@ -27350,7 +27350,7 @@
           <a:p>
             <a:pPr algn="ctr"/>
             <a:r>
-              <a:rPr sz="1250">
+              <a:rPr sz="1550">
                 <a:solidFill>
                   <a:srgbClr val="9AA5B1"/>
                 </a:solidFill>
@@ -27361,7 +27361,7 @@
           <a:p>
             <a:pPr algn="ctr"/>
             <a:r>
-              <a:rPr sz="1250">
+              <a:rPr sz="1550">
                 <a:solidFill>
                   <a:srgbClr val="9AA5B1"/>
                 </a:solidFill>
@@ -27501,8 +27501,8 @@
         </p:nvSpPr>
         <p:spPr>
           <a:xfrm>
-            <a:off x="566928" y="3328416"/>
-            <a:ext cx="5190591" cy="2679192"/>
+            <a:off x="566928" y="3383280"/>
+            <a:ext cx="5190591" cy="2624328"/>
           </a:xfrm>
           <a:prstGeom prst="rect">
             <a:avLst/>
@@ -27517,11 +27517,11 @@
           <a:p>
             <a:pPr algn="l">
               <a:lnSpc>
-                <a:spcPct val="108000"/>
+                <a:spcPct val="110000"/>
               </a:lnSpc>
             </a:pPr>
             <a:r>
-              <a:rPr sz="1400">
+              <a:rPr sz="1700">
                 <a:solidFill>
                   <a:srgbClr val="FBFCFD"/>
                 </a:solidFill>
@@ -27529,7 +27529,7 @@
               <a:t>• Campaña experimental del </a:t>
             </a:r>
             <a:r>
-              <a:rPr sz="1400" b="1">
+              <a:rPr sz="1700" b="1">
                 <a:solidFill>
                   <a:srgbClr val="FBFCFD"/>
                 </a:solidFill>
@@ -27537,7 +27537,7 @@
               <a:t>NREL</a:t>
             </a:r>
             <a:r>
-              <a:rPr sz="1400">
+              <a:rPr sz="1700">
                 <a:solidFill>
                   <a:srgbClr val="FBFCFD"/>
                 </a:solidFill>
@@ -27548,18 +27548,18 @@
           <a:p>
             <a:pPr algn="l">
               <a:lnSpc>
-                <a:spcPct val="108000"/>
+                <a:spcPct val="110000"/>
               </a:lnSpc>
             </a:pPr>
           </a:p>
           <a:p>
             <a:pPr algn="l">
               <a:lnSpc>
-                <a:spcPct val="108000"/>
+                <a:spcPct val="110000"/>
               </a:lnSpc>
             </a:pPr>
             <a:r>
-              <a:rPr sz="1400">
+              <a:rPr sz="1700">
                 <a:solidFill>
                   <a:srgbClr val="FBFCFD"/>
                 </a:solidFill>
@@ -27567,7 +27567,7 @@
               <a:t>• Sitio: </a:t>
             </a:r>
             <a:r>
-              <a:rPr sz="1400" b="1">
+              <a:rPr sz="1700" b="1">
                 <a:solidFill>
                   <a:srgbClr val="FBFCFD"/>
                 </a:solidFill>
@@ -27575,7 +27575,7 @@
               <a:t>Cocoa, Florida</a:t>
             </a:r>
             <a:r>
-              <a:rPr sz="1400">
+              <a:rPr sz="1700">
                 <a:solidFill>
                   <a:srgbClr val="FBFCFD"/>
                 </a:solidFill>
@@ -27586,18 +27586,18 @@
           <a:p>
             <a:pPr algn="l">
               <a:lnSpc>
-                <a:spcPct val="108000"/>
+                <a:spcPct val="110000"/>
               </a:lnSpc>
             </a:pPr>
           </a:p>
           <a:p>
             <a:pPr algn="l">
               <a:lnSpc>
-                <a:spcPct val="108000"/>
+                <a:spcPct val="110000"/>
               </a:lnSpc>
             </a:pPr>
             <a:r>
-              <a:rPr sz="1400">
+              <a:rPr sz="1700">
                 <a:solidFill>
                   <a:srgbClr val="FBFCFD"/>
                 </a:solidFill>
@@ -27608,18 +27608,18 @@
           <a:p>
             <a:pPr algn="l">
               <a:lnSpc>
-                <a:spcPct val="108000"/>
+                <a:spcPct val="110000"/>
               </a:lnSpc>
             </a:pPr>
           </a:p>
           <a:p>
             <a:pPr algn="l">
               <a:lnSpc>
-                <a:spcPct val="108000"/>
+                <a:spcPct val="110000"/>
               </a:lnSpc>
             </a:pPr>
             <a:r>
-              <a:rPr sz="1400">
+              <a:rPr sz="1700">
                 <a:solidFill>
                   <a:srgbClr val="FBFCFD"/>
                 </a:solidFill>
@@ -27627,7 +27627,7 @@
               <a:t>• </a:t>
             </a:r>
             <a:r>
-              <a:rPr sz="1400" b="1">
+              <a:rPr sz="1700" b="1">
                 <a:solidFill>
                   <a:srgbClr val="FBFCFD"/>
                 </a:solidFill>
@@ -27635,7 +27635,7 @@
               <a:t>Cada registro = una curva I-V completa</a:t>
             </a:r>
             <a:r>
-              <a:rPr sz="1400">
+              <a:rPr sz="1700">
                 <a:solidFill>
                   <a:srgbClr val="FBFCFD"/>
                 </a:solidFill>
@@ -27775,8 +27775,8 @@
         </p:nvSpPr>
         <p:spPr>
           <a:xfrm>
-            <a:off x="6434175" y="3328416"/>
-            <a:ext cx="5190591" cy="2679192"/>
+            <a:off x="6434175" y="3383280"/>
+            <a:ext cx="5190591" cy="2624328"/>
           </a:xfrm>
           <a:prstGeom prst="rect">
             <a:avLst/>
@@ -27791,11 +27791,11 @@
           <a:p>
             <a:pPr algn="l">
               <a:lnSpc>
-                <a:spcPct val="108000"/>
+                <a:spcPct val="110000"/>
               </a:lnSpc>
             </a:pPr>
             <a:r>
-              <a:rPr sz="1400">
+              <a:rPr sz="1700">
                 <a:solidFill>
                   <a:srgbClr val="FBFCFD"/>
                 </a:solidFill>
@@ -27803,7 +27803,7 @@
               <a:t>• </a:t>
             </a:r>
             <a:r>
-              <a:rPr sz="1300">
+              <a:rPr sz="1600">
                 <a:solidFill>
                   <a:srgbClr val="7FDBFF"/>
                 </a:solidFill>
@@ -27812,7 +27812,7 @@
               <a:t>mSi0166</a:t>
             </a:r>
             <a:r>
-              <a:rPr sz="1400">
+              <a:rPr sz="1700">
                 <a:solidFill>
                   <a:srgbClr val="FBFCFD"/>
                 </a:solidFill>
@@ -27823,11 +27823,11 @@
           <a:p>
             <a:pPr algn="l">
               <a:lnSpc>
-                <a:spcPct val="108000"/>
+                <a:spcPct val="110000"/>
               </a:lnSpc>
             </a:pPr>
             <a:r>
-              <a:rPr sz="1400">
+              <a:rPr sz="1700">
                 <a:solidFill>
                   <a:srgbClr val="FBFCFD"/>
                 </a:solidFill>
@@ -27835,7 +27835,7 @@
               <a:t>  </a:t>
             </a:r>
             <a:r>
-              <a:rPr sz="1400" b="1">
+              <a:rPr sz="1700" b="1">
                 <a:solidFill>
                   <a:srgbClr val="FBFCFD"/>
                 </a:solidFill>
@@ -27843,7 +27843,7 @@
               <a:t>36,765 curvas</a:t>
             </a:r>
             <a:r>
-              <a:rPr sz="1400">
+              <a:rPr sz="1700">
                 <a:solidFill>
                   <a:srgbClr val="FBFCFD"/>
                 </a:solidFill>
@@ -27854,18 +27854,18 @@
           <a:p>
             <a:pPr algn="l">
               <a:lnSpc>
-                <a:spcPct val="108000"/>
+                <a:spcPct val="110000"/>
               </a:lnSpc>
             </a:pPr>
           </a:p>
           <a:p>
             <a:pPr algn="l">
               <a:lnSpc>
-                <a:spcPct val="108000"/>
+                <a:spcPct val="110000"/>
               </a:lnSpc>
             </a:pPr>
             <a:r>
-              <a:rPr sz="1400">
+              <a:rPr sz="1700">
                 <a:solidFill>
                   <a:srgbClr val="FBFCFD"/>
                 </a:solidFill>
@@ -27873,7 +27873,7 @@
               <a:t>• </a:t>
             </a:r>
             <a:r>
-              <a:rPr sz="1300">
+              <a:rPr sz="1600">
                 <a:solidFill>
                   <a:srgbClr val="7FDBFF"/>
                 </a:solidFill>
@@ -27882,7 +27882,7 @@
               <a:t>HIT05667</a:t>
             </a:r>
             <a:r>
-              <a:rPr sz="1400">
+              <a:rPr sz="1700">
                 <a:solidFill>
                   <a:srgbClr val="FBFCFD"/>
                 </a:solidFill>
@@ -27893,11 +27893,11 @@
           <a:p>
             <a:pPr algn="l">
               <a:lnSpc>
-                <a:spcPct val="108000"/>
+                <a:spcPct val="110000"/>
               </a:lnSpc>
             </a:pPr>
             <a:r>
-              <a:rPr sz="1400">
+              <a:rPr sz="1700">
                 <a:solidFill>
                   <a:srgbClr val="FBFCFD"/>
                 </a:solidFill>
@@ -27905,7 +27905,7 @@
               <a:t>  </a:t>
             </a:r>
             <a:r>
-              <a:rPr sz="1400" b="1">
+              <a:rPr sz="1700" b="1">
                 <a:solidFill>
                   <a:srgbClr val="FBFCFD"/>
                 </a:solidFill>
@@ -27913,7 +27913,7 @@
               <a:t>38,377 curvas</a:t>
             </a:r>
             <a:r>
-              <a:rPr sz="1400">
+              <a:rPr sz="1700">
                 <a:solidFill>
                   <a:srgbClr val="FBFCFD"/>
                 </a:solidFill>
@@ -27924,18 +27924,18 @@
           <a:p>
             <a:pPr algn="l">
               <a:lnSpc>
-                <a:spcPct val="108000"/>
+                <a:spcPct val="110000"/>
               </a:lnSpc>
             </a:pPr>
           </a:p>
           <a:p>
             <a:pPr algn="l">
               <a:lnSpc>
-                <a:spcPct val="108000"/>
+                <a:spcPct val="110000"/>
               </a:lnSpc>
             </a:pPr>
             <a:r>
-              <a:rPr sz="1400">
+              <a:rPr sz="1700">
                 <a:solidFill>
                   <a:srgbClr val="FBFCFD"/>
                 </a:solidFill>
@@ -28266,8 +28266,8 @@
         </p:nvSpPr>
         <p:spPr>
           <a:xfrm>
-            <a:off x="566928" y="1773936"/>
-            <a:ext cx="5190591" cy="4233672"/>
+            <a:off x="566928" y="1828800"/>
+            <a:ext cx="5190591" cy="4178808"/>
           </a:xfrm>
           <a:prstGeom prst="rect">
             <a:avLst/>
@@ -28282,11 +28282,11 @@
           <a:p>
             <a:pPr algn="l">
               <a:lnSpc>
-                <a:spcPct val="108000"/>
+                <a:spcPct val="110000"/>
               </a:lnSpc>
             </a:pPr>
             <a:r>
-              <a:rPr sz="1400">
+              <a:rPr sz="1700">
                 <a:solidFill>
                   <a:srgbClr val="FBFCFD"/>
                 </a:solidFill>
@@ -28294,7 +28294,7 @@
               <a:t>• </a:t>
             </a:r>
             <a:r>
-              <a:rPr sz="1400" b="1">
+              <a:rPr sz="1700" b="1">
                 <a:solidFill>
                   <a:srgbClr val="FBFCFD"/>
                 </a:solidFill>
@@ -28302,7 +28302,7 @@
               <a:t>Eléctricas:</a:t>
             </a:r>
             <a:r>
-              <a:rPr sz="1400">
+              <a:rPr sz="1700">
                 <a:solidFill>
                   <a:srgbClr val="FBFCFD"/>
                 </a:solidFill>
@@ -28313,18 +28313,18 @@
           <a:p>
             <a:pPr algn="l">
               <a:lnSpc>
-                <a:spcPct val="108000"/>
+                <a:spcPct val="110000"/>
               </a:lnSpc>
             </a:pPr>
           </a:p>
           <a:p>
             <a:pPr algn="l">
               <a:lnSpc>
-                <a:spcPct val="108000"/>
+                <a:spcPct val="110000"/>
               </a:lnSpc>
             </a:pPr>
             <a:r>
-              <a:rPr sz="1400">
+              <a:rPr sz="1700">
                 <a:solidFill>
                   <a:srgbClr val="FBFCFD"/>
                 </a:solidFill>
@@ -28332,7 +28332,7 @@
               <a:t>• </a:t>
             </a:r>
             <a:r>
-              <a:rPr sz="1400" b="1">
+              <a:rPr sz="1700" b="1">
                 <a:solidFill>
                   <a:srgbClr val="FBFCFD"/>
                 </a:solidFill>
@@ -28340,7 +28340,7 @@
               <a:t>Meteorológicas:</a:t>
             </a:r>
             <a:r>
-              <a:rPr sz="1400">
+              <a:rPr sz="1700">
                 <a:solidFill>
                   <a:srgbClr val="FBFCFD"/>
                 </a:solidFill>
@@ -28351,18 +28351,18 @@
           <a:p>
             <a:pPr algn="l">
               <a:lnSpc>
-                <a:spcPct val="108000"/>
+                <a:spcPct val="110000"/>
               </a:lnSpc>
             </a:pPr>
           </a:p>
           <a:p>
             <a:pPr algn="l">
               <a:lnSpc>
-                <a:spcPct val="108000"/>
+                <a:spcPct val="110000"/>
               </a:lnSpc>
             </a:pPr>
             <a:r>
-              <a:rPr sz="1400">
+              <a:rPr sz="1700">
                 <a:solidFill>
                   <a:srgbClr val="FBFCFD"/>
                 </a:solidFill>
@@ -28370,7 +28370,7 @@
               <a:t>• </a:t>
             </a:r>
             <a:r>
-              <a:rPr sz="1400" b="1">
+              <a:rPr sz="1700" b="1">
                 <a:solidFill>
                   <a:srgbClr val="FBFCFD"/>
                 </a:solidFill>
@@ -28378,7 +28378,7 @@
               <a:t>Referencia POA:</a:t>
             </a:r>
             <a:r>
-              <a:rPr sz="1400">
+              <a:rPr sz="1700">
                 <a:solidFill>
                   <a:srgbClr val="FBFCFD"/>
                 </a:solidFill>
@@ -28389,18 +28389,18 @@
           <a:p>
             <a:pPr algn="l">
               <a:lnSpc>
-                <a:spcPct val="108000"/>
+                <a:spcPct val="110000"/>
               </a:lnSpc>
             </a:pPr>
           </a:p>
           <a:p>
             <a:pPr algn="l">
               <a:lnSpc>
-                <a:spcPct val="108000"/>
+                <a:spcPct val="110000"/>
               </a:lnSpc>
             </a:pPr>
             <a:r>
-              <a:rPr sz="1400">
+              <a:rPr sz="1700">
                 <a:solidFill>
                   <a:srgbClr val="FBFCFD"/>
                 </a:solidFill>
@@ -28408,7 +28408,7 @@
               <a:t>• </a:t>
             </a:r>
             <a:r>
-              <a:rPr sz="1400" b="1">
+              <a:rPr sz="1700" b="1">
                 <a:solidFill>
                   <a:srgbClr val="FBFCFD"/>
                 </a:solidFill>
@@ -28416,7 +28416,7 @@
               <a:t>Calidad / operación:</a:t>
             </a:r>
             <a:r>
-              <a:rPr sz="1400">
+              <a:rPr sz="1700">
                 <a:solidFill>
                   <a:srgbClr val="FBFCFD"/>
                 </a:solidFill>
@@ -28556,8 +28556,8 @@
         </p:nvSpPr>
         <p:spPr>
           <a:xfrm>
-            <a:off x="6434175" y="1773936"/>
-            <a:ext cx="5190591" cy="4233672"/>
+            <a:off x="6434175" y="1828800"/>
+            <a:ext cx="5190591" cy="4178808"/>
           </a:xfrm>
           <a:prstGeom prst="rect">
             <a:avLst/>
@@ -28572,11 +28572,11 @@
           <a:p>
             <a:pPr algn="l">
               <a:lnSpc>
-                <a:spcPct val="108000"/>
+                <a:spcPct val="110000"/>
               </a:lnSpc>
             </a:pPr>
             <a:r>
-              <a:rPr sz="1400">
+              <a:rPr sz="1700">
                 <a:solidFill>
                   <a:srgbClr val="FBFCFD"/>
                 </a:solidFill>
@@ -28584,7 +28584,7 @@
               <a:t>• </a:t>
             </a:r>
             <a:r>
-              <a:rPr sz="1400" b="1">
+              <a:rPr sz="1700" b="1">
                 <a:solidFill>
                   <a:srgbClr val="FBFCFD"/>
                 </a:solidFill>
@@ -28592,7 +28592,7 @@
               <a:t>Usadas (11 columnas):</a:t>
             </a:r>
             <a:r>
-              <a:rPr sz="1400">
+              <a:rPr sz="1700">
                 <a:solidFill>
                   <a:srgbClr val="FBFCFD"/>
                 </a:solidFill>
@@ -28603,18 +28603,18 @@
           <a:p>
             <a:pPr algn="l">
               <a:lnSpc>
-                <a:spcPct val="108000"/>
+                <a:spcPct val="110000"/>
               </a:lnSpc>
             </a:pPr>
           </a:p>
           <a:p>
             <a:pPr algn="l">
               <a:lnSpc>
-                <a:spcPct val="108000"/>
+                <a:spcPct val="110000"/>
               </a:lnSpc>
             </a:pPr>
             <a:r>
-              <a:rPr sz="1400">
+              <a:rPr sz="1700">
                 <a:solidFill>
                   <a:srgbClr val="FBFCFD"/>
                 </a:solidFill>
@@ -28622,7 +28622,7 @@
               <a:t>• </a:t>
             </a:r>
             <a:r>
-              <a:rPr sz="1400" b="1">
+              <a:rPr sz="1700" b="1">
                 <a:solidFill>
                   <a:srgbClr val="FBFCFD"/>
                 </a:solidFill>
@@ -28630,7 +28630,7 @@
               <a:t>Verificación:</a:t>
             </a:r>
             <a:r>
-              <a:rPr sz="1400">
+              <a:rPr sz="1700">
                 <a:solidFill>
                   <a:srgbClr val="FBFCFD"/>
                 </a:solidFill>
@@ -28641,18 +28641,18 @@
           <a:p>
             <a:pPr algn="l">
               <a:lnSpc>
-                <a:spcPct val="108000"/>
+                <a:spcPct val="110000"/>
               </a:lnSpc>
             </a:pPr>
           </a:p>
           <a:p>
             <a:pPr algn="l">
               <a:lnSpc>
-                <a:spcPct val="108000"/>
+                <a:spcPct val="110000"/>
               </a:lnSpc>
             </a:pPr>
             <a:r>
-              <a:rPr sz="1400">
+              <a:rPr sz="1700">
                 <a:solidFill>
                   <a:srgbClr val="FBFCFD"/>
                 </a:solidFill>
@@ -28660,7 +28660,7 @@
               <a:t>• </a:t>
             </a:r>
             <a:r>
-              <a:rPr sz="1400" b="1">
+              <a:rPr sz="1700" b="1">
                 <a:solidFill>
                   <a:srgbClr val="FBFCFD"/>
                 </a:solidFill>
@@ -28668,7 +28668,7 @@
               <a:t>Descartadas:</a:t>
             </a:r>
             <a:r>
-              <a:rPr sz="1400">
+              <a:rPr sz="1700">
                 <a:solidFill>
                   <a:srgbClr val="FBFCFD"/>
                 </a:solidFill>
@@ -28679,18 +28679,18 @@
           <a:p>
             <a:pPr algn="l">
               <a:lnSpc>
-                <a:spcPct val="108000"/>
+                <a:spcPct val="110000"/>
               </a:lnSpc>
             </a:pPr>
           </a:p>
           <a:p>
             <a:pPr algn="l">
               <a:lnSpc>
-                <a:spcPct val="108000"/>
+                <a:spcPct val="110000"/>
               </a:lnSpc>
             </a:pPr>
             <a:r>
-              <a:rPr sz="1400">
+              <a:rPr sz="1700">
                 <a:solidFill>
                   <a:srgbClr val="FBFCFD"/>
                 </a:solidFill>
@@ -28984,11 +28984,11 @@
           <a:p>
             <a:pPr algn="l">
               <a:lnSpc>
-                <a:spcPct val="105000"/>
+                <a:spcPct val="108000"/>
               </a:lnSpc>
             </a:pPr>
             <a:r>
-              <a:rPr sz="1400" b="1">
+              <a:rPr sz="1750" b="1">
                 <a:solidFill>
                   <a:srgbClr val="FBFCFD"/>
                 </a:solidFill>
@@ -28996,7 +28996,7 @@
               <a:t>Estructura y lectura de datos:</a:t>
             </a:r>
             <a:r>
-              <a:rPr sz="1400">
+              <a:rPr sz="1750">
                 <a:solidFill>
                   <a:srgbClr val="FBFCFD"/>
                 </a:solidFill>
@@ -29327,8 +29327,8 @@
         </p:nvSpPr>
         <p:spPr>
           <a:xfrm>
-            <a:off x="566928" y="1773936"/>
-            <a:ext cx="5190591" cy="4233672"/>
+            <a:off x="566928" y="1828800"/>
+            <a:ext cx="5190591" cy="4178808"/>
           </a:xfrm>
           <a:prstGeom prst="rect">
             <a:avLst/>
@@ -29343,11 +29343,11 @@
           <a:p>
             <a:pPr algn="l">
               <a:lnSpc>
-                <a:spcPct val="108000"/>
+                <a:spcPct val="110000"/>
               </a:lnSpc>
             </a:pPr>
             <a:r>
-              <a:rPr sz="1400">
+              <a:rPr sz="1700">
                 <a:solidFill>
                   <a:srgbClr val="FBFCFD"/>
                 </a:solidFill>
@@ -29355,7 +29355,7 @@
               <a:t>• </a:t>
             </a:r>
             <a:r>
-              <a:rPr sz="1400" b="1">
+              <a:rPr sz="1700" b="1">
                 <a:solidFill>
                   <a:srgbClr val="FBFCFD"/>
                 </a:solidFill>
@@ -29363,7 +29363,7 @@
               <a:t>Naturaleza de los datos:</a:t>
             </a:r>
             <a:r>
-              <a:rPr sz="1400">
+              <a:rPr sz="1700">
                 <a:solidFill>
                   <a:srgbClr val="FBFCFD"/>
                 </a:solidFill>
@@ -29371,7 +29371,7 @@
               <a:t> cada fila contiene 43 columnas fijas + </a:t>
             </a:r>
             <a:r>
-              <a:rPr sz="1400" b="1">
+              <a:rPr sz="1700" b="1">
                 <a:solidFill>
                   <a:srgbClr val="FBFCFD"/>
                 </a:solidFill>
@@ -29379,7 +29379,7 @@
               <a:t>n pares (I, V) crudos</a:t>
             </a:r>
             <a:r>
-              <a:rPr sz="1400">
+              <a:rPr sz="1700">
                 <a:solidFill>
                   <a:srgbClr val="FBFCFD"/>
                 </a:solidFill>
@@ -29390,18 +29390,18 @@
           <a:p>
             <a:pPr algn="l">
               <a:lnSpc>
-                <a:spcPct val="108000"/>
+                <a:spcPct val="110000"/>
               </a:lnSpc>
             </a:pPr>
           </a:p>
           <a:p>
             <a:pPr algn="l">
               <a:lnSpc>
-                <a:spcPct val="108000"/>
+                <a:spcPct val="110000"/>
               </a:lnSpc>
             </a:pPr>
             <a:r>
-              <a:rPr sz="1400">
+              <a:rPr sz="1700">
                 <a:solidFill>
                   <a:srgbClr val="FBFCFD"/>
                 </a:solidFill>
@@ -29409,7 +29409,7 @@
               <a:t>• </a:t>
             </a:r>
             <a:r>
-              <a:rPr sz="1400" b="1">
+              <a:rPr sz="1700" b="1">
                 <a:solidFill>
                   <a:srgbClr val="FBFCFD"/>
                 </a:solidFill>
@@ -29417,7 +29417,7 @@
               <a:t>Falla del método estándar:</a:t>
             </a:r>
             <a:r>
-              <a:rPr sz="1400">
+              <a:rPr sz="1700">
                 <a:solidFill>
                   <a:srgbClr val="FBFCFD"/>
                 </a:solidFill>
@@ -29425,7 +29425,7 @@
               <a:t> </a:t>
             </a:r>
             <a:r>
-              <a:rPr sz="1300">
+              <a:rPr sz="1600">
                 <a:solidFill>
                   <a:srgbClr val="7FDBFF"/>
                 </a:solidFill>
@@ -29434,7 +29434,7 @@
               <a:t>pandas.read_csv</a:t>
             </a:r>
             <a:r>
-              <a:rPr sz="1400">
+              <a:rPr sz="1700">
                 <a:solidFill>
                   <a:srgbClr val="FBFCFD"/>
                 </a:solidFill>
@@ -29445,18 +29445,18 @@
           <a:p>
             <a:pPr algn="l">
               <a:lnSpc>
-                <a:spcPct val="108000"/>
+                <a:spcPct val="110000"/>
               </a:lnSpc>
             </a:pPr>
           </a:p>
           <a:p>
             <a:pPr algn="l">
               <a:lnSpc>
-                <a:spcPct val="108000"/>
+                <a:spcPct val="110000"/>
               </a:lnSpc>
             </a:pPr>
             <a:r>
-              <a:rPr sz="1400">
+              <a:rPr sz="1700">
                 <a:solidFill>
                   <a:srgbClr val="FBFCFD"/>
                 </a:solidFill>
@@ -29464,7 +29464,7 @@
               <a:t>• </a:t>
             </a:r>
             <a:r>
-              <a:rPr sz="1400" b="1">
+              <a:rPr sz="1700" b="1">
                 <a:solidFill>
                   <a:srgbClr val="FBFCFD"/>
                 </a:solidFill>
@@ -29472,7 +29472,7 @@
               <a:t>Datos centinela:</a:t>
             </a:r>
             <a:r>
-              <a:rPr sz="1400">
+              <a:rPr sz="1700">
                 <a:solidFill>
                   <a:srgbClr val="FBFCFD"/>
                 </a:solidFill>
@@ -29480,7 +29480,7 @@
               <a:t> los faltantes vienen codificados como </a:t>
             </a:r>
             <a:r>
-              <a:rPr sz="1400" b="1">
+              <a:rPr sz="1700" b="1">
                 <a:solidFill>
                   <a:srgbClr val="FBFCFD"/>
                 </a:solidFill>
@@ -29488,7 +29488,7 @@
               <a:t>−9999</a:t>
             </a:r>
             <a:r>
-              <a:rPr sz="1400">
+              <a:rPr sz="1700">
                 <a:solidFill>
                   <a:srgbClr val="FBFCFD"/>
                 </a:solidFill>
@@ -29628,8 +29628,8 @@
         </p:nvSpPr>
         <p:spPr>
           <a:xfrm>
-            <a:off x="6434175" y="1773936"/>
-            <a:ext cx="5190591" cy="4233672"/>
+            <a:off x="6434175" y="1828800"/>
+            <a:ext cx="5190591" cy="4178808"/>
           </a:xfrm>
           <a:prstGeom prst="rect">
             <a:avLst/>
@@ -29644,11 +29644,11 @@
           <a:p>
             <a:pPr algn="l">
               <a:lnSpc>
-                <a:spcPct val="108000"/>
+                <a:spcPct val="110000"/>
               </a:lnSpc>
             </a:pPr>
             <a:r>
-              <a:rPr sz="1400">
+              <a:rPr sz="1700">
                 <a:solidFill>
                   <a:srgbClr val="FBFCFD"/>
                 </a:solidFill>
@@ -29656,7 +29656,7 @@
               <a:t>• </a:t>
             </a:r>
             <a:r>
-              <a:rPr sz="1400" b="1">
+              <a:rPr sz="1700" b="1">
                 <a:solidFill>
                   <a:srgbClr val="FBFCFD"/>
                 </a:solidFill>
@@ -29664,7 +29664,7 @@
               <a:t>Lectura línea a línea</a:t>
             </a:r>
             <a:r>
-              <a:rPr sz="1400">
+              <a:rPr sz="1700">
                 <a:solidFill>
                   <a:srgbClr val="FBFCFD"/>
                 </a:solidFill>
@@ -29672,7 +29672,7 @@
               <a:t> con el módulo </a:t>
             </a:r>
             <a:r>
-              <a:rPr sz="1300">
+              <a:rPr sz="1600">
                 <a:solidFill>
                   <a:srgbClr val="7FDBFF"/>
                 </a:solidFill>
@@ -29681,7 +29681,7 @@
               <a:t>csv</a:t>
             </a:r>
             <a:r>
-              <a:rPr sz="1400">
+              <a:rPr sz="1700">
                 <a:solidFill>
                   <a:srgbClr val="FBFCFD"/>
                 </a:solidFill>
@@ -29689,7 +29689,7 @@
               <a:t> nativo: se indexan solo las </a:t>
             </a:r>
             <a:r>
-              <a:rPr sz="1400" b="1">
+              <a:rPr sz="1700" b="1">
                 <a:solidFill>
                   <a:srgbClr val="FBFCFD"/>
                 </a:solidFill>
@@ -29697,7 +29697,7 @@
               <a:t>11 columnas clave por posición fija</a:t>
             </a:r>
             <a:r>
-              <a:rPr sz="1400">
+              <a:rPr sz="1700">
                 <a:solidFill>
                   <a:srgbClr val="FBFCFD"/>
                 </a:solidFill>
@@ -29708,18 +29708,18 @@
           <a:p>
             <a:pPr algn="l">
               <a:lnSpc>
-                <a:spcPct val="108000"/>
+                <a:spcPct val="110000"/>
               </a:lnSpc>
             </a:pPr>
           </a:p>
           <a:p>
             <a:pPr algn="l">
               <a:lnSpc>
-                <a:spcPct val="108000"/>
+                <a:spcPct val="110000"/>
               </a:lnSpc>
             </a:pPr>
             <a:r>
-              <a:rPr sz="1400">
+              <a:rPr sz="1700">
                 <a:solidFill>
                   <a:srgbClr val="FBFCFD"/>
                 </a:solidFill>
@@ -29727,7 +29727,7 @@
               <a:t>• </a:t>
             </a:r>
             <a:r>
-              <a:rPr sz="1400" b="1">
+              <a:rPr sz="1700" b="1">
                 <a:solidFill>
                   <a:srgbClr val="FBFCFD"/>
                 </a:solidFill>
@@ -29735,7 +29735,7 @@
               <a:t>Limpieza:</a:t>
             </a:r>
             <a:r>
-              <a:rPr sz="1400">
+              <a:rPr sz="1700">
                 <a:solidFill>
                   <a:srgbClr val="FBFCFD"/>
                 </a:solidFill>
@@ -29743,7 +29743,7 @@
               <a:t> </a:t>
             </a:r>
             <a:r>
-              <a:rPr sz="1300">
+              <a:rPr sz="1600">
                 <a:solidFill>
                   <a:srgbClr val="7FDBFF"/>
                 </a:solidFill>
@@ -29752,7 +29752,7 @@
               <a:t>-9999 → NaN</a:t>
             </a:r>
             <a:r>
-              <a:rPr sz="1400">
+              <a:rPr sz="1700">
                 <a:solidFill>
                   <a:srgbClr val="FBFCFD"/>
                 </a:solidFill>
@@ -29760,7 +29760,7 @@
               <a:t>, </a:t>
             </a:r>
             <a:r>
-              <a:rPr sz="1300">
+              <a:rPr sz="1600">
                 <a:solidFill>
                   <a:srgbClr val="7FDBFF"/>
                 </a:solidFill>
@@ -29769,7 +29769,7 @@
               <a:t>dropna</a:t>
             </a:r>
             <a:r>
-              <a:rPr sz="1400">
+              <a:rPr sz="1700">
                 <a:solidFill>
                   <a:srgbClr val="FBFCFD"/>
                 </a:solidFill>
@@ -29777,7 +29777,7 @@
               <a:t> sobre GHI/DNI/DHI/T_air y </a:t>
             </a:r>
             <a:r>
-              <a:rPr sz="1300">
+              <a:rPr sz="1600">
                 <a:solidFill>
                   <a:srgbClr val="7FDBFF"/>
                 </a:solidFill>
@@ -29786,7 +29786,7 @@
               <a:t>clip(≥0)</a:t>
             </a:r>
             <a:r>
-              <a:rPr sz="1400">
+              <a:rPr sz="1700">
                 <a:solidFill>
                   <a:srgbClr val="FBFCFD"/>
                 </a:solidFill>
@@ -29797,18 +29797,18 @@
           <a:p>
             <a:pPr algn="l">
               <a:lnSpc>
-                <a:spcPct val="108000"/>
+                <a:spcPct val="110000"/>
               </a:lnSpc>
             </a:pPr>
           </a:p>
           <a:p>
             <a:pPr algn="l">
               <a:lnSpc>
-                <a:spcPct val="108000"/>
+                <a:spcPct val="110000"/>
               </a:lnSpc>
             </a:pPr>
             <a:r>
-              <a:rPr sz="1400">
+              <a:rPr sz="1700">
                 <a:solidFill>
                   <a:srgbClr val="FBFCFD"/>
                 </a:solidFill>
@@ -29816,7 +29816,7 @@
               <a:t>• </a:t>
             </a:r>
             <a:r>
-              <a:rPr sz="1400" b="1">
+              <a:rPr sz="1700" b="1">
                 <a:solidFill>
                   <a:srgbClr val="FBFCFD"/>
                 </a:solidFill>
@@ -29824,7 +29824,7 @@
               <a:t>Resultado:</a:t>
             </a:r>
             <a:r>
-              <a:rPr sz="1400">
+              <a:rPr sz="1700">
                 <a:solidFill>
                   <a:srgbClr val="FBFCFD"/>
                 </a:solidFill>
@@ -29835,18 +29835,18 @@
           <a:p>
             <a:pPr algn="l">
               <a:lnSpc>
-                <a:spcPct val="108000"/>
+                <a:spcPct val="110000"/>
               </a:lnSpc>
             </a:pPr>
           </a:p>
           <a:p>
             <a:pPr algn="l">
               <a:lnSpc>
-                <a:spcPct val="108000"/>
+                <a:spcPct val="110000"/>
               </a:lnSpc>
             </a:pPr>
             <a:r>
-              <a:rPr sz="1400">
+              <a:rPr sz="1700">
                 <a:solidFill>
                   <a:srgbClr val="FBFCFD"/>
                 </a:solidFill>

--- a/output/Presentacion_Final_ELI556_Atacama_POA_Tarea2_revisado.pptx
+++ b/output/Presentacion_Final_ELI556_Atacama_POA_Tarea2_revisado.pptx
@@ -4558,8 +4558,8 @@
         </p:nvSpPr>
         <p:spPr>
           <a:xfrm>
-            <a:off x="365760" y="5349240"/>
-            <a:ext cx="11460175" cy="914400"/>
+            <a:off x="365760" y="5257800"/>
+            <a:ext cx="11460175" cy="1097280"/>
           </a:xfrm>
           <a:prstGeom prst="rect">
             <a:avLst/>
@@ -4603,8 +4603,8 @@
         </p:nvSpPr>
         <p:spPr>
           <a:xfrm>
-            <a:off x="548640" y="5422392"/>
-            <a:ext cx="11094415" cy="768096"/>
+            <a:off x="548640" y="5294376"/>
+            <a:ext cx="11094415" cy="1024127"/>
           </a:xfrm>
           <a:prstGeom prst="rect">
             <a:avLst/>
@@ -4612,7 +4612,7 @@
           <a:noFill/>
         </p:spPr>
         <p:txBody>
-          <a:bodyPr wrap="square">
+          <a:bodyPr wrap="square" lIns="0" rIns="0" tIns="0" bIns="0">
             <a:spAutoFit/>
           </a:bodyPr>
           <a:lstStyle/>
@@ -4880,8 +4880,8 @@
         </p:nvSpPr>
         <p:spPr>
           <a:xfrm>
-            <a:off x="365760" y="5303520"/>
-            <a:ext cx="11460175" cy="1097280"/>
+            <a:off x="365760" y="5212080"/>
+            <a:ext cx="11460175" cy="1234440"/>
           </a:xfrm>
           <a:prstGeom prst="rect">
             <a:avLst/>
@@ -4925,8 +4925,8 @@
         </p:nvSpPr>
         <p:spPr>
           <a:xfrm>
-            <a:off x="548640" y="5376672"/>
-            <a:ext cx="11094415" cy="950976"/>
+            <a:off x="548640" y="5248656"/>
+            <a:ext cx="11094415" cy="1161288"/>
           </a:xfrm>
           <a:prstGeom prst="rect">
             <a:avLst/>
@@ -4934,7 +4934,7 @@
           <a:noFill/>
         </p:spPr>
         <p:txBody>
-          <a:bodyPr wrap="square">
+          <a:bodyPr wrap="square" lIns="0" rIns="0" tIns="0" bIns="0">
             <a:spAutoFit/>
           </a:bodyPr>
           <a:lstStyle/>
@@ -6386,8 +6386,8 @@
         </p:nvSpPr>
         <p:spPr>
           <a:xfrm>
-            <a:off x="365760" y="5303520"/>
-            <a:ext cx="11460175" cy="1097280"/>
+            <a:off x="365760" y="5212080"/>
+            <a:ext cx="11460175" cy="1234440"/>
           </a:xfrm>
           <a:prstGeom prst="rect">
             <a:avLst/>
@@ -6431,8 +6431,8 @@
         </p:nvSpPr>
         <p:spPr>
           <a:xfrm>
-            <a:off x="548640" y="5376672"/>
-            <a:ext cx="11094415" cy="950976"/>
+            <a:off x="548640" y="5248656"/>
+            <a:ext cx="11094415" cy="1161288"/>
           </a:xfrm>
           <a:prstGeom prst="rect">
             <a:avLst/>
@@ -6440,7 +6440,7 @@
           <a:noFill/>
         </p:spPr>
         <p:txBody>
-          <a:bodyPr wrap="square">
+          <a:bodyPr wrap="square" lIns="0" rIns="0" tIns="0" bIns="0">
             <a:spAutoFit/>
           </a:bodyPr>
           <a:lstStyle/>
@@ -6692,8 +6692,8 @@
         </p:nvSpPr>
         <p:spPr>
           <a:xfrm>
-            <a:off x="365760" y="5303520"/>
-            <a:ext cx="11460175" cy="1097280"/>
+            <a:off x="365760" y="5212080"/>
+            <a:ext cx="11460175" cy="1234440"/>
           </a:xfrm>
           <a:prstGeom prst="rect">
             <a:avLst/>
@@ -6737,8 +6737,8 @@
         </p:nvSpPr>
         <p:spPr>
           <a:xfrm>
-            <a:off x="548640" y="5376672"/>
-            <a:ext cx="11094415" cy="950976"/>
+            <a:off x="548640" y="5248656"/>
+            <a:ext cx="11094415" cy="1161288"/>
           </a:xfrm>
           <a:prstGeom prst="rect">
             <a:avLst/>
@@ -6746,7 +6746,7 @@
           <a:noFill/>
         </p:spPr>
         <p:txBody>
-          <a:bodyPr wrap="square">
+          <a:bodyPr wrap="square" lIns="0" rIns="0" tIns="0" bIns="0">
             <a:spAutoFit/>
           </a:bodyPr>
           <a:lstStyle/>
@@ -8571,8 +8571,8 @@
         </p:nvSpPr>
         <p:spPr>
           <a:xfrm>
-            <a:off x="365760" y="5303520"/>
-            <a:ext cx="11460175" cy="1097280"/>
+            <a:off x="365760" y="5212080"/>
+            <a:ext cx="11460175" cy="1234440"/>
           </a:xfrm>
           <a:prstGeom prst="rect">
             <a:avLst/>
@@ -8616,8 +8616,8 @@
         </p:nvSpPr>
         <p:spPr>
           <a:xfrm>
-            <a:off x="548640" y="5376672"/>
-            <a:ext cx="11094415" cy="950976"/>
+            <a:off x="548640" y="5248656"/>
+            <a:ext cx="11094415" cy="1161288"/>
           </a:xfrm>
           <a:prstGeom prst="rect">
             <a:avLst/>
@@ -8625,7 +8625,7 @@
           <a:noFill/>
         </p:spPr>
         <p:txBody>
-          <a:bodyPr wrap="square">
+          <a:bodyPr wrap="square" lIns="0" rIns="0" tIns="0" bIns="0">
             <a:spAutoFit/>
           </a:bodyPr>
           <a:lstStyle/>
@@ -19470,8 +19470,8 @@
         </p:nvSpPr>
         <p:spPr>
           <a:xfrm>
-            <a:off x="365760" y="5532120"/>
-            <a:ext cx="11460175" cy="868680"/>
+            <a:off x="365760" y="5440680"/>
+            <a:ext cx="11460175" cy="1005840"/>
           </a:xfrm>
           <a:prstGeom prst="rect">
             <a:avLst/>
@@ -19515,8 +19515,8 @@
         </p:nvSpPr>
         <p:spPr>
           <a:xfrm>
-            <a:off x="548640" y="5605272"/>
-            <a:ext cx="11094415" cy="722375"/>
+            <a:off x="548640" y="5477256"/>
+            <a:ext cx="11094415" cy="932688"/>
           </a:xfrm>
           <a:prstGeom prst="rect">
             <a:avLst/>
@@ -19524,7 +19524,7 @@
           <a:noFill/>
         </p:spPr>
         <p:txBody>
-          <a:bodyPr wrap="square">
+          <a:bodyPr wrap="square" lIns="0" rIns="0" tIns="0" bIns="0">
             <a:spAutoFit/>
           </a:bodyPr>
           <a:lstStyle/>
@@ -26601,8 +26601,8 @@
         </p:nvSpPr>
         <p:spPr>
           <a:xfrm>
-            <a:off x="365760" y="5349240"/>
-            <a:ext cx="11460175" cy="1051560"/>
+            <a:off x="365760" y="5257800"/>
+            <a:ext cx="11460175" cy="1188720"/>
           </a:xfrm>
           <a:prstGeom prst="rect">
             <a:avLst/>
@@ -26646,8 +26646,8 @@
         </p:nvSpPr>
         <p:spPr>
           <a:xfrm>
-            <a:off x="548640" y="5422392"/>
-            <a:ext cx="11094415" cy="905255"/>
+            <a:off x="548640" y="5294376"/>
+            <a:ext cx="11094415" cy="1115568"/>
           </a:xfrm>
           <a:prstGeom prst="rect">
             <a:avLst/>
@@ -26655,7 +26655,7 @@
           <a:noFill/>
         </p:spPr>
         <p:txBody>
-          <a:bodyPr wrap="square">
+          <a:bodyPr wrap="square" lIns="0" rIns="0" tIns="0" bIns="0">
             <a:spAutoFit/>
           </a:bodyPr>
           <a:lstStyle/>
@@ -28923,8 +28923,8 @@
         </p:nvSpPr>
         <p:spPr>
           <a:xfrm>
-            <a:off x="365760" y="5349240"/>
-            <a:ext cx="11460175" cy="1051560"/>
+            <a:off x="365760" y="5257800"/>
+            <a:ext cx="11460175" cy="1188720"/>
           </a:xfrm>
           <a:prstGeom prst="rect">
             <a:avLst/>
@@ -28968,8 +28968,8 @@
         </p:nvSpPr>
         <p:spPr>
           <a:xfrm>
-            <a:off x="548640" y="5422392"/>
-            <a:ext cx="11094415" cy="905255"/>
+            <a:off x="548640" y="5294376"/>
+            <a:ext cx="11094415" cy="1115568"/>
           </a:xfrm>
           <a:prstGeom prst="rect">
             <a:avLst/>
@@ -28977,7 +28977,7 @@
           <a:noFill/>
         </p:spPr>
         <p:txBody>
-          <a:bodyPr wrap="square">
+          <a:bodyPr wrap="square" lIns="0" rIns="0" tIns="0" bIns="0">
             <a:spAutoFit/>
           </a:bodyPr>
           <a:lstStyle/>

--- a/output/Presentacion_Final_ELI556_Atacama_POA_Tarea2_revisado.pptx
+++ b/output/Presentacion_Final_ELI556_Atacama_POA_Tarea2_revisado.pptx
@@ -28907,7 +28907,7 @@
         </p:blipFill>
         <p:spPr>
           <a:xfrm>
-            <a:off x="380847" y="1188720"/>
+            <a:off x="380847" y="1097280"/>
             <a:ext cx="11430000" cy="4019340"/>
           </a:xfrm>
           <a:prstGeom prst="rect">
@@ -28923,8 +28923,8 @@
         </p:nvSpPr>
         <p:spPr>
           <a:xfrm>
-            <a:off x="365760" y="5257800"/>
-            <a:ext cx="11460175" cy="1188720"/>
+            <a:off x="365760" y="5212080"/>
+            <a:ext cx="11460175" cy="1234440"/>
           </a:xfrm>
           <a:prstGeom prst="rect">
             <a:avLst/>
@@ -28968,8 +28968,8 @@
         </p:nvSpPr>
         <p:spPr>
           <a:xfrm>
-            <a:off x="548640" y="5294376"/>
-            <a:ext cx="11094415" cy="1115568"/>
+            <a:off x="548640" y="5248656"/>
+            <a:ext cx="11094415" cy="1161288"/>
           </a:xfrm>
           <a:prstGeom prst="rect">
             <a:avLst/>

--- a/output/Presentacion_Final_ELI556_Atacama_POA_Tarea2_revisado.pptx
+++ b/output/Presentacion_Final_ELI556_Atacama_POA_Tarea2_revisado.pptx
@@ -29197,16 +29197,40 @@
           </a:p>
         </p:txBody>
       </p:sp>
-      <p:sp>
-        <p:nvSpPr>
-          <p:cNvPr id="5" name="Rectangle 4"/>
+      <p:pic>
+        <p:nvPicPr>
+          <p:cNvPr id="5" name="Picture 4" descr="ingesta_limpieza.png"/>
+          <p:cNvPicPr>
+            <a:picLocks noChangeAspect="1"/>
+          </p:cNvPicPr>
+          <p:nvPr/>
+        </p:nvPicPr>
+        <p:blipFill>
+          <a:blip r:embed="rId2"/>
+          <a:stretch>
+            <a:fillRect/>
+          </a:stretch>
+        </p:blipFill>
+        <p:spPr>
+          <a:xfrm>
+            <a:off x="380847" y="1097280"/>
+            <a:ext cx="11430000" cy="4019340"/>
+          </a:xfrm>
+          <a:prstGeom prst="rect">
+            <a:avLst/>
+          </a:prstGeom>
+        </p:spPr>
+      </p:pic>
+      <p:sp>
+        <p:nvSpPr>
+          <p:cNvPr id="6" name="Rectangle 5"/>
           <p:cNvSpPr/>
           <p:nvPr/>
         </p:nvSpPr>
         <p:spPr>
           <a:xfrm>
-            <a:off x="365760" y="1188720"/>
-            <a:ext cx="5592927" cy="4983480"/>
+            <a:off x="365760" y="5212080"/>
+            <a:ext cx="11460175" cy="1234440"/>
           </a:xfrm>
           <a:prstGeom prst="rect">
             <a:avLst/>
@@ -29216,7 +29240,7 @@
           </a:solidFill>
           <a:ln w="12700">
             <a:solidFill>
-              <a:srgbClr val="FF5E3A"/>
+              <a:srgbClr val="F1C40F"/>
             </a:solidFill>
           </a:ln>
         </p:spPr>
@@ -29244,57 +29268,14 @@
       </p:sp>
       <p:sp>
         <p:nvSpPr>
-          <p:cNvPr id="6" name="Rectangle 5"/>
-          <p:cNvSpPr/>
-          <p:nvPr/>
-        </p:nvSpPr>
-        <p:spPr>
-          <a:xfrm>
-            <a:off x="365760" y="1188720"/>
-            <a:ext cx="73152" cy="4983480"/>
-          </a:xfrm>
-          <a:prstGeom prst="rect">
-            <a:avLst/>
-          </a:prstGeom>
-          <a:solidFill>
-            <a:srgbClr val="FF5E3A"/>
-          </a:solidFill>
-          <a:ln>
-            <a:noFill/>
-          </a:ln>
-        </p:spPr>
-        <p:style>
-          <a:lnRef idx="1">
-            <a:schemeClr val="accent1"/>
-          </a:lnRef>
-          <a:fillRef idx="3">
-            <a:schemeClr val="accent1"/>
-          </a:fillRef>
-          <a:effectRef idx="2">
-            <a:schemeClr val="accent1"/>
-          </a:effectRef>
-          <a:fontRef idx="minor">
-            <a:schemeClr val="lt1"/>
-          </a:fontRef>
-        </p:style>
-        <p:txBody>
-          <a:bodyPr rtlCol="0" anchor="ctr"/>
-          <a:lstStyle/>
-          <a:p>
-            <a:pPr algn="ctr"/>
-          </a:p>
-        </p:txBody>
-      </p:sp>
-      <p:sp>
-        <p:nvSpPr>
           <p:cNvPr id="7" name="TextBox 6"/>
           <p:cNvSpPr txBox="1"/>
           <p:nvPr/>
         </p:nvSpPr>
         <p:spPr>
           <a:xfrm>
-            <a:off x="530352" y="1280160"/>
-            <a:ext cx="5318607" cy="411480"/>
+            <a:off x="548640" y="5248656"/>
+            <a:ext cx="11094415" cy="1161288"/>
           </a:xfrm>
           <a:prstGeom prst="rect">
             <a:avLst/>
@@ -29302,130 +29283,34 @@
           <a:noFill/>
         </p:spPr>
         <p:txBody>
-          <a:bodyPr wrap="none">
+          <a:bodyPr wrap="square" lIns="0" rIns="0" tIns="0" bIns="0">
             <a:spAutoFit/>
           </a:bodyPr>
           <a:lstStyle/>
           <a:p>
-            <a:pPr algn="l"/>
-            <a:r>
-              <a:rPr sz="1800" b="1">
-                <a:solidFill>
-                  <a:srgbClr val="F1C40F"/>
-                </a:solidFill>
-              </a:rPr>
-              <a:t>El Desafío: archivos irregulares de ~110 MB</a:t>
-            </a:r>
-          </a:p>
-        </p:txBody>
-      </p:sp>
-      <p:sp>
-        <p:nvSpPr>
-          <p:cNvPr id="8" name="TextBox 7"/>
-          <p:cNvSpPr txBox="1"/>
-          <p:nvPr/>
-        </p:nvSpPr>
-        <p:spPr>
-          <a:xfrm>
-            <a:off x="566928" y="1828800"/>
-            <a:ext cx="5190591" cy="4178808"/>
-          </a:xfrm>
-          <a:prstGeom prst="rect">
-            <a:avLst/>
-          </a:prstGeom>
-          <a:noFill/>
-        </p:spPr>
-        <p:txBody>
-          <a:bodyPr wrap="square">
-            <a:spAutoFit/>
-          </a:bodyPr>
-          <a:lstStyle/>
-          <a:p>
             <a:pPr algn="l">
               <a:lnSpc>
-                <a:spcPct val="110000"/>
+                <a:spcPct val="108000"/>
               </a:lnSpc>
             </a:pPr>
             <a:r>
-              <a:rPr sz="1700">
-                <a:solidFill>
-                  <a:srgbClr val="FBFCFD"/>
-                </a:solidFill>
-              </a:rPr>
-              <a:t>• </a:t>
-            </a:r>
-            <a:r>
-              <a:rPr sz="1700" b="1">
-                <a:solidFill>
-                  <a:srgbClr val="FBFCFD"/>
-                </a:solidFill>
-              </a:rPr>
-              <a:t>Naturaleza de los datos:</a:t>
-            </a:r>
-            <a:r>
-              <a:rPr sz="1700">
-                <a:solidFill>
-                  <a:srgbClr val="FBFCFD"/>
-                </a:solidFill>
-              </a:rPr>
-              <a:t> cada fila contiene 43 columnas fijas + </a:t>
-            </a:r>
-            <a:r>
-              <a:rPr sz="1700" b="1">
-                <a:solidFill>
-                  <a:srgbClr val="FBFCFD"/>
-                </a:solidFill>
-              </a:rPr>
-              <a:t>n pares (I, V) crudos</a:t>
-            </a:r>
-            <a:r>
-              <a:rPr sz="1700">
-                <a:solidFill>
-                  <a:srgbClr val="FBFCFD"/>
-                </a:solidFill>
-              </a:rPr>
-              <a:t> de la curva trazada (n ≈ 180–380) → filas de longitud variable.</a:t>
-            </a:r>
-          </a:p>
-          <a:p>
-            <a:pPr algn="l">
-              <a:lnSpc>
-                <a:spcPct val="110000"/>
-              </a:lnSpc>
-            </a:pPr>
-          </a:p>
-          <a:p>
-            <a:pPr algn="l">
-              <a:lnSpc>
-                <a:spcPct val="110000"/>
-              </a:lnSpc>
-            </a:pPr>
-            <a:r>
-              <a:rPr sz="1700">
-                <a:solidFill>
-                  <a:srgbClr val="FBFCFD"/>
-                </a:solidFill>
-              </a:rPr>
-              <a:t>• </a:t>
-            </a:r>
-            <a:r>
-              <a:rPr sz="1700" b="1">
-                <a:solidFill>
-                  <a:srgbClr val="FBFCFD"/>
-                </a:solidFill>
-              </a:rPr>
-              <a:t>Falla del método estándar:</a:t>
-            </a:r>
-            <a:r>
-              <a:rPr sz="1700">
-                <a:solidFill>
-                  <a:srgbClr val="FBFCFD"/>
-                </a:solidFill>
-              </a:rPr>
-              <a:t> </a:t>
-            </a:r>
-            <a:r>
-              <a:rPr sz="1600">
+              <a:rPr sz="1750" b="1">
+                <a:solidFill>
+                  <a:srgbClr val="FBFCFD"/>
+                </a:solidFill>
+              </a:rPr>
+              <a:t>Proceso de ingesta y depuración:</a:t>
+            </a:r>
+            <a:r>
+              <a:rPr sz="1750">
+                <a:solidFill>
+                  <a:srgbClr val="FBFCFD"/>
+                </a:solidFill>
+              </a:rPr>
+              <a:t> El gran volumen de datos (~110 MB por archivo) y el ancho de fila variable debido a la cola de curvas I-V impiden el uso de métodos convencionales como </a:t>
+            </a:r>
+            <a:r>
+              <a:rPr sz="1650">
                 <a:solidFill>
                   <a:srgbClr val="7FDBFF"/>
                 </a:solidFill>
@@ -29434,431 +29319,53 @@
               <a:t>pandas.read_csv</a:t>
             </a:r>
             <a:r>
-              <a:rPr sz="1700">
-                <a:solidFill>
-                  <a:srgbClr val="FBFCFD"/>
-                </a:solidFill>
-              </a:rPr>
-              <a:t> no tolera el ancho variable (infiere mal el esquema) y carga ~110 MB por módulo a memoria innecesariamente.</a:t>
-            </a:r>
-          </a:p>
-          <a:p>
-            <a:pPr algn="l">
-              <a:lnSpc>
-                <a:spcPct val="110000"/>
-              </a:lnSpc>
-            </a:pPr>
-          </a:p>
-          <a:p>
-            <a:pPr algn="l">
-              <a:lnSpc>
-                <a:spcPct val="110000"/>
-              </a:lnSpc>
-            </a:pPr>
-            <a:r>
-              <a:rPr sz="1700">
-                <a:solidFill>
-                  <a:srgbClr val="FBFCFD"/>
-                </a:solidFill>
-              </a:rPr>
-              <a:t>• </a:t>
-            </a:r>
-            <a:r>
-              <a:rPr sz="1700" b="1">
-                <a:solidFill>
-                  <a:srgbClr val="FBFCFD"/>
-                </a:solidFill>
-              </a:rPr>
-              <a:t>Datos centinela:</a:t>
-            </a:r>
-            <a:r>
-              <a:rPr sz="1700">
-                <a:solidFill>
-                  <a:srgbClr val="FBFCFD"/>
-                </a:solidFill>
-              </a:rPr>
-              <a:t> los faltantes vienen codificados como </a:t>
-            </a:r>
-            <a:r>
-              <a:rPr sz="1700" b="1">
-                <a:solidFill>
-                  <a:srgbClr val="FBFCFD"/>
-                </a:solidFill>
-              </a:rPr>
-              <a:t>−9999</a:t>
-            </a:r>
-            <a:r>
-              <a:rPr sz="1700">
-                <a:solidFill>
-                  <a:srgbClr val="FBFCFD"/>
-                </a:solidFill>
-              </a:rPr>
-              <a:t>, que contaminan promedios y regresiones si no se neutralizan.</a:t>
-            </a:r>
-          </a:p>
-        </p:txBody>
-      </p:sp>
-      <p:sp>
-        <p:nvSpPr>
-          <p:cNvPr id="9" name="Rectangle 8"/>
-          <p:cNvSpPr/>
-          <p:nvPr/>
-        </p:nvSpPr>
-        <p:spPr>
-          <a:xfrm>
-            <a:off x="6233007" y="1188720"/>
-            <a:ext cx="5592927" cy="4983480"/>
-          </a:xfrm>
-          <a:prstGeom prst="rect">
-            <a:avLst/>
-          </a:prstGeom>
-          <a:solidFill>
-            <a:srgbClr val="1F2833"/>
-          </a:solidFill>
-          <a:ln w="12700">
-            <a:solidFill>
-              <a:srgbClr val="00D2FF"/>
-            </a:solidFill>
-          </a:ln>
-        </p:spPr>
-        <p:style>
-          <a:lnRef idx="1">
-            <a:schemeClr val="accent1"/>
-          </a:lnRef>
-          <a:fillRef idx="3">
-            <a:schemeClr val="accent1"/>
-          </a:fillRef>
-          <a:effectRef idx="2">
-            <a:schemeClr val="accent1"/>
-          </a:effectRef>
-          <a:fontRef idx="minor">
-            <a:schemeClr val="lt1"/>
-          </a:fontRef>
-        </p:style>
-        <p:txBody>
-          <a:bodyPr rtlCol="0" anchor="ctr"/>
-          <a:lstStyle/>
-          <a:p>
-            <a:pPr algn="ctr"/>
-          </a:p>
-        </p:txBody>
-      </p:sp>
-      <p:sp>
-        <p:nvSpPr>
-          <p:cNvPr id="10" name="Rectangle 9"/>
-          <p:cNvSpPr/>
-          <p:nvPr/>
-        </p:nvSpPr>
-        <p:spPr>
-          <a:xfrm>
-            <a:off x="6233007" y="1188720"/>
-            <a:ext cx="73152" cy="4983480"/>
-          </a:xfrm>
-          <a:prstGeom prst="rect">
-            <a:avLst/>
-          </a:prstGeom>
-          <a:solidFill>
-            <a:srgbClr val="00D2FF"/>
-          </a:solidFill>
-          <a:ln>
-            <a:noFill/>
-          </a:ln>
-        </p:spPr>
-        <p:style>
-          <a:lnRef idx="1">
-            <a:schemeClr val="accent1"/>
-          </a:lnRef>
-          <a:fillRef idx="3">
-            <a:schemeClr val="accent1"/>
-          </a:fillRef>
-          <a:effectRef idx="2">
-            <a:schemeClr val="accent1"/>
-          </a:effectRef>
-          <a:fontRef idx="minor">
-            <a:schemeClr val="lt1"/>
-          </a:fontRef>
-        </p:style>
-        <p:txBody>
-          <a:bodyPr rtlCol="0" anchor="ctr"/>
-          <a:lstStyle/>
-          <a:p>
-            <a:pPr algn="ctr"/>
-          </a:p>
-        </p:txBody>
-      </p:sp>
-      <p:sp>
-        <p:nvSpPr>
-          <p:cNvPr id="11" name="TextBox 10"/>
-          <p:cNvSpPr txBox="1"/>
-          <p:nvPr/>
-        </p:nvSpPr>
-        <p:spPr>
-          <a:xfrm>
-            <a:off x="6397599" y="1280160"/>
-            <a:ext cx="5318607" cy="411480"/>
-          </a:xfrm>
-          <a:prstGeom prst="rect">
-            <a:avLst/>
-          </a:prstGeom>
-          <a:noFill/>
-        </p:spPr>
-        <p:txBody>
-          <a:bodyPr wrap="none">
-            <a:spAutoFit/>
-          </a:bodyPr>
-          <a:lstStyle/>
-          <a:p>
-            <a:pPr algn="l"/>
-            <a:r>
-              <a:rPr sz="1800" b="1">
-                <a:solidFill>
-                  <a:srgbClr val="F1C40F"/>
-                </a:solidFill>
-              </a:rPr>
-              <a:t>La Solución: lector en streaming (Fase 2)</a:t>
-            </a:r>
-          </a:p>
-        </p:txBody>
-      </p:sp>
-      <p:sp>
-        <p:nvSpPr>
-          <p:cNvPr id="12" name="TextBox 11"/>
-          <p:cNvSpPr txBox="1"/>
-          <p:nvPr/>
-        </p:nvSpPr>
-        <p:spPr>
-          <a:xfrm>
-            <a:off x="6434175" y="1828800"/>
-            <a:ext cx="5190591" cy="4178808"/>
-          </a:xfrm>
-          <a:prstGeom prst="rect">
-            <a:avLst/>
-          </a:prstGeom>
-          <a:noFill/>
-        </p:spPr>
-        <p:txBody>
-          <a:bodyPr wrap="square">
-            <a:spAutoFit/>
-          </a:bodyPr>
-          <a:lstStyle/>
-          <a:p>
-            <a:pPr algn="l">
-              <a:lnSpc>
-                <a:spcPct val="110000"/>
-              </a:lnSpc>
-            </a:pPr>
-            <a:r>
-              <a:rPr sz="1700">
-                <a:solidFill>
-                  <a:srgbClr val="FBFCFD"/>
-                </a:solidFill>
-              </a:rPr>
-              <a:t>• </a:t>
-            </a:r>
-            <a:r>
-              <a:rPr sz="1700" b="1">
-                <a:solidFill>
-                  <a:srgbClr val="FBFCFD"/>
-                </a:solidFill>
-              </a:rPr>
-              <a:t>Lectura línea a línea</a:t>
-            </a:r>
-            <a:r>
-              <a:rPr sz="1700">
-                <a:solidFill>
-                  <a:srgbClr val="FBFCFD"/>
-                </a:solidFill>
-              </a:rPr>
-              <a:t> con el módulo </a:t>
-            </a:r>
-            <a:r>
-              <a:rPr sz="1600">
+              <a:rPr sz="1750">
+                <a:solidFill>
+                  <a:srgbClr val="FBFCFD"/>
+                </a:solidFill>
+              </a:rPr>
+              <a:t>. El pipeline implementa un lector en flujo (streaming) nativo que indexa selectivamente solo las 11 variables útiles. Posteriormente, se reemplazan los valores centinela </a:t>
+            </a:r>
+            <a:r>
+              <a:rPr sz="1650">
                 <a:solidFill>
                   <a:srgbClr val="7FDBFF"/>
                 </a:solidFill>
                 <a:latin typeface="Consolas"/>
               </a:rPr>
-              <a:t>csv</a:t>
-            </a:r>
-            <a:r>
-              <a:rPr sz="1700">
-                <a:solidFill>
-                  <a:srgbClr val="FBFCFD"/>
-                </a:solidFill>
-              </a:rPr>
-              <a:t> nativo: se indexan solo las </a:t>
-            </a:r>
-            <a:r>
-              <a:rPr sz="1700" b="1">
-                <a:solidFill>
-                  <a:srgbClr val="FBFCFD"/>
-                </a:solidFill>
-              </a:rPr>
-              <a:t>11 columnas clave por posición fija</a:t>
-            </a:r>
-            <a:r>
-              <a:rPr sz="1700">
-                <a:solidFill>
-                  <a:srgbClr val="FBFCFD"/>
-                </a:solidFill>
-              </a:rPr>
-              <a:t> y se descarta la cola I-V al vuelo.</a:t>
-            </a:r>
-          </a:p>
-          <a:p>
-            <a:pPr algn="l">
-              <a:lnSpc>
-                <a:spcPct val="110000"/>
-              </a:lnSpc>
-            </a:pPr>
-          </a:p>
-          <a:p>
-            <a:pPr algn="l">
-              <a:lnSpc>
-                <a:spcPct val="110000"/>
-              </a:lnSpc>
-            </a:pPr>
-            <a:r>
-              <a:rPr sz="1700">
-                <a:solidFill>
-                  <a:srgbClr val="FBFCFD"/>
-                </a:solidFill>
-              </a:rPr>
-              <a:t>• </a:t>
-            </a:r>
-            <a:r>
-              <a:rPr sz="1700" b="1">
-                <a:solidFill>
-                  <a:srgbClr val="FBFCFD"/>
-                </a:solidFill>
-              </a:rPr>
-              <a:t>Limpieza:</a:t>
-            </a:r>
-            <a:r>
-              <a:rPr sz="1700">
-                <a:solidFill>
-                  <a:srgbClr val="FBFCFD"/>
-                </a:solidFill>
-              </a:rPr>
-              <a:t> </a:t>
-            </a:r>
-            <a:r>
-              <a:rPr sz="1600">
+              <a:t>-9999</a:t>
+            </a:r>
+            <a:r>
+              <a:rPr sz="1750">
+                <a:solidFill>
+                  <a:srgbClr val="FBFCFD"/>
+                </a:solidFill>
+              </a:rPr>
+              <a:t> por </a:t>
+            </a:r>
+            <a:r>
+              <a:rPr sz="1650">
                 <a:solidFill>
                   <a:srgbClr val="7FDBFF"/>
                 </a:solidFill>
                 <a:latin typeface="Consolas"/>
               </a:rPr>
-              <a:t>-9999 → NaN</a:t>
-            </a:r>
-            <a:r>
-              <a:rPr sz="1700">
-                <a:solidFill>
-                  <a:srgbClr val="FBFCFD"/>
-                </a:solidFill>
-              </a:rPr>
-              <a:t>, </a:t>
-            </a:r>
-            <a:r>
-              <a:rPr sz="1600">
-                <a:solidFill>
-                  <a:srgbClr val="7FDBFF"/>
-                </a:solidFill>
-                <a:latin typeface="Consolas"/>
-              </a:rPr>
-              <a:t>dropna</a:t>
-            </a:r>
-            <a:r>
-              <a:rPr sz="1700">
-                <a:solidFill>
-                  <a:srgbClr val="FBFCFD"/>
-                </a:solidFill>
-              </a:rPr>
-              <a:t> sobre GHI/DNI/DHI/T_air y </a:t>
-            </a:r>
-            <a:r>
-              <a:rPr sz="1600">
-                <a:solidFill>
-                  <a:srgbClr val="7FDBFF"/>
-                </a:solidFill>
-                <a:latin typeface="Consolas"/>
-              </a:rPr>
-              <a:t>clip(≥0)</a:t>
-            </a:r>
-            <a:r>
-              <a:rPr sz="1700">
-                <a:solidFill>
-                  <a:srgbClr val="FBFCFD"/>
-                </a:solidFill>
-              </a:rPr>
-              <a:t> en irradiancias.</a:t>
-            </a:r>
-          </a:p>
-          <a:p>
-            <a:pPr algn="l">
-              <a:lnSpc>
-                <a:spcPct val="110000"/>
-              </a:lnSpc>
-            </a:pPr>
-          </a:p>
-          <a:p>
-            <a:pPr algn="l">
-              <a:lnSpc>
-                <a:spcPct val="110000"/>
-              </a:lnSpc>
-            </a:pPr>
-            <a:r>
-              <a:rPr sz="1700">
-                <a:solidFill>
-                  <a:srgbClr val="FBFCFD"/>
-                </a:solidFill>
-              </a:rPr>
-              <a:t>• </a:t>
-            </a:r>
-            <a:r>
-              <a:rPr sz="1700" b="1">
-                <a:solidFill>
-                  <a:srgbClr val="FBFCFD"/>
-                </a:solidFill>
-              </a:rPr>
-              <a:t>Resultado:</a:t>
-            </a:r>
-            <a:r>
-              <a:rPr sz="1700">
-                <a:solidFill>
-                  <a:srgbClr val="FBFCFD"/>
-                </a:solidFill>
-              </a:rPr>
-              <a:t> m-Si 35,669/36,765 filas válidas (97.0 %) · HIT 37,313/38,377 (97.2 %).</a:t>
-            </a:r>
-          </a:p>
-          <a:p>
-            <a:pPr algn="l">
-              <a:lnSpc>
-                <a:spcPct val="110000"/>
-              </a:lnSpc>
-            </a:pPr>
-          </a:p>
-          <a:p>
-            <a:pPr algn="l">
-              <a:lnSpc>
-                <a:spcPct val="110000"/>
-              </a:lnSpc>
-            </a:pPr>
-            <a:r>
-              <a:rPr sz="1700">
-                <a:solidFill>
-                  <a:srgbClr val="FBFCFD"/>
-                </a:solidFill>
-              </a:rPr>
-              <a:t>• Los registros nocturnos no existen en la base (solo se midió de día); no se requirió filtro nocturno adicional.</a:t>
-            </a:r>
-          </a:p>
-        </p:txBody>
-      </p:sp>
-      <p:sp>
-        <p:nvSpPr>
-          <p:cNvPr id="13" name="TextBox 12"/>
+              <a:t>NaN</a:t>
+            </a:r>
+            <a:r>
+              <a:rPr sz="1750">
+                <a:solidFill>
+                  <a:srgbClr val="FBFCFD"/>
+                </a:solidFill>
+              </a:rPr>
+              <a:t>, se descartan filas nulas y se recortan irradiancias negativas, logrando un 97.0 % (m-Si) y 97.2 % (HIT) de registros útiles para el modelado.</a:t>
+            </a:r>
+          </a:p>
+        </p:txBody>
+      </p:sp>
+      <p:sp>
+        <p:nvSpPr>
+          <p:cNvPr id="8" name="TextBox 7"/>
           <p:cNvSpPr txBox="1"/>
           <p:nvPr/>
         </p:nvSpPr>

--- a/output/Presentacion_Final_ELI556_Atacama_POA_Tarea2_revisado.pptx
+++ b/output/Presentacion_Final_ELI556_Atacama_POA_Tarea2_revisado.pptx
@@ -26370,7 +26370,7 @@
         </p:blipFill>
         <p:spPr>
           <a:xfrm>
-            <a:off x="7193127" y="1874520"/>
+            <a:off x="7065111" y="1874520"/>
             <a:ext cx="3931920" cy="3931920"/>
           </a:xfrm>
           <a:prstGeom prst="rect">

--- a/output/Presentacion_Final_ELI556_Atacama_POA_Tarea2_revisado.pptx
+++ b/output/Presentacion_Final_ELI556_Atacama_POA_Tarea2_revisado.pptx
@@ -4075,7 +4075,7 @@
         <p:spPr>
           <a:xfrm>
             <a:off x="365760" y="1188720"/>
-            <a:ext cx="5592927" cy="3977639"/>
+            <a:ext cx="5592927" cy="3886200"/>
           </a:xfrm>
           <a:prstGeom prst="rect">
             <a:avLst/>
@@ -4120,7 +4120,7 @@
         <p:spPr>
           <a:xfrm>
             <a:off x="365760" y="1188720"/>
-            <a:ext cx="73152" cy="3977639"/>
+            <a:ext cx="73152" cy="3886200"/>
           </a:xfrm>
           <a:prstGeom prst="rect">
             <a:avLst/>
@@ -4197,7 +4197,7 @@
         <p:spPr>
           <a:xfrm>
             <a:off x="566928" y="1828800"/>
-            <a:ext cx="5190591" cy="3172967"/>
+            <a:ext cx="5190591" cy="3081528"/>
           </a:xfrm>
           <a:prstGeom prst="rect">
             <a:avLst/>
@@ -4212,11 +4212,11 @@
           <a:p>
             <a:pPr algn="l">
               <a:lnSpc>
-                <a:spcPct val="110000"/>
+                <a:spcPct val="120000"/>
               </a:lnSpc>
             </a:pPr>
             <a:r>
-              <a:rPr sz="1700">
+              <a:rPr sz="1950">
                 <a:solidFill>
                   <a:srgbClr val="FBFCFD"/>
                 </a:solidFill>
@@ -4227,18 +4227,18 @@
           <a:p>
             <a:pPr algn="l">
               <a:lnSpc>
-                <a:spcPct val="110000"/>
+                <a:spcPct val="120000"/>
               </a:lnSpc>
             </a:pPr>
           </a:p>
           <a:p>
             <a:pPr algn="l">
               <a:lnSpc>
-                <a:spcPct val="110000"/>
+                <a:spcPct val="120000"/>
               </a:lnSpc>
             </a:pPr>
             <a:r>
-              <a:rPr sz="1700">
+              <a:rPr sz="1950">
                 <a:solidFill>
                   <a:srgbClr val="FBFCFD"/>
                 </a:solidFill>
@@ -4249,18 +4249,18 @@
           <a:p>
             <a:pPr algn="l">
               <a:lnSpc>
-                <a:spcPct val="110000"/>
+                <a:spcPct val="120000"/>
               </a:lnSpc>
             </a:pPr>
           </a:p>
           <a:p>
             <a:pPr algn="l">
               <a:lnSpc>
-                <a:spcPct val="110000"/>
+                <a:spcPct val="120000"/>
               </a:lnSpc>
             </a:pPr>
             <a:r>
-              <a:rPr sz="1700">
+              <a:rPr sz="1950">
                 <a:solidFill>
                   <a:srgbClr val="FBFCFD"/>
                 </a:solidFill>
@@ -4271,18 +4271,18 @@
           <a:p>
             <a:pPr algn="l">
               <a:lnSpc>
-                <a:spcPct val="110000"/>
+                <a:spcPct val="120000"/>
               </a:lnSpc>
             </a:pPr>
           </a:p>
           <a:p>
             <a:pPr algn="l">
               <a:lnSpc>
-                <a:spcPct val="110000"/>
+                <a:spcPct val="120000"/>
               </a:lnSpc>
             </a:pPr>
             <a:r>
-              <a:rPr sz="1700">
+              <a:rPr sz="1950">
                 <a:solidFill>
                   <a:srgbClr val="FBFCFD"/>
                 </a:solidFill>
@@ -4290,7 +4290,7 @@
               <a:t>• T</a:t>
             </a:r>
             <a:r>
-              <a:rPr sz="1300">
+              <a:rPr sz="1550">
                 <a:solidFill>
                   <a:srgbClr val="FBFCFD"/>
                 </a:solidFill>
@@ -4298,7 +4298,7 @@
               <a:t>c</a:t>
             </a:r>
             <a:r>
-              <a:rPr sz="1700">
+              <a:rPr sz="1950">
                 <a:solidFill>
                   <a:srgbClr val="FBFCFD"/>
                 </a:solidFill>
@@ -4317,7 +4317,7 @@
         <p:spPr>
           <a:xfrm>
             <a:off x="6233007" y="1188720"/>
-            <a:ext cx="5592927" cy="3977639"/>
+            <a:ext cx="5592927" cy="3886200"/>
           </a:xfrm>
           <a:prstGeom prst="rect">
             <a:avLst/>
@@ -4362,7 +4362,7 @@
         <p:spPr>
           <a:xfrm>
             <a:off x="6233007" y="1188720"/>
-            <a:ext cx="73152" cy="3977639"/>
+            <a:ext cx="73152" cy="3886200"/>
           </a:xfrm>
           <a:prstGeom prst="rect">
             <a:avLst/>
@@ -4439,7 +4439,7 @@
         <p:spPr>
           <a:xfrm>
             <a:off x="6434175" y="1828800"/>
-            <a:ext cx="5190591" cy="3172967"/>
+            <a:ext cx="5190591" cy="3081528"/>
           </a:xfrm>
           <a:prstGeom prst="rect">
             <a:avLst/>
@@ -4454,11 +4454,11 @@
           <a:p>
             <a:pPr algn="l">
               <a:lnSpc>
-                <a:spcPct val="110000"/>
+                <a:spcPct val="120000"/>
               </a:lnSpc>
             </a:pPr>
             <a:r>
-              <a:rPr sz="1700">
+              <a:rPr sz="1950">
                 <a:solidFill>
                   <a:srgbClr val="FBFCFD"/>
                 </a:solidFill>
@@ -4469,18 +4469,18 @@
           <a:p>
             <a:pPr algn="l">
               <a:lnSpc>
-                <a:spcPct val="110000"/>
+                <a:spcPct val="120000"/>
               </a:lnSpc>
             </a:pPr>
           </a:p>
           <a:p>
             <a:pPr algn="l">
               <a:lnSpc>
-                <a:spcPct val="110000"/>
+                <a:spcPct val="120000"/>
               </a:lnSpc>
             </a:pPr>
             <a:r>
-              <a:rPr sz="1700">
+              <a:rPr sz="1950">
                 <a:solidFill>
                   <a:srgbClr val="FBFCFD"/>
                 </a:solidFill>
@@ -4491,18 +4491,18 @@
           <a:p>
             <a:pPr algn="l">
               <a:lnSpc>
-                <a:spcPct val="110000"/>
+                <a:spcPct val="120000"/>
               </a:lnSpc>
             </a:pPr>
           </a:p>
           <a:p>
             <a:pPr algn="l">
               <a:lnSpc>
-                <a:spcPct val="110000"/>
+                <a:spcPct val="120000"/>
               </a:lnSpc>
             </a:pPr>
             <a:r>
-              <a:rPr sz="1700">
+              <a:rPr sz="1950">
                 <a:solidFill>
                   <a:srgbClr val="FBFCFD"/>
                 </a:solidFill>
@@ -4513,18 +4513,18 @@
           <a:p>
             <a:pPr algn="l">
               <a:lnSpc>
-                <a:spcPct val="110000"/>
+                <a:spcPct val="120000"/>
               </a:lnSpc>
             </a:pPr>
           </a:p>
           <a:p>
             <a:pPr algn="l">
               <a:lnSpc>
-                <a:spcPct val="110000"/>
+                <a:spcPct val="120000"/>
               </a:lnSpc>
             </a:pPr>
             <a:r>
-              <a:rPr sz="1700">
+              <a:rPr sz="1950">
                 <a:solidFill>
                   <a:srgbClr val="FBFCFD"/>
                 </a:solidFill>
@@ -4532,7 +4532,7 @@
               <a:t>• T</a:t>
             </a:r>
             <a:r>
-              <a:rPr sz="1300">
+              <a:rPr sz="1550">
                 <a:solidFill>
                   <a:srgbClr val="FBFCFD"/>
                 </a:solidFill>
@@ -4540,7 +4540,7 @@
               <a:t>c</a:t>
             </a:r>
             <a:r>
-              <a:rPr sz="1700">
+              <a:rPr sz="1950">
                 <a:solidFill>
                   <a:srgbClr val="FBFCFD"/>
                 </a:solidFill>
@@ -4558,8 +4558,8 @@
         </p:nvSpPr>
         <p:spPr>
           <a:xfrm>
-            <a:off x="365760" y="5257800"/>
-            <a:ext cx="11460175" cy="1097280"/>
+            <a:off x="365760" y="5120640"/>
+            <a:ext cx="11460175" cy="1325880"/>
           </a:xfrm>
           <a:prstGeom prst="rect">
             <a:avLst/>
@@ -4603,8 +4603,8 @@
         </p:nvSpPr>
         <p:spPr>
           <a:xfrm>
-            <a:off x="548640" y="5294376"/>
-            <a:ext cx="11094415" cy="1024127"/>
+            <a:off x="548640" y="5157216"/>
+            <a:ext cx="11094415" cy="1252728"/>
           </a:xfrm>
           <a:prstGeom prst="rect">
             <a:avLst/>
@@ -4623,7 +4623,7 @@
               </a:lnSpc>
             </a:pPr>
             <a:r>
-              <a:rPr sz="1750" b="1">
+              <a:rPr sz="1700" b="1">
                 <a:solidFill>
                   <a:srgbClr val="FBFCFD"/>
                 </a:solidFill>
@@ -4631,7 +4631,7 @@
               <a:t>Límite explícito del método:</a:t>
             </a:r>
             <a:r>
-              <a:rPr sz="1750">
+              <a:rPr sz="1700">
                 <a:solidFill>
                   <a:srgbClr val="FBFCFD"/>
                 </a:solidFill>
@@ -4639,7 +4639,7 @@
               <a:t> el filtro alinea estaciones, geometría solar e inclinación óptima (tilt = latitud, azimut 0° N); las </a:t>
             </a:r>
             <a:r>
-              <a:rPr sz="1750" b="1">
+              <a:rPr sz="1700" b="1">
                 <a:solidFill>
                   <a:srgbClr val="FBFCFD"/>
                 </a:solidFill>
@@ -4647,7 +4647,7 @@
               <a:t>magnitudes medidas</a:t>
             </a:r>
             <a:r>
-              <a:rPr sz="1750">
+              <a:rPr sz="1700">
                 <a:solidFill>
                   <a:srgbClr val="FBFCFD"/>
                 </a:solidFill>
@@ -4864,8 +4864,8 @@
         </p:blipFill>
         <p:spPr>
           <a:xfrm>
-            <a:off x="619397" y="1234440"/>
-            <a:ext cx="10952900" cy="3931920"/>
+            <a:off x="1192514" y="1234440"/>
+            <a:ext cx="9806666" cy="3520440"/>
           </a:xfrm>
           <a:prstGeom prst="rect">
             <a:avLst/>
@@ -4880,8 +4880,8 @@
         </p:nvSpPr>
         <p:spPr>
           <a:xfrm>
-            <a:off x="365760" y="5212080"/>
-            <a:ext cx="11460175" cy="1234440"/>
+            <a:off x="365760" y="4846320"/>
+            <a:ext cx="11460175" cy="1554480"/>
           </a:xfrm>
           <a:prstGeom prst="rect">
             <a:avLst/>
@@ -4925,8 +4925,8 @@
         </p:nvSpPr>
         <p:spPr>
           <a:xfrm>
-            <a:off x="548640" y="5248656"/>
-            <a:ext cx="11094415" cy="1161288"/>
+            <a:off x="548640" y="4882896"/>
+            <a:ext cx="11094415" cy="1481328"/>
           </a:xfrm>
           <a:prstGeom prst="rect">
             <a:avLst/>
@@ -4945,7 +4945,7 @@
               </a:lnSpc>
             </a:pPr>
             <a:r>
-              <a:rPr sz="1750" b="1">
+              <a:rPr sz="1700" b="1">
                 <a:solidFill>
                   <a:srgbClr val="FBFCFD"/>
                 </a:solidFill>
@@ -4953,7 +4953,7 @@
               <a:t>Proceso de emulación temporal:</a:t>
             </a:r>
             <a:r>
-              <a:rPr sz="1750">
+              <a:rPr sz="1700">
                 <a:solidFill>
                   <a:srgbClr val="FBFCFD"/>
                 </a:solidFill>
@@ -5292,8 +5292,8 @@
         </p:nvSpPr>
         <p:spPr>
           <a:xfrm>
-            <a:off x="365760" y="1280160"/>
-            <a:ext cx="3520440" cy="658368"/>
+            <a:off x="365760" y="1261872"/>
+            <a:ext cx="3520440" cy="685800"/>
           </a:xfrm>
           <a:prstGeom prst="rect">
             <a:avLst/>
@@ -5308,7 +5308,7 @@
           <a:p>
             <a:pPr algn="ctr"/>
             <a:r>
-              <a:rPr sz="3800" b="1">
+              <a:rPr sz="4200" b="1">
                 <a:solidFill>
                   <a:srgbClr val="00D2FF"/>
                 </a:solidFill>
@@ -5326,8 +5326,8 @@
         </p:nvSpPr>
         <p:spPr>
           <a:xfrm>
-            <a:off x="420624" y="1920240"/>
-            <a:ext cx="3410712" cy="566928"/>
+            <a:off x="420624" y="1901952"/>
+            <a:ext cx="3410712" cy="585216"/>
           </a:xfrm>
           <a:prstGeom prst="rect">
             <a:avLst/>
@@ -5342,7 +5342,7 @@
           <a:p>
             <a:pPr algn="ctr"/>
             <a:r>
-              <a:rPr sz="1550">
+              <a:rPr sz="1700">
                 <a:solidFill>
                   <a:srgbClr val="9AA5B1"/>
                 </a:solidFill>
@@ -5353,7 +5353,7 @@
           <a:p>
             <a:pPr algn="ctr"/>
             <a:r>
-              <a:rPr sz="1550">
+              <a:rPr sz="1700">
                 <a:solidFill>
                   <a:srgbClr val="9AA5B1"/>
                 </a:solidFill>
@@ -5416,8 +5416,8 @@
         </p:nvSpPr>
         <p:spPr>
           <a:xfrm>
-            <a:off x="4334256" y="1280160"/>
-            <a:ext cx="3520440" cy="658368"/>
+            <a:off x="4334256" y="1261872"/>
+            <a:ext cx="3520440" cy="685800"/>
           </a:xfrm>
           <a:prstGeom prst="rect">
             <a:avLst/>
@@ -5432,7 +5432,7 @@
           <a:p>
             <a:pPr algn="ctr"/>
             <a:r>
-              <a:rPr sz="3800" b="1">
+              <a:rPr sz="4200" b="1">
                 <a:solidFill>
                   <a:srgbClr val="F1C40F"/>
                 </a:solidFill>
@@ -5450,8 +5450,8 @@
         </p:nvSpPr>
         <p:spPr>
           <a:xfrm>
-            <a:off x="4389120" y="1920240"/>
-            <a:ext cx="3410712" cy="566928"/>
+            <a:off x="4389120" y="1901952"/>
+            <a:ext cx="3410712" cy="585216"/>
           </a:xfrm>
           <a:prstGeom prst="rect">
             <a:avLst/>
@@ -5466,7 +5466,7 @@
           <a:p>
             <a:pPr algn="ctr"/>
             <a:r>
-              <a:rPr sz="1550">
+              <a:rPr sz="1700">
                 <a:solidFill>
                   <a:srgbClr val="9AA5B1"/>
                 </a:solidFill>
@@ -5477,7 +5477,7 @@
           <a:p>
             <a:pPr algn="ctr"/>
             <a:r>
-              <a:rPr sz="1550">
+              <a:rPr sz="1700">
                 <a:solidFill>
                   <a:srgbClr val="9AA5B1"/>
                 </a:solidFill>
@@ -5540,8 +5540,8 @@
         </p:nvSpPr>
         <p:spPr>
           <a:xfrm>
-            <a:off x="8302752" y="1280160"/>
-            <a:ext cx="3520440" cy="658368"/>
+            <a:off x="8302752" y="1261872"/>
+            <a:ext cx="3520440" cy="685800"/>
           </a:xfrm>
           <a:prstGeom prst="rect">
             <a:avLst/>
@@ -5556,7 +5556,7 @@
           <a:p>
             <a:pPr algn="ctr"/>
             <a:r>
-              <a:rPr sz="3800" b="1">
+              <a:rPr sz="4200" b="1">
                 <a:solidFill>
                   <a:srgbClr val="FF5E3A"/>
                 </a:solidFill>
@@ -5574,8 +5574,8 @@
         </p:nvSpPr>
         <p:spPr>
           <a:xfrm>
-            <a:off x="8357616" y="1920240"/>
-            <a:ext cx="3410712" cy="566928"/>
+            <a:off x="8357616" y="1901952"/>
+            <a:ext cx="3410712" cy="585216"/>
           </a:xfrm>
           <a:prstGeom prst="rect">
             <a:avLst/>
@@ -5590,7 +5590,7 @@
           <a:p>
             <a:pPr algn="ctr"/>
             <a:r>
-              <a:rPr sz="1550">
+              <a:rPr sz="1700">
                 <a:solidFill>
                   <a:srgbClr val="9AA5B1"/>
                 </a:solidFill>
@@ -5601,7 +5601,7 @@
           <a:p>
             <a:pPr algn="ctr"/>
             <a:r>
-              <a:rPr sz="1550">
+              <a:rPr sz="1700">
                 <a:solidFill>
                   <a:srgbClr val="9AA5B1"/>
                 </a:solidFill>
@@ -5757,11 +5757,11 @@
           <a:p>
             <a:pPr algn="l">
               <a:lnSpc>
-                <a:spcPct val="110000"/>
+                <a:spcPct val="112000"/>
               </a:lnSpc>
             </a:pPr>
             <a:r>
-              <a:rPr sz="1350">
+              <a:rPr sz="1750">
                 <a:solidFill>
                   <a:srgbClr val="FBFCFD"/>
                 </a:solidFill>
@@ -5769,7 +5769,7 @@
               <a:t>• </a:t>
             </a:r>
             <a:r>
-              <a:rPr sz="1350" b="1">
+              <a:rPr sz="1750" b="1">
                 <a:solidFill>
                   <a:srgbClr val="FBFCFD"/>
                 </a:solidFill>
@@ -5777,7 +5777,7 @@
               <a:t>Superposición de mediciones:</a:t>
             </a:r>
             <a:r>
-              <a:rPr sz="1350">
+              <a:rPr sz="1750">
                 <a:solidFill>
                   <a:srgbClr val="FBFCFD"/>
                 </a:solidFill>
@@ -5788,18 +5788,18 @@
           <a:p>
             <a:pPr algn="l">
               <a:lnSpc>
-                <a:spcPct val="110000"/>
+                <a:spcPct val="112000"/>
               </a:lnSpc>
             </a:pPr>
           </a:p>
           <a:p>
             <a:pPr algn="l">
               <a:lnSpc>
-                <a:spcPct val="110000"/>
+                <a:spcPct val="112000"/>
               </a:lnSpc>
             </a:pPr>
             <a:r>
-              <a:rPr sz="1350">
+              <a:rPr sz="1750">
                 <a:solidFill>
                   <a:srgbClr val="FBFCFD"/>
                 </a:solidFill>
@@ -5807,7 +5807,7 @@
               <a:t>• </a:t>
             </a:r>
             <a:r>
-              <a:rPr sz="1350" b="1">
+              <a:rPr sz="1750" b="1">
                 <a:solidFill>
                   <a:srgbClr val="FBFCFD"/>
                 </a:solidFill>
@@ -5815,7 +5815,7 @@
               <a:t>Rango temporal:</a:t>
             </a:r>
             <a:r>
-              <a:rPr sz="1350">
+              <a:rPr sz="1750">
                 <a:solidFill>
                   <a:srgbClr val="FBFCFD"/>
                 </a:solidFill>
@@ -5823,7 +5823,7 @@
               <a:t> Campaña desde el </a:t>
             </a:r>
             <a:r>
-              <a:rPr sz="1350" b="1">
+              <a:rPr sz="1750" b="1">
                 <a:solidFill>
                   <a:srgbClr val="FBFCFD"/>
                 </a:solidFill>
@@ -5831,7 +5831,7 @@
               <a:t>21 de enero de 2011</a:t>
             </a:r>
             <a:r>
-              <a:rPr sz="1350">
+              <a:rPr sz="1750">
                 <a:solidFill>
                   <a:srgbClr val="FBFCFD"/>
                 </a:solidFill>
@@ -5839,7 +5839,7 @@
               <a:t> hasta el </a:t>
             </a:r>
             <a:r>
-              <a:rPr sz="1350" b="1">
+              <a:rPr sz="1750" b="1">
                 <a:solidFill>
                   <a:srgbClr val="FBFCFD"/>
                 </a:solidFill>
@@ -5847,7 +5847,7 @@
               <a:t>4 de marzo de 2012</a:t>
             </a:r>
             <a:r>
-              <a:rPr sz="1350">
+              <a:rPr sz="1750">
                 <a:solidFill>
                   <a:srgbClr val="FBFCFD"/>
                 </a:solidFill>
@@ -5858,18 +5858,18 @@
           <a:p>
             <a:pPr algn="l">
               <a:lnSpc>
-                <a:spcPct val="110000"/>
+                <a:spcPct val="112000"/>
               </a:lnSpc>
             </a:pPr>
           </a:p>
           <a:p>
             <a:pPr algn="l">
               <a:lnSpc>
-                <a:spcPct val="110000"/>
+                <a:spcPct val="112000"/>
               </a:lnSpc>
             </a:pPr>
             <a:r>
-              <a:rPr sz="1350">
+              <a:rPr sz="1750">
                 <a:solidFill>
                   <a:srgbClr val="FBFCFD"/>
                 </a:solidFill>
@@ -5877,7 +5877,7 @@
               <a:t>• </a:t>
             </a:r>
             <a:r>
-              <a:rPr sz="1350" b="1">
+              <a:rPr sz="1750" b="1">
                 <a:solidFill>
                   <a:srgbClr val="FBFCFD"/>
                 </a:solidFill>
@@ -5885,7 +5885,7 @@
               <a:t>Tratamiento:</a:t>
             </a:r>
             <a:r>
-              <a:rPr sz="1350">
+              <a:rPr sz="1750">
                 <a:solidFill>
                   <a:srgbClr val="FBFCFD"/>
                 </a:solidFill>
@@ -6041,11 +6041,11 @@
           <a:p>
             <a:pPr algn="l">
               <a:lnSpc>
-                <a:spcPct val="110000"/>
+                <a:spcPct val="112000"/>
               </a:lnSpc>
             </a:pPr>
             <a:r>
-              <a:rPr sz="1350">
+              <a:rPr sz="1750">
                 <a:solidFill>
                   <a:srgbClr val="FBFCFD"/>
                 </a:solidFill>
@@ -6053,7 +6053,7 @@
               <a:t>• </a:t>
             </a:r>
             <a:r>
-              <a:rPr sz="1350" b="1">
+              <a:rPr sz="1750" b="1">
                 <a:solidFill>
                   <a:srgbClr val="FBFCFD"/>
                 </a:solidFill>
@@ -6061,7 +6061,7 @@
               <a:t>Validación previa:</a:t>
             </a:r>
             <a:r>
-              <a:rPr sz="1350">
+              <a:rPr sz="1750">
                 <a:solidFill>
                   <a:srgbClr val="FBFCFD"/>
                 </a:solidFill>
@@ -6069,7 +6069,7 @@
               <a:t> El objetivo es validar la homogeneidad física de la radiación medida </a:t>
             </a:r>
             <a:r>
-              <a:rPr sz="1350" b="1">
+              <a:rPr sz="1750" b="1">
                 <a:solidFill>
                   <a:srgbClr val="FBFCFD"/>
                 </a:solidFill>
@@ -6077,7 +6077,7 @@
               <a:t>antes</a:t>
             </a:r>
             <a:r>
-              <a:rPr sz="1350">
+              <a:rPr sz="1750">
                 <a:solidFill>
                   <a:srgbClr val="FBFCFD"/>
                 </a:solidFill>
@@ -6088,18 +6088,18 @@
           <a:p>
             <a:pPr algn="l">
               <a:lnSpc>
-                <a:spcPct val="110000"/>
+                <a:spcPct val="112000"/>
               </a:lnSpc>
             </a:pPr>
           </a:p>
           <a:p>
             <a:pPr algn="l">
               <a:lnSpc>
-                <a:spcPct val="110000"/>
+                <a:spcPct val="112000"/>
               </a:lnSpc>
             </a:pPr>
             <a:r>
-              <a:rPr sz="1350">
+              <a:rPr sz="1750">
                 <a:solidFill>
                   <a:srgbClr val="FBFCFD"/>
                 </a:solidFill>
@@ -6107,7 +6107,7 @@
               <a:t>• </a:t>
             </a:r>
             <a:r>
-              <a:rPr sz="1350" b="1">
+              <a:rPr sz="1750" b="1">
                 <a:solidFill>
                   <a:srgbClr val="FBFCFD"/>
                 </a:solidFill>
@@ -6115,7 +6115,7 @@
               <a:t>Evidencia de soiling y mantenimiento:</a:t>
             </a:r>
             <a:r>
-              <a:rPr sz="1350">
+              <a:rPr sz="1750">
                 <a:solidFill>
                   <a:srgbClr val="FBFCFD"/>
                 </a:solidFill>
@@ -6126,18 +6126,18 @@
           <a:p>
             <a:pPr algn="l">
               <a:lnSpc>
-                <a:spcPct val="110000"/>
+                <a:spcPct val="112000"/>
               </a:lnSpc>
             </a:pPr>
           </a:p>
           <a:p>
             <a:pPr algn="l">
               <a:lnSpc>
-                <a:spcPct val="110000"/>
+                <a:spcPct val="112000"/>
               </a:lnSpc>
             </a:pPr>
             <a:r>
-              <a:rPr sz="1350">
+              <a:rPr sz="1750">
                 <a:solidFill>
                   <a:srgbClr val="FBFCFD"/>
                 </a:solidFill>
@@ -6145,7 +6145,7 @@
               <a:t>• </a:t>
             </a:r>
             <a:r>
-              <a:rPr sz="1350" b="1">
+              <a:rPr sz="1750" b="1">
                 <a:solidFill>
                   <a:srgbClr val="FBFCFD"/>
                 </a:solidFill>
@@ -6153,7 +6153,7 @@
               <a:t>Alineación de sensores:</a:t>
             </a:r>
             <a:r>
-              <a:rPr sz="1350">
+              <a:rPr sz="1750">
                 <a:solidFill>
                   <a:srgbClr val="FBFCFD"/>
                 </a:solidFill>
@@ -6370,8 +6370,8 @@
         </p:blipFill>
         <p:spPr>
           <a:xfrm>
-            <a:off x="960278" y="1234440"/>
-            <a:ext cx="10271137" cy="3931920"/>
+            <a:off x="1497721" y="1234440"/>
+            <a:ext cx="9196251" cy="3520440"/>
           </a:xfrm>
           <a:prstGeom prst="rect">
             <a:avLst/>
@@ -6386,8 +6386,8 @@
         </p:nvSpPr>
         <p:spPr>
           <a:xfrm>
-            <a:off x="365760" y="5212080"/>
-            <a:ext cx="11460175" cy="1234440"/>
+            <a:off x="365760" y="4846320"/>
+            <a:ext cx="11460175" cy="1554480"/>
           </a:xfrm>
           <a:prstGeom prst="rect">
             <a:avLst/>
@@ -6431,8 +6431,8 @@
         </p:nvSpPr>
         <p:spPr>
           <a:xfrm>
-            <a:off x="548640" y="5248656"/>
-            <a:ext cx="11094415" cy="1161288"/>
+            <a:off x="548640" y="4882896"/>
+            <a:ext cx="11094415" cy="1481328"/>
           </a:xfrm>
           <a:prstGeom prst="rect">
             <a:avLst/>
@@ -6451,7 +6451,7 @@
               </a:lnSpc>
             </a:pPr>
             <a:r>
-              <a:rPr sz="1750" b="1">
+              <a:rPr sz="1700" b="1">
                 <a:solidFill>
                   <a:srgbClr val="FBFCFD"/>
                 </a:solidFill>
@@ -6459,12 +6459,12 @@
               <a:t>Estimación de la radiación y temperatura:</a:t>
             </a:r>
             <a:r>
-              <a:rPr sz="1750">
-                <a:solidFill>
-                  <a:srgbClr val="FBFCFD"/>
-                </a:solidFill>
-              </a:rPr>
-              <a:t> Tras filtrar y limpiar los registros nulos, el código utiliza el modelo difuso de Perez para transponer las irradiancias al plano inclinado (POA). Luego, con el modelo de Sandia (SAPM) y asumiendo una velocidad de viento fija de 1 m/s (peor caso de ventilación), se estima la temperatura interna de operación de las celdas para cada tecnología (m-Si y HIT).</a:t>
+              <a:rPr sz="1700">
+                <a:solidFill>
+                  <a:srgbClr val="FBFCFD"/>
+                </a:solidFill>
+              </a:rPr>
+              <a:t> Tras filtrar y limpiar los registros nulos, el código utiliza el modelo difuso de Perez para transponer las irradiancias al plano inclinado (POA). Luego, con el modelo de Sandia (SAPM) y asumiendo una velocidad de viento fija de 1 m/s (peor caso de ventilación), se estima la temperatura interna de operación de las celdas para cada tecnología (m-Si and HIT).</a:t>
             </a:r>
           </a:p>
         </p:txBody>
@@ -6676,8 +6676,8 @@
         </p:blipFill>
         <p:spPr>
           <a:xfrm>
-            <a:off x="1256561" y="1234440"/>
-            <a:ext cx="9678572" cy="3931920"/>
+            <a:off x="1762998" y="1234440"/>
+            <a:ext cx="8665698" cy="3520440"/>
           </a:xfrm>
           <a:prstGeom prst="rect">
             <a:avLst/>
@@ -6692,8 +6692,8 @@
         </p:nvSpPr>
         <p:spPr>
           <a:xfrm>
-            <a:off x="365760" y="5212080"/>
-            <a:ext cx="11460175" cy="1234440"/>
+            <a:off x="365760" y="4846320"/>
+            <a:ext cx="11460175" cy="1554480"/>
           </a:xfrm>
           <a:prstGeom prst="rect">
             <a:avLst/>
@@ -6737,8 +6737,8 @@
         </p:nvSpPr>
         <p:spPr>
           <a:xfrm>
-            <a:off x="548640" y="5248656"/>
-            <a:ext cx="11094415" cy="1161288"/>
+            <a:off x="548640" y="4882896"/>
+            <a:ext cx="11094415" cy="1481328"/>
           </a:xfrm>
           <a:prstGeom prst="rect">
             <a:avLst/>
@@ -6757,7 +6757,7 @@
               </a:lnSpc>
             </a:pPr>
             <a:r>
-              <a:rPr sz="1750" b="1">
+              <a:rPr sz="1700" b="1">
                 <a:solidFill>
                   <a:srgbClr val="FBFCFD"/>
                 </a:solidFill>
@@ -6765,7 +6765,7 @@
               <a:t>Caracterización física de los módulos:</a:t>
             </a:r>
             <a:r>
-              <a:rPr sz="1750">
+              <a:rPr sz="1700">
                 <a:solidFill>
                   <a:srgbClr val="FBFCFD"/>
                 </a:solidFill>
@@ -7119,7 +7119,7 @@
                     <a:p>
                       <a:pPr algn="ctr"/>
                       <a:r>
-                        <a:rPr sz="1250" b="1">
+                        <a:rPr sz="1450" b="1">
                           <a:solidFill>
                             <a:srgbClr val="F1C40F"/>
                           </a:solidFill>
@@ -7141,7 +7141,7 @@
                     <a:p>
                       <a:pPr algn="ctr"/>
                       <a:r>
-                        <a:rPr sz="1250" b="1">
+                        <a:rPr sz="1450" b="1">
                           <a:solidFill>
                             <a:srgbClr val="F1C40F"/>
                           </a:solidFill>
@@ -7163,7 +7163,7 @@
                     <a:p>
                       <a:pPr algn="ctr"/>
                       <a:r>
-                        <a:rPr sz="1250" b="1">
+                        <a:rPr sz="1450" b="1">
                           <a:solidFill>
                             <a:srgbClr val="F1C40F"/>
                           </a:solidFill>
@@ -7187,7 +7187,7 @@
                     <a:p>
                       <a:pPr algn="l"/>
                       <a:r>
-                        <a:rPr sz="1150">
+                        <a:rPr sz="1300">
                           <a:solidFill>
                             <a:srgbClr val="FBFCFD"/>
                           </a:solidFill>
@@ -7195,7 +7195,7 @@
                         <a:t>I</a:t>
                       </a:r>
                       <a:r>
-                        <a:rPr sz="800">
+                        <a:rPr sz="900">
                           <a:solidFill>
                             <a:srgbClr val="FBFCFD"/>
                           </a:solidFill>
@@ -7203,7 +7203,7 @@
                         <a:t>L,ref</a:t>
                       </a:r>
                       <a:r>
-                        <a:rPr sz="1150">
+                        <a:rPr sz="1300">
                           <a:solidFill>
                             <a:srgbClr val="FBFCFD"/>
                           </a:solidFill>
@@ -7225,7 +7225,7 @@
                     <a:p>
                       <a:pPr algn="ctr"/>
                       <a:r>
-                        <a:rPr sz="1150">
+                        <a:rPr sz="1300">
                           <a:solidFill>
                             <a:srgbClr val="FBFCFD"/>
                           </a:solidFill>
@@ -7247,7 +7247,7 @@
                     <a:p>
                       <a:pPr algn="ctr"/>
                       <a:r>
-                        <a:rPr sz="1150">
+                        <a:rPr sz="1300">
                           <a:solidFill>
                             <a:srgbClr val="FBFCFD"/>
                           </a:solidFill>
@@ -7271,7 +7271,7 @@
                     <a:p>
                       <a:pPr algn="l"/>
                       <a:r>
-                        <a:rPr sz="1150">
+                        <a:rPr sz="1300">
                           <a:solidFill>
                             <a:srgbClr val="FBFCFD"/>
                           </a:solidFill>
@@ -7279,7 +7279,7 @@
                         <a:t>I</a:t>
                       </a:r>
                       <a:r>
-                        <a:rPr sz="800">
+                        <a:rPr sz="900">
                           <a:solidFill>
                             <a:srgbClr val="FBFCFD"/>
                           </a:solidFill>
@@ -7287,7 +7287,7 @@
                         <a:t>0,ref</a:t>
                       </a:r>
                       <a:r>
-                        <a:rPr sz="1150">
+                        <a:rPr sz="1300">
                           <a:solidFill>
                             <a:srgbClr val="FBFCFD"/>
                           </a:solidFill>
@@ -7309,7 +7309,7 @@
                     <a:p>
                       <a:pPr algn="ctr"/>
                       <a:r>
-                        <a:rPr sz="1150">
+                        <a:rPr sz="1300">
                           <a:solidFill>
                             <a:srgbClr val="FBFCFD"/>
                           </a:solidFill>
@@ -7317,7 +7317,7 @@
                         <a:t>4.13 × 10</a:t>
                       </a:r>
                       <a:r>
-                        <a:rPr sz="800">
+                        <a:rPr sz="900">
                           <a:solidFill>
                             <a:srgbClr val="FBFCFD"/>
                           </a:solidFill>
@@ -7339,7 +7339,7 @@
                     <a:p>
                       <a:pPr algn="ctr"/>
                       <a:r>
-                        <a:rPr sz="1150">
+                        <a:rPr sz="1300">
                           <a:solidFill>
                             <a:srgbClr val="FBFCFD"/>
                           </a:solidFill>
@@ -7347,7 +7347,7 @@
                         <a:t>4.68 × 10</a:t>
                       </a:r>
                       <a:r>
-                        <a:rPr sz="800">
+                        <a:rPr sz="900">
                           <a:solidFill>
                             <a:srgbClr val="FBFCFD"/>
                           </a:solidFill>
@@ -7371,7 +7371,7 @@
                     <a:p>
                       <a:pPr algn="l"/>
                       <a:r>
-                        <a:rPr sz="1150">
+                        <a:rPr sz="1300">
                           <a:solidFill>
                             <a:srgbClr val="FBFCFD"/>
                           </a:solidFill>
@@ -7379,7 +7379,7 @@
                         <a:t>R</a:t>
                       </a:r>
                       <a:r>
-                        <a:rPr sz="800">
+                        <a:rPr sz="900">
                           <a:solidFill>
                             <a:srgbClr val="FBFCFD"/>
                           </a:solidFill>
@@ -7387,7 +7387,7 @@
                         <a:t>s,ref</a:t>
                       </a:r>
                       <a:r>
-                        <a:rPr sz="1150">
+                        <a:rPr sz="1300">
                           <a:solidFill>
                             <a:srgbClr val="FBFCFD"/>
                           </a:solidFill>
@@ -7409,7 +7409,7 @@
                     <a:p>
                       <a:pPr algn="ctr"/>
                       <a:r>
-                        <a:rPr sz="1150">
+                        <a:rPr sz="1300">
                           <a:solidFill>
                             <a:srgbClr val="FBFCFD"/>
                           </a:solidFill>
@@ -7431,7 +7431,7 @@
                     <a:p>
                       <a:pPr algn="ctr"/>
                       <a:r>
-                        <a:rPr sz="1150">
+                        <a:rPr sz="1300">
                           <a:solidFill>
                             <a:srgbClr val="FBFCFD"/>
                           </a:solidFill>
@@ -7455,7 +7455,7 @@
                     <a:p>
                       <a:pPr algn="l"/>
                       <a:r>
-                        <a:rPr sz="1150">
+                        <a:rPr sz="1300">
                           <a:solidFill>
                             <a:srgbClr val="FBFCFD"/>
                           </a:solidFill>
@@ -7463,7 +7463,7 @@
                         <a:t>R</a:t>
                       </a:r>
                       <a:r>
-                        <a:rPr sz="800">
+                        <a:rPr sz="900">
                           <a:solidFill>
                             <a:srgbClr val="FBFCFD"/>
                           </a:solidFill>
@@ -7471,7 +7471,7 @@
                         <a:t>sh,ref</a:t>
                       </a:r>
                       <a:r>
-                        <a:rPr sz="1150">
+                        <a:rPr sz="1300">
                           <a:solidFill>
                             <a:srgbClr val="FBFCFD"/>
                           </a:solidFill>
@@ -7493,7 +7493,7 @@
                     <a:p>
                       <a:pPr algn="ctr"/>
                       <a:r>
-                        <a:rPr sz="1150">
+                        <a:rPr sz="1300">
                           <a:solidFill>
                             <a:srgbClr val="FBFCFD"/>
                           </a:solidFill>
@@ -7515,7 +7515,7 @@
                     <a:p>
                       <a:pPr algn="ctr"/>
                       <a:r>
-                        <a:rPr sz="1150">
+                        <a:rPr sz="1300">
                           <a:solidFill>
                             <a:srgbClr val="FBFCFD"/>
                           </a:solidFill>
@@ -7539,7 +7539,7 @@
                     <a:p>
                       <a:pPr algn="l"/>
                       <a:r>
-                        <a:rPr sz="1150">
+                        <a:rPr sz="1300">
                           <a:solidFill>
                             <a:srgbClr val="FBFCFD"/>
                           </a:solidFill>
@@ -7547,7 +7547,7 @@
                         <a:t>N</a:t>
                       </a:r>
                       <a:r>
-                        <a:rPr sz="800">
+                        <a:rPr sz="900">
                           <a:solidFill>
                             <a:srgbClr val="FBFCFD"/>
                           </a:solidFill>
@@ -7555,7 +7555,7 @@
                         <a:t>s</a:t>
                       </a:r>
                       <a:r>
-                        <a:rPr sz="1150">
+                        <a:rPr sz="1300">
                           <a:solidFill>
                             <a:srgbClr val="FBFCFD"/>
                           </a:solidFill>
@@ -7577,7 +7577,7 @@
                     <a:p>
                       <a:pPr algn="ctr"/>
                       <a:r>
-                        <a:rPr sz="1150">
+                        <a:rPr sz="1300">
                           <a:solidFill>
                             <a:srgbClr val="FBFCFD"/>
                           </a:solidFill>
@@ -7599,7 +7599,7 @@
                     <a:p>
                       <a:pPr algn="ctr"/>
                       <a:r>
-                        <a:rPr sz="1150">
+                        <a:rPr sz="1300">
                           <a:solidFill>
                             <a:srgbClr val="FBFCFD"/>
                           </a:solidFill>
@@ -7623,7 +7623,7 @@
                     <a:p>
                       <a:pPr algn="l"/>
                       <a:r>
-                        <a:rPr sz="1150">
+                        <a:rPr sz="1300">
                           <a:solidFill>
                             <a:srgbClr val="FBFCFD"/>
                           </a:solidFill>
@@ -7631,7 +7631,7 @@
                         <a:t>α</a:t>
                       </a:r>
                       <a:r>
-                        <a:rPr sz="800">
+                        <a:rPr sz="900">
                           <a:solidFill>
                             <a:srgbClr val="FBFCFD"/>
                           </a:solidFill>
@@ -7639,7 +7639,7 @@
                         <a:t>Isc</a:t>
                       </a:r>
                       <a:r>
-                        <a:rPr sz="1150">
+                        <a:rPr sz="1300">
                           <a:solidFill>
                             <a:srgbClr val="FBFCFD"/>
                           </a:solidFill>
@@ -7661,7 +7661,7 @@
                     <a:p>
                       <a:pPr algn="ctr"/>
                       <a:r>
-                        <a:rPr sz="1150">
+                        <a:rPr sz="1300">
                           <a:solidFill>
                             <a:srgbClr val="FBFCFD"/>
                           </a:solidFill>
@@ -7683,7 +7683,7 @@
                     <a:p>
                       <a:pPr algn="ctr"/>
                       <a:r>
-                        <a:rPr sz="1150">
+                        <a:rPr sz="1300">
                           <a:solidFill>
                             <a:srgbClr val="FBFCFD"/>
                           </a:solidFill>
@@ -7707,7 +7707,7 @@
                     <a:p>
                       <a:pPr algn="l"/>
                       <a:r>
-                        <a:rPr sz="1150">
+                        <a:rPr sz="1300">
                           <a:solidFill>
                             <a:srgbClr val="FBFCFD"/>
                           </a:solidFill>
@@ -7715,7 +7715,7 @@
                         <a:t>β</a:t>
                       </a:r>
                       <a:r>
-                        <a:rPr sz="800">
+                        <a:rPr sz="900">
                           <a:solidFill>
                             <a:srgbClr val="FBFCFD"/>
                           </a:solidFill>
@@ -7723,7 +7723,7 @@
                         <a:t>Voc</a:t>
                       </a:r>
                       <a:r>
-                        <a:rPr sz="1150">
+                        <a:rPr sz="1300">
                           <a:solidFill>
                             <a:srgbClr val="FBFCFD"/>
                           </a:solidFill>
@@ -7745,7 +7745,7 @@
                     <a:p>
                       <a:pPr algn="ctr"/>
                       <a:r>
-                        <a:rPr sz="1150">
+                        <a:rPr sz="1300">
                           <a:solidFill>
                             <a:srgbClr val="FBFCFD"/>
                           </a:solidFill>
@@ -7767,7 +7767,7 @@
                     <a:p>
                       <a:pPr algn="ctr"/>
                       <a:r>
-                        <a:rPr sz="1150">
+                        <a:rPr sz="1300">
                           <a:solidFill>
                             <a:srgbClr val="FBFCFD"/>
                           </a:solidFill>
@@ -7791,7 +7791,7 @@
                     <a:p>
                       <a:pPr algn="l"/>
                       <a:r>
-                        <a:rPr sz="1150">
+                        <a:rPr sz="1300">
                           <a:solidFill>
                             <a:srgbClr val="FBFCFD"/>
                           </a:solidFill>
@@ -7799,7 +7799,7 @@
                         <a:t>I</a:t>
                       </a:r>
                       <a:r>
-                        <a:rPr sz="800">
+                        <a:rPr sz="900">
                           <a:solidFill>
                             <a:srgbClr val="FBFCFD"/>
                           </a:solidFill>
@@ -7807,7 +7807,7 @@
                         <a:t>sc,ref</a:t>
                       </a:r>
                       <a:r>
-                        <a:rPr sz="1150">
+                        <a:rPr sz="1300">
                           <a:solidFill>
                             <a:srgbClr val="FBFCFD"/>
                           </a:solidFill>
@@ -7815,7 +7815,7 @@
                         <a:t> / V</a:t>
                       </a:r>
                       <a:r>
-                        <a:rPr sz="800">
+                        <a:rPr sz="900">
                           <a:solidFill>
                             <a:srgbClr val="FBFCFD"/>
                           </a:solidFill>
@@ -7837,7 +7837,7 @@
                     <a:p>
                       <a:pPr algn="ctr"/>
                       <a:r>
-                        <a:rPr sz="1150">
+                        <a:rPr sz="1300">
                           <a:solidFill>
                             <a:srgbClr val="FBFCFD"/>
                           </a:solidFill>
@@ -7859,7 +7859,7 @@
                     <a:p>
                       <a:pPr algn="ctr"/>
                       <a:r>
-                        <a:rPr sz="1150">
+                        <a:rPr sz="1300">
                           <a:solidFill>
                             <a:srgbClr val="FBFCFD"/>
                           </a:solidFill>
@@ -7883,7 +7883,7 @@
                     <a:p>
                       <a:pPr algn="l"/>
                       <a:r>
-                        <a:rPr sz="1150">
+                        <a:rPr sz="1300">
                           <a:solidFill>
                             <a:srgbClr val="FBFCFD"/>
                           </a:solidFill>
@@ -7891,7 +7891,7 @@
                         <a:t>P</a:t>
                       </a:r>
                       <a:r>
-                        <a:rPr sz="800">
+                        <a:rPr sz="900">
                           <a:solidFill>
                             <a:srgbClr val="FBFCFD"/>
                           </a:solidFill>
@@ -7899,7 +7899,7 @@
                         <a:t>STC</a:t>
                       </a:r>
                       <a:r>
-                        <a:rPr sz="1150">
+                        <a:rPr sz="1300">
                           <a:solidFill>
                             <a:srgbClr val="FBFCFD"/>
                           </a:solidFill>
@@ -7921,7 +7921,7 @@
                     <a:p>
                       <a:pPr algn="ctr"/>
                       <a:r>
-                        <a:rPr sz="1150">
+                        <a:rPr sz="1300">
                           <a:solidFill>
                             <a:srgbClr val="FBFCFD"/>
                           </a:solidFill>
@@ -7943,7 +7943,7 @@
                     <a:p>
                       <a:pPr algn="ctr"/>
                       <a:r>
-                        <a:rPr sz="1150">
+                        <a:rPr sz="1300">
                           <a:solidFill>
                             <a:srgbClr val="FBFCFD"/>
                           </a:solidFill>
@@ -8255,59 +8255,59 @@
           <a:p>
             <a:pPr algn="l">
               <a:lnSpc>
-                <a:spcPct val="110000"/>
+                <a:spcPct val="115000"/>
               </a:lnSpc>
             </a:pPr>
             <a:r>
+              <a:rPr sz="1700">
+                <a:solidFill>
+                  <a:srgbClr val="FBFCFD"/>
+                </a:solidFill>
+              </a:rPr>
+              <a:t>• I</a:t>
+            </a:r>
+            <a:r>
               <a:rPr sz="1300">
                 <a:solidFill>
                   <a:srgbClr val="FBFCFD"/>
                 </a:solidFill>
               </a:rPr>
-              <a:t>• I</a:t>
-            </a:r>
-            <a:r>
-              <a:rPr sz="900">
-                <a:solidFill>
-                  <a:srgbClr val="FBFCFD"/>
-                </a:solidFill>
-              </a:rPr>
               <a:t>0</a:t>
             </a:r>
             <a:r>
+              <a:rPr sz="1700">
+                <a:solidFill>
+                  <a:srgbClr val="FBFCFD"/>
+                </a:solidFill>
+              </a:rPr>
+              <a:t> de HIT es </a:t>
+            </a:r>
+            <a:r>
+              <a:rPr sz="1700" b="1">
+                <a:solidFill>
+                  <a:srgbClr val="FBFCFD"/>
+                </a:solidFill>
+              </a:rPr>
+              <a:t>un orden de magnitud menor</a:t>
+            </a:r>
+            <a:r>
+              <a:rPr sz="1700">
+                <a:solidFill>
+                  <a:srgbClr val="FBFCFD"/>
+                </a:solidFill>
+              </a:rPr>
+              <a:t> → menor recombinación → mayor V</a:t>
+            </a:r>
+            <a:r>
               <a:rPr sz="1300">
                 <a:solidFill>
                   <a:srgbClr val="FBFCFD"/>
                 </a:solidFill>
               </a:rPr>
-              <a:t> de HIT es </a:t>
-            </a:r>
-            <a:r>
-              <a:rPr sz="1300" b="1">
-                <a:solidFill>
-                  <a:srgbClr val="FBFCFD"/>
-                </a:solidFill>
-              </a:rPr>
-              <a:t>un orden de magnitud menor</a:t>
-            </a:r>
-            <a:r>
-              <a:rPr sz="1300">
-                <a:solidFill>
-                  <a:srgbClr val="FBFCFD"/>
-                </a:solidFill>
-              </a:rPr>
-              <a:t> → menor recombinación → mayor V</a:t>
-            </a:r>
-            <a:r>
-              <a:rPr sz="900">
-                <a:solidFill>
-                  <a:srgbClr val="FBFCFD"/>
-                </a:solidFill>
-              </a:rPr>
               <a:t>oc</a:t>
             </a:r>
             <a:r>
-              <a:rPr sz="1300">
+              <a:rPr sz="1700">
                 <a:solidFill>
                   <a:srgbClr val="FBFCFD"/>
                 </a:solidFill>
@@ -8318,27 +8318,27 @@
           <a:p>
             <a:pPr algn="l">
               <a:lnSpc>
-                <a:spcPct val="110000"/>
+                <a:spcPct val="115000"/>
               </a:lnSpc>
             </a:pPr>
             <a:r>
+              <a:rPr sz="1700">
+                <a:solidFill>
+                  <a:srgbClr val="FBFCFD"/>
+                </a:solidFill>
+              </a:rPr>
+              <a:t>• R</a:t>
+            </a:r>
+            <a:r>
               <a:rPr sz="1300">
                 <a:solidFill>
                   <a:srgbClr val="FBFCFD"/>
                 </a:solidFill>
               </a:rPr>
-              <a:t>• R</a:t>
-            </a:r>
-            <a:r>
-              <a:rPr sz="900">
-                <a:solidFill>
-                  <a:srgbClr val="FBFCFD"/>
-                </a:solidFill>
-              </a:rPr>
               <a:t>sh</a:t>
             </a:r>
             <a:r>
-              <a:rPr sz="1300">
+              <a:rPr sz="1700">
                 <a:solidFill>
                   <a:srgbClr val="FBFCFD"/>
                 </a:solidFill>
@@ -8555,8 +8555,8 @@
         </p:blipFill>
         <p:spPr>
           <a:xfrm>
-            <a:off x="1256561" y="1234440"/>
-            <a:ext cx="9678572" cy="3931920"/>
+            <a:off x="1762998" y="1234440"/>
+            <a:ext cx="8665698" cy="3520440"/>
           </a:xfrm>
           <a:prstGeom prst="rect">
             <a:avLst/>
@@ -8571,8 +8571,8 @@
         </p:nvSpPr>
         <p:spPr>
           <a:xfrm>
-            <a:off x="365760" y="5212080"/>
-            <a:ext cx="11460175" cy="1234440"/>
+            <a:off x="365760" y="4846320"/>
+            <a:ext cx="11460175" cy="1554480"/>
           </a:xfrm>
           <a:prstGeom prst="rect">
             <a:avLst/>
@@ -8616,8 +8616,8 @@
         </p:nvSpPr>
         <p:spPr>
           <a:xfrm>
-            <a:off x="548640" y="5248656"/>
-            <a:ext cx="11094415" cy="1161288"/>
+            <a:off x="548640" y="4882896"/>
+            <a:ext cx="11094415" cy="1481328"/>
           </a:xfrm>
           <a:prstGeom prst="rect">
             <a:avLst/>
@@ -8636,7 +8636,7 @@
               </a:lnSpc>
             </a:pPr>
             <a:r>
-              <a:rPr sz="1750" b="1">
+              <a:rPr sz="1700" b="1">
                 <a:solidFill>
                   <a:srgbClr val="FBFCFD"/>
                 </a:solidFill>
@@ -8644,7 +8644,7 @@
               <a:t>Cálculo de la producción eléctrica anual:</a:t>
             </a:r>
             <a:r>
-              <a:rPr sz="1750">
+              <a:rPr sz="1700">
                 <a:solidFill>
                   <a:srgbClr val="FBFCFD"/>
                 </a:solidFill>
@@ -8995,7 +8995,7 @@
               </a:lnSpc>
             </a:pPr>
             <a:r>
-              <a:rPr sz="1700">
+              <a:rPr sz="1800">
                 <a:solidFill>
                   <a:srgbClr val="FBFCFD"/>
                 </a:solidFill>
@@ -9003,7 +9003,7 @@
               <a:t>• </a:t>
             </a:r>
             <a:r>
-              <a:rPr sz="1700" b="1">
+              <a:rPr sz="1800" b="1">
                 <a:solidFill>
                   <a:srgbClr val="FBFCFD"/>
                 </a:solidFill>
@@ -9011,7 +9011,7 @@
               <a:t>Irradiación excepcional:</a:t>
             </a:r>
             <a:r>
-              <a:rPr sz="1700">
+              <a:rPr sz="1800">
                 <a:solidFill>
                   <a:srgbClr val="FBFCFD"/>
                 </a:solidFill>
@@ -9033,7 +9033,7 @@
               </a:lnSpc>
             </a:pPr>
             <a:r>
-              <a:rPr sz="1700">
+              <a:rPr sz="1800">
                 <a:solidFill>
                   <a:srgbClr val="FBFCFD"/>
                 </a:solidFill>
@@ -9041,7 +9041,7 @@
               <a:t>• </a:t>
             </a:r>
             <a:r>
-              <a:rPr sz="1700" b="1">
+              <a:rPr sz="1800" b="1">
                 <a:solidFill>
                   <a:srgbClr val="FBFCFD"/>
                 </a:solidFill>
@@ -9049,7 +9049,7 @@
               <a:t>Cielos limpios y altitud:</a:t>
             </a:r>
             <a:r>
-              <a:rPr sz="1700">
+              <a:rPr sz="1800">
                 <a:solidFill>
                   <a:srgbClr val="FBFCFD"/>
                 </a:solidFill>
@@ -9071,7 +9071,7 @@
               </a:lnSpc>
             </a:pPr>
             <a:r>
-              <a:rPr sz="1700">
+              <a:rPr sz="1800">
                 <a:solidFill>
                   <a:srgbClr val="FBFCFD"/>
                 </a:solidFill>
@@ -9079,7 +9079,7 @@
               <a:t>• </a:t>
             </a:r>
             <a:r>
-              <a:rPr sz="1700" b="1">
+              <a:rPr sz="1800" b="1">
                 <a:solidFill>
                   <a:srgbClr val="FBFCFD"/>
                 </a:solidFill>
@@ -9087,7 +9087,7 @@
               <a:t>Sitio simulado:</a:t>
             </a:r>
             <a:r>
-              <a:rPr sz="1700">
+              <a:rPr sz="1800">
                 <a:solidFill>
                   <a:srgbClr val="FBFCFD"/>
                 </a:solidFill>
@@ -9109,7 +9109,7 @@
               </a:lnSpc>
             </a:pPr>
             <a:r>
-              <a:rPr sz="1700">
+              <a:rPr sz="1800">
                 <a:solidFill>
                   <a:srgbClr val="FBFCFD"/>
                 </a:solidFill>
@@ -9117,7 +9117,7 @@
               <a:t>• </a:t>
             </a:r>
             <a:r>
-              <a:rPr sz="1700" b="1">
+              <a:rPr sz="1800" b="1">
                 <a:solidFill>
                   <a:srgbClr val="FBFCFD"/>
                 </a:solidFill>
@@ -9125,7 +9125,7 @@
               <a:t>Base experimental:</a:t>
             </a:r>
             <a:r>
-              <a:rPr sz="1700">
+              <a:rPr sz="1800">
                 <a:solidFill>
                   <a:srgbClr val="FBFCFD"/>
                 </a:solidFill>
@@ -9285,7 +9285,7 @@
               </a:lnSpc>
             </a:pPr>
             <a:r>
-              <a:rPr sz="1700">
+              <a:rPr sz="1800">
                 <a:solidFill>
                   <a:srgbClr val="FBFCFD"/>
                 </a:solidFill>
@@ -9293,7 +9293,7 @@
               <a:t>• </a:t>
             </a:r>
             <a:r>
-              <a:rPr sz="1700" b="1">
+              <a:rPr sz="1800" b="1">
                 <a:solidFill>
                   <a:srgbClr val="FBFCFD"/>
                 </a:solidFill>
@@ -9301,7 +9301,7 @@
               <a:t>Calentamiento severo:</a:t>
             </a:r>
             <a:r>
-              <a:rPr sz="1700">
+              <a:rPr sz="1800">
                 <a:solidFill>
                   <a:srgbClr val="FBFCFD"/>
                 </a:solidFill>
@@ -9323,7 +9323,7 @@
               </a:lnSpc>
             </a:pPr>
             <a:r>
-              <a:rPr sz="1700">
+              <a:rPr sz="1800">
                 <a:solidFill>
                   <a:srgbClr val="FBFCFD"/>
                 </a:solidFill>
@@ -9331,7 +9331,7 @@
               <a:t>• </a:t>
             </a:r>
             <a:r>
-              <a:rPr sz="1700" b="1">
+              <a:rPr sz="1800" b="1">
                 <a:solidFill>
                   <a:srgbClr val="FBFCFD"/>
                 </a:solidFill>
@@ -9339,7 +9339,7 @@
               <a:t>Degradación térmica:</a:t>
             </a:r>
             <a:r>
-              <a:rPr sz="1700">
+              <a:rPr sz="1800">
                 <a:solidFill>
                   <a:srgbClr val="FBFCFD"/>
                 </a:solidFill>
@@ -9347,7 +9347,7 @@
               <a:t> La potencia máxima y el voltaje de circuito abierto caen al aumentar la temperatura de celda (T</a:t>
             </a:r>
             <a:r>
-              <a:rPr sz="1300">
+              <a:rPr sz="1400">
                 <a:solidFill>
                   <a:srgbClr val="FBFCFD"/>
                 </a:solidFill>
@@ -9355,7 +9355,7 @@
               <a:t>c</a:t>
             </a:r>
             <a:r>
-              <a:rPr sz="1700">
+              <a:rPr sz="1800">
                 <a:solidFill>
                   <a:srgbClr val="FBFCFD"/>
                 </a:solidFill>
@@ -9377,7 +9377,7 @@
               </a:lnSpc>
             </a:pPr>
             <a:r>
-              <a:rPr sz="1700">
+              <a:rPr sz="1800">
                 <a:solidFill>
                   <a:srgbClr val="FBFCFD"/>
                 </a:solidFill>
@@ -9385,7 +9385,7 @@
               <a:t>• </a:t>
             </a:r>
             <a:r>
-              <a:rPr sz="1700" b="1">
+              <a:rPr sz="1800" b="1">
                 <a:solidFill>
                   <a:srgbClr val="FBFCFD"/>
                 </a:solidFill>
@@ -9393,7 +9393,7 @@
               <a:t>Objetivo:</a:t>
             </a:r>
             <a:r>
-              <a:rPr sz="1700">
+              <a:rPr sz="1800">
                 <a:solidFill>
                   <a:srgbClr val="FBFCFD"/>
                 </a:solidFill>
@@ -9401,7 +9401,7 @@
               <a:t> Modelar dinámicamente registro a registro (cadencia 5 min) y cuantificar qué tecnología — </a:t>
             </a:r>
             <a:r>
-              <a:rPr sz="1700" b="1">
+              <a:rPr sz="1800" b="1">
                 <a:solidFill>
                   <a:srgbClr val="FBFCFD"/>
                 </a:solidFill>
@@ -9409,7 +9409,7 @@
               <a:t>m-Si</a:t>
             </a:r>
             <a:r>
-              <a:rPr sz="1700">
+              <a:rPr sz="1800">
                 <a:solidFill>
                   <a:srgbClr val="FBFCFD"/>
                 </a:solidFill>
@@ -9417,7 +9417,7 @@
               <a:t> o </a:t>
             </a:r>
             <a:r>
-              <a:rPr sz="1700" b="1">
+              <a:rPr sz="1800" b="1">
                 <a:solidFill>
                   <a:srgbClr val="FBFCFD"/>
                 </a:solidFill>
@@ -9425,7 +9425,7 @@
               <a:t>HIT</a:t>
             </a:r>
             <a:r>
-              <a:rPr sz="1700">
+              <a:rPr sz="1800">
                 <a:solidFill>
                   <a:srgbClr val="FBFCFD"/>
                 </a:solidFill>
@@ -9447,7 +9447,7 @@
               </a:lnSpc>
             </a:pPr>
             <a:r>
-              <a:rPr sz="1700">
+              <a:rPr sz="1800">
                 <a:solidFill>
                   <a:srgbClr val="FBFCFD"/>
                 </a:solidFill>
@@ -9455,7 +9455,7 @@
               <a:t>• </a:t>
             </a:r>
             <a:r>
-              <a:rPr sz="1700" b="1">
+              <a:rPr sz="1800" b="1">
                 <a:solidFill>
                   <a:srgbClr val="FBFCFD"/>
                 </a:solidFill>
@@ -9463,7 +9463,7 @@
               <a:t>Pregunta guía:</a:t>
             </a:r>
             <a:r>
-              <a:rPr sz="1700">
+              <a:rPr sz="1800">
                 <a:solidFill>
                   <a:srgbClr val="FBFCFD"/>
                 </a:solidFill>
@@ -9960,7 +9960,7 @@
               </a:lnSpc>
             </a:pPr>
             <a:r>
-              <a:rPr sz="1400" b="1">
+              <a:rPr sz="1750" b="1">
                 <a:solidFill>
                   <a:srgbClr val="FBFCFD"/>
                 </a:solidFill>
@@ -9968,7 +9968,7 @@
               <a:t>65–73 °C de operación recurrente</a:t>
             </a:r>
             <a:r>
-              <a:rPr sz="1400">
+              <a:rPr sz="1750">
                 <a:solidFill>
                   <a:srgbClr val="FBFCFD"/>
                 </a:solidFill>
@@ -10124,11 +10124,11 @@
           <a:p>
             <a:pPr algn="l">
               <a:lnSpc>
-                <a:spcPct val="110000"/>
+                <a:spcPct val="112000"/>
               </a:lnSpc>
             </a:pPr>
             <a:r>
-              <a:rPr sz="1350">
+              <a:rPr sz="1700">
                 <a:solidFill>
                   <a:srgbClr val="FBFCFD"/>
                 </a:solidFill>
@@ -10136,7 +10136,7 @@
               <a:t>• </a:t>
             </a:r>
             <a:r>
-              <a:rPr sz="1350" b="1">
+              <a:rPr sz="1700" b="1">
                 <a:solidFill>
                   <a:srgbClr val="FBFCFD"/>
                 </a:solidFill>
@@ -10144,7 +10144,7 @@
               <a:t>Estrés térmico evidenciado:</a:t>
             </a:r>
             <a:r>
-              <a:rPr sz="1350">
+              <a:rPr sz="1700">
                 <a:solidFill>
                   <a:srgbClr val="FBFCFD"/>
                 </a:solidFill>
@@ -10155,18 +10155,18 @@
           <a:p>
             <a:pPr algn="l">
               <a:lnSpc>
-                <a:spcPct val="110000"/>
+                <a:spcPct val="112000"/>
               </a:lnSpc>
             </a:pPr>
           </a:p>
           <a:p>
             <a:pPr algn="l">
               <a:lnSpc>
-                <a:spcPct val="110000"/>
+                <a:spcPct val="112000"/>
               </a:lnSpc>
             </a:pPr>
             <a:r>
-              <a:rPr sz="1350">
+              <a:rPr sz="1700">
                 <a:solidFill>
                   <a:srgbClr val="FBFCFD"/>
                 </a:solidFill>
@@ -10174,7 +10174,7 @@
               <a:t>• </a:t>
             </a:r>
             <a:r>
-              <a:rPr sz="1350" b="1">
+              <a:rPr sz="1700" b="1">
                 <a:solidFill>
                   <a:srgbClr val="FBFCFD"/>
                 </a:solidFill>
@@ -10182,7 +10182,7 @@
               <a:t>Enfriamiento convectivo limitado:</a:t>
             </a:r>
             <a:r>
-              <a:rPr sz="1350">
+              <a:rPr sz="1700">
                 <a:solidFill>
                   <a:srgbClr val="FBFCFD"/>
                 </a:solidFill>
@@ -10193,18 +10193,18 @@
           <a:p>
             <a:pPr algn="l">
               <a:lnSpc>
-                <a:spcPct val="110000"/>
+                <a:spcPct val="112000"/>
               </a:lnSpc>
             </a:pPr>
           </a:p>
           <a:p>
             <a:pPr algn="l">
               <a:lnSpc>
-                <a:spcPct val="110000"/>
+                <a:spcPct val="112000"/>
               </a:lnSpc>
             </a:pPr>
             <a:r>
-              <a:rPr sz="1350">
+              <a:rPr sz="1700">
                 <a:solidFill>
                   <a:srgbClr val="FBFCFD"/>
                 </a:solidFill>
@@ -10212,7 +10212,7 @@
               <a:t>• </a:t>
             </a:r>
             <a:r>
-              <a:rPr sz="1350" b="1">
+              <a:rPr sz="1700" b="1">
                 <a:solidFill>
                   <a:srgbClr val="FBFCFD"/>
                 </a:solidFill>
@@ -10220,7 +10220,7 @@
               <a:t>Consecuencia en voltaje [De Soto et al., 2006]:</a:t>
             </a:r>
             <a:r>
-              <a:rPr sz="1350">
+              <a:rPr sz="1700">
                 <a:solidFill>
                   <a:srgbClr val="FBFCFD"/>
                 </a:solidFill>
@@ -10228,7 +10228,7 @@
               <a:t> el calentamiento eleva I</a:t>
             </a:r>
             <a:r>
-              <a:rPr sz="950">
+              <a:rPr sz="1300">
                 <a:solidFill>
                   <a:srgbClr val="FBFCFD"/>
                 </a:solidFill>
@@ -10236,7 +10236,7 @@
               <a:t>0</a:t>
             </a:r>
             <a:r>
-              <a:rPr sz="1350">
+              <a:rPr sz="1700">
                 <a:solidFill>
                   <a:srgbClr val="FBFCFD"/>
                 </a:solidFill>
@@ -10244,7 +10244,7 @@
               <a:t> exponencialmente, deprimiendo V</a:t>
             </a:r>
             <a:r>
-              <a:rPr sz="950">
+              <a:rPr sz="1300">
                 <a:solidFill>
                   <a:srgbClr val="FBFCFD"/>
                 </a:solidFill>
@@ -10252,7 +10252,7 @@
               <a:t>oc</a:t>
             </a:r>
             <a:r>
-              <a:rPr sz="1350">
+              <a:rPr sz="1700">
                 <a:solidFill>
                   <a:srgbClr val="FBFCFD"/>
                 </a:solidFill>
@@ -10765,7 +10765,7 @@
               </a:lnSpc>
             </a:pPr>
             <a:r>
-              <a:rPr sz="1400" b="1">
+              <a:rPr sz="1750" b="1">
                 <a:solidFill>
                   <a:srgbClr val="FBFCFD"/>
                 </a:solidFill>
@@ -10773,7 +10773,7 @@
               <a:t>R² ≈ 0.99</a:t>
             </a:r>
             <a:r>
-              <a:rPr sz="1400">
+              <a:rPr sz="1750">
                 <a:solidFill>
                   <a:srgbClr val="FBFCFD"/>
                 </a:solidFill>
@@ -10781,7 +10781,7 @@
               <a:t>  |  RMSE ≈ 3 % de P</a:t>
             </a:r>
             <a:r>
-              <a:rPr sz="1000">
+              <a:rPr sz="1350">
                 <a:solidFill>
                   <a:srgbClr val="FBFCFD"/>
                 </a:solidFill>
@@ -10789,7 +10789,7 @@
               <a:t>STC</a:t>
             </a:r>
             <a:r>
-              <a:rPr sz="1400">
+              <a:rPr sz="1750">
                 <a:solidFill>
                   <a:srgbClr val="FBFCFD"/>
                 </a:solidFill>
@@ -10945,11 +10945,11 @@
           <a:p>
             <a:pPr algn="l">
               <a:lnSpc>
-                <a:spcPct val="110000"/>
+                <a:spcPct val="112000"/>
               </a:lnSpc>
             </a:pPr>
             <a:r>
-              <a:rPr sz="1350">
+              <a:rPr sz="1700">
                 <a:solidFill>
                   <a:srgbClr val="FBFCFD"/>
                 </a:solidFill>
@@ -10957,7 +10957,7 @@
               <a:t>• </a:t>
             </a:r>
             <a:r>
-              <a:rPr sz="1350" b="1">
+              <a:rPr sz="1700" b="1">
                 <a:solidFill>
                   <a:srgbClr val="FBFCFD"/>
                 </a:solidFill>
@@ -10965,7 +10965,7 @@
               <a:t>Misma meteorología:</a:t>
             </a:r>
             <a:r>
-              <a:rPr sz="1350">
+              <a:rPr sz="1700">
                 <a:solidFill>
                   <a:srgbClr val="FBFCFD"/>
                 </a:solidFill>
@@ -10973,7 +10973,7 @@
               <a:t> cada punto compara la P</a:t>
             </a:r>
             <a:r>
-              <a:rPr sz="950">
+              <a:rPr sz="1300">
                 <a:solidFill>
                   <a:srgbClr val="FBFCFD"/>
                 </a:solidFill>
@@ -10981,7 +10981,7 @@
               <a:t>mp</a:t>
             </a:r>
             <a:r>
-              <a:rPr sz="1350">
+              <a:rPr sz="1700">
                 <a:solidFill>
                   <a:srgbClr val="FBFCFD"/>
                 </a:solidFill>
@@ -10989,7 +10989,7 @@
               <a:t> </a:t>
             </a:r>
             <a:r>
-              <a:rPr sz="1350" b="1">
+              <a:rPr sz="1700" b="1">
                 <a:solidFill>
                   <a:srgbClr val="FBFCFD"/>
                 </a:solidFill>
@@ -10997,7 +10997,7 @@
               <a:t>medida</a:t>
             </a:r>
             <a:r>
-              <a:rPr sz="1350">
+              <a:rPr sz="1700">
                 <a:solidFill>
                   <a:srgbClr val="FBFCFD"/>
                 </a:solidFill>
@@ -11005,7 +11005,7 @@
               <a:t> por el trazador NREL con la </a:t>
             </a:r>
             <a:r>
-              <a:rPr sz="1350" b="1">
+              <a:rPr sz="1700" b="1">
                 <a:solidFill>
                   <a:srgbClr val="FBFCFD"/>
                 </a:solidFill>
@@ -11013,7 +11013,7 @@
               <a:t>simulada</a:t>
             </a:r>
             <a:r>
-              <a:rPr sz="1350">
+              <a:rPr sz="1700">
                 <a:solidFill>
                   <a:srgbClr val="FBFCFD"/>
                 </a:solidFill>
@@ -11021,7 +11021,7 @@
               <a:t> por el SDM bajo el mismo G y T</a:t>
             </a:r>
             <a:r>
-              <a:rPr sz="950">
+              <a:rPr sz="1300">
                 <a:solidFill>
                   <a:srgbClr val="FBFCFD"/>
                 </a:solidFill>
@@ -11029,7 +11029,7 @@
               <a:t>c</a:t>
             </a:r>
             <a:r>
-              <a:rPr sz="1350">
+              <a:rPr sz="1700">
                 <a:solidFill>
                   <a:srgbClr val="FBFCFD"/>
                 </a:solidFill>
@@ -11040,18 +11040,18 @@
           <a:p>
             <a:pPr algn="l">
               <a:lnSpc>
-                <a:spcPct val="110000"/>
+                <a:spcPct val="112000"/>
               </a:lnSpc>
             </a:pPr>
           </a:p>
           <a:p>
             <a:pPr algn="l">
               <a:lnSpc>
-                <a:spcPct val="110000"/>
+                <a:spcPct val="112000"/>
               </a:lnSpc>
             </a:pPr>
             <a:r>
-              <a:rPr sz="1350">
+              <a:rPr sz="1700">
                 <a:solidFill>
                   <a:srgbClr val="FBFCFD"/>
                 </a:solidFill>
@@ -11059,7 +11059,7 @@
               <a:t>• </a:t>
             </a:r>
             <a:r>
-              <a:rPr sz="1350" b="1">
+              <a:rPr sz="1700" b="1">
                 <a:solidFill>
                   <a:srgbClr val="FBFCFD"/>
                 </a:solidFill>
@@ -11067,7 +11067,7 @@
               <a:t>Fidelidad del circuito:</a:t>
             </a:r>
             <a:r>
-              <a:rPr sz="1350">
+              <a:rPr sz="1700">
                 <a:solidFill>
                   <a:srgbClr val="FBFCFD"/>
                 </a:solidFill>
@@ -11078,18 +11078,18 @@
           <a:p>
             <a:pPr algn="l">
               <a:lnSpc>
-                <a:spcPct val="110000"/>
+                <a:spcPct val="112000"/>
               </a:lnSpc>
             </a:pPr>
           </a:p>
           <a:p>
             <a:pPr algn="l">
               <a:lnSpc>
-                <a:spcPct val="110000"/>
+                <a:spcPct val="112000"/>
               </a:lnSpc>
             </a:pPr>
             <a:r>
-              <a:rPr sz="1350">
+              <a:rPr sz="1700">
                 <a:solidFill>
                   <a:srgbClr val="FBFCFD"/>
                 </a:solidFill>
@@ -11097,7 +11097,7 @@
               <a:t>• </a:t>
             </a:r>
             <a:r>
-              <a:rPr sz="1350" b="1">
+              <a:rPr sz="1700" b="1">
                 <a:solidFill>
                   <a:srgbClr val="FBFCFD"/>
                 </a:solidFill>
@@ -11105,7 +11105,7 @@
               <a:t>Zonas de discrepancia:</a:t>
             </a:r>
             <a:r>
-              <a:rPr sz="1350">
+              <a:rPr sz="1700">
                 <a:solidFill>
                   <a:srgbClr val="FBFCFD"/>
                 </a:solidFill>
@@ -11113,7 +11113,7 @@
               <a:t> leve dispersión a baja irradiancia por la idealización empírica de R</a:t>
             </a:r>
             <a:r>
-              <a:rPr sz="950">
+              <a:rPr sz="1300">
                 <a:solidFill>
                   <a:srgbClr val="FBFCFD"/>
                 </a:solidFill>
@@ -11121,7 +11121,7 @@
               <a:t>sh</a:t>
             </a:r>
             <a:r>
-              <a:rPr sz="1350">
+              <a:rPr sz="1700">
                 <a:solidFill>
                   <a:srgbClr val="FBFCFD"/>
                 </a:solidFill>
@@ -11500,11 +11500,11 @@
           <a:p>
             <a:pPr algn="l">
               <a:lnSpc>
-                <a:spcPct val="110000"/>
+                <a:spcPct val="112000"/>
               </a:lnSpc>
             </a:pPr>
             <a:r>
-              <a:rPr sz="1350">
+              <a:rPr sz="1700">
                 <a:solidFill>
                   <a:srgbClr val="FBFCFD"/>
                 </a:solidFill>
@@ -11512,7 +11512,7 @@
               <a:t>• </a:t>
             </a:r>
             <a:r>
-              <a:rPr sz="1350" b="1">
+              <a:rPr sz="1700" b="1">
                 <a:solidFill>
                   <a:srgbClr val="FBFCFD"/>
                 </a:solidFill>
@@ -11520,7 +11520,7 @@
               <a:t>Alta correlación paramétrica [De Soto et al., 2006]:</a:t>
             </a:r>
             <a:r>
-              <a:rPr sz="1350">
+              <a:rPr sz="1700">
                 <a:solidFill>
                   <a:srgbClr val="FBFCFD"/>
                 </a:solidFill>
@@ -11528,7 +11528,7 @@
               <a:t> R</a:t>
             </a:r>
             <a:r>
-              <a:rPr sz="950">
+              <a:rPr sz="1300">
                 <a:solidFill>
                   <a:srgbClr val="FBFCFD"/>
                 </a:solidFill>
@@ -11536,7 +11536,7 @@
               <a:t>s</a:t>
             </a:r>
             <a:r>
-              <a:rPr sz="1350">
+              <a:rPr sz="1700">
                 <a:solidFill>
                   <a:srgbClr val="FBFCFD"/>
                 </a:solidFill>
@@ -11547,18 +11547,18 @@
           <a:p>
             <a:pPr algn="l">
               <a:lnSpc>
-                <a:spcPct val="110000"/>
+                <a:spcPct val="112000"/>
               </a:lnSpc>
             </a:pPr>
           </a:p>
           <a:p>
             <a:pPr algn="l">
               <a:lnSpc>
-                <a:spcPct val="110000"/>
+                <a:spcPct val="112000"/>
               </a:lnSpc>
             </a:pPr>
             <a:r>
-              <a:rPr sz="1350">
+              <a:rPr sz="1700">
                 <a:solidFill>
                   <a:srgbClr val="FBFCFD"/>
                 </a:solidFill>
@@ -11566,7 +11566,7 @@
               <a:t>• </a:t>
             </a:r>
             <a:r>
-              <a:rPr sz="1350" b="1">
+              <a:rPr sz="1700" b="1">
                 <a:solidFill>
                   <a:srgbClr val="FBFCFD"/>
                 </a:solidFill>
@@ -11574,7 +11574,7 @@
               <a:t>Problema mal condicionado:</a:t>
             </a:r>
             <a:r>
-              <a:rPr sz="1350">
+              <a:rPr sz="1700">
                 <a:solidFill>
                   <a:srgbClr val="FBFCFD"/>
                 </a:solidFill>
@@ -11582,7 +11582,7 @@
               <a:t> múltiples pares (R</a:t>
             </a:r>
             <a:r>
-              <a:rPr sz="950">
+              <a:rPr sz="1300">
                 <a:solidFill>
                   <a:srgbClr val="FBFCFD"/>
                 </a:solidFill>
@@ -11590,7 +11590,7 @@
               <a:t>s</a:t>
             </a:r>
             <a:r>
-              <a:rPr sz="1350">
+              <a:rPr sz="1700">
                 <a:solidFill>
                   <a:srgbClr val="FBFCFD"/>
                 </a:solidFill>
@@ -11601,18 +11601,18 @@
           <a:p>
             <a:pPr algn="l">
               <a:lnSpc>
-                <a:spcPct val="110000"/>
+                <a:spcPct val="112000"/>
               </a:lnSpc>
             </a:pPr>
           </a:p>
           <a:p>
             <a:pPr algn="l">
               <a:lnSpc>
-                <a:spcPct val="110000"/>
+                <a:spcPct val="112000"/>
               </a:lnSpc>
             </a:pPr>
             <a:r>
-              <a:rPr sz="1350">
+              <a:rPr sz="1700">
                 <a:solidFill>
                   <a:srgbClr val="FBFCFD"/>
                 </a:solidFill>
@@ -11620,7 +11620,7 @@
               <a:t>• </a:t>
             </a:r>
             <a:r>
-              <a:rPr sz="1350" b="1">
+              <a:rPr sz="1700" b="1">
                 <a:solidFill>
                   <a:srgbClr val="FBFCFD"/>
                 </a:solidFill>
@@ -11628,7 +11628,7 @@
               <a:t>Mitigación aplicada:</a:t>
             </a:r>
             <a:r>
-              <a:rPr sz="1350">
+              <a:rPr sz="1700">
                 <a:solidFill>
                   <a:srgbClr val="FBFCFD"/>
                 </a:solidFill>
@@ -11636,7 +11636,7 @@
               <a:t> bounds estrictos en el optimizador — R</a:t>
             </a:r>
             <a:r>
-              <a:rPr sz="950">
+              <a:rPr sz="1300">
                 <a:solidFill>
                   <a:srgbClr val="FBFCFD"/>
                 </a:solidFill>
@@ -11644,7 +11644,7 @@
               <a:t>s</a:t>
             </a:r>
             <a:r>
-              <a:rPr sz="1350">
+              <a:rPr sz="1700">
                 <a:solidFill>
                   <a:srgbClr val="FBFCFD"/>
                 </a:solidFill>
@@ -11800,11 +11800,11 @@
           <a:p>
             <a:pPr algn="l">
               <a:lnSpc>
-                <a:spcPct val="110000"/>
+                <a:spcPct val="112000"/>
               </a:lnSpc>
             </a:pPr>
             <a:r>
-              <a:rPr sz="1350">
+              <a:rPr sz="1700">
                 <a:solidFill>
                   <a:srgbClr val="FBFCFD"/>
                 </a:solidFill>
@@ -11812,7 +11812,7 @@
               <a:t>• </a:t>
             </a:r>
             <a:r>
-              <a:rPr sz="1350" b="1">
+              <a:rPr sz="1700" b="1">
                 <a:solidFill>
                   <a:srgbClr val="FBFCFD"/>
                 </a:solidFill>
@@ -11820,7 +11820,7 @@
               <a:t>R</a:t>
             </a:r>
             <a:r>
-              <a:rPr sz="950" b="1">
+              <a:rPr sz="1300" b="1">
                 <a:solidFill>
                   <a:srgbClr val="FBFCFD"/>
                 </a:solidFill>
@@ -11828,7 +11828,7 @@
               <a:t>sh</a:t>
             </a:r>
             <a:r>
-              <a:rPr sz="1350" b="1">
+              <a:rPr sz="1700" b="1">
                 <a:solidFill>
                   <a:srgbClr val="FBFCFD"/>
                 </a:solidFill>
@@ -11836,7 +11836,7 @@
               <a:t> e irradiancia:</a:t>
             </a:r>
             <a:r>
-              <a:rPr sz="1350">
+              <a:rPr sz="1700">
                 <a:solidFill>
                   <a:srgbClr val="FBFCFD"/>
                 </a:solidFill>
@@ -11844,7 +11844,7 @@
               <a:t> la relación R</a:t>
             </a:r>
             <a:r>
-              <a:rPr sz="950">
+              <a:rPr sz="1300">
                 <a:solidFill>
                   <a:srgbClr val="FBFCFD"/>
                 </a:solidFill>
@@ -11852,7 +11852,7 @@
               <a:t>sh</a:t>
             </a:r>
             <a:r>
-              <a:rPr sz="1350">
+              <a:rPr sz="1700">
                 <a:solidFill>
                   <a:srgbClr val="FBFCFD"/>
                 </a:solidFill>
@@ -11860,7 +11860,7 @@
               <a:t> = R</a:t>
             </a:r>
             <a:r>
-              <a:rPr sz="950">
+              <a:rPr sz="1300">
                 <a:solidFill>
                   <a:srgbClr val="FBFCFD"/>
                 </a:solidFill>
@@ -11868,7 +11868,7 @@
               <a:t>sh,ref</a:t>
             </a:r>
             <a:r>
-              <a:rPr sz="1350">
+              <a:rPr sz="1700">
                 <a:solidFill>
                   <a:srgbClr val="FBFCFD"/>
                 </a:solidFill>
@@ -11876,7 +11876,7 @@
               <a:t>·(S</a:t>
             </a:r>
             <a:r>
-              <a:rPr sz="950">
+              <a:rPr sz="1300">
                 <a:solidFill>
                   <a:srgbClr val="FBFCFD"/>
                 </a:solidFill>
@@ -11884,7 +11884,7 @@
               <a:t>ref</a:t>
             </a:r>
             <a:r>
-              <a:rPr sz="1350">
+              <a:rPr sz="1700">
                 <a:solidFill>
                   <a:srgbClr val="FBFCFD"/>
                 </a:solidFill>
@@ -11895,18 +11895,18 @@
           <a:p>
             <a:pPr algn="l">
               <a:lnSpc>
-                <a:spcPct val="110000"/>
+                <a:spcPct val="112000"/>
               </a:lnSpc>
             </a:pPr>
           </a:p>
           <a:p>
             <a:pPr algn="l">
               <a:lnSpc>
-                <a:spcPct val="110000"/>
+                <a:spcPct val="112000"/>
               </a:lnSpc>
             </a:pPr>
             <a:r>
-              <a:rPr sz="1350">
+              <a:rPr sz="1700">
                 <a:solidFill>
                   <a:srgbClr val="FBFCFD"/>
                 </a:solidFill>
@@ -11914,7 +11914,7 @@
               <a:t>• </a:t>
             </a:r>
             <a:r>
-              <a:rPr sz="1350" b="1">
+              <a:rPr sz="1700" b="1">
                 <a:solidFill>
                   <a:srgbClr val="FBFCFD"/>
                 </a:solidFill>
@@ -11922,7 +11922,7 @@
               <a:t>R</a:t>
             </a:r>
             <a:r>
-              <a:rPr sz="950" b="1">
+              <a:rPr sz="1300" b="1">
                 <a:solidFill>
                   <a:srgbClr val="FBFCFD"/>
                 </a:solidFill>
@@ -11930,7 +11930,7 @@
               <a:t>s</a:t>
             </a:r>
             <a:r>
-              <a:rPr sz="1350" b="1">
+              <a:rPr sz="1700" b="1">
                 <a:solidFill>
                   <a:srgbClr val="FBFCFD"/>
                 </a:solidFill>
@@ -11938,7 +11938,7 @@
               <a:t> constante con la temperatura:</a:t>
             </a:r>
             <a:r>
-              <a:rPr sz="1350">
+              <a:rPr sz="1700">
                 <a:solidFill>
                   <a:srgbClr val="FBFCFD"/>
                 </a:solidFill>
@@ -11946,7 +11946,7 @@
               <a:t> ignora el cambio de resistividad del semiconductor con T</a:t>
             </a:r>
             <a:r>
-              <a:rPr sz="950">
+              <a:rPr sz="1300">
                 <a:solidFill>
                   <a:srgbClr val="FBFCFD"/>
                 </a:solidFill>
@@ -11954,7 +11954,7 @@
               <a:t>c</a:t>
             </a:r>
             <a:r>
-              <a:rPr sz="1350">
+              <a:rPr sz="1700">
                 <a:solidFill>
                   <a:srgbClr val="FBFCFD"/>
                 </a:solidFill>
@@ -11965,18 +11965,18 @@
           <a:p>
             <a:pPr algn="l">
               <a:lnSpc>
-                <a:spcPct val="110000"/>
+                <a:spcPct val="112000"/>
               </a:lnSpc>
             </a:pPr>
           </a:p>
           <a:p>
             <a:pPr algn="l">
               <a:lnSpc>
-                <a:spcPct val="110000"/>
+                <a:spcPct val="112000"/>
               </a:lnSpc>
             </a:pPr>
             <a:r>
-              <a:rPr sz="1350">
+              <a:rPr sz="1700">
                 <a:solidFill>
                   <a:srgbClr val="FBFCFD"/>
                 </a:solidFill>
@@ -11984,7 +11984,7 @@
               <a:t>• </a:t>
             </a:r>
             <a:r>
-              <a:rPr sz="1350" b="1">
+              <a:rPr sz="1700" b="1">
                 <a:solidFill>
                   <a:srgbClr val="FBFCFD"/>
                 </a:solidFill>
@@ -11992,7 +11992,7 @@
               <a:t>Bandgap lineal con la temperatura:</a:t>
             </a:r>
             <a:r>
-              <a:rPr sz="1350">
+              <a:rPr sz="1700">
                 <a:solidFill>
                   <a:srgbClr val="FBFCFD"/>
                 </a:solidFill>
@@ -12000,7 +12000,7 @@
               <a:t> se asume dE</a:t>
             </a:r>
             <a:r>
-              <a:rPr sz="950">
+              <a:rPr sz="1300">
                 <a:solidFill>
                   <a:srgbClr val="FBFCFD"/>
                 </a:solidFill>
@@ -12008,7 +12008,7 @@
               <a:t>g</a:t>
             </a:r>
             <a:r>
-              <a:rPr sz="1350">
+              <a:rPr sz="1700">
                 <a:solidFill>
                   <a:srgbClr val="FBFCFD"/>
                 </a:solidFill>
@@ -12521,7 +12521,7 @@
               </a:lnSpc>
             </a:pPr>
             <a:r>
-              <a:rPr sz="1400">
+              <a:rPr sz="1750">
                 <a:solidFill>
                   <a:srgbClr val="FBFCFD"/>
                 </a:solidFill>
@@ -12529,7 +12529,7 @@
               <a:t>m-Si: </a:t>
             </a:r>
             <a:r>
-              <a:rPr sz="1400" b="1">
+              <a:rPr sz="1750" b="1">
                 <a:solidFill>
                   <a:srgbClr val="FBFCFD"/>
                 </a:solidFill>
@@ -12537,7 +12537,7 @@
               <a:t>−0.40 %/°C</a:t>
             </a:r>
             <a:r>
-              <a:rPr sz="1400">
+              <a:rPr sz="1750">
                 <a:solidFill>
                   <a:srgbClr val="FBFCFD"/>
                 </a:solidFill>
@@ -12552,7 +12552,7 @@
               </a:lnSpc>
             </a:pPr>
             <a:r>
-              <a:rPr sz="1400">
+              <a:rPr sz="1750">
                 <a:solidFill>
                   <a:srgbClr val="FBFCFD"/>
                 </a:solidFill>
@@ -12560,7 +12560,7 @@
               <a:t>HIT: </a:t>
             </a:r>
             <a:r>
-              <a:rPr sz="1400" b="1">
+              <a:rPr sz="1750" b="1">
                 <a:solidFill>
                   <a:srgbClr val="FBFCFD"/>
                 </a:solidFill>
@@ -12568,7 +12568,7 @@
               <a:t>−0.26 %/°C</a:t>
             </a:r>
             <a:r>
-              <a:rPr sz="1400">
+              <a:rPr sz="1750">
                 <a:solidFill>
                   <a:srgbClr val="FBFCFD"/>
                 </a:solidFill>
@@ -12724,11 +12724,11 @@
           <a:p>
             <a:pPr algn="l">
               <a:lnSpc>
-                <a:spcPct val="110000"/>
+                <a:spcPct val="112000"/>
               </a:lnSpc>
             </a:pPr>
             <a:r>
-              <a:rPr sz="1350">
+              <a:rPr sz="1700">
                 <a:solidFill>
                   <a:srgbClr val="FBFCFD"/>
                 </a:solidFill>
@@ -12736,7 +12736,7 @@
               <a:t>• </a:t>
             </a:r>
             <a:r>
-              <a:rPr sz="1350" b="1">
+              <a:rPr sz="1700" b="1">
                 <a:solidFill>
                   <a:srgbClr val="FBFCFD"/>
                 </a:solidFill>
@@ -12744,7 +12744,7 @@
               <a:t>HIT (naranja):</a:t>
             </a:r>
             <a:r>
-              <a:rPr sz="1350">
+              <a:rPr sz="1700">
                 <a:solidFill>
                   <a:srgbClr val="FBFCFD"/>
                 </a:solidFill>
@@ -12755,18 +12755,18 @@
           <a:p>
             <a:pPr algn="l">
               <a:lnSpc>
-                <a:spcPct val="110000"/>
+                <a:spcPct val="112000"/>
               </a:lnSpc>
             </a:pPr>
           </a:p>
           <a:p>
             <a:pPr algn="l">
               <a:lnSpc>
-                <a:spcPct val="110000"/>
+                <a:spcPct val="112000"/>
               </a:lnSpc>
             </a:pPr>
             <a:r>
-              <a:rPr sz="1350">
+              <a:rPr sz="1700">
                 <a:solidFill>
                   <a:srgbClr val="FBFCFD"/>
                 </a:solidFill>
@@ -12774,7 +12774,7 @@
               <a:t>• </a:t>
             </a:r>
             <a:r>
-              <a:rPr sz="1350" b="1">
+              <a:rPr sz="1700" b="1">
                 <a:solidFill>
                   <a:srgbClr val="FBFCFD"/>
                 </a:solidFill>
@@ -12782,7 +12782,7 @@
               <a:t>m-Si (azul):</a:t>
             </a:r>
             <a:r>
-              <a:rPr sz="1350">
+              <a:rPr sz="1700">
                 <a:solidFill>
                   <a:srgbClr val="FBFCFD"/>
                 </a:solidFill>
@@ -12793,18 +12793,18 @@
           <a:p>
             <a:pPr algn="l">
               <a:lnSpc>
-                <a:spcPct val="110000"/>
+                <a:spcPct val="112000"/>
               </a:lnSpc>
             </a:pPr>
           </a:p>
           <a:p>
             <a:pPr algn="l">
               <a:lnSpc>
-                <a:spcPct val="110000"/>
+                <a:spcPct val="112000"/>
               </a:lnSpc>
             </a:pPr>
             <a:r>
-              <a:rPr sz="1350">
+              <a:rPr sz="1700">
                 <a:solidFill>
                   <a:srgbClr val="FBFCFD"/>
                 </a:solidFill>
@@ -12812,7 +12812,7 @@
               <a:t>• </a:t>
             </a:r>
             <a:r>
-              <a:rPr sz="1350" b="1">
+              <a:rPr sz="1700" b="1">
                 <a:solidFill>
                   <a:srgbClr val="FBFCFD"/>
                 </a:solidFill>
@@ -12820,7 +12820,7 @@
               <a:t>Consecuencia:</a:t>
             </a:r>
             <a:r>
-              <a:rPr sz="1350">
+              <a:rPr sz="1700">
                 <a:solidFill>
                   <a:srgbClr val="FBFCFD"/>
                 </a:solidFill>
@@ -13074,8 +13074,8 @@
         </p:nvSpPr>
         <p:spPr>
           <a:xfrm>
-            <a:off x="365760" y="1280160"/>
-            <a:ext cx="2613583" cy="658368"/>
+            <a:off x="365760" y="1261872"/>
+            <a:ext cx="2613583" cy="685800"/>
           </a:xfrm>
           <a:prstGeom prst="rect">
             <a:avLst/>
@@ -13090,7 +13090,7 @@
           <a:p>
             <a:pPr algn="ctr"/>
             <a:r>
-              <a:rPr sz="3800" b="1">
+              <a:rPr sz="4200" b="1">
                 <a:solidFill>
                   <a:srgbClr val="F1C40F"/>
                 </a:solidFill>
@@ -13108,8 +13108,8 @@
         </p:nvSpPr>
         <p:spPr>
           <a:xfrm>
-            <a:off x="420624" y="1920240"/>
-            <a:ext cx="2503855" cy="566928"/>
+            <a:off x="420624" y="1901952"/>
+            <a:ext cx="2503855" cy="585216"/>
           </a:xfrm>
           <a:prstGeom prst="rect">
             <a:avLst/>
@@ -13124,7 +13124,7 @@
           <a:p>
             <a:pPr algn="ctr"/>
             <a:r>
-              <a:rPr sz="1550">
+              <a:rPr sz="1700">
                 <a:solidFill>
                   <a:srgbClr val="9AA5B1"/>
                 </a:solidFill>
@@ -13135,7 +13135,7 @@
           <a:p>
             <a:pPr algn="ctr"/>
             <a:r>
-              <a:rPr sz="1550">
+              <a:rPr sz="1700">
                 <a:solidFill>
                   <a:srgbClr val="9AA5B1"/>
                 </a:solidFill>
@@ -13198,8 +13198,8 @@
         </p:nvSpPr>
         <p:spPr>
           <a:xfrm>
-            <a:off x="3345103" y="1280160"/>
-            <a:ext cx="2613583" cy="658368"/>
+            <a:off x="3345103" y="1261872"/>
+            <a:ext cx="2613583" cy="685800"/>
           </a:xfrm>
           <a:prstGeom prst="rect">
             <a:avLst/>
@@ -13214,7 +13214,7 @@
           <a:p>
             <a:pPr algn="ctr"/>
             <a:r>
-              <a:rPr sz="3800" b="1">
+              <a:rPr sz="4200" b="1">
                 <a:solidFill>
                   <a:srgbClr val="00D2FF"/>
                 </a:solidFill>
@@ -13232,8 +13232,8 @@
         </p:nvSpPr>
         <p:spPr>
           <a:xfrm>
-            <a:off x="3399967" y="1920240"/>
-            <a:ext cx="2503855" cy="566928"/>
+            <a:off x="3399967" y="1901952"/>
+            <a:ext cx="2503855" cy="585216"/>
           </a:xfrm>
           <a:prstGeom prst="rect">
             <a:avLst/>
@@ -13248,7 +13248,7 @@
           <a:p>
             <a:pPr algn="ctr"/>
             <a:r>
-              <a:rPr sz="1550">
+              <a:rPr sz="1700">
                 <a:solidFill>
                   <a:srgbClr val="9AA5B1"/>
                 </a:solidFill>
@@ -13259,7 +13259,7 @@
           <a:p>
             <a:pPr algn="ctr"/>
             <a:r>
-              <a:rPr sz="1550">
+              <a:rPr sz="1700">
                 <a:solidFill>
                   <a:srgbClr val="9AA5B1"/>
                 </a:solidFill>
@@ -13322,8 +13322,8 @@
         </p:nvSpPr>
         <p:spPr>
           <a:xfrm>
-            <a:off x="365760" y="2880360"/>
-            <a:ext cx="5592927" cy="658368"/>
+            <a:off x="365760" y="2862072"/>
+            <a:ext cx="5592927" cy="685800"/>
           </a:xfrm>
           <a:prstGeom prst="rect">
             <a:avLst/>
@@ -13338,7 +13338,7 @@
           <a:p>
             <a:pPr algn="ctr"/>
             <a:r>
-              <a:rPr sz="3800" b="1">
+              <a:rPr sz="4200" b="1">
                 <a:solidFill>
                   <a:srgbClr val="2ECC71"/>
                 </a:solidFill>
@@ -13356,8 +13356,8 @@
         </p:nvSpPr>
         <p:spPr>
           <a:xfrm>
-            <a:off x="420624" y="3520440"/>
-            <a:ext cx="5483199" cy="566928"/>
+            <a:off x="420624" y="3502152"/>
+            <a:ext cx="5483199" cy="585216"/>
           </a:xfrm>
           <a:prstGeom prst="rect">
             <a:avLst/>
@@ -13372,7 +13372,7 @@
           <a:p>
             <a:pPr algn="ctr"/>
             <a:r>
-              <a:rPr sz="1550">
+              <a:rPr sz="1700">
                 <a:solidFill>
                   <a:srgbClr val="9AA5B1"/>
                 </a:solidFill>
@@ -13532,7 +13532,7 @@
               </a:lnSpc>
             </a:pPr>
             <a:r>
-              <a:rPr sz="1700">
+              <a:rPr sz="1800">
                 <a:solidFill>
                   <a:srgbClr val="FBFCFD"/>
                 </a:solidFill>
@@ -13932,8 +13932,8 @@
         </p:nvSpPr>
         <p:spPr>
           <a:xfrm>
-            <a:off x="365760" y="1280160"/>
-            <a:ext cx="3637178" cy="658368"/>
+            <a:off x="365760" y="1261872"/>
+            <a:ext cx="3637178" cy="685800"/>
           </a:xfrm>
           <a:prstGeom prst="rect">
             <a:avLst/>
@@ -13948,7 +13948,7 @@
           <a:p>
             <a:pPr algn="ctr"/>
             <a:r>
-              <a:rPr sz="3800" b="1">
+              <a:rPr sz="4200" b="1">
                 <a:solidFill>
                   <a:srgbClr val="F1C40F"/>
                 </a:solidFill>
@@ -13966,8 +13966,8 @@
         </p:nvSpPr>
         <p:spPr>
           <a:xfrm>
-            <a:off x="420624" y="1920240"/>
-            <a:ext cx="3527450" cy="566928"/>
+            <a:off x="420624" y="1901952"/>
+            <a:ext cx="3527450" cy="585216"/>
           </a:xfrm>
           <a:prstGeom prst="rect">
             <a:avLst/>
@@ -13982,7 +13982,7 @@
           <a:p>
             <a:pPr algn="ctr"/>
             <a:r>
-              <a:rPr sz="1550">
+              <a:rPr sz="1700">
                 <a:solidFill>
                   <a:srgbClr val="9AA5B1"/>
                 </a:solidFill>
@@ -13993,7 +13993,7 @@
           <a:p>
             <a:pPr algn="ctr"/>
             <a:r>
-              <a:rPr sz="1550">
+              <a:rPr sz="1700">
                 <a:solidFill>
                   <a:srgbClr val="9AA5B1"/>
                 </a:solidFill>
@@ -14056,8 +14056,8 @@
         </p:nvSpPr>
         <p:spPr>
           <a:xfrm>
-            <a:off x="4277258" y="1280160"/>
-            <a:ext cx="3637178" cy="658368"/>
+            <a:off x="4277258" y="1261872"/>
+            <a:ext cx="3637178" cy="685800"/>
           </a:xfrm>
           <a:prstGeom prst="rect">
             <a:avLst/>
@@ -14072,7 +14072,7 @@
           <a:p>
             <a:pPr algn="ctr"/>
             <a:r>
-              <a:rPr sz="3800" b="1">
+              <a:rPr sz="4200" b="1">
                 <a:solidFill>
                   <a:srgbClr val="2ECC71"/>
                 </a:solidFill>
@@ -14090,8 +14090,8 @@
         </p:nvSpPr>
         <p:spPr>
           <a:xfrm>
-            <a:off x="4332122" y="1920240"/>
-            <a:ext cx="3527450" cy="566928"/>
+            <a:off x="4332122" y="1901952"/>
+            <a:ext cx="3527450" cy="585216"/>
           </a:xfrm>
           <a:prstGeom prst="rect">
             <a:avLst/>
@@ -14106,7 +14106,7 @@
           <a:p>
             <a:pPr algn="ctr"/>
             <a:r>
-              <a:rPr sz="1550">
+              <a:rPr sz="1700">
                 <a:solidFill>
                   <a:srgbClr val="9AA5B1"/>
                 </a:solidFill>
@@ -14117,7 +14117,7 @@
           <a:p>
             <a:pPr algn="ctr"/>
             <a:r>
-              <a:rPr sz="1550">
+              <a:rPr sz="1700">
                 <a:solidFill>
                   <a:srgbClr val="9AA5B1"/>
                 </a:solidFill>
@@ -14180,8 +14180,8 @@
         </p:nvSpPr>
         <p:spPr>
           <a:xfrm>
-            <a:off x="8188756" y="1280160"/>
-            <a:ext cx="3637178" cy="658368"/>
+            <a:off x="8188756" y="1261872"/>
+            <a:ext cx="3637178" cy="685800"/>
           </a:xfrm>
           <a:prstGeom prst="rect">
             <a:avLst/>
@@ -14196,7 +14196,7 @@
           <a:p>
             <a:pPr algn="ctr"/>
             <a:r>
-              <a:rPr sz="3800" b="1">
+              <a:rPr sz="4200" b="1">
                 <a:solidFill>
                   <a:srgbClr val="00D2FF"/>
                 </a:solidFill>
@@ -14214,8 +14214,8 @@
         </p:nvSpPr>
         <p:spPr>
           <a:xfrm>
-            <a:off x="8243620" y="1920240"/>
-            <a:ext cx="3527450" cy="566928"/>
+            <a:off x="8243620" y="1901952"/>
+            <a:ext cx="3527450" cy="585216"/>
           </a:xfrm>
           <a:prstGeom prst="rect">
             <a:avLst/>
@@ -14230,7 +14230,7 @@
           <a:p>
             <a:pPr algn="ctr"/>
             <a:r>
-              <a:rPr sz="1550">
+              <a:rPr sz="1700">
                 <a:solidFill>
                   <a:srgbClr val="9AA5B1"/>
                 </a:solidFill>
@@ -14241,7 +14241,7 @@
           <a:p>
             <a:pPr algn="ctr"/>
             <a:r>
-              <a:rPr sz="1550">
+              <a:rPr sz="1700">
                 <a:solidFill>
                   <a:srgbClr val="9AA5B1"/>
                 </a:solidFill>
@@ -14401,7 +14401,7 @@
               </a:lnSpc>
             </a:pPr>
             <a:r>
-              <a:rPr sz="1700">
+              <a:rPr sz="1800">
                 <a:solidFill>
                   <a:srgbClr val="FBFCFD"/>
                 </a:solidFill>
@@ -14409,7 +14409,7 @@
               <a:t>• </a:t>
             </a:r>
             <a:r>
-              <a:rPr sz="1700" b="1">
+              <a:rPr sz="1800" b="1">
                 <a:solidFill>
                   <a:srgbClr val="FBFCFD"/>
                 </a:solidFill>
@@ -14417,7 +14417,7 @@
               <a:t>Recurso escalado:</a:t>
             </a:r>
             <a:r>
-              <a:rPr sz="1700">
+              <a:rPr sz="1800">
                 <a:solidFill>
                   <a:srgbClr val="FBFCFD"/>
                 </a:solidFill>
@@ -14439,7 +14439,7 @@
               </a:lnSpc>
             </a:pPr>
             <a:r>
-              <a:rPr sz="1700">
+              <a:rPr sz="1800">
                 <a:solidFill>
                   <a:srgbClr val="FBFCFD"/>
                 </a:solidFill>
@@ -14447,7 +14447,7 @@
               <a:t>• ΔPR +2.39 pts → ≈ +60 kWh/kWp·año → </a:t>
             </a:r>
             <a:r>
-              <a:rPr sz="1700" b="1">
+              <a:rPr sz="1800" b="1">
                 <a:solidFill>
                   <a:srgbClr val="FBFCFD"/>
                 </a:solidFill>
@@ -14455,7 +14455,7 @@
               <a:t>~6,000 MWh</a:t>
             </a:r>
             <a:r>
-              <a:rPr sz="1700">
+              <a:rPr sz="1800">
                 <a:solidFill>
                   <a:srgbClr val="FBFCFD"/>
                 </a:solidFill>
@@ -14477,7 +14477,7 @@
               </a:lnSpc>
             </a:pPr>
             <a:r>
-              <a:rPr sz="1700">
+              <a:rPr sz="1800">
                 <a:solidFill>
                   <a:srgbClr val="FBFCFD"/>
                 </a:solidFill>
@@ -14485,7 +14485,7 @@
               <a:t>• Precio de venta ≈ 45 USD/MWh → </a:t>
             </a:r>
             <a:r>
-              <a:rPr sz="1700" b="1">
+              <a:rPr sz="1800" b="1">
                 <a:solidFill>
                   <a:srgbClr val="FBFCFD"/>
                 </a:solidFill>
@@ -14493,7 +14493,7 @@
               <a:t>~USD 270k/año</a:t>
             </a:r>
             <a:r>
-              <a:rPr sz="1700">
+              <a:rPr sz="1800">
                 <a:solidFill>
                   <a:srgbClr val="FBFCFD"/>
                 </a:solidFill>
@@ -14653,7 +14653,7 @@
               </a:lnSpc>
             </a:pPr>
             <a:r>
-              <a:rPr sz="1700">
+              <a:rPr sz="1800">
                 <a:solidFill>
                   <a:srgbClr val="FBFCFD"/>
                 </a:solidFill>
@@ -14661,7 +14661,7 @@
               <a:t>• La prima CAPEX de los módulos HIT se </a:t>
             </a:r>
             <a:r>
-              <a:rPr sz="1700" b="1">
+              <a:rPr sz="1800" b="1">
                 <a:solidFill>
                   <a:srgbClr val="FBFCFD"/>
                 </a:solidFill>
@@ -14669,7 +14669,7 @@
               <a:t>amortiza con holgura</a:t>
             </a:r>
             <a:r>
-              <a:rPr sz="1700">
+              <a:rPr sz="1800">
                 <a:solidFill>
                   <a:srgbClr val="FBFCFD"/>
                 </a:solidFill>
@@ -14691,7 +14691,7 @@
               </a:lnSpc>
             </a:pPr>
             <a:r>
-              <a:rPr sz="1700">
+              <a:rPr sz="1800">
                 <a:solidFill>
                   <a:srgbClr val="FBFCFD"/>
                 </a:solidFill>
@@ -14713,7 +14713,7 @@
               </a:lnSpc>
             </a:pPr>
             <a:r>
-              <a:rPr sz="1700">
+              <a:rPr sz="1800">
                 <a:solidFill>
                   <a:srgbClr val="FBFCFD"/>
                 </a:solidFill>
@@ -15060,11 +15060,11 @@
           <a:p>
             <a:pPr algn="l">
               <a:lnSpc>
-                <a:spcPct val="110000"/>
+                <a:spcPct val="105000"/>
               </a:lnSpc>
             </a:pPr>
             <a:r>
-              <a:rPr sz="1650">
+              <a:rPr sz="1750">
                 <a:solidFill>
                   <a:srgbClr val="FBFCFD"/>
                 </a:solidFill>
@@ -15072,7 +15072,7 @@
               <a:t>• </a:t>
             </a:r>
             <a:r>
-              <a:rPr sz="1650" b="1">
+              <a:rPr sz="1750" b="1">
                 <a:solidFill>
                   <a:srgbClr val="FBFCFD"/>
                 </a:solidFill>
@@ -15080,7 +15080,7 @@
               <a:t>Magnitudes de Florida:</a:t>
             </a:r>
             <a:r>
-              <a:rPr sz="1650">
+              <a:rPr sz="1750">
                 <a:solidFill>
                   <a:srgbClr val="FBFCFD"/>
                 </a:solidFill>
@@ -15091,18 +15091,18 @@
           <a:p>
             <a:pPr algn="l">
               <a:lnSpc>
-                <a:spcPct val="110000"/>
+                <a:spcPct val="105000"/>
               </a:lnSpc>
             </a:pPr>
           </a:p>
           <a:p>
             <a:pPr algn="l">
               <a:lnSpc>
-                <a:spcPct val="110000"/>
+                <a:spcPct val="105000"/>
               </a:lnSpc>
             </a:pPr>
             <a:r>
-              <a:rPr sz="1650">
+              <a:rPr sz="1750">
                 <a:solidFill>
                   <a:srgbClr val="FBFCFD"/>
                 </a:solidFill>
@@ -15110,7 +15110,7 @@
               <a:t>• </a:t>
             </a:r>
             <a:r>
-              <a:rPr sz="1650" b="1">
+              <a:rPr sz="1750" b="1">
                 <a:solidFill>
                   <a:srgbClr val="FBFCFD"/>
                 </a:solidFill>
@@ -15118,7 +15118,7 @@
               <a:t>Cobertura temporal:</a:t>
             </a:r>
             <a:r>
-              <a:rPr sz="1650">
+              <a:rPr sz="1750">
                 <a:solidFill>
                   <a:srgbClr val="FBFCFD"/>
                 </a:solidFill>
@@ -15129,18 +15129,18 @@
           <a:p>
             <a:pPr algn="l">
               <a:lnSpc>
-                <a:spcPct val="110000"/>
+                <a:spcPct val="105000"/>
               </a:lnSpc>
             </a:pPr>
           </a:p>
           <a:p>
             <a:pPr algn="l">
               <a:lnSpc>
-                <a:spcPct val="110000"/>
+                <a:spcPct val="105000"/>
               </a:lnSpc>
             </a:pPr>
             <a:r>
-              <a:rPr sz="1650">
+              <a:rPr sz="1750">
                 <a:solidFill>
                   <a:srgbClr val="FBFCFD"/>
                 </a:solidFill>
@@ -15148,7 +15148,7 @@
               <a:t>• </a:t>
             </a:r>
             <a:r>
-              <a:rPr sz="1650" b="1">
+              <a:rPr sz="1750" b="1">
                 <a:solidFill>
                   <a:srgbClr val="FBFCFD"/>
                 </a:solidFill>
@@ -15156,7 +15156,7 @@
               <a:t>α</a:t>
             </a:r>
             <a:r>
-              <a:rPr sz="1250" b="1">
+              <a:rPr sz="1350" b="1">
                 <a:solidFill>
                   <a:srgbClr val="FBFCFD"/>
                 </a:solidFill>
@@ -15164,7 +15164,7 @@
               <a:t>Isc</a:t>
             </a:r>
             <a:r>
-              <a:rPr sz="1650" b="1">
+              <a:rPr sz="1750" b="1">
                 <a:solidFill>
                   <a:srgbClr val="FBFCFD"/>
                 </a:solidFill>
@@ -15172,7 +15172,7 @@
               <a:t> de literatura:</a:t>
             </a:r>
             <a:r>
-              <a:rPr sz="1650">
+              <a:rPr sz="1750">
                 <a:solidFill>
                   <a:srgbClr val="FBFCFD"/>
                 </a:solidFill>
@@ -15328,11 +15328,11 @@
           <a:p>
             <a:pPr algn="l">
               <a:lnSpc>
-                <a:spcPct val="110000"/>
+                <a:spcPct val="105000"/>
               </a:lnSpc>
             </a:pPr>
             <a:r>
-              <a:rPr sz="1650">
+              <a:rPr sz="1750">
                 <a:solidFill>
                   <a:srgbClr val="FBFCFD"/>
                 </a:solidFill>
@@ -15340,7 +15340,7 @@
               <a:t>• </a:t>
             </a:r>
             <a:r>
-              <a:rPr sz="1650" b="1">
+              <a:rPr sz="1750" b="1">
                 <a:solidFill>
                   <a:srgbClr val="FBFCFD"/>
                 </a:solidFill>
@@ -15348,7 +15348,7 @@
               <a:t>Sin pérdidas ópticas/espectrales:</a:t>
             </a:r>
             <a:r>
-              <a:rPr sz="1650">
+              <a:rPr sz="1750">
                 <a:solidFill>
                   <a:srgbClr val="FBFCFD"/>
                 </a:solidFill>
@@ -15359,18 +15359,18 @@
           <a:p>
             <a:pPr algn="l">
               <a:lnSpc>
-                <a:spcPct val="110000"/>
+                <a:spcPct val="105000"/>
               </a:lnSpc>
             </a:pPr>
           </a:p>
           <a:p>
             <a:pPr algn="l">
               <a:lnSpc>
-                <a:spcPct val="110000"/>
+                <a:spcPct val="105000"/>
               </a:lnSpc>
             </a:pPr>
             <a:r>
-              <a:rPr sz="1650">
+              <a:rPr sz="1750">
                 <a:solidFill>
                   <a:srgbClr val="FBFCFD"/>
                 </a:solidFill>
@@ -15378,7 +15378,7 @@
               <a:t>• </a:t>
             </a:r>
             <a:r>
-              <a:rPr sz="1650" b="1">
+              <a:rPr sz="1750" b="1">
                 <a:solidFill>
                   <a:srgbClr val="FBFCFD"/>
                 </a:solidFill>
@@ -15386,7 +15386,7 @@
               <a:t>Albedo fijo 0.25</a:t>
             </a:r>
             <a:r>
-              <a:rPr sz="1650">
+              <a:rPr sz="1750">
                 <a:solidFill>
                   <a:srgbClr val="FBFCFD"/>
                 </a:solidFill>
@@ -15394,7 +15394,7 @@
               <a:t> (default pvlib) y </a:t>
             </a:r>
             <a:r>
-              <a:rPr sz="1650" b="1">
+              <a:rPr sz="1750" b="1">
                 <a:solidFill>
                   <a:srgbClr val="FBFCFD"/>
                 </a:solidFill>
@@ -15402,7 +15402,7 @@
               <a:t>viento fijo 1 m/s</a:t>
             </a:r>
             <a:r>
-              <a:rPr sz="1650">
+              <a:rPr sz="1750">
                 <a:solidFill>
                   <a:srgbClr val="FBFCFD"/>
                 </a:solidFill>
@@ -15413,18 +15413,18 @@
           <a:p>
             <a:pPr algn="l">
               <a:lnSpc>
-                <a:spcPct val="110000"/>
+                <a:spcPct val="105000"/>
               </a:lnSpc>
             </a:pPr>
           </a:p>
           <a:p>
             <a:pPr algn="l">
               <a:lnSpc>
-                <a:spcPct val="110000"/>
+                <a:spcPct val="105000"/>
               </a:lnSpc>
             </a:pPr>
             <a:r>
-              <a:rPr sz="1650">
+              <a:rPr sz="1750">
                 <a:solidFill>
                   <a:srgbClr val="FBFCFD"/>
                 </a:solidFill>
@@ -15432,7 +15432,7 @@
               <a:t>• </a:t>
             </a:r>
             <a:r>
-              <a:rPr sz="1650" b="1">
+              <a:rPr sz="1750" b="1">
                 <a:solidFill>
                   <a:srgbClr val="FBFCFD"/>
                 </a:solidFill>
@@ -15440,7 +15440,7 @@
               <a:t>P</a:t>
             </a:r>
             <a:r>
-              <a:rPr sz="1250" b="1">
+              <a:rPr sz="1350" b="1">
                 <a:solidFill>
                   <a:srgbClr val="FBFCFD"/>
                 </a:solidFill>
@@ -15448,7 +15448,7 @@
               <a:t>STC</a:t>
             </a:r>
             <a:r>
-              <a:rPr sz="1650" b="1">
+              <a:rPr sz="1750" b="1">
                 <a:solidFill>
                   <a:srgbClr val="FBFCFD"/>
                 </a:solidFill>
@@ -15456,7 +15456,7 @@
               <a:t> del SDM</a:t>
             </a:r>
             <a:r>
-              <a:rPr sz="1650">
+              <a:rPr sz="1750">
                 <a:solidFill>
                   <a:srgbClr val="FBFCFD"/>
                 </a:solidFill>
@@ -15467,18 +15467,18 @@
           <a:p>
             <a:pPr algn="l">
               <a:lnSpc>
-                <a:spcPct val="110000"/>
+                <a:spcPct val="105000"/>
               </a:lnSpc>
             </a:pPr>
           </a:p>
           <a:p>
             <a:pPr algn="l">
               <a:lnSpc>
-                <a:spcPct val="110000"/>
+                <a:spcPct val="105000"/>
               </a:lnSpc>
             </a:pPr>
             <a:r>
-              <a:rPr sz="1650">
+              <a:rPr sz="1750">
                 <a:solidFill>
                   <a:srgbClr val="FBFCFD"/>
                 </a:solidFill>
@@ -15486,7 +15486,7 @@
               <a:t>• </a:t>
             </a:r>
             <a:r>
-              <a:rPr sz="1650" b="1">
+              <a:rPr sz="1750" b="1">
                 <a:solidFill>
                   <a:srgbClr val="FBFCFD"/>
                 </a:solidFill>
@@ -15494,7 +15494,7 @@
               <a:t>Sin soiling ni mismatch:</a:t>
             </a:r>
             <a:r>
-              <a:rPr sz="1650">
+              <a:rPr sz="1750">
                 <a:solidFill>
                   <a:srgbClr val="FBFCFD"/>
                 </a:solidFill>
@@ -15841,11 +15841,11 @@
           <a:p>
             <a:pPr algn="l">
               <a:lnSpc>
-                <a:spcPct val="110000"/>
+                <a:spcPct val="105000"/>
               </a:lnSpc>
             </a:pPr>
             <a:r>
-              <a:rPr sz="1650">
+              <a:rPr sz="1750">
                 <a:solidFill>
                   <a:srgbClr val="FBFCFD"/>
                 </a:solidFill>
@@ -15853,7 +15853,7 @@
               <a:t>1. </a:t>
             </a:r>
             <a:r>
-              <a:rPr sz="1650" b="1">
+              <a:rPr sz="1750" b="1">
                 <a:solidFill>
                   <a:srgbClr val="FBFCFD"/>
                 </a:solidFill>
@@ -15861,7 +15861,7 @@
               <a:t>Fidelidad metodológica:</a:t>
             </a:r>
             <a:r>
-              <a:rPr sz="1650">
+              <a:rPr sz="1750">
                 <a:solidFill>
                   <a:srgbClr val="FBFCFD"/>
                 </a:solidFill>
@@ -15872,18 +15872,18 @@
           <a:p>
             <a:pPr algn="l">
               <a:lnSpc>
-                <a:spcPct val="110000"/>
+                <a:spcPct val="105000"/>
               </a:lnSpc>
             </a:pPr>
           </a:p>
           <a:p>
             <a:pPr algn="l">
               <a:lnSpc>
-                <a:spcPct val="110000"/>
+                <a:spcPct val="105000"/>
               </a:lnSpc>
             </a:pPr>
             <a:r>
-              <a:rPr sz="1650">
+              <a:rPr sz="1750">
                 <a:solidFill>
                   <a:srgbClr val="FBFCFD"/>
                 </a:solidFill>
@@ -15891,7 +15891,7 @@
               <a:t>2. </a:t>
             </a:r>
             <a:r>
-              <a:rPr sz="1650" b="1">
+              <a:rPr sz="1750" b="1">
                 <a:solidFill>
                   <a:srgbClr val="FBFCFD"/>
                 </a:solidFill>
@@ -15899,7 +15899,7 @@
               <a:t>Pipeline de datos robusto:</a:t>
             </a:r>
             <a:r>
-              <a:rPr sz="1650">
+              <a:rPr sz="1750">
                 <a:solidFill>
                   <a:srgbClr val="FBFCFD"/>
                 </a:solidFill>
@@ -15910,18 +15910,18 @@
           <a:p>
             <a:pPr algn="l">
               <a:lnSpc>
-                <a:spcPct val="110000"/>
+                <a:spcPct val="105000"/>
               </a:lnSpc>
             </a:pPr>
           </a:p>
           <a:p>
             <a:pPr algn="l">
               <a:lnSpc>
-                <a:spcPct val="110000"/>
+                <a:spcPct val="105000"/>
               </a:lnSpc>
             </a:pPr>
             <a:r>
-              <a:rPr sz="1650">
+              <a:rPr sz="1750">
                 <a:solidFill>
                   <a:srgbClr val="FBFCFD"/>
                 </a:solidFill>
@@ -15929,7 +15929,7 @@
               <a:t>3. </a:t>
             </a:r>
             <a:r>
-              <a:rPr sz="1650" b="1">
+              <a:rPr sz="1750" b="1">
                 <a:solidFill>
                   <a:srgbClr val="FBFCFD"/>
                 </a:solidFill>
@@ -15937,7 +15937,7 @@
               <a:t>Ajuste robusto:</a:t>
             </a:r>
             <a:r>
-              <a:rPr sz="1650">
+              <a:rPr sz="1750">
                 <a:solidFill>
                   <a:srgbClr val="FBFCFD"/>
                 </a:solidFill>
@@ -15945,7 +15945,7 @@
               <a:t> el SDM de 5 parámetros reprodujo la potencia medida con R² ≈ 0.99 y RMSE ≈ 3 % de P</a:t>
             </a:r>
             <a:r>
-              <a:rPr sz="1250">
+              <a:rPr sz="1350">
                 <a:solidFill>
                   <a:srgbClr val="FBFCFD"/>
                 </a:solidFill>
@@ -15953,7 +15953,7 @@
               <a:t>STC</a:t>
             </a:r>
             <a:r>
-              <a:rPr sz="1650">
+              <a:rPr sz="1750">
                 <a:solidFill>
                   <a:srgbClr val="FBFCFD"/>
                 </a:solidFill>
@@ -15964,18 +15964,18 @@
           <a:p>
             <a:pPr algn="l">
               <a:lnSpc>
-                <a:spcPct val="110000"/>
+                <a:spcPct val="105000"/>
               </a:lnSpc>
             </a:pPr>
           </a:p>
           <a:p>
             <a:pPr algn="l">
               <a:lnSpc>
-                <a:spcPct val="110000"/>
+                <a:spcPct val="105000"/>
               </a:lnSpc>
             </a:pPr>
             <a:r>
-              <a:rPr sz="1650">
+              <a:rPr sz="1750">
                 <a:solidFill>
                   <a:srgbClr val="FBFCFD"/>
                 </a:solidFill>
@@ -15983,7 +15983,7 @@
               <a:t>4. </a:t>
             </a:r>
             <a:r>
-              <a:rPr sz="1650" b="1">
+              <a:rPr sz="1750" b="1">
                 <a:solidFill>
                   <a:srgbClr val="FBFCFD"/>
                 </a:solidFill>
@@ -15991,7 +15991,7 @@
               <a:t>HIT vencedor:</a:t>
             </a:r>
             <a:r>
-              <a:rPr sz="1650">
+              <a:rPr sz="1750">
                 <a:solidFill>
                   <a:srgbClr val="FBFCFD"/>
                 </a:solidFill>
@@ -16147,11 +16147,11 @@
           <a:p>
             <a:pPr algn="l">
               <a:lnSpc>
-                <a:spcPct val="110000"/>
+                <a:spcPct val="105000"/>
               </a:lnSpc>
             </a:pPr>
             <a:r>
-              <a:rPr sz="1650">
+              <a:rPr sz="1750">
                 <a:solidFill>
                   <a:srgbClr val="FBFCFD"/>
                 </a:solidFill>
@@ -16159,7 +16159,7 @@
               <a:t>• </a:t>
             </a:r>
             <a:r>
-              <a:rPr sz="1650" b="1">
+              <a:rPr sz="1750" b="1">
                 <a:solidFill>
                   <a:srgbClr val="FBFCFD"/>
                 </a:solidFill>
@@ -16167,7 +16167,7 @@
               <a:t>Aplicar IAM y corrección espectral AM</a:t>
             </a:r>
             <a:r>
-              <a:rPr sz="1650">
+              <a:rPr sz="1750">
                 <a:solidFill>
                   <a:srgbClr val="FBFCFD"/>
                 </a:solidFill>
@@ -16178,18 +16178,18 @@
           <a:p>
             <a:pPr algn="l">
               <a:lnSpc>
-                <a:spcPct val="110000"/>
+                <a:spcPct val="105000"/>
               </a:lnSpc>
             </a:pPr>
           </a:p>
           <a:p>
             <a:pPr algn="l">
               <a:lnSpc>
-                <a:spcPct val="110000"/>
+                <a:spcPct val="105000"/>
               </a:lnSpc>
             </a:pPr>
             <a:r>
-              <a:rPr sz="1650">
+              <a:rPr sz="1750">
                 <a:solidFill>
                   <a:srgbClr val="FBFCFD"/>
                 </a:solidFill>
@@ -16197,7 +16197,7 @@
               <a:t>• </a:t>
             </a:r>
             <a:r>
-              <a:rPr sz="1650" b="1">
+              <a:rPr sz="1750" b="1">
                 <a:solidFill>
                   <a:srgbClr val="FBFCFD"/>
                 </a:solidFill>
@@ -16205,7 +16205,7 @@
               <a:t>Escalar el recurso a magnitudes de Atacama</a:t>
             </a:r>
             <a:r>
-              <a:rPr sz="1650">
+              <a:rPr sz="1750">
                 <a:solidFill>
                   <a:srgbClr val="FBFCFD"/>
                 </a:solidFill>
@@ -16216,18 +16216,18 @@
           <a:p>
             <a:pPr algn="l">
               <a:lnSpc>
-                <a:spcPct val="110000"/>
+                <a:spcPct val="105000"/>
               </a:lnSpc>
             </a:pPr>
           </a:p>
           <a:p>
             <a:pPr algn="l">
               <a:lnSpc>
-                <a:spcPct val="110000"/>
+                <a:spcPct val="105000"/>
               </a:lnSpc>
             </a:pPr>
             <a:r>
-              <a:rPr sz="1650">
+              <a:rPr sz="1750">
                 <a:solidFill>
                   <a:srgbClr val="FBFCFD"/>
                 </a:solidFill>
@@ -16235,7 +16235,7 @@
               <a:t>• </a:t>
             </a:r>
             <a:r>
-              <a:rPr sz="1650" b="1">
+              <a:rPr sz="1750" b="1">
                 <a:solidFill>
                   <a:srgbClr val="FBFCFD"/>
                 </a:solidFill>
@@ -16243,7 +16243,7 @@
               <a:t>Bifacialidad:</a:t>
             </a:r>
             <a:r>
-              <a:rPr sz="1650">
+              <a:rPr sz="1750">
                 <a:solidFill>
                   <a:srgbClr val="FBFCFD"/>
                 </a:solidFill>
@@ -16254,18 +16254,18 @@
           <a:p>
             <a:pPr algn="l">
               <a:lnSpc>
-                <a:spcPct val="110000"/>
+                <a:spcPct val="105000"/>
               </a:lnSpc>
             </a:pPr>
           </a:p>
           <a:p>
             <a:pPr algn="l">
               <a:lnSpc>
-                <a:spcPct val="110000"/>
+                <a:spcPct val="105000"/>
               </a:lnSpc>
             </a:pPr>
             <a:r>
-              <a:rPr sz="1650">
+              <a:rPr sz="1750">
                 <a:solidFill>
                   <a:srgbClr val="FBFCFD"/>
                 </a:solidFill>
@@ -16273,7 +16273,7 @@
               <a:t>• </a:t>
             </a:r>
             <a:r>
-              <a:rPr sz="1650" b="1">
+              <a:rPr sz="1750" b="1">
                 <a:solidFill>
                   <a:srgbClr val="FBFCFD"/>
                 </a:solidFill>
@@ -16281,7 +16281,7 @@
               <a:t>Soiling desértico:</a:t>
             </a:r>
             <a:r>
-              <a:rPr sz="1650">
+              <a:rPr sz="1750">
                 <a:solidFill>
                   <a:srgbClr val="FBFCFD"/>
                 </a:solidFill>
@@ -16292,18 +16292,18 @@
           <a:p>
             <a:pPr algn="l">
               <a:lnSpc>
-                <a:spcPct val="110000"/>
+                <a:spcPct val="105000"/>
               </a:lnSpc>
             </a:pPr>
           </a:p>
           <a:p>
             <a:pPr algn="l">
               <a:lnSpc>
-                <a:spcPct val="110000"/>
+                <a:spcPct val="105000"/>
               </a:lnSpc>
             </a:pPr>
             <a:r>
-              <a:rPr sz="1650">
+              <a:rPr sz="1750">
                 <a:solidFill>
                   <a:srgbClr val="FBFCFD"/>
                 </a:solidFill>
@@ -16311,7 +16311,7 @@
               <a:t>• </a:t>
             </a:r>
             <a:r>
-              <a:rPr sz="1650" b="1">
+              <a:rPr sz="1750" b="1">
                 <a:solidFill>
                   <a:srgbClr val="FBFCFD"/>
                 </a:solidFill>
@@ -16319,7 +16319,7 @@
               <a:t>Modelo de doble diodo:</a:t>
             </a:r>
             <a:r>
-              <a:rPr sz="1650">
+              <a:rPr sz="1750">
                 <a:solidFill>
                   <a:srgbClr val="FBFCFD"/>
                 </a:solidFill>
@@ -16666,11 +16666,11 @@
           <a:p>
             <a:pPr algn="l">
               <a:lnSpc>
-                <a:spcPct val="110000"/>
+                <a:spcPct val="112000"/>
               </a:lnSpc>
             </a:pPr>
             <a:r>
-              <a:rPr sz="1750">
+              <a:rPr sz="1900">
                 <a:solidFill>
                   <a:srgbClr val="FBFCFD"/>
                 </a:solidFill>
@@ -16681,18 +16681,18 @@
           <a:p>
             <a:pPr algn="l">
               <a:lnSpc>
-                <a:spcPct val="110000"/>
+                <a:spcPct val="112000"/>
               </a:lnSpc>
             </a:pPr>
           </a:p>
           <a:p>
             <a:pPr algn="l">
               <a:lnSpc>
-                <a:spcPct val="110000"/>
+                <a:spcPct val="112000"/>
               </a:lnSpc>
             </a:pPr>
             <a:r>
-              <a:rPr sz="1750">
+              <a:rPr sz="1900">
                 <a:solidFill>
                   <a:srgbClr val="FBFCFD"/>
                 </a:solidFill>
@@ -16703,18 +16703,18 @@
           <a:p>
             <a:pPr algn="l">
               <a:lnSpc>
-                <a:spcPct val="110000"/>
+                <a:spcPct val="112000"/>
               </a:lnSpc>
             </a:pPr>
           </a:p>
           <a:p>
             <a:pPr algn="l">
               <a:lnSpc>
-                <a:spcPct val="110000"/>
+                <a:spcPct val="112000"/>
               </a:lnSpc>
             </a:pPr>
             <a:r>
-              <a:rPr sz="1750">
+              <a:rPr sz="1900">
                 <a:solidFill>
                   <a:srgbClr val="FBFCFD"/>
                 </a:solidFill>
@@ -16725,18 +16725,18 @@
           <a:p>
             <a:pPr algn="l">
               <a:lnSpc>
-                <a:spcPct val="110000"/>
+                <a:spcPct val="112000"/>
               </a:lnSpc>
             </a:pPr>
           </a:p>
           <a:p>
             <a:pPr algn="l">
               <a:lnSpc>
-                <a:spcPct val="110000"/>
+                <a:spcPct val="112000"/>
               </a:lnSpc>
             </a:pPr>
             <a:r>
-              <a:rPr sz="1750">
+              <a:rPr sz="1900">
                 <a:solidFill>
                   <a:srgbClr val="FBFCFD"/>
                 </a:solidFill>
@@ -16747,18 +16747,18 @@
           <a:p>
             <a:pPr algn="l">
               <a:lnSpc>
-                <a:spcPct val="110000"/>
+                <a:spcPct val="112000"/>
               </a:lnSpc>
             </a:pPr>
           </a:p>
           <a:p>
             <a:pPr algn="l">
               <a:lnSpc>
-                <a:spcPct val="110000"/>
+                <a:spcPct val="112000"/>
               </a:lnSpc>
             </a:pPr>
             <a:r>
-              <a:rPr sz="1750">
+              <a:rPr sz="1900">
                 <a:solidFill>
                   <a:srgbClr val="FBFCFD"/>
                 </a:solidFill>
@@ -16769,18 +16769,18 @@
           <a:p>
             <a:pPr algn="l">
               <a:lnSpc>
-                <a:spcPct val="110000"/>
+                <a:spcPct val="112000"/>
               </a:lnSpc>
             </a:pPr>
           </a:p>
           <a:p>
             <a:pPr algn="l">
               <a:lnSpc>
-                <a:spcPct val="110000"/>
+                <a:spcPct val="112000"/>
               </a:lnSpc>
             </a:pPr>
             <a:r>
-              <a:rPr sz="1750">
+              <a:rPr sz="1900">
                 <a:solidFill>
                   <a:srgbClr val="FBFCFD"/>
                 </a:solidFill>
@@ -16791,18 +16791,18 @@
           <a:p>
             <a:pPr algn="l">
               <a:lnSpc>
-                <a:spcPct val="110000"/>
+                <a:spcPct val="112000"/>
               </a:lnSpc>
             </a:pPr>
           </a:p>
           <a:p>
             <a:pPr algn="l">
               <a:lnSpc>
-                <a:spcPct val="110000"/>
+                <a:spcPct val="112000"/>
               </a:lnSpc>
             </a:pPr>
             <a:r>
-              <a:rPr sz="1750">
+              <a:rPr sz="1900">
                 <a:solidFill>
                   <a:srgbClr val="FBFCFD"/>
                 </a:solidFill>
@@ -17149,7 +17149,7 @@
           <a:p>
             <a:pPr algn="l"/>
             <a:r>
-              <a:rPr sz="1600">
+              <a:rPr sz="1800">
                 <a:solidFill>
                   <a:srgbClr val="FBFCFD"/>
                 </a:solidFill>
@@ -17211,7 +17211,7 @@
               </a:lnSpc>
             </a:pPr>
             <a:r>
-              <a:rPr sz="1650">
+              <a:rPr sz="1800">
                 <a:solidFill>
                   <a:srgbClr val="F1C40F"/>
                 </a:solidFill>
@@ -17226,7 +17226,7 @@
               </a:lnSpc>
             </a:pPr>
             <a:r>
-              <a:rPr sz="1650">
+              <a:rPr sz="1800">
                 <a:solidFill>
                   <a:srgbClr val="F1C40F"/>
                 </a:solidFill>
@@ -17234,7 +17234,7 @@
               <a:t>• G</a:t>
             </a:r>
             <a:r>
-              <a:rPr sz="1250">
+              <a:rPr sz="1400">
                 <a:solidFill>
                   <a:srgbClr val="F1C40F"/>
                 </a:solidFill>
@@ -17242,7 +17242,7 @@
               <a:t>b</a:t>
             </a:r>
             <a:r>
-              <a:rPr sz="1650">
+              <a:rPr sz="1800">
                 <a:solidFill>
                   <a:srgbClr val="F1C40F"/>
                 </a:solidFill>
@@ -17250,7 +17250,7 @@
               <a:t> / G</a:t>
             </a:r>
             <a:r>
-              <a:rPr sz="1250">
+              <a:rPr sz="1400">
                 <a:solidFill>
                   <a:srgbClr val="F1C40F"/>
                 </a:solidFill>
@@ -17258,7 +17258,7 @@
               <a:t>d</a:t>
             </a:r>
             <a:r>
-              <a:rPr sz="1650">
+              <a:rPr sz="1800">
                 <a:solidFill>
                   <a:srgbClr val="F1C40F"/>
                 </a:solidFill>
@@ -17273,7 +17273,7 @@
               </a:lnSpc>
             </a:pPr>
             <a:r>
-              <a:rPr sz="1650">
+              <a:rPr sz="1800">
                 <a:solidFill>
                   <a:srgbClr val="F1C40F"/>
                 </a:solidFill>
@@ -17288,7 +17288,7 @@
               </a:lnSpc>
             </a:pPr>
             <a:r>
-              <a:rPr sz="1650">
+              <a:rPr sz="1800">
                 <a:solidFill>
                   <a:srgbClr val="F1C40F"/>
                 </a:solidFill>
@@ -17296,7 +17296,7 @@
               <a:t>• ρ: albedo = 0.25 (default </a:t>
             </a:r>
             <a:r>
-              <a:rPr sz="1550">
+              <a:rPr sz="1700">
                 <a:solidFill>
                   <a:srgbClr val="7FDBFF"/>
                 </a:solidFill>
@@ -17305,7 +17305,7 @@
               <a:t>pvlib</a:t>
             </a:r>
             <a:r>
-              <a:rPr sz="1650">
+              <a:rPr sz="1800">
                 <a:solidFill>
                   <a:srgbClr val="F1C40F"/>
                 </a:solidFill>
@@ -17320,7 +17320,7 @@
               </a:lnSpc>
             </a:pPr>
             <a:r>
-              <a:rPr sz="1650">
+              <a:rPr sz="1800">
                 <a:solidFill>
                   <a:srgbClr val="F1C40F"/>
                 </a:solidFill>
@@ -17328,7 +17328,7 @@
               <a:t>• R</a:t>
             </a:r>
             <a:r>
-              <a:rPr sz="1250">
+              <a:rPr sz="1400">
                 <a:solidFill>
                   <a:srgbClr val="F1C40F"/>
                 </a:solidFill>
@@ -17336,7 +17336,7 @@
               <a:t>beam</a:t>
             </a:r>
             <a:r>
-              <a:rPr sz="1650">
+              <a:rPr sz="1800">
                 <a:solidFill>
                   <a:srgbClr val="F1C40F"/>
                 </a:solidFill>
@@ -17351,7 +17351,7 @@
               </a:lnSpc>
             </a:pPr>
             <a:r>
-              <a:rPr sz="1650">
+              <a:rPr sz="1800">
                 <a:solidFill>
                   <a:srgbClr val="F1C40F"/>
                 </a:solidFill>
@@ -17359,7 +17359,7 @@
               <a:t>• G</a:t>
             </a:r>
             <a:r>
-              <a:rPr sz="1250">
+              <a:rPr sz="1400">
                 <a:solidFill>
                   <a:srgbClr val="F1C40F"/>
                 </a:solidFill>
@@ -17367,7 +17367,7 @@
               <a:t>d,perez</a:t>
             </a:r>
             <a:r>
-              <a:rPr sz="1650">
+              <a:rPr sz="1800">
                 <a:solidFill>
                   <a:srgbClr val="F1C40F"/>
                 </a:solidFill>
@@ -17382,7 +17382,7 @@
               </a:lnSpc>
             </a:pPr>
             <a:r>
-              <a:rPr sz="1650">
+              <a:rPr sz="1800">
                 <a:solidFill>
                   <a:srgbClr val="F1C40F"/>
                 </a:solidFill>
@@ -17390,7 +17390,7 @@
               <a:t>  brillo de horizonte), evaluada por </a:t>
             </a:r>
             <a:r>
-              <a:rPr sz="1550">
+              <a:rPr sz="1700">
                 <a:solidFill>
                   <a:srgbClr val="7FDBFF"/>
                 </a:solidFill>
@@ -17399,7 +17399,7 @@
               <a:t>pvlib.get_total_irradiance</a:t>
             </a:r>
             <a:r>
-              <a:rPr sz="1650">
+              <a:rPr sz="1800">
                 <a:solidFill>
                   <a:srgbClr val="F1C40F"/>
                 </a:solidFill>
@@ -17559,7 +17559,7 @@
               </a:lnSpc>
             </a:pPr>
             <a:r>
-              <a:rPr sz="1650">
+              <a:rPr sz="1800">
                 <a:solidFill>
                   <a:srgbClr val="FBFCFD"/>
                 </a:solidFill>
@@ -17567,7 +17567,7 @@
               <a:t>• </a:t>
             </a:r>
             <a:r>
-              <a:rPr sz="1550">
+              <a:rPr sz="1700">
                 <a:solidFill>
                   <a:srgbClr val="7FDBFF"/>
                 </a:solidFill>
@@ -17576,7 +17576,7 @@
               <a:t>location.get_solarposition(times)</a:t>
             </a:r>
             <a:r>
-              <a:rPr sz="1650">
+              <a:rPr sz="1800">
                 <a:solidFill>
                   <a:srgbClr val="FBFCFD"/>
                 </a:solidFill>
@@ -17598,7 +17598,7 @@
               </a:lnSpc>
             </a:pPr>
             <a:r>
-              <a:rPr sz="1650">
+              <a:rPr sz="1800">
                 <a:solidFill>
                   <a:srgbClr val="FBFCFD"/>
                 </a:solidFill>
@@ -17606,7 +17606,7 @@
               <a:t>• </a:t>
             </a:r>
             <a:r>
-              <a:rPr sz="1550">
+              <a:rPr sz="1700">
                 <a:solidFill>
                   <a:srgbClr val="7FDBFF"/>
                 </a:solidFill>
@@ -17615,7 +17615,7 @@
               <a:t>irradiance.get_extra_radiation(times)</a:t>
             </a:r>
             <a:r>
-              <a:rPr sz="1650">
+              <a:rPr sz="1800">
                 <a:solidFill>
                   <a:srgbClr val="FBFCFD"/>
                 </a:solidFill>
@@ -17637,7 +17637,7 @@
               </a:lnSpc>
             </a:pPr>
             <a:r>
-              <a:rPr sz="1650">
+              <a:rPr sz="1800">
                 <a:solidFill>
                   <a:srgbClr val="FBFCFD"/>
                 </a:solidFill>
@@ -17645,7 +17645,7 @@
               <a:t>• </a:t>
             </a:r>
             <a:r>
-              <a:rPr sz="1550">
+              <a:rPr sz="1700">
                 <a:solidFill>
                   <a:srgbClr val="7FDBFF"/>
                 </a:solidFill>
@@ -17654,7 +17654,7 @@
               <a:t>irradiance.get_total_irradiance(tilt, az, dni, ghi, dhi, ..., model='perez')</a:t>
             </a:r>
             <a:r>
-              <a:rPr sz="1650">
+              <a:rPr sz="1800">
                 <a:solidFill>
                   <a:srgbClr val="FBFCFD"/>
                 </a:solidFill>
@@ -17676,7 +17676,7 @@
               </a:lnSpc>
             </a:pPr>
             <a:r>
-              <a:rPr sz="1650">
+              <a:rPr sz="1800">
                 <a:solidFill>
                   <a:srgbClr val="FBFCFD"/>
                 </a:solidFill>
@@ -17684,7 +17684,7 @@
               <a:t>• Salida: </a:t>
             </a:r>
             <a:r>
-              <a:rPr sz="1550">
+              <a:rPr sz="1700">
                 <a:solidFill>
                   <a:srgbClr val="7FDBFF"/>
                 </a:solidFill>
@@ -17693,7 +17693,7 @@
               <a:t>poa_global</a:t>
             </a:r>
             <a:r>
-              <a:rPr sz="1650">
+              <a:rPr sz="1800">
                 <a:solidFill>
                   <a:srgbClr val="FBFCFD"/>
                 </a:solidFill>
@@ -17701,7 +17701,7 @@
               <a:t> con </a:t>
             </a:r>
             <a:r>
-              <a:rPr sz="1550">
+              <a:rPr sz="1700">
                 <a:solidFill>
                   <a:srgbClr val="7FDBFF"/>
                 </a:solidFill>
@@ -17710,7 +17710,7 @@
               <a:t>clip(≥0)</a:t>
             </a:r>
             <a:r>
-              <a:rPr sz="1650">
+              <a:rPr sz="1800">
                 <a:solidFill>
                   <a:srgbClr val="FBFCFD"/>
                 </a:solidFill>
@@ -18043,7 +18043,7 @@
         </p:nvGraphicFramePr>
         <p:xfrm>
           <a:off x="594360" y="1755648"/>
-          <a:ext cx="11002973" cy="3749039"/>
+          <a:ext cx="11002973" cy="3886200"/>
         </p:xfrm>
         <a:graphic>
           <a:graphicData uri="http://schemas.openxmlformats.org/drawingml/2006/table">
@@ -18058,7 +18058,7 @@
                 <a:gridCol w="3143707"/>
                 <a:gridCol w="2297324"/>
               </a:tblGrid>
-              <a:tr h="624839">
+              <a:tr h="647700">
                 <a:tc>
                   <a:txBody>
                     <a:bodyPr wrap="square"/>
@@ -18066,7 +18066,7 @@
                     <a:p>
                       <a:pPr algn="ctr"/>
                       <a:r>
-                        <a:rPr sz="1700" b="1">
+                        <a:rPr sz="1800" b="1">
                           <a:solidFill>
                             <a:srgbClr val="F1C40F"/>
                           </a:solidFill>
@@ -18088,7 +18088,7 @@
                     <a:p>
                       <a:pPr algn="ctr"/>
                       <a:r>
-                        <a:rPr sz="1700" b="1">
+                        <a:rPr sz="1800" b="1">
                           <a:solidFill>
                             <a:srgbClr val="F1C40F"/>
                           </a:solidFill>
@@ -18110,7 +18110,7 @@
                     <a:p>
                       <a:pPr algn="ctr"/>
                       <a:r>
-                        <a:rPr sz="1700" b="1">
+                        <a:rPr sz="1800" b="1">
                           <a:solidFill>
                             <a:srgbClr val="F1C40F"/>
                           </a:solidFill>
@@ -18132,7 +18132,7 @@
                     <a:p>
                       <a:pPr algn="ctr"/>
                       <a:r>
-                        <a:rPr sz="1700" b="1">
+                        <a:rPr sz="1800" b="1">
                           <a:solidFill>
                             <a:srgbClr val="F1C40F"/>
                           </a:solidFill>
@@ -18154,7 +18154,7 @@
                     <a:p>
                       <a:pPr algn="ctr"/>
                       <a:r>
-                        <a:rPr sz="1700" b="1">
+                        <a:rPr sz="1800" b="1">
                           <a:solidFill>
                             <a:srgbClr val="F1C40F"/>
                           </a:solidFill>
@@ -18170,7 +18170,7 @@
                   </a:tcPr>
                 </a:tc>
               </a:tr>
-              <a:tr h="624839">
+              <a:tr h="647700">
                 <a:tc>
                   <a:txBody>
                     <a:bodyPr wrap="square"/>
@@ -18178,7 +18178,7 @@
                     <a:p>
                       <a:pPr algn="l"/>
                       <a:r>
-                        <a:rPr sz="1550">
+                        <a:rPr sz="1650">
                           <a:solidFill>
                             <a:srgbClr val="FBFCFD"/>
                           </a:solidFill>
@@ -18201,7 +18201,7 @@
                     <a:p>
                       <a:pPr algn="ctr"/>
                       <a:r>
-                        <a:rPr sz="1550">
+                        <a:rPr sz="1650">
                           <a:solidFill>
                             <a:srgbClr val="FBFCFD"/>
                           </a:solidFill>
@@ -18223,7 +18223,7 @@
                     <a:p>
                       <a:pPr algn="ctr"/>
                       <a:r>
-                        <a:rPr sz="1550">
+                        <a:rPr sz="1650">
                           <a:solidFill>
                             <a:srgbClr val="FBFCFD"/>
                           </a:solidFill>
@@ -18245,7 +18245,7 @@
                     <a:p>
                       <a:pPr algn="ctr"/>
                       <a:r>
-                        <a:rPr sz="1550">
+                        <a:rPr sz="1650">
                           <a:solidFill>
                             <a:srgbClr val="FBFCFD"/>
                           </a:solidFill>
@@ -18267,7 +18267,7 @@
                     <a:p>
                       <a:pPr algn="ctr"/>
                       <a:r>
-                        <a:rPr sz="1550">
+                        <a:rPr sz="1650">
                           <a:solidFill>
                             <a:srgbClr val="FBFCFD"/>
                           </a:solidFill>
@@ -18283,7 +18283,7 @@
                   </a:tcPr>
                 </a:tc>
               </a:tr>
-              <a:tr h="624839">
+              <a:tr h="647700">
                 <a:tc>
                   <a:txBody>
                     <a:bodyPr wrap="square"/>
@@ -18291,7 +18291,7 @@
                     <a:p>
                       <a:pPr algn="l"/>
                       <a:r>
-                        <a:rPr sz="1550">
+                        <a:rPr sz="1650">
                           <a:solidFill>
                             <a:srgbClr val="FBFCFD"/>
                           </a:solidFill>
@@ -18314,7 +18314,7 @@
                     <a:p>
                       <a:pPr algn="ctr"/>
                       <a:r>
-                        <a:rPr sz="1550">
+                        <a:rPr sz="1650">
                           <a:solidFill>
                             <a:srgbClr val="FBFCFD"/>
                           </a:solidFill>
@@ -18336,7 +18336,7 @@
                     <a:p>
                       <a:pPr algn="ctr"/>
                       <a:r>
-                        <a:rPr sz="1550">
+                        <a:rPr sz="1650">
                           <a:solidFill>
                             <a:srgbClr val="FBFCFD"/>
                           </a:solidFill>
@@ -18358,7 +18358,7 @@
                     <a:p>
                       <a:pPr algn="ctr"/>
                       <a:r>
-                        <a:rPr sz="1550">
+                        <a:rPr sz="1650">
                           <a:solidFill>
                             <a:srgbClr val="FBFCFD"/>
                           </a:solidFill>
@@ -18380,7 +18380,7 @@
                     <a:p>
                       <a:pPr algn="ctr"/>
                       <a:r>
-                        <a:rPr sz="1550">
+                        <a:rPr sz="1650">
                           <a:solidFill>
                             <a:srgbClr val="FBFCFD"/>
                           </a:solidFill>
@@ -18396,7 +18396,7 @@
                   </a:tcPr>
                 </a:tc>
               </a:tr>
-              <a:tr h="624839">
+              <a:tr h="647700">
                 <a:tc>
                   <a:txBody>
                     <a:bodyPr wrap="square"/>
@@ -18404,7 +18404,7 @@
                     <a:p>
                       <a:pPr algn="l"/>
                       <a:r>
-                        <a:rPr sz="1550">
+                        <a:rPr sz="1650">
                           <a:solidFill>
                             <a:srgbClr val="FBFCFD"/>
                           </a:solidFill>
@@ -18427,7 +18427,7 @@
                     <a:p>
                       <a:pPr algn="ctr"/>
                       <a:r>
-                        <a:rPr sz="1550">
+                        <a:rPr sz="1650">
                           <a:solidFill>
                             <a:srgbClr val="FBFCFD"/>
                           </a:solidFill>
@@ -18449,7 +18449,7 @@
                     <a:p>
                       <a:pPr algn="ctr"/>
                       <a:r>
-                        <a:rPr sz="1550">
+                        <a:rPr sz="1650">
                           <a:solidFill>
                             <a:srgbClr val="FBFCFD"/>
                           </a:solidFill>
@@ -18471,7 +18471,7 @@
                     <a:p>
                       <a:pPr algn="ctr"/>
                       <a:r>
-                        <a:rPr sz="1550">
+                        <a:rPr sz="1650">
                           <a:solidFill>
                             <a:srgbClr val="FBFCFD"/>
                           </a:solidFill>
@@ -18493,7 +18493,7 @@
                     <a:p>
                       <a:pPr algn="ctr"/>
                       <a:r>
-                        <a:rPr sz="1550">
+                        <a:rPr sz="1650">
                           <a:solidFill>
                             <a:srgbClr val="FBFCFD"/>
                           </a:solidFill>
@@ -18509,7 +18509,7 @@
                   </a:tcPr>
                 </a:tc>
               </a:tr>
-              <a:tr h="624839">
+              <a:tr h="647700">
                 <a:tc>
                   <a:txBody>
                     <a:bodyPr wrap="square"/>
@@ -18517,7 +18517,7 @@
                     <a:p>
                       <a:pPr algn="l"/>
                       <a:r>
-                        <a:rPr sz="1550">
+                        <a:rPr sz="1650">
                           <a:solidFill>
                             <a:srgbClr val="FBFCFD"/>
                           </a:solidFill>
@@ -18540,7 +18540,7 @@
                     <a:p>
                       <a:pPr algn="ctr"/>
                       <a:r>
-                        <a:rPr sz="1550">
+                        <a:rPr sz="1650">
                           <a:solidFill>
                             <a:srgbClr val="FBFCFD"/>
                           </a:solidFill>
@@ -18562,7 +18562,7 @@
                     <a:p>
                       <a:pPr algn="ctr"/>
                       <a:r>
-                        <a:rPr sz="1550">
+                        <a:rPr sz="1650">
                           <a:solidFill>
                             <a:srgbClr val="FBFCFD"/>
                           </a:solidFill>
@@ -18584,7 +18584,7 @@
                     <a:p>
                       <a:pPr algn="ctr"/>
                       <a:r>
-                        <a:rPr sz="1550">
+                        <a:rPr sz="1650">
                           <a:solidFill>
                             <a:srgbClr val="FBFCFD"/>
                           </a:solidFill>
@@ -18606,7 +18606,7 @@
                     <a:p>
                       <a:pPr algn="ctr"/>
                       <a:r>
-                        <a:rPr sz="1550">
+                        <a:rPr sz="1650">
                           <a:solidFill>
                             <a:srgbClr val="FBFCFD"/>
                           </a:solidFill>
@@ -18622,7 +18622,7 @@
                   </a:tcPr>
                 </a:tc>
               </a:tr>
-              <a:tr h="624844">
+              <a:tr h="647700">
                 <a:tc>
                   <a:txBody>
                     <a:bodyPr wrap="square"/>
@@ -18630,7 +18630,7 @@
                     <a:p>
                       <a:pPr algn="l"/>
                       <a:r>
-                        <a:rPr sz="1550">
+                        <a:rPr sz="1650">
                           <a:solidFill>
                             <a:srgbClr val="FBFCFD"/>
                           </a:solidFill>
@@ -18653,7 +18653,7 @@
                     <a:p>
                       <a:pPr algn="ctr"/>
                       <a:r>
-                        <a:rPr sz="1550">
+                        <a:rPr sz="1650">
                           <a:solidFill>
                             <a:srgbClr val="FBFCFD"/>
                           </a:solidFill>
@@ -18675,7 +18675,7 @@
                     <a:p>
                       <a:pPr algn="ctr"/>
                       <a:r>
-                        <a:rPr sz="1550">
+                        <a:rPr sz="1650">
                           <a:solidFill>
                             <a:srgbClr val="FBFCFD"/>
                           </a:solidFill>
@@ -18697,7 +18697,7 @@
                     <a:p>
                       <a:pPr algn="ctr"/>
                       <a:r>
-                        <a:rPr sz="1550">
+                        <a:rPr sz="1650">
                           <a:solidFill>
                             <a:srgbClr val="FBFCFD"/>
                           </a:solidFill>
@@ -18719,7 +18719,7 @@
                     <a:p>
                       <a:pPr algn="ctr"/>
                       <a:r>
-                        <a:rPr sz="1550">
+                        <a:rPr sz="1650">
                           <a:solidFill>
                             <a:srgbClr val="FBFCFD"/>
                           </a:solidFill>
@@ -18747,7 +18747,7 @@
         </p:nvSpPr>
         <p:spPr>
           <a:xfrm>
-            <a:off x="594360" y="5623560"/>
+            <a:off x="594360" y="5742432"/>
             <a:ext cx="11002975" cy="457200"/>
           </a:xfrm>
           <a:prstGeom prst="rect">
@@ -18763,7 +18763,7 @@
           <a:p>
             <a:pPr algn="l"/>
             <a:r>
-              <a:rPr sz="1550">
+              <a:rPr sz="1700">
                 <a:solidFill>
                   <a:srgbClr val="9AA5B1"/>
                 </a:solidFill>
@@ -18771,7 +18771,7 @@
               <a:t>Criterio: máximo contraste térmico entre tecnologías comerciales viables, con datos experimentales completos en el dataset (</a:t>
             </a:r>
             <a:r>
-              <a:rPr sz="1450">
+              <a:rPr sz="1600">
                 <a:solidFill>
                   <a:srgbClr val="7FDBFF"/>
                 </a:solidFill>
@@ -18780,7 +18780,7 @@
               <a:t>mSi0166</a:t>
             </a:r>
             <a:r>
-              <a:rPr sz="1550">
+              <a:rPr sz="1700">
                 <a:solidFill>
                   <a:srgbClr val="9AA5B1"/>
                 </a:solidFill>
@@ -18788,7 +18788,7 @@
               <a:t> y </a:t>
             </a:r>
             <a:r>
-              <a:rPr sz="1450">
+              <a:rPr sz="1600">
                 <a:solidFill>
                   <a:srgbClr val="7FDBFF"/>
                 </a:solidFill>
@@ -18797,7 +18797,7 @@
               <a:t>HIT05667</a:t>
             </a:r>
             <a:r>
-              <a:rPr sz="1550">
+              <a:rPr sz="1700">
                 <a:solidFill>
                   <a:srgbClr val="9AA5B1"/>
                 </a:solidFill>
@@ -19007,7 +19007,7 @@
         <p:spPr>
           <a:xfrm>
             <a:off x="365760" y="1188720"/>
-            <a:ext cx="5592927" cy="4206240"/>
+            <a:ext cx="5592927" cy="4023360"/>
           </a:xfrm>
           <a:prstGeom prst="rect">
             <a:avLst/>
@@ -19052,7 +19052,7 @@
         <p:spPr>
           <a:xfrm>
             <a:off x="365760" y="1188720"/>
-            <a:ext cx="73152" cy="4206240"/>
+            <a:ext cx="73152" cy="4023360"/>
           </a:xfrm>
           <a:prstGeom prst="rect">
             <a:avLst/>
@@ -19177,7 +19177,7 @@
         <p:spPr>
           <a:xfrm>
             <a:off x="566928" y="3657600"/>
-            <a:ext cx="5190591" cy="1554480"/>
+            <a:ext cx="5190591" cy="1371600"/>
           </a:xfrm>
           <a:prstGeom prst="rect">
             <a:avLst/>
@@ -19231,7 +19231,7 @@
         <p:spPr>
           <a:xfrm>
             <a:off x="6233007" y="1188720"/>
-            <a:ext cx="5592927" cy="4206240"/>
+            <a:ext cx="5592927" cy="4023360"/>
           </a:xfrm>
           <a:prstGeom prst="rect">
             <a:avLst/>
@@ -19276,7 +19276,7 @@
         <p:spPr>
           <a:xfrm>
             <a:off x="6233007" y="1188720"/>
-            <a:ext cx="73152" cy="4206240"/>
+            <a:ext cx="73152" cy="4023360"/>
           </a:xfrm>
           <a:prstGeom prst="rect">
             <a:avLst/>
@@ -19401,7 +19401,7 @@
         <p:spPr>
           <a:xfrm>
             <a:off x="6434175" y="3657600"/>
-            <a:ext cx="5190591" cy="1554480"/>
+            <a:ext cx="5190591" cy="1371600"/>
           </a:xfrm>
           <a:prstGeom prst="rect">
             <a:avLst/>
@@ -19470,8 +19470,8 @@
         </p:nvSpPr>
         <p:spPr>
           <a:xfrm>
-            <a:off x="365760" y="5440680"/>
-            <a:ext cx="11460175" cy="1005840"/>
+            <a:off x="365760" y="5303520"/>
+            <a:ext cx="11460175" cy="1188720"/>
           </a:xfrm>
           <a:prstGeom prst="rect">
             <a:avLst/>
@@ -19515,8 +19515,8 @@
         </p:nvSpPr>
         <p:spPr>
           <a:xfrm>
-            <a:off x="548640" y="5477256"/>
-            <a:ext cx="11094415" cy="932688"/>
+            <a:off x="548640" y="5340096"/>
+            <a:ext cx="11094415" cy="1115568"/>
           </a:xfrm>
           <a:prstGeom prst="rect">
             <a:avLst/>
@@ -19535,7 +19535,7 @@
               </a:lnSpc>
             </a:pPr>
             <a:r>
-              <a:rPr sz="1750" b="1">
+              <a:rPr sz="1700" b="1">
                 <a:solidFill>
                   <a:srgbClr val="FBFCFD"/>
                 </a:solidFill>
@@ -19543,7 +19543,7 @@
               <a:t>Estado en este estudio:</a:t>
             </a:r>
             <a:r>
-              <a:rPr sz="1750">
+              <a:rPr sz="1700">
                 <a:solidFill>
                   <a:srgbClr val="FBFCFD"/>
                 </a:solidFill>
@@ -19551,7 +19551,7 @@
               <a:t> ecuaciones revisadas en la literatura pero </a:t>
             </a:r>
             <a:r>
-              <a:rPr sz="1750" b="1">
+              <a:rPr sz="1700" b="1">
                 <a:solidFill>
                   <a:srgbClr val="FBFCFD"/>
                 </a:solidFill>
@@ -19559,7 +19559,7 @@
               <a:t>no ejecutadas por el pipeline</a:t>
             </a:r>
             <a:r>
-              <a:rPr sz="1750">
+              <a:rPr sz="1700">
                 <a:solidFill>
                   <a:srgbClr val="FBFCFD"/>
                 </a:solidFill>
@@ -19906,7 +19906,7 @@
           <a:p>
             <a:pPr algn="l"/>
             <a:r>
-              <a:rPr sz="1600">
+              <a:rPr sz="1800">
                 <a:solidFill>
                   <a:srgbClr val="FBFCFD"/>
                 </a:solidFill>
@@ -20090,7 +20090,7 @@
               </a:lnSpc>
             </a:pPr>
             <a:r>
-              <a:rPr sz="1650">
+              <a:rPr sz="1800">
                 <a:solidFill>
                   <a:srgbClr val="FBFCFD"/>
                 </a:solidFill>
@@ -20098,7 +20098,7 @@
               <a:t>• T</a:t>
             </a:r>
             <a:r>
-              <a:rPr sz="1250">
+              <a:rPr sz="1400">
                 <a:solidFill>
                   <a:srgbClr val="FBFCFD"/>
                 </a:solidFill>
@@ -20106,7 +20106,7 @@
               <a:t>c</a:t>
             </a:r>
             <a:r>
-              <a:rPr sz="1650">
+              <a:rPr sz="1800">
                 <a:solidFill>
                   <a:srgbClr val="FBFCFD"/>
                 </a:solidFill>
@@ -20114,7 +20114,7 @@
               <a:t> / T</a:t>
             </a:r>
             <a:r>
-              <a:rPr sz="1250">
+              <a:rPr sz="1400">
                 <a:solidFill>
                   <a:srgbClr val="FBFCFD"/>
                 </a:solidFill>
@@ -20122,7 +20122,7 @@
               <a:t>a</a:t>
             </a:r>
             <a:r>
-              <a:rPr sz="1650">
+              <a:rPr sz="1800">
                 <a:solidFill>
                   <a:srgbClr val="FBFCFD"/>
                 </a:solidFill>
@@ -20137,7 +20137,7 @@
               </a:lnSpc>
             </a:pPr>
             <a:r>
-              <a:rPr sz="1650">
+              <a:rPr sz="1800">
                 <a:solidFill>
                   <a:srgbClr val="FBFCFD"/>
                 </a:solidFill>
@@ -20145,7 +20145,7 @@
               <a:t>• G</a:t>
             </a:r>
             <a:r>
-              <a:rPr sz="1250">
+              <a:rPr sz="1400">
                 <a:solidFill>
                   <a:srgbClr val="FBFCFD"/>
                 </a:solidFill>
@@ -20153,7 +20153,7 @@
               <a:t>poa</a:t>
             </a:r>
             <a:r>
-              <a:rPr sz="1650">
+              <a:rPr sz="1800">
                 <a:solidFill>
                   <a:srgbClr val="FBFCFD"/>
                 </a:solidFill>
@@ -20168,7 +20168,7 @@
               </a:lnSpc>
             </a:pPr>
             <a:r>
-              <a:rPr sz="1650">
+              <a:rPr sz="1800">
                 <a:solidFill>
                   <a:srgbClr val="FBFCFD"/>
                 </a:solidFill>
@@ -20176,7 +20176,7 @@
               <a:t>• v</a:t>
             </a:r>
             <a:r>
-              <a:rPr sz="1250">
+              <a:rPr sz="1400">
                 <a:solidFill>
                   <a:srgbClr val="FBFCFD"/>
                 </a:solidFill>
@@ -20184,7 +20184,7 @@
               <a:t>w</a:t>
             </a:r>
             <a:r>
-              <a:rPr sz="1650">
+              <a:rPr sz="1800">
                 <a:solidFill>
                   <a:srgbClr val="FBFCFD"/>
                 </a:solidFill>
@@ -20199,7 +20199,7 @@
               </a:lnSpc>
             </a:pPr>
             <a:r>
-              <a:rPr sz="1650">
+              <a:rPr sz="1800">
                 <a:solidFill>
                   <a:srgbClr val="FBFCFD"/>
                 </a:solidFill>
@@ -20359,7 +20359,7 @@
               </a:lnSpc>
             </a:pPr>
             <a:r>
-              <a:rPr sz="1650">
+              <a:rPr sz="1800">
                 <a:solidFill>
                   <a:srgbClr val="FBFCFD"/>
                 </a:solidFill>
@@ -20367,7 +20367,7 @@
               <a:t>• m-Si — </a:t>
             </a:r>
             <a:r>
-              <a:rPr sz="1550">
+              <a:rPr sz="1700">
                 <a:solidFill>
                   <a:srgbClr val="7FDBFF"/>
                 </a:solidFill>
@@ -20376,7 +20376,7 @@
               <a:t>open_rack_glass_polymer</a:t>
             </a:r>
             <a:r>
-              <a:rPr sz="1650">
+              <a:rPr sz="1800">
                 <a:solidFill>
                   <a:srgbClr val="FBFCFD"/>
                 </a:solidFill>
@@ -20398,7 +20398,7 @@
               </a:lnSpc>
             </a:pPr>
             <a:r>
-              <a:rPr sz="1650">
+              <a:rPr sz="1800">
                 <a:solidFill>
                   <a:srgbClr val="FBFCFD"/>
                 </a:solidFill>
@@ -20406,7 +20406,7 @@
               <a:t>• HIT — </a:t>
             </a:r>
             <a:r>
-              <a:rPr sz="1550">
+              <a:rPr sz="1700">
                 <a:solidFill>
                   <a:srgbClr val="7FDBFF"/>
                 </a:solidFill>
@@ -20415,7 +20415,7 @@
               <a:t>open_rack_glass_glass</a:t>
             </a:r>
             <a:r>
-              <a:rPr sz="1650">
+              <a:rPr sz="1800">
                 <a:solidFill>
                   <a:srgbClr val="FBFCFD"/>
                 </a:solidFill>
@@ -20437,7 +20437,7 @@
               </a:lnSpc>
             </a:pPr>
             <a:r>
-              <a:rPr sz="1650" b="1">
+              <a:rPr sz="1800" b="1">
                 <a:solidFill>
                   <a:srgbClr val="FBFCFD"/>
                 </a:solidFill>
@@ -20445,7 +20445,7 @@
               <a:t>Fuente:</a:t>
             </a:r>
             <a:r>
-              <a:rPr sz="1650">
+              <a:rPr sz="1800">
                 <a:solidFill>
                   <a:srgbClr val="FBFCFD"/>
                 </a:solidFill>
@@ -20453,7 +20453,7 @@
               <a:t> </a:t>
             </a:r>
             <a:r>
-              <a:rPr sz="1550">
+              <a:rPr sz="1700">
                 <a:solidFill>
                   <a:srgbClr val="7FDBFF"/>
                 </a:solidFill>
@@ -20462,7 +20462,7 @@
               <a:t>pvlib.temperature.TEMPERATURE_MODEL_PARAMETERS['sapm']</a:t>
             </a:r>
             <a:r>
-              <a:rPr sz="1650">
+              <a:rPr sz="1800">
                 <a:solidFill>
                   <a:srgbClr val="FBFCFD"/>
                 </a:solidFill>
@@ -20809,7 +20809,7 @@
           <a:p>
             <a:pPr algn="l"/>
             <a:r>
-              <a:rPr sz="1600">
+              <a:rPr sz="1800">
                 <a:solidFill>
                   <a:srgbClr val="FBFCFD"/>
                 </a:solidFill>
@@ -20817,7 +20817,7 @@
               <a:t>Corriente implícita del modelo de diodo simple con resistencias parásitas (resuelta con la función W de Lambert en </a:t>
             </a:r>
             <a:r>
-              <a:rPr sz="1500">
+              <a:rPr sz="1700">
                 <a:solidFill>
                   <a:srgbClr val="7FDBFF"/>
                 </a:solidFill>
@@ -20826,7 +20826,7 @@
               <a:t>pvlib.singlediode</a:t>
             </a:r>
             <a:r>
-              <a:rPr sz="1600">
+              <a:rPr sz="1800">
                 <a:solidFill>
                   <a:srgbClr val="FBFCFD"/>
                 </a:solidFill>
@@ -21034,7 +21034,7 @@
               </a:lnSpc>
             </a:pPr>
             <a:r>
-              <a:rPr sz="1650">
+              <a:rPr sz="1800">
                 <a:solidFill>
                   <a:srgbClr val="F1C40F"/>
                 </a:solidFill>
@@ -21042,7 +21042,7 @@
               <a:t>• N</a:t>
             </a:r>
             <a:r>
-              <a:rPr sz="1250">
+              <a:rPr sz="1400">
                 <a:solidFill>
                   <a:srgbClr val="F1C40F"/>
                 </a:solidFill>
@@ -21050,7 +21050,7 @@
               <a:t>s</a:t>
             </a:r>
             <a:r>
-              <a:rPr sz="1650">
+              <a:rPr sz="1800">
                 <a:solidFill>
                   <a:srgbClr val="F1C40F"/>
                 </a:solidFill>
@@ -21065,7 +21065,7 @@
               </a:lnSpc>
             </a:pPr>
             <a:r>
-              <a:rPr sz="1650">
+              <a:rPr sz="1800">
                 <a:solidFill>
                   <a:srgbClr val="F1C40F"/>
                 </a:solidFill>
@@ -21073,7 +21073,7 @@
               <a:t>• n</a:t>
             </a:r>
             <a:r>
-              <a:rPr sz="1250">
+              <a:rPr sz="1400">
                 <a:solidFill>
                   <a:srgbClr val="F1C40F"/>
                 </a:solidFill>
@@ -21081,7 +21081,7 @@
               <a:t>I</a:t>
             </a:r>
             <a:r>
-              <a:rPr sz="1650">
+              <a:rPr sz="1800">
                 <a:solidFill>
                   <a:srgbClr val="F1C40F"/>
                 </a:solidFill>
@@ -21241,7 +21241,7 @@
               </a:lnSpc>
             </a:pPr>
             <a:r>
-              <a:rPr sz="1650">
+              <a:rPr sz="1800">
                 <a:solidFill>
                   <a:srgbClr val="FBFCFD"/>
                 </a:solidFill>
@@ -21256,7 +21256,7 @@
               </a:lnSpc>
             </a:pPr>
             <a:r>
-              <a:rPr sz="1650">
+              <a:rPr sz="1800">
                 <a:solidFill>
                   <a:srgbClr val="FBFCFD"/>
                 </a:solidFill>
@@ -21264,7 +21264,7 @@
               <a:t>• I</a:t>
             </a:r>
             <a:r>
-              <a:rPr sz="1250">
+              <a:rPr sz="1400">
                 <a:solidFill>
                   <a:srgbClr val="FBFCFD"/>
                 </a:solidFill>
@@ -21272,7 +21272,7 @@
               <a:t>L</a:t>
             </a:r>
             <a:r>
-              <a:rPr sz="1650">
+              <a:rPr sz="1800">
                 <a:solidFill>
                   <a:srgbClr val="FBFCFD"/>
                 </a:solidFill>
@@ -21287,7 +21287,7 @@
               </a:lnSpc>
             </a:pPr>
             <a:r>
-              <a:rPr sz="1650">
+              <a:rPr sz="1800">
                 <a:solidFill>
                   <a:srgbClr val="FBFCFD"/>
                 </a:solidFill>
@@ -21295,7 +21295,7 @@
               <a:t>• I</a:t>
             </a:r>
             <a:r>
-              <a:rPr sz="1250">
+              <a:rPr sz="1400">
                 <a:solidFill>
                   <a:srgbClr val="FBFCFD"/>
                 </a:solidFill>
@@ -21303,7 +21303,7 @@
               <a:t>0</a:t>
             </a:r>
             <a:r>
-              <a:rPr sz="1650">
+              <a:rPr sz="1800">
                 <a:solidFill>
                   <a:srgbClr val="FBFCFD"/>
                 </a:solidFill>
@@ -21318,7 +21318,7 @@
               </a:lnSpc>
             </a:pPr>
             <a:r>
-              <a:rPr sz="1650">
+              <a:rPr sz="1800">
                 <a:solidFill>
                   <a:srgbClr val="FBFCFD"/>
                 </a:solidFill>
@@ -21326,7 +21326,7 @@
               <a:t>• R</a:t>
             </a:r>
             <a:r>
-              <a:rPr sz="1250">
+              <a:rPr sz="1400">
                 <a:solidFill>
                   <a:srgbClr val="FBFCFD"/>
                 </a:solidFill>
@@ -21334,7 +21334,7 @@
               <a:t>s</a:t>
             </a:r>
             <a:r>
-              <a:rPr sz="1650">
+              <a:rPr sz="1800">
                 <a:solidFill>
                   <a:srgbClr val="FBFCFD"/>
                 </a:solidFill>
@@ -21342,7 +21342,7 @@
               <a:t> / R</a:t>
             </a:r>
             <a:r>
-              <a:rPr sz="1250">
+              <a:rPr sz="1400">
                 <a:solidFill>
                   <a:srgbClr val="FBFCFD"/>
                 </a:solidFill>
@@ -21350,7 +21350,7 @@
               <a:t>sh</a:t>
             </a:r>
             <a:r>
-              <a:rPr sz="1650">
+              <a:rPr sz="1800">
                 <a:solidFill>
                   <a:srgbClr val="FBFCFD"/>
                 </a:solidFill>
@@ -21365,7 +21365,7 @@
               </a:lnSpc>
             </a:pPr>
             <a:r>
-              <a:rPr sz="1650">
+              <a:rPr sz="1800">
                 <a:solidFill>
                   <a:srgbClr val="FBFCFD"/>
                 </a:solidFill>
@@ -21373,7 +21373,7 @@
               <a:t>• k / q / T</a:t>
             </a:r>
             <a:r>
-              <a:rPr sz="1250">
+              <a:rPr sz="1400">
                 <a:solidFill>
                   <a:srgbClr val="FBFCFD"/>
                 </a:solidFill>
@@ -21381,7 +21381,7 @@
               <a:t>c</a:t>
             </a:r>
             <a:r>
-              <a:rPr sz="1650">
+              <a:rPr sz="1800">
                 <a:solidFill>
                   <a:srgbClr val="FBFCFD"/>
                 </a:solidFill>
@@ -21728,7 +21728,7 @@
           <a:p>
             <a:pPr algn="l"/>
             <a:r>
-              <a:rPr sz="1550">
+              <a:rPr sz="1800">
                 <a:solidFill>
                   <a:srgbClr val="FBFCFD"/>
                 </a:solidFill>
@@ -21814,7 +21814,7 @@
               </a:lnSpc>
             </a:pPr>
             <a:r>
-              <a:rPr sz="1550">
+              <a:rPr sz="1750">
                 <a:solidFill>
                   <a:srgbClr val="F1C40F"/>
                 </a:solidFill>
@@ -21822,7 +21822,7 @@
               <a:t>• β</a:t>
             </a:r>
             <a:r>
-              <a:rPr sz="1150">
+              <a:rPr sz="1350">
                 <a:solidFill>
                   <a:srgbClr val="F1C40F"/>
                 </a:solidFill>
@@ -21830,7 +21830,7 @@
               <a:t>Voc</a:t>
             </a:r>
             <a:r>
-              <a:rPr sz="1550">
+              <a:rPr sz="1750">
                 <a:solidFill>
                   <a:srgbClr val="F1C40F"/>
                 </a:solidFill>
@@ -21838,7 +21838,7 @@
               <a:t> (medido): regresión lineal V</a:t>
             </a:r>
             <a:r>
-              <a:rPr sz="1150">
+              <a:rPr sz="1350">
                 <a:solidFill>
                   <a:srgbClr val="F1C40F"/>
                 </a:solidFill>
@@ -21846,7 +21846,7 @@
               <a:t>oc</a:t>
             </a:r>
             <a:r>
-              <a:rPr sz="1550">
+              <a:rPr sz="1750">
                 <a:solidFill>
                   <a:srgbClr val="F1C40F"/>
                 </a:solidFill>
@@ -21854,7 +21854,7 @@
               <a:t> vs T</a:t>
             </a:r>
             <a:r>
-              <a:rPr sz="1150">
+              <a:rPr sz="1350">
                 <a:solidFill>
                   <a:srgbClr val="F1C40F"/>
                 </a:solidFill>
@@ -21862,7 +21862,7 @@
               <a:t>c</a:t>
             </a:r>
             <a:r>
-              <a:rPr sz="1550">
+              <a:rPr sz="1750">
                 <a:solidFill>
                   <a:srgbClr val="F1C40F"/>
                 </a:solidFill>
@@ -21877,7 +21877,7 @@
               </a:lnSpc>
             </a:pPr>
             <a:r>
-              <a:rPr sz="1550">
+              <a:rPr sz="1750">
                 <a:solidFill>
                   <a:srgbClr val="F1C40F"/>
                 </a:solidFill>
@@ -21885,7 +21885,7 @@
               <a:t>• α</a:t>
             </a:r>
             <a:r>
-              <a:rPr sz="1150">
+              <a:rPr sz="1350">
                 <a:solidFill>
                   <a:srgbClr val="F1C40F"/>
                 </a:solidFill>
@@ -21893,7 +21893,7 @@
               <a:t>Isc</a:t>
             </a:r>
             <a:r>
-              <a:rPr sz="1550">
+              <a:rPr sz="1750">
                 <a:solidFill>
                   <a:srgbClr val="F1C40F"/>
                 </a:solidFill>
@@ -21908,7 +21908,7 @@
               </a:lnSpc>
             </a:pPr>
             <a:r>
-              <a:rPr sz="1550">
+              <a:rPr sz="1750">
                 <a:solidFill>
                   <a:srgbClr val="F1C40F"/>
                 </a:solidFill>
@@ -21916,7 +21916,7 @@
               <a:t>• Promedios de la ventana → I</a:t>
             </a:r>
             <a:r>
-              <a:rPr sz="1150">
+              <a:rPr sz="1350">
                 <a:solidFill>
                   <a:srgbClr val="F1C40F"/>
                 </a:solidFill>
@@ -21924,7 +21924,7 @@
               <a:t>sc,ref</a:t>
             </a:r>
             <a:r>
-              <a:rPr sz="1550">
+              <a:rPr sz="1750">
                 <a:solidFill>
                   <a:srgbClr val="F1C40F"/>
                 </a:solidFill>
@@ -21932,7 +21932,7 @@
               <a:t>, V</a:t>
             </a:r>
             <a:r>
-              <a:rPr sz="1150">
+              <a:rPr sz="1350">
                 <a:solidFill>
                   <a:srgbClr val="F1C40F"/>
                 </a:solidFill>
@@ -21940,7 +21940,7 @@
               <a:t>oc,ref</a:t>
             </a:r>
             <a:r>
-              <a:rPr sz="1550">
+              <a:rPr sz="1750">
                 <a:solidFill>
                   <a:srgbClr val="F1C40F"/>
                 </a:solidFill>
@@ -21948,7 +21948,7 @@
               <a:t>, I</a:t>
             </a:r>
             <a:r>
-              <a:rPr sz="1150">
+              <a:rPr sz="1350">
                 <a:solidFill>
                   <a:srgbClr val="F1C40F"/>
                 </a:solidFill>
@@ -21956,7 +21956,7 @@
               <a:t>mp,ref</a:t>
             </a:r>
             <a:r>
-              <a:rPr sz="1550">
+              <a:rPr sz="1750">
                 <a:solidFill>
                   <a:srgbClr val="F1C40F"/>
                 </a:solidFill>
@@ -21964,7 +21964,7 @@
               <a:t>, V</a:t>
             </a:r>
             <a:r>
-              <a:rPr sz="1150">
+              <a:rPr sz="1350">
                 <a:solidFill>
                   <a:srgbClr val="F1C40F"/>
                 </a:solidFill>
@@ -21972,7 +21972,7 @@
               <a:t>mp,ref</a:t>
             </a:r>
             <a:r>
-              <a:rPr sz="1550">
+              <a:rPr sz="1750">
                 <a:solidFill>
                   <a:srgbClr val="F1C40F"/>
                 </a:solidFill>
@@ -22128,7 +22128,7 @@
           <a:p>
             <a:pPr algn="l"/>
             <a:r>
-              <a:rPr sz="1450">
+              <a:rPr sz="1650">
                 <a:solidFill>
                   <a:srgbClr val="7FDBFF"/>
                 </a:solidFill>
@@ -22137,7 +22137,7 @@
               <a:t>scipy.optimize.minimize</a:t>
             </a:r>
             <a:r>
-              <a:rPr sz="1550">
+              <a:rPr sz="1750">
                 <a:solidFill>
                   <a:srgbClr val="FBFCFD"/>
                 </a:solidFill>
@@ -22199,7 +22199,7 @@
               </a:lnSpc>
             </a:pPr>
             <a:r>
-              <a:rPr sz="1500">
+              <a:rPr sz="1700">
                 <a:solidFill>
                   <a:srgbClr val="F1C40F"/>
                 </a:solidFill>
@@ -22207,7 +22207,7 @@
               <a:t>• e</a:t>
             </a:r>
             <a:r>
-              <a:rPr sz="1100">
+              <a:rPr sz="1300">
                 <a:solidFill>
                   <a:srgbClr val="F1C40F"/>
                 </a:solidFill>
@@ -22215,7 +22215,7 @@
               <a:t>Voc</a:t>
             </a:r>
             <a:r>
-              <a:rPr sz="1500">
+              <a:rPr sz="1700">
                 <a:solidFill>
                   <a:srgbClr val="F1C40F"/>
                 </a:solidFill>
@@ -22230,7 +22230,7 @@
               </a:lnSpc>
             </a:pPr>
             <a:r>
-              <a:rPr sz="1500">
+              <a:rPr sz="1700">
                 <a:solidFill>
                   <a:srgbClr val="F1C40F"/>
                 </a:solidFill>
@@ -22238,7 +22238,7 @@
               <a:t>• e</a:t>
             </a:r>
             <a:r>
-              <a:rPr sz="1100">
+              <a:rPr sz="1300">
                 <a:solidFill>
                   <a:srgbClr val="F1C40F"/>
                 </a:solidFill>
@@ -22246,7 +22246,7 @@
               <a:t>Isc</a:t>
             </a:r>
             <a:r>
-              <a:rPr sz="1500">
+              <a:rPr sz="1700">
                 <a:solidFill>
                   <a:srgbClr val="F1C40F"/>
                 </a:solidFill>
@@ -22261,7 +22261,7 @@
               </a:lnSpc>
             </a:pPr>
             <a:r>
-              <a:rPr sz="1500">
+              <a:rPr sz="1700">
                 <a:solidFill>
                   <a:srgbClr val="F1C40F"/>
                 </a:solidFill>
@@ -22269,7 +22269,7 @@
               <a:t>• e</a:t>
             </a:r>
             <a:r>
-              <a:rPr sz="1100">
+              <a:rPr sz="1300">
                 <a:solidFill>
                   <a:srgbClr val="F1C40F"/>
                 </a:solidFill>
@@ -22277,7 +22277,7 @@
               <a:t>MPP</a:t>
             </a:r>
             <a:r>
-              <a:rPr sz="1500">
+              <a:rPr sz="1700">
                 <a:solidFill>
                   <a:srgbClr val="F1C40F"/>
                 </a:solidFill>
@@ -22285,7 +22285,7 @@
               <a:t>: corriente correcta en (V</a:t>
             </a:r>
             <a:r>
-              <a:rPr sz="1100">
+              <a:rPr sz="1300">
                 <a:solidFill>
                   <a:srgbClr val="F1C40F"/>
                 </a:solidFill>
@@ -22293,7 +22293,7 @@
               <a:t>mp</a:t>
             </a:r>
             <a:r>
-              <a:rPr sz="1500">
+              <a:rPr sz="1700">
                 <a:solidFill>
                   <a:srgbClr val="F1C40F"/>
                 </a:solidFill>
@@ -22301,7 +22301,7 @@
               <a:t>, I</a:t>
             </a:r>
             <a:r>
-              <a:rPr sz="1100">
+              <a:rPr sz="1300">
                 <a:solidFill>
                   <a:srgbClr val="F1C40F"/>
                 </a:solidFill>
@@ -22309,7 +22309,7 @@
               <a:t>mp</a:t>
             </a:r>
             <a:r>
-              <a:rPr sz="1500">
+              <a:rPr sz="1700">
                 <a:solidFill>
                   <a:srgbClr val="F1C40F"/>
                 </a:solidFill>
@@ -22331,7 +22331,7 @@
               </a:lnSpc>
             </a:pPr>
             <a:r>
-              <a:rPr sz="1500" b="1">
+              <a:rPr sz="1700" b="1">
                 <a:solidFill>
                   <a:srgbClr val="F1C40F"/>
                 </a:solidFill>
@@ -22339,7 +22339,7 @@
               <a:t>Regularización física (bounds):</a:t>
             </a:r>
             <a:r>
-              <a:rPr sz="1500">
+              <a:rPr sz="1700">
                 <a:solidFill>
                   <a:srgbClr val="F1C40F"/>
                 </a:solidFill>
@@ -22347,7 +22347,7 @@
               <a:t> R</a:t>
             </a:r>
             <a:r>
-              <a:rPr sz="1100">
+              <a:rPr sz="1300">
                 <a:solidFill>
                   <a:srgbClr val="F1C40F"/>
                 </a:solidFill>
@@ -22355,7 +22355,7 @@
               <a:t>s</a:t>
             </a:r>
             <a:r>
-              <a:rPr sz="1500">
+              <a:rPr sz="1700">
                 <a:solidFill>
                   <a:srgbClr val="F1C40F"/>
                 </a:solidFill>
@@ -22363,7 +22363,7 @@
               <a:t> ∈ [0.001, 2] Ω · R</a:t>
             </a:r>
             <a:r>
-              <a:rPr sz="1100">
+              <a:rPr sz="1300">
                 <a:solidFill>
                   <a:srgbClr val="F1C40F"/>
                 </a:solidFill>
@@ -22371,7 +22371,7 @@
               <a:t>sh</a:t>
             </a:r>
             <a:r>
-              <a:rPr sz="1500">
+              <a:rPr sz="1700">
                 <a:solidFill>
                   <a:srgbClr val="F1C40F"/>
                 </a:solidFill>
@@ -22379,7 +22379,7 @@
               <a:t> ∈ [100, 10⁴] Ω · n</a:t>
             </a:r>
             <a:r>
-              <a:rPr sz="1100">
+              <a:rPr sz="1300">
                 <a:solidFill>
                   <a:srgbClr val="F1C40F"/>
                 </a:solidFill>
@@ -22387,7 +22387,7 @@
               <a:t>I</a:t>
             </a:r>
             <a:r>
-              <a:rPr sz="1500">
+              <a:rPr sz="1700">
                 <a:solidFill>
                   <a:srgbClr val="F1C40F"/>
                 </a:solidFill>
@@ -22395,7 +22395,7 @@
               <a:t> ∈ [1, 2] · I</a:t>
             </a:r>
             <a:r>
-              <a:rPr sz="1100">
+              <a:rPr sz="1300">
                 <a:solidFill>
                   <a:srgbClr val="F1C40F"/>
                 </a:solidFill>
@@ -22403,7 +22403,7 @@
               <a:t>L</a:t>
             </a:r>
             <a:r>
-              <a:rPr sz="1500">
+              <a:rPr sz="1700">
                 <a:solidFill>
                   <a:srgbClr val="F1C40F"/>
                 </a:solidFill>
@@ -22411,7 +22411,7 @@
               <a:t> ± 10 % · I</a:t>
             </a:r>
             <a:r>
-              <a:rPr sz="1100">
+              <a:rPr sz="1300">
                 <a:solidFill>
                   <a:srgbClr val="F1C40F"/>
                 </a:solidFill>
@@ -22419,7 +22419,7 @@
               <a:t>0</a:t>
             </a:r>
             <a:r>
-              <a:rPr sz="1500">
+              <a:rPr sz="1700">
                 <a:solidFill>
                   <a:srgbClr val="F1C40F"/>
                 </a:solidFill>
@@ -22434,7 +22434,7 @@
               </a:lnSpc>
             </a:pPr>
             <a:r>
-              <a:rPr sz="1500" b="1">
+              <a:rPr sz="1700" b="1">
                 <a:solidFill>
                   <a:srgbClr val="F1C40F"/>
                 </a:solidFill>
@@ -22442,7 +22442,7 @@
               <a:t>Inicialización analítica:</a:t>
             </a:r>
             <a:r>
-              <a:rPr sz="1500">
+              <a:rPr sz="1700">
                 <a:solidFill>
                   <a:srgbClr val="F1C40F"/>
                 </a:solidFill>
@@ -22450,7 +22450,7 @@
               <a:t> a₀ = N</a:t>
             </a:r>
             <a:r>
-              <a:rPr sz="1100">
+              <a:rPr sz="1300">
                 <a:solidFill>
                   <a:srgbClr val="F1C40F"/>
                 </a:solidFill>
@@ -22458,7 +22458,7 @@
               <a:t>s</a:t>
             </a:r>
             <a:r>
-              <a:rPr sz="1500">
+              <a:rPr sz="1700">
                 <a:solidFill>
                   <a:srgbClr val="F1C40F"/>
                 </a:solidFill>
@@ -22466,7 +22466,7 @@
               <a:t>·1.2·kT/q; I</a:t>
             </a:r>
             <a:r>
-              <a:rPr sz="1100">
+              <a:rPr sz="1300">
                 <a:solidFill>
                   <a:srgbClr val="F1C40F"/>
                 </a:solidFill>
@@ -22474,7 +22474,7 @@
               <a:t>0,0</a:t>
             </a:r>
             <a:r>
-              <a:rPr sz="1500">
+              <a:rPr sz="1700">
                 <a:solidFill>
                   <a:srgbClr val="F1C40F"/>
                 </a:solidFill>
@@ -22482,7 +22482,7 @@
               <a:t> = I</a:t>
             </a:r>
             <a:r>
-              <a:rPr sz="1100">
+              <a:rPr sz="1300">
                 <a:solidFill>
                   <a:srgbClr val="F1C40F"/>
                 </a:solidFill>
@@ -22490,7 +22490,7 @@
               <a:t>sc</a:t>
             </a:r>
             <a:r>
-              <a:rPr sz="1500">
+              <a:rPr sz="1700">
                 <a:solidFill>
                   <a:srgbClr val="F1C40F"/>
                 </a:solidFill>
@@ -22498,7 +22498,7 @@
               <a:t>·exp(−V</a:t>
             </a:r>
             <a:r>
-              <a:rPr sz="1100">
+              <a:rPr sz="1300">
                 <a:solidFill>
                   <a:srgbClr val="F1C40F"/>
                 </a:solidFill>
@@ -22506,7 +22506,7 @@
               <a:t>oc</a:t>
             </a:r>
             <a:r>
-              <a:rPr sz="1500">
+              <a:rPr sz="1700">
                 <a:solidFill>
                   <a:srgbClr val="F1C40F"/>
                 </a:solidFill>
@@ -22521,7 +22521,7 @@
               </a:lnSpc>
             </a:pPr>
             <a:r>
-              <a:rPr sz="1500">
+              <a:rPr sz="1700">
                 <a:solidFill>
                   <a:srgbClr val="F1C40F"/>
                 </a:solidFill>
@@ -22868,7 +22868,7 @@
           <a:p>
             <a:pPr algn="l"/>
             <a:r>
-              <a:rPr sz="1550">
+              <a:rPr sz="1750">
                 <a:solidFill>
                   <a:srgbClr val="FBFCFD"/>
                 </a:solidFill>
@@ -22876,7 +22876,7 @@
               <a:t>1. Corriente fotogenerada (I</a:t>
             </a:r>
             <a:r>
-              <a:rPr sz="1150">
+              <a:rPr sz="1350">
                 <a:solidFill>
                   <a:srgbClr val="FBFCFD"/>
                 </a:solidFill>
@@ -22884,7 +22884,7 @@
               <a:t>L</a:t>
             </a:r>
             <a:r>
-              <a:rPr sz="1550">
+              <a:rPr sz="1750">
                 <a:solidFill>
                   <a:srgbClr val="FBFCFD"/>
                 </a:solidFill>
@@ -22942,7 +22942,7 @@
           <a:p>
             <a:pPr algn="l"/>
             <a:r>
-              <a:rPr sz="1550">
+              <a:rPr sz="1750">
                 <a:solidFill>
                   <a:srgbClr val="FBFCFD"/>
                 </a:solidFill>
@@ -22950,7 +22950,7 @@
               <a:t>2. Corriente de saturación inversa (I</a:t>
             </a:r>
             <a:r>
-              <a:rPr sz="1150">
+              <a:rPr sz="1350">
                 <a:solidFill>
                   <a:srgbClr val="FBFCFD"/>
                 </a:solidFill>
@@ -22958,7 +22958,7 @@
               <a:t>0</a:t>
             </a:r>
             <a:r>
-              <a:rPr sz="1550">
+              <a:rPr sz="1750">
                 <a:solidFill>
                   <a:srgbClr val="FBFCFD"/>
                 </a:solidFill>
@@ -23016,7 +23016,7 @@
           <a:p>
             <a:pPr algn="l"/>
             <a:r>
-              <a:rPr sz="1550">
+              <a:rPr sz="1750">
                 <a:solidFill>
                   <a:srgbClr val="FBFCFD"/>
                 </a:solidFill>
@@ -23196,7 +23196,7 @@
           <a:p>
             <a:pPr algn="l"/>
             <a:r>
-              <a:rPr sz="1550">
+              <a:rPr sz="1750">
                 <a:solidFill>
                   <a:srgbClr val="FBFCFD"/>
                 </a:solidFill>
@@ -23204,7 +23204,7 @@
               <a:t>4. Resistencia shunt (R</a:t>
             </a:r>
             <a:r>
-              <a:rPr sz="1150">
+              <a:rPr sz="1350">
                 <a:solidFill>
                   <a:srgbClr val="FBFCFD"/>
                 </a:solidFill>
@@ -23212,7 +23212,7 @@
               <a:t>sh</a:t>
             </a:r>
             <a:r>
-              <a:rPr sz="1550">
+              <a:rPr sz="1750">
                 <a:solidFill>
                   <a:srgbClr val="FBFCFD"/>
                 </a:solidFill>
@@ -23270,7 +23270,7 @@
           <a:p>
             <a:pPr algn="l"/>
             <a:r>
-              <a:rPr sz="1550">
+              <a:rPr sz="1750">
                 <a:solidFill>
                   <a:srgbClr val="FBFCFD"/>
                 </a:solidFill>
@@ -23278,7 +23278,7 @@
               <a:t>5. Energía de bandgap del Silicio (E</a:t>
             </a:r>
             <a:r>
-              <a:rPr sz="1150">
+              <a:rPr sz="1350">
                 <a:solidFill>
                   <a:srgbClr val="FBFCFD"/>
                 </a:solidFill>
@@ -23286,7 +23286,7 @@
               <a:t>g</a:t>
             </a:r>
             <a:r>
-              <a:rPr sz="1550">
+              <a:rPr sz="1750">
                 <a:solidFill>
                   <a:srgbClr val="FBFCFD"/>
                 </a:solidFill>
@@ -23348,7 +23348,7 @@
               </a:lnSpc>
             </a:pPr>
             <a:r>
-              <a:rPr sz="1550">
+              <a:rPr sz="1700">
                 <a:solidFill>
                   <a:srgbClr val="F1C40F"/>
                 </a:solidFill>
@@ -23363,7 +23363,7 @@
               </a:lnSpc>
             </a:pPr>
             <a:r>
-              <a:rPr sz="1550">
+              <a:rPr sz="1700">
                 <a:solidFill>
                   <a:srgbClr val="F1C40F"/>
                 </a:solidFill>
@@ -23371,7 +23371,7 @@
               <a:t>• R</a:t>
             </a:r>
             <a:r>
-              <a:rPr sz="1150">
+              <a:rPr sz="1300">
                 <a:solidFill>
                   <a:srgbClr val="F1C40F"/>
                 </a:solidFill>
@@ -23379,7 +23379,7 @@
               <a:t>s</a:t>
             </a:r>
             <a:r>
-              <a:rPr sz="1550">
+              <a:rPr sz="1700">
                 <a:solidFill>
                   <a:srgbClr val="F1C40F"/>
                 </a:solidFill>
@@ -23387,7 +23387,7 @@
               <a:t> constante: R</a:t>
             </a:r>
             <a:r>
-              <a:rPr sz="1150">
+              <a:rPr sz="1300">
                 <a:solidFill>
                   <a:srgbClr val="F1C40F"/>
                 </a:solidFill>
@@ -23395,7 +23395,7 @@
               <a:t>s</a:t>
             </a:r>
             <a:r>
-              <a:rPr sz="1550">
+              <a:rPr sz="1700">
                 <a:solidFill>
                   <a:srgbClr val="F1C40F"/>
                 </a:solidFill>
@@ -23403,7 +23403,7 @@
               <a:t> = R</a:t>
             </a:r>
             <a:r>
-              <a:rPr sz="1150">
+              <a:rPr sz="1300">
                 <a:solidFill>
                   <a:srgbClr val="F1C40F"/>
                 </a:solidFill>
@@ -23411,7 +23411,7 @@
               <a:t>s,ref</a:t>
             </a:r>
             <a:r>
-              <a:rPr sz="1550">
+              <a:rPr sz="1700">
                 <a:solidFill>
                   <a:srgbClr val="F1C40F"/>
                 </a:solidFill>
@@ -23426,7 +23426,7 @@
               </a:lnSpc>
             </a:pPr>
             <a:r>
-              <a:rPr sz="1550">
+              <a:rPr sz="1700">
                 <a:solidFill>
                   <a:srgbClr val="F1C40F"/>
                 </a:solidFill>
@@ -23434,7 +23434,7 @@
               <a:t>• R</a:t>
             </a:r>
             <a:r>
-              <a:rPr sz="1150">
+              <a:rPr sz="1300">
                 <a:solidFill>
                   <a:srgbClr val="F1C40F"/>
                 </a:solidFill>
@@ -23442,7 +23442,7 @@
               <a:t>sh</a:t>
             </a:r>
             <a:r>
-              <a:rPr sz="1550">
+              <a:rPr sz="1700">
                 <a:solidFill>
                   <a:srgbClr val="F1C40F"/>
                 </a:solidFill>
@@ -23457,7 +23457,7 @@
               </a:lnSpc>
             </a:pPr>
             <a:r>
-              <a:rPr sz="1550">
+              <a:rPr sz="1700">
                 <a:solidFill>
                   <a:srgbClr val="F1C40F"/>
                 </a:solidFill>
@@ -23465,7 +23465,7 @@
               <a:t>• E</a:t>
             </a:r>
             <a:r>
-              <a:rPr sz="1150">
+              <a:rPr sz="1300">
                 <a:solidFill>
                   <a:srgbClr val="F1C40F"/>
                 </a:solidFill>
@@ -23473,7 +23473,7 @@
               <a:t>g,ref</a:t>
             </a:r>
             <a:r>
-              <a:rPr sz="1550">
+              <a:rPr sz="1700">
                 <a:solidFill>
                   <a:srgbClr val="F1C40F"/>
                 </a:solidFill>
@@ -23488,7 +23488,7 @@
               </a:lnSpc>
             </a:pPr>
             <a:r>
-              <a:rPr sz="1550">
+              <a:rPr sz="1700">
                 <a:solidFill>
                   <a:srgbClr val="F1C40F"/>
                 </a:solidFill>
@@ -23496,7 +23496,7 @@
               <a:t>• S = G</a:t>
             </a:r>
             <a:r>
-              <a:rPr sz="1150">
+              <a:rPr sz="1300">
                 <a:solidFill>
                   <a:srgbClr val="F1C40F"/>
                 </a:solidFill>
@@ -23504,7 +23504,7 @@
               <a:t>poa</a:t>
             </a:r>
             <a:r>
-              <a:rPr sz="1550">
+              <a:rPr sz="1700">
                 <a:solidFill>
                   <a:srgbClr val="F1C40F"/>
                 </a:solidFill>
@@ -23519,7 +23519,7 @@
               </a:lnSpc>
             </a:pPr>
             <a:r>
-              <a:rPr sz="1550">
+              <a:rPr sz="1700">
                 <a:solidFill>
                   <a:srgbClr val="F1C40F"/>
                 </a:solidFill>
@@ -23527,7 +23527,7 @@
               <a:t>Implementado por </a:t>
             </a:r>
             <a:r>
-              <a:rPr sz="1450">
+              <a:rPr sz="1600">
                 <a:solidFill>
                   <a:srgbClr val="7FDBFF"/>
                 </a:solidFill>
@@ -23536,7 +23536,7 @@
               <a:t>pvlib.pvsystem.calcparams_desoto</a:t>
             </a:r>
             <a:r>
-              <a:rPr sz="1550">
+              <a:rPr sz="1700">
                 <a:solidFill>
                   <a:srgbClr val="F1C40F"/>
                 </a:solidFill>
@@ -23883,7 +23883,7 @@
           <a:p>
             <a:pPr algn="l"/>
             <a:r>
-              <a:rPr sz="1600">
+              <a:rPr sz="1800">
                 <a:solidFill>
                   <a:srgbClr val="FBFCFD"/>
                 </a:solidFill>
@@ -24067,7 +24067,7 @@
               </a:lnSpc>
             </a:pPr>
             <a:r>
-              <a:rPr sz="1650">
+              <a:rPr sz="1800">
                 <a:solidFill>
                   <a:srgbClr val="FBFCFD"/>
                 </a:solidFill>
@@ -24075,7 +24075,7 @@
               <a:t>• P</a:t>
             </a:r>
             <a:r>
-              <a:rPr sz="1250">
+              <a:rPr sz="1400">
                 <a:solidFill>
                   <a:srgbClr val="FBFCFD"/>
                 </a:solidFill>
@@ -24083,7 +24083,7 @@
               <a:t>mp,t</a:t>
             </a:r>
             <a:r>
-              <a:rPr sz="1650">
+              <a:rPr sz="1800">
                 <a:solidFill>
                   <a:srgbClr val="FBFCFD"/>
                 </a:solidFill>
@@ -24098,7 +24098,7 @@
               </a:lnSpc>
             </a:pPr>
             <a:r>
-              <a:rPr sz="1650">
+              <a:rPr sz="1800">
                 <a:solidFill>
                   <a:srgbClr val="FBFCFD"/>
                 </a:solidFill>
@@ -24106,7 +24106,7 @@
               <a:t>• P</a:t>
             </a:r>
             <a:r>
-              <a:rPr sz="1250">
+              <a:rPr sz="1400">
                 <a:solidFill>
                   <a:srgbClr val="FBFCFD"/>
                 </a:solidFill>
@@ -24114,7 +24114,7 @@
               <a:t>STC</a:t>
             </a:r>
             <a:r>
-              <a:rPr sz="1650">
+              <a:rPr sz="1800">
                 <a:solidFill>
                   <a:srgbClr val="FBFCFD"/>
                 </a:solidFill>
@@ -24122,7 +24122,7 @@
               <a:t>: potencia nominal del </a:t>
             </a:r>
             <a:r>
-              <a:rPr sz="1650" b="1">
+              <a:rPr sz="1800" b="1">
                 <a:solidFill>
                   <a:srgbClr val="FBFCFD"/>
                 </a:solidFill>
@@ -24130,7 +24130,7 @@
               <a:t>mismo SDM</a:t>
             </a:r>
             <a:r>
-              <a:rPr sz="1650">
+              <a:rPr sz="1800">
                 <a:solidFill>
                   <a:srgbClr val="FBFCFD"/>
                 </a:solidFill>
@@ -24145,7 +24145,7 @@
               </a:lnSpc>
             </a:pPr>
             <a:r>
-              <a:rPr sz="1650">
+              <a:rPr sz="1800">
                 <a:solidFill>
                   <a:srgbClr val="FBFCFD"/>
                 </a:solidFill>
@@ -24153,7 +24153,7 @@
               <a:t>• G</a:t>
             </a:r>
             <a:r>
-              <a:rPr sz="1250">
+              <a:rPr sz="1400">
                 <a:solidFill>
                   <a:srgbClr val="FBFCFD"/>
                 </a:solidFill>
@@ -24161,7 +24161,7 @@
               <a:t>poa,t</a:t>
             </a:r>
             <a:r>
-              <a:rPr sz="1650">
+              <a:rPr sz="1800">
                 <a:solidFill>
                   <a:srgbClr val="FBFCFD"/>
                 </a:solidFill>
@@ -24176,7 +24176,7 @@
               </a:lnSpc>
             </a:pPr>
             <a:r>
-              <a:rPr sz="1650">
+              <a:rPr sz="1800">
                 <a:solidFill>
                   <a:srgbClr val="FBFCFD"/>
                 </a:solidFill>
@@ -24184,7 +24184,7 @@
               <a:t>• G</a:t>
             </a:r>
             <a:r>
-              <a:rPr sz="1250">
+              <a:rPr sz="1400">
                 <a:solidFill>
                   <a:srgbClr val="FBFCFD"/>
                 </a:solidFill>
@@ -24192,7 +24192,7 @@
               <a:t>ref</a:t>
             </a:r>
             <a:r>
-              <a:rPr sz="1650">
+              <a:rPr sz="1800">
                 <a:solidFill>
                   <a:srgbClr val="FBFCFD"/>
                 </a:solidFill>
@@ -24352,7 +24352,7 @@
               </a:lnSpc>
             </a:pPr>
             <a:r>
-              <a:rPr sz="1650">
+              <a:rPr sz="1800">
                 <a:solidFill>
                   <a:srgbClr val="FBFCFD"/>
                 </a:solidFill>
@@ -24360,7 +24360,7 @@
               <a:t>• </a:t>
             </a:r>
             <a:r>
-              <a:rPr sz="1650" b="1">
+              <a:rPr sz="1800" b="1">
                 <a:solidFill>
                   <a:srgbClr val="FBFCFD"/>
                 </a:solidFill>
@@ -24368,7 +24368,7 @@
               <a:t>Térmicas:</a:t>
             </a:r>
             <a:r>
-              <a:rPr sz="1650">
+              <a:rPr sz="1800">
                 <a:solidFill>
                   <a:srgbClr val="FBFCFD"/>
                 </a:solidFill>
@@ -24376,7 +24376,7 @@
               <a:t> caídas por elevada T</a:t>
             </a:r>
             <a:r>
-              <a:rPr sz="1250">
+              <a:rPr sz="1400">
                 <a:solidFill>
                   <a:srgbClr val="FBFCFD"/>
                 </a:solidFill>
@@ -24384,7 +24384,7 @@
               <a:t>c</a:t>
             </a:r>
             <a:r>
-              <a:rPr sz="1650">
+              <a:rPr sz="1800">
                 <a:solidFill>
                   <a:srgbClr val="FBFCFD"/>
                 </a:solidFill>
@@ -24399,7 +24399,7 @@
               </a:lnSpc>
             </a:pPr>
             <a:r>
-              <a:rPr sz="1650">
+              <a:rPr sz="1800">
                 <a:solidFill>
                   <a:srgbClr val="FBFCFD"/>
                 </a:solidFill>
@@ -24407,7 +24407,7 @@
               <a:t>• </a:t>
             </a:r>
             <a:r>
-              <a:rPr sz="1650" b="1">
+              <a:rPr sz="1800" b="1">
                 <a:solidFill>
                   <a:srgbClr val="FBFCFD"/>
                 </a:solidFill>
@@ -24415,7 +24415,7 @@
               <a:t>Óhmicas:</a:t>
             </a:r>
             <a:r>
-              <a:rPr sz="1650">
+              <a:rPr sz="1800">
                 <a:solidFill>
                   <a:srgbClr val="FBFCFD"/>
                 </a:solidFill>
@@ -24423,7 +24423,7 @@
               <a:t> pérdidas resistivas en R</a:t>
             </a:r>
             <a:r>
-              <a:rPr sz="1250">
+              <a:rPr sz="1400">
                 <a:solidFill>
                   <a:srgbClr val="FBFCFD"/>
                 </a:solidFill>
@@ -24431,7 +24431,7 @@
               <a:t>s</a:t>
             </a:r>
             <a:r>
-              <a:rPr sz="1650">
+              <a:rPr sz="1800">
                 <a:solidFill>
                   <a:srgbClr val="FBFCFD"/>
                 </a:solidFill>
@@ -24446,7 +24446,7 @@
               </a:lnSpc>
             </a:pPr>
             <a:r>
-              <a:rPr sz="1650">
+              <a:rPr sz="1800">
                 <a:solidFill>
                   <a:srgbClr val="FBFCFD"/>
                 </a:solidFill>
@@ -24454,7 +24454,7 @@
               <a:t>• </a:t>
             </a:r>
             <a:r>
-              <a:rPr sz="1650" b="1">
+              <a:rPr sz="1800" b="1">
                 <a:solidFill>
                   <a:srgbClr val="FBFCFD"/>
                 </a:solidFill>
@@ -24462,7 +24462,7 @@
               <a:t>De bajo G:</a:t>
             </a:r>
             <a:r>
-              <a:rPr sz="1650">
+              <a:rPr sz="1800">
                 <a:solidFill>
                   <a:srgbClr val="FBFCFD"/>
                 </a:solidFill>
@@ -24470,7 +24470,7 @@
               <a:t> comportamiento no lineal a baja irradiancia (R</a:t>
             </a:r>
             <a:r>
-              <a:rPr sz="1250">
+              <a:rPr sz="1400">
                 <a:solidFill>
                   <a:srgbClr val="FBFCFD"/>
                 </a:solidFill>
@@ -24478,7 +24478,7 @@
               <a:t>sh</a:t>
             </a:r>
             <a:r>
-              <a:rPr sz="1650">
+              <a:rPr sz="1800">
                 <a:solidFill>
                   <a:srgbClr val="FBFCFD"/>
                 </a:solidFill>
@@ -24493,7 +24493,7 @@
               </a:lnSpc>
             </a:pPr>
             <a:r>
-              <a:rPr sz="1650">
+              <a:rPr sz="1800">
                 <a:solidFill>
                   <a:srgbClr val="FBFCFD"/>
                 </a:solidFill>
@@ -24844,7 +24844,7 @@
               </a:lnSpc>
             </a:pPr>
             <a:r>
-              <a:rPr sz="1650">
+              <a:rPr sz="1800">
                 <a:solidFill>
                   <a:srgbClr val="FBFCFD"/>
                 </a:solidFill>
@@ -24852,7 +24852,7 @@
               <a:t>• </a:t>
             </a:r>
             <a:r>
-              <a:rPr sz="1550">
+              <a:rPr sz="1700">
                 <a:solidFill>
                   <a:srgbClr val="7FDBFF"/>
                 </a:solidFill>
@@ -24861,7 +24861,7 @@
               <a:t>Time Stamp</a:t>
             </a:r>
             <a:r>
-              <a:rPr sz="1650">
+              <a:rPr sz="1800">
                 <a:solidFill>
                   <a:srgbClr val="FBFCFD"/>
                 </a:solidFill>
@@ -24876,7 +24876,7 @@
               </a:lnSpc>
             </a:pPr>
             <a:r>
-              <a:rPr sz="1650">
+              <a:rPr sz="1800">
                 <a:solidFill>
                   <a:srgbClr val="FBFCFD"/>
                 </a:solidFill>
@@ -25036,7 +25036,7 @@
               </a:lnSpc>
             </a:pPr>
             <a:r>
-              <a:rPr sz="1650">
+              <a:rPr sz="1800">
                 <a:solidFill>
                   <a:srgbClr val="FBFCFD"/>
                 </a:solidFill>
@@ -25044,7 +25044,7 @@
               <a:t>• </a:t>
             </a:r>
             <a:r>
-              <a:rPr sz="1550">
+              <a:rPr sz="1700">
                 <a:solidFill>
                   <a:srgbClr val="7FDBFF"/>
                 </a:solidFill>
@@ -25053,7 +25053,7 @@
               <a:t>Isc</a:t>
             </a:r>
             <a:r>
-              <a:rPr sz="1650">
+              <a:rPr sz="1800">
                 <a:solidFill>
                   <a:srgbClr val="FBFCFD"/>
                 </a:solidFill>
@@ -25061,7 +25061,7 @@
               <a:t> (5), </a:t>
             </a:r>
             <a:r>
-              <a:rPr sz="1550">
+              <a:rPr sz="1700">
                 <a:solidFill>
                   <a:srgbClr val="7FDBFF"/>
                 </a:solidFill>
@@ -25070,7 +25070,7 @@
               <a:t>Pmp</a:t>
             </a:r>
             <a:r>
-              <a:rPr sz="1650">
+              <a:rPr sz="1800">
                 <a:solidFill>
                   <a:srgbClr val="FBFCFD"/>
                 </a:solidFill>
@@ -25078,7 +25078,7 @@
               <a:t> (7), </a:t>
             </a:r>
             <a:r>
-              <a:rPr sz="1550">
+              <a:rPr sz="1700">
                 <a:solidFill>
                   <a:srgbClr val="7FDBFF"/>
                 </a:solidFill>
@@ -25087,7 +25087,7 @@
               <a:t>Imp</a:t>
             </a:r>
             <a:r>
-              <a:rPr sz="1650">
+              <a:rPr sz="1800">
                 <a:solidFill>
                   <a:srgbClr val="FBFCFD"/>
                 </a:solidFill>
@@ -25095,7 +25095,7 @@
               <a:t> (9), </a:t>
             </a:r>
             <a:r>
-              <a:rPr sz="1550">
+              <a:rPr sz="1700">
                 <a:solidFill>
                   <a:srgbClr val="7FDBFF"/>
                 </a:solidFill>
@@ -25104,7 +25104,7 @@
               <a:t>Vmp</a:t>
             </a:r>
             <a:r>
-              <a:rPr sz="1650">
+              <a:rPr sz="1800">
                 <a:solidFill>
                   <a:srgbClr val="FBFCFD"/>
                 </a:solidFill>
@@ -25112,7 +25112,7 @@
               <a:t> (11), </a:t>
             </a:r>
             <a:r>
-              <a:rPr sz="1550">
+              <a:rPr sz="1700">
                 <a:solidFill>
                   <a:srgbClr val="7FDBFF"/>
                 </a:solidFill>
@@ -25121,7 +25121,7 @@
               <a:t>Voc</a:t>
             </a:r>
             <a:r>
-              <a:rPr sz="1650">
+              <a:rPr sz="1800">
                 <a:solidFill>
                   <a:srgbClr val="FBFCFD"/>
                 </a:solidFill>
@@ -25136,7 +25136,7 @@
               </a:lnSpc>
             </a:pPr>
             <a:r>
-              <a:rPr sz="1650">
+              <a:rPr sz="1800">
                 <a:solidFill>
                   <a:srgbClr val="FBFCFD"/>
                 </a:solidFill>
@@ -25144,7 +25144,7 @@
               <a:t>• </a:t>
             </a:r>
             <a:r>
-              <a:rPr sz="1550">
+              <a:rPr sz="1700">
                 <a:solidFill>
                   <a:srgbClr val="7FDBFF"/>
                 </a:solidFill>
@@ -25153,7 +25153,7 @@
               <a:t>FF</a:t>
             </a:r>
             <a:r>
-              <a:rPr sz="1650">
+              <a:rPr sz="1800">
                 <a:solidFill>
                   <a:srgbClr val="FBFCFD"/>
                 </a:solidFill>
@@ -25313,7 +25313,7 @@
               </a:lnSpc>
             </a:pPr>
             <a:r>
-              <a:rPr sz="1650">
+              <a:rPr sz="1800">
                 <a:solidFill>
                   <a:srgbClr val="FBFCFD"/>
                 </a:solidFill>
@@ -25321,7 +25321,7 @@
               <a:t>• </a:t>
             </a:r>
             <a:r>
-              <a:rPr sz="1550">
+              <a:rPr sz="1700">
                 <a:solidFill>
                   <a:srgbClr val="7FDBFF"/>
                 </a:solidFill>
@@ -25330,7 +25330,7 @@
               <a:t>Dry bulb temperature</a:t>
             </a:r>
             <a:r>
-              <a:rPr sz="1650">
+              <a:rPr sz="1800">
                 <a:solidFill>
                   <a:srgbClr val="FBFCFD"/>
                 </a:solidFill>
@@ -25338,7 +25338,7 @@
               <a:t> (20), </a:t>
             </a:r>
             <a:r>
-              <a:rPr sz="1550">
+              <a:rPr sz="1700">
                 <a:solidFill>
                   <a:srgbClr val="7FDBFF"/>
                 </a:solidFill>
@@ -25347,7 +25347,7 @@
               <a:t>Atmospheric pressure</a:t>
             </a:r>
             <a:r>
-              <a:rPr sz="1650">
+              <a:rPr sz="1800">
                 <a:solidFill>
                   <a:srgbClr val="FBFCFD"/>
                 </a:solidFill>
@@ -25362,7 +25362,7 @@
               </a:lnSpc>
             </a:pPr>
             <a:r>
-              <a:rPr sz="1650">
+              <a:rPr sz="1800">
                 <a:solidFill>
                   <a:srgbClr val="FBFCFD"/>
                 </a:solidFill>
@@ -25370,7 +25370,7 @@
               <a:t>• </a:t>
             </a:r>
             <a:r>
-              <a:rPr sz="1550">
+              <a:rPr sz="1700">
                 <a:solidFill>
                   <a:srgbClr val="7FDBFF"/>
                 </a:solidFill>
@@ -25379,7 +25379,7 @@
               <a:t>DNI</a:t>
             </a:r>
             <a:r>
-              <a:rPr sz="1650">
+              <a:rPr sz="1800">
                 <a:solidFill>
                   <a:srgbClr val="FBFCFD"/>
                 </a:solidFill>
@@ -25387,7 +25387,7 @@
               <a:t> (27), </a:t>
             </a:r>
             <a:r>
-              <a:rPr sz="1550">
+              <a:rPr sz="1700">
                 <a:solidFill>
                   <a:srgbClr val="7FDBFF"/>
                 </a:solidFill>
@@ -25396,7 +25396,7 @@
               <a:t>GHI</a:t>
             </a:r>
             <a:r>
-              <a:rPr sz="1650">
+              <a:rPr sz="1800">
                 <a:solidFill>
                   <a:srgbClr val="FBFCFD"/>
                 </a:solidFill>
@@ -25404,7 +25404,7 @@
               <a:t> (30), </a:t>
             </a:r>
             <a:r>
-              <a:rPr sz="1550">
+              <a:rPr sz="1700">
                 <a:solidFill>
                   <a:srgbClr val="7FDBFF"/>
                 </a:solidFill>
@@ -25413,7 +25413,7 @@
               <a:t>DHI</a:t>
             </a:r>
             <a:r>
-              <a:rPr sz="1650">
+              <a:rPr sz="1800">
                 <a:solidFill>
                   <a:srgbClr val="FBFCFD"/>
                 </a:solidFill>
@@ -25428,7 +25428,7 @@
               </a:lnSpc>
             </a:pPr>
             <a:r>
-              <a:rPr sz="1650">
+              <a:rPr sz="1800">
                 <a:solidFill>
                   <a:srgbClr val="FBFCFD"/>
                 </a:solidFill>
@@ -25436,7 +25436,7 @@
               <a:t>• </a:t>
             </a:r>
             <a:r>
-              <a:rPr sz="1550">
+              <a:rPr sz="1700">
                 <a:solidFill>
                   <a:srgbClr val="7FDBFF"/>
                 </a:solidFill>
@@ -25445,7 +25445,7 @@
               <a:t>POA CMP22</a:t>
             </a:r>
             <a:r>
-              <a:rPr sz="1650">
+              <a:rPr sz="1800">
                 <a:solidFill>
                   <a:srgbClr val="FBFCFD"/>
                 </a:solidFill>
@@ -25605,7 +25605,7 @@
               </a:lnSpc>
             </a:pPr>
             <a:r>
-              <a:rPr sz="1650">
+              <a:rPr sz="1800">
                 <a:solidFill>
                   <a:srgbClr val="FBFCFD"/>
                 </a:solidFill>
@@ -25613,7 +25613,7 @@
               <a:t>• </a:t>
             </a:r>
             <a:r>
-              <a:rPr sz="1550">
+              <a:rPr sz="1700">
                 <a:solidFill>
                   <a:srgbClr val="7FDBFF"/>
                 </a:solidFill>
@@ -25622,7 +25622,7 @@
               <a:t>Solar QA residual</a:t>
             </a:r>
             <a:r>
-              <a:rPr sz="1650">
+              <a:rPr sz="1800">
                 <a:solidFill>
                   <a:srgbClr val="FBFCFD"/>
                 </a:solidFill>
@@ -25637,7 +25637,7 @@
               </a:lnSpc>
             </a:pPr>
             <a:r>
-              <a:rPr sz="1650">
+              <a:rPr sz="1800">
                 <a:solidFill>
                   <a:srgbClr val="FBFCFD"/>
                 </a:solidFill>
@@ -25645,7 +25645,7 @@
               <a:t>• </a:t>
             </a:r>
             <a:r>
-              <a:rPr sz="1550">
+              <a:rPr sz="1700">
                 <a:solidFill>
                   <a:srgbClr val="7FDBFF"/>
                 </a:solidFill>
@@ -25654,7 +25654,7 @@
               <a:t>PV module soiling derate</a:t>
             </a:r>
             <a:r>
-              <a:rPr sz="1650">
+              <a:rPr sz="1800">
                 <a:solidFill>
                   <a:srgbClr val="FBFCFD"/>
                 </a:solidFill>
@@ -25662,7 +25662,7 @@
               <a:t>, lluvia acumulada, humedad relativa, T dorso del módulo, T gabinete MT5, horarios de mantenimiento (</a:t>
             </a:r>
             <a:r>
-              <a:rPr sz="1550">
+              <a:rPr sz="1700">
                 <a:solidFill>
                   <a:srgbClr val="7FDBFF"/>
                 </a:solidFill>
@@ -25671,7 +25671,7 @@
               <a:t>99:99</a:t>
             </a:r>
             <a:r>
-              <a:rPr sz="1650">
+              <a:rPr sz="1800">
                 <a:solidFill>
                   <a:srgbClr val="FBFCFD"/>
                 </a:solidFill>
@@ -26018,11 +26018,11 @@
           <a:p>
             <a:pPr algn="l">
               <a:lnSpc>
-                <a:spcPct val="110000"/>
+                <a:spcPct val="105000"/>
               </a:lnSpc>
             </a:pPr>
             <a:r>
-              <a:rPr sz="1650">
+              <a:rPr sz="1600">
                 <a:solidFill>
                   <a:srgbClr val="FBFCFD"/>
                 </a:solidFill>
@@ -26030,7 +26030,7 @@
               <a:t>• </a:t>
             </a:r>
             <a:r>
-              <a:rPr sz="1650" b="1">
+              <a:rPr sz="1600" b="1">
                 <a:solidFill>
                   <a:srgbClr val="FBFCFD"/>
                 </a:solidFill>
@@ -26038,7 +26038,7 @@
               <a:t>Modelo de un Diodo Simple (SDM) [De Soto et al., 2006]:</a:t>
             </a:r>
             <a:r>
-              <a:rPr sz="1650">
+              <a:rPr sz="1600">
                 <a:solidFill>
                   <a:srgbClr val="FBFCFD"/>
                 </a:solidFill>
@@ -26046,7 +26046,7 @@
               <a:t> circuito equivalente con pérdidas óhmicas en serie (R</a:t>
             </a:r>
             <a:r>
-              <a:rPr sz="1250">
+              <a:rPr sz="1200">
                 <a:solidFill>
                   <a:srgbClr val="FBFCFD"/>
                 </a:solidFill>
@@ -26054,7 +26054,7 @@
               <a:t>s</a:t>
             </a:r>
             <a:r>
-              <a:rPr sz="1650">
+              <a:rPr sz="1600">
                 <a:solidFill>
                   <a:srgbClr val="FBFCFD"/>
                 </a:solidFill>
@@ -26062,7 +26062,7 @@
               <a:t>) y fugas shunt (R</a:t>
             </a:r>
             <a:r>
-              <a:rPr sz="1250">
+              <a:rPr sz="1200">
                 <a:solidFill>
                   <a:srgbClr val="FBFCFD"/>
                 </a:solidFill>
@@ -26070,7 +26070,7 @@
               <a:t>sh</a:t>
             </a:r>
             <a:r>
-              <a:rPr sz="1650">
+              <a:rPr sz="1600">
                 <a:solidFill>
                   <a:srgbClr val="FBFCFD"/>
                 </a:solidFill>
@@ -26081,18 +26081,18 @@
           <a:p>
             <a:pPr algn="l">
               <a:lnSpc>
-                <a:spcPct val="110000"/>
+                <a:spcPct val="105000"/>
               </a:lnSpc>
             </a:pPr>
           </a:p>
           <a:p>
             <a:pPr algn="l">
               <a:lnSpc>
-                <a:spcPct val="110000"/>
+                <a:spcPct val="105000"/>
               </a:lnSpc>
             </a:pPr>
             <a:r>
-              <a:rPr sz="1650">
+              <a:rPr sz="1600">
                 <a:solidFill>
                   <a:srgbClr val="FBFCFD"/>
                 </a:solidFill>
@@ -26100,7 +26100,7 @@
               <a:t>• </a:t>
             </a:r>
             <a:r>
-              <a:rPr sz="1650" b="1">
+              <a:rPr sz="1600" b="1">
                 <a:solidFill>
                   <a:srgbClr val="FBFCFD"/>
                 </a:solidFill>
@@ -26108,7 +26108,7 @@
               <a:t>Modelo Térmico de Sandia (SAPM) [King et al., 2004]:</a:t>
             </a:r>
             <a:r>
-              <a:rPr sz="1650">
+              <a:rPr sz="1600">
                 <a:solidFill>
                   <a:srgbClr val="FBFCFD"/>
                 </a:solidFill>
@@ -26119,18 +26119,18 @@
           <a:p>
             <a:pPr algn="l">
               <a:lnSpc>
-                <a:spcPct val="110000"/>
+                <a:spcPct val="105000"/>
               </a:lnSpc>
             </a:pPr>
           </a:p>
           <a:p>
             <a:pPr algn="l">
               <a:lnSpc>
-                <a:spcPct val="110000"/>
+                <a:spcPct val="105000"/>
               </a:lnSpc>
             </a:pPr>
             <a:r>
-              <a:rPr sz="1650">
+              <a:rPr sz="1600">
                 <a:solidFill>
                   <a:srgbClr val="FBFCFD"/>
                 </a:solidFill>
@@ -26138,7 +26138,7 @@
               <a:t>• </a:t>
             </a:r>
             <a:r>
-              <a:rPr sz="1650" b="1">
+              <a:rPr sz="1600" b="1">
                 <a:solidFill>
                   <a:srgbClr val="FBFCFD"/>
                 </a:solidFill>
@@ -26146,7 +26146,7 @@
               <a:t>Transposición de Perez (1990):</a:t>
             </a:r>
             <a:r>
-              <a:rPr sz="1650">
+              <a:rPr sz="1600">
                 <a:solidFill>
                   <a:srgbClr val="FBFCFD"/>
                 </a:solidFill>
@@ -26157,18 +26157,18 @@
           <a:p>
             <a:pPr algn="l">
               <a:lnSpc>
-                <a:spcPct val="110000"/>
+                <a:spcPct val="105000"/>
               </a:lnSpc>
             </a:pPr>
           </a:p>
           <a:p>
             <a:pPr algn="l">
               <a:lnSpc>
-                <a:spcPct val="110000"/>
+                <a:spcPct val="105000"/>
               </a:lnSpc>
             </a:pPr>
             <a:r>
-              <a:rPr sz="1650">
+              <a:rPr sz="1600">
                 <a:solidFill>
                   <a:srgbClr val="FBFCFD"/>
                 </a:solidFill>
@@ -26176,7 +26176,7 @@
               <a:t>• </a:t>
             </a:r>
             <a:r>
-              <a:rPr sz="1650" b="1">
+              <a:rPr sz="1600" b="1">
                 <a:solidFill>
                   <a:srgbClr val="FBFCFD"/>
                 </a:solidFill>
@@ -26184,7 +26184,7 @@
               <a:t>Escalamiento De Soto (2006):</a:t>
             </a:r>
             <a:r>
-              <a:rPr sz="1650">
+              <a:rPr sz="1600">
                 <a:solidFill>
                   <a:srgbClr val="FBFCFD"/>
                 </a:solidFill>
@@ -26195,18 +26195,18 @@
           <a:p>
             <a:pPr algn="l">
               <a:lnSpc>
-                <a:spcPct val="110000"/>
+                <a:spcPct val="105000"/>
               </a:lnSpc>
             </a:pPr>
           </a:p>
           <a:p>
             <a:pPr algn="l">
               <a:lnSpc>
-                <a:spcPct val="110000"/>
+                <a:spcPct val="105000"/>
               </a:lnSpc>
             </a:pPr>
             <a:r>
-              <a:rPr sz="1650">
+              <a:rPr sz="1600">
                 <a:solidFill>
                   <a:srgbClr val="FBFCFD"/>
                 </a:solidFill>
@@ -26214,7 +26214,7 @@
               <a:t>• </a:t>
             </a:r>
             <a:r>
-              <a:rPr sz="1650" b="1">
+              <a:rPr sz="1600" b="1">
                 <a:solidFill>
                   <a:srgbClr val="FBFCFD"/>
                 </a:solidFill>
@@ -26222,7 +26222,7 @@
               <a:t>Marco revisado NO aplicado:</a:t>
             </a:r>
             <a:r>
-              <a:rPr sz="1650">
+              <a:rPr sz="1600">
                 <a:solidFill>
                   <a:srgbClr val="FBFCFD"/>
                 </a:solidFill>
@@ -26370,8 +26370,8 @@
         </p:blipFill>
         <p:spPr>
           <a:xfrm>
-            <a:off x="7065111" y="1874520"/>
-            <a:ext cx="3931920" cy="3931920"/>
+            <a:off x="6333591" y="1783080"/>
+            <a:ext cx="5394960" cy="2377440"/>
           </a:xfrm>
           <a:prstGeom prst="rect">
             <a:avLst/>
@@ -26381,6 +26381,247 @@
       <p:sp>
         <p:nvSpPr>
           <p:cNvPr id="13" name="TextBox 12"/>
+          <p:cNvSpPr txBox="1"/>
+          <p:nvPr/>
+        </p:nvSpPr>
+        <p:spPr>
+          <a:xfrm>
+            <a:off x="6434175" y="4251960"/>
+            <a:ext cx="5190591" cy="1828800"/>
+          </a:xfrm>
+          <a:prstGeom prst="rect">
+            <a:avLst/>
+          </a:prstGeom>
+          <a:noFill/>
+        </p:spPr>
+        <p:txBody>
+          <a:bodyPr wrap="square">
+            <a:spAutoFit/>
+          </a:bodyPr>
+          <a:lstStyle/>
+          <a:p>
+            <a:pPr algn="l">
+              <a:lnSpc>
+                <a:spcPct val="108000"/>
+              </a:lnSpc>
+            </a:pPr>
+            <a:r>
+              <a:rPr sz="1500">
+                <a:solidFill>
+                  <a:srgbClr val="FBFCFD"/>
+                </a:solidFill>
+              </a:rPr>
+              <a:t>Componentes del circuito equivalente (SDM):</a:t>
+            </a:r>
+          </a:p>
+          <a:p>
+            <a:pPr algn="l">
+              <a:lnSpc>
+                <a:spcPct val="108000"/>
+              </a:lnSpc>
+            </a:pPr>
+            <a:r>
+              <a:rPr sz="1500">
+                <a:solidFill>
+                  <a:srgbClr val="FBFCFD"/>
+                </a:solidFill>
+              </a:rPr>
+              <a:t>• </a:t>
+            </a:r>
+            <a:r>
+              <a:rPr sz="1500" b="1">
+                <a:solidFill>
+                  <a:srgbClr val="FBFCFD"/>
+                </a:solidFill>
+              </a:rPr>
+              <a:t>I</a:t>
+            </a:r>
+            <a:r>
+              <a:rPr sz="1100" b="1">
+                <a:solidFill>
+                  <a:srgbClr val="FBFCFD"/>
+                </a:solidFill>
+              </a:rPr>
+              <a:t>L</a:t>
+            </a:r>
+            <a:r>
+              <a:rPr sz="1500" b="1">
+                <a:solidFill>
+                  <a:srgbClr val="FBFCFD"/>
+                </a:solidFill>
+              </a:rPr>
+              <a:t> (Corriente fotogenerada):</a:t>
+            </a:r>
+            <a:r>
+              <a:rPr sz="1500">
+                <a:solidFill>
+                  <a:srgbClr val="FBFCFD"/>
+                </a:solidFill>
+              </a:rPr>
+              <a:t> proporcional a la irradiancia.</a:t>
+            </a:r>
+          </a:p>
+          <a:p>
+            <a:pPr algn="l">
+              <a:lnSpc>
+                <a:spcPct val="108000"/>
+              </a:lnSpc>
+            </a:pPr>
+            <a:r>
+              <a:rPr sz="1500">
+                <a:solidFill>
+                  <a:srgbClr val="FBFCFD"/>
+                </a:solidFill>
+              </a:rPr>
+              <a:t>• </a:t>
+            </a:r>
+            <a:r>
+              <a:rPr sz="1500" b="1">
+                <a:solidFill>
+                  <a:srgbClr val="FBFCFD"/>
+                </a:solidFill>
+              </a:rPr>
+              <a:t>Diodo (D):</a:t>
+            </a:r>
+            <a:r>
+              <a:rPr sz="1500">
+                <a:solidFill>
+                  <a:srgbClr val="FBFCFD"/>
+                </a:solidFill>
+              </a:rPr>
+              <a:t> representa la recombinación en la unión P-N.</a:t>
+            </a:r>
+          </a:p>
+          <a:p>
+            <a:pPr algn="l">
+              <a:lnSpc>
+                <a:spcPct val="108000"/>
+              </a:lnSpc>
+            </a:pPr>
+            <a:r>
+              <a:rPr sz="1500">
+                <a:solidFill>
+                  <a:srgbClr val="FBFCFD"/>
+                </a:solidFill>
+              </a:rPr>
+              <a:t>• </a:t>
+            </a:r>
+            <a:r>
+              <a:rPr sz="1500" b="1">
+                <a:solidFill>
+                  <a:srgbClr val="FBFCFD"/>
+                </a:solidFill>
+              </a:rPr>
+              <a:t>R</a:t>
+            </a:r>
+            <a:r>
+              <a:rPr sz="1100" b="1">
+                <a:solidFill>
+                  <a:srgbClr val="FBFCFD"/>
+                </a:solidFill>
+              </a:rPr>
+              <a:t>sh</a:t>
+            </a:r>
+            <a:r>
+              <a:rPr sz="1500" b="1">
+                <a:solidFill>
+                  <a:srgbClr val="FBFCFD"/>
+                </a:solidFill>
+              </a:rPr>
+              <a:t> (Resistencia shunt):</a:t>
+            </a:r>
+            <a:r>
+              <a:rPr sz="1500">
+                <a:solidFill>
+                  <a:srgbClr val="FBFCFD"/>
+                </a:solidFill>
+              </a:rPr>
+              <a:t> corriente de fuga interna.</a:t>
+            </a:r>
+          </a:p>
+          <a:p>
+            <a:pPr algn="l">
+              <a:lnSpc>
+                <a:spcPct val="108000"/>
+              </a:lnSpc>
+            </a:pPr>
+            <a:r>
+              <a:rPr sz="1500">
+                <a:solidFill>
+                  <a:srgbClr val="FBFCFD"/>
+                </a:solidFill>
+              </a:rPr>
+              <a:t>• </a:t>
+            </a:r>
+            <a:r>
+              <a:rPr sz="1500" b="1">
+                <a:solidFill>
+                  <a:srgbClr val="FBFCFD"/>
+                </a:solidFill>
+              </a:rPr>
+              <a:t>R</a:t>
+            </a:r>
+            <a:r>
+              <a:rPr sz="1100" b="1">
+                <a:solidFill>
+                  <a:srgbClr val="FBFCFD"/>
+                </a:solidFill>
+              </a:rPr>
+              <a:t>s</a:t>
+            </a:r>
+            <a:r>
+              <a:rPr sz="1500" b="1">
+                <a:solidFill>
+                  <a:srgbClr val="FBFCFD"/>
+                </a:solidFill>
+              </a:rPr>
+              <a:t> (Resistencia serie):</a:t>
+            </a:r>
+            <a:r>
+              <a:rPr sz="1500">
+                <a:solidFill>
+                  <a:srgbClr val="FBFCFD"/>
+                </a:solidFill>
+              </a:rPr>
+              <a:t> pérdidas óhmicas de contacto.</a:t>
+            </a:r>
+          </a:p>
+          <a:p>
+            <a:pPr algn="l">
+              <a:lnSpc>
+                <a:spcPct val="108000"/>
+              </a:lnSpc>
+            </a:pPr>
+            <a:r>
+              <a:rPr sz="1500">
+                <a:solidFill>
+                  <a:srgbClr val="FBFCFD"/>
+                </a:solidFill>
+              </a:rPr>
+              <a:t>• </a:t>
+            </a:r>
+            <a:r>
+              <a:rPr sz="1500" b="1">
+                <a:solidFill>
+                  <a:srgbClr val="FBFCFD"/>
+                </a:solidFill>
+              </a:rPr>
+              <a:t>I / V:</a:t>
+            </a:r>
+            <a:r>
+              <a:rPr sz="1500">
+                <a:solidFill>
+                  <a:srgbClr val="FBFCFD"/>
+                </a:solidFill>
+              </a:rPr>
+              <a:t> corriente y voltaje de salida entregados.</a:t>
+            </a:r>
+          </a:p>
+        </p:txBody>
+      </p:sp>
+      <p:sp>
+        <p:nvSpPr>
+          <p:cNvPr id="14" name="TextBox 13"/>
           <p:cNvSpPr txBox="1"/>
           <p:nvPr/>
         </p:nvSpPr>
@@ -26585,8 +26826,8 @@
         </p:blipFill>
         <p:spPr>
           <a:xfrm>
-            <a:off x="2072487" y="1188720"/>
-            <a:ext cx="8046720" cy="4023360"/>
+            <a:off x="2529687" y="1188720"/>
+            <a:ext cx="7132320" cy="3566160"/>
           </a:xfrm>
           <a:prstGeom prst="rect">
             <a:avLst/>
@@ -26601,8 +26842,8 @@
         </p:nvSpPr>
         <p:spPr>
           <a:xfrm>
-            <a:off x="365760" y="5257800"/>
-            <a:ext cx="11460175" cy="1188720"/>
+            <a:off x="365760" y="4846320"/>
+            <a:ext cx="11460175" cy="1554480"/>
           </a:xfrm>
           <a:prstGeom prst="rect">
             <a:avLst/>
@@ -26646,8 +26887,8 @@
         </p:nvSpPr>
         <p:spPr>
           <a:xfrm>
-            <a:off x="548640" y="5294376"/>
-            <a:ext cx="11094415" cy="1115568"/>
+            <a:off x="548640" y="4882896"/>
+            <a:ext cx="11094415" cy="1481328"/>
           </a:xfrm>
           <a:prstGeom prst="rect">
             <a:avLst/>
@@ -26666,7 +26907,7 @@
               </a:lnSpc>
             </a:pPr>
             <a:r>
-              <a:rPr sz="1750" b="1">
+              <a:rPr sz="1700" b="1">
                 <a:solidFill>
                   <a:srgbClr val="FBFCFD"/>
                 </a:solidFill>
@@ -26674,7 +26915,7 @@
               <a:t>Flujo lógico de la simulación:</a:t>
             </a:r>
             <a:r>
-              <a:rPr sz="1750">
+              <a:rPr sz="1700">
                 <a:solidFill>
                   <a:srgbClr val="FBFCFD"/>
                 </a:solidFill>
@@ -26928,8 +27169,8 @@
         </p:nvSpPr>
         <p:spPr>
           <a:xfrm>
-            <a:off x="365760" y="1280160"/>
-            <a:ext cx="2714167" cy="658368"/>
+            <a:off x="365760" y="1261872"/>
+            <a:ext cx="2714167" cy="685800"/>
           </a:xfrm>
           <a:prstGeom prst="rect">
             <a:avLst/>
@@ -26944,7 +27185,7 @@
           <a:p>
             <a:pPr algn="ctr"/>
             <a:r>
-              <a:rPr sz="3800" b="1">
+              <a:rPr sz="4200" b="1">
                 <a:solidFill>
                   <a:srgbClr val="00D2FF"/>
                 </a:solidFill>
@@ -26962,8 +27203,8 @@
         </p:nvSpPr>
         <p:spPr>
           <a:xfrm>
-            <a:off x="420624" y="1874520"/>
-            <a:ext cx="2604439" cy="566928"/>
+            <a:off x="420624" y="1856232"/>
+            <a:ext cx="2604439" cy="585216"/>
           </a:xfrm>
           <a:prstGeom prst="rect">
             <a:avLst/>
@@ -26978,7 +27219,7 @@
           <a:p>
             <a:pPr algn="ctr"/>
             <a:r>
-              <a:rPr sz="1550">
+              <a:rPr sz="1700">
                 <a:solidFill>
                   <a:srgbClr val="9AA5B1"/>
                 </a:solidFill>
@@ -26989,7 +27230,7 @@
           <a:p>
             <a:pPr algn="ctr"/>
             <a:r>
-              <a:rPr sz="1550">
+              <a:rPr sz="1700">
                 <a:solidFill>
                   <a:srgbClr val="9AA5B1"/>
                 </a:solidFill>
@@ -27052,8 +27293,8 @@
         </p:nvSpPr>
         <p:spPr>
           <a:xfrm>
-            <a:off x="3281095" y="1280160"/>
-            <a:ext cx="2714167" cy="658368"/>
+            <a:off x="3281095" y="1261872"/>
+            <a:ext cx="2714167" cy="685800"/>
           </a:xfrm>
           <a:prstGeom prst="rect">
             <a:avLst/>
@@ -27068,7 +27309,7 @@
           <a:p>
             <a:pPr algn="ctr"/>
             <a:r>
-              <a:rPr sz="3800" b="1">
+              <a:rPr sz="4200" b="1">
                 <a:solidFill>
                   <a:srgbClr val="F1C40F"/>
                 </a:solidFill>
@@ -27086,8 +27327,8 @@
         </p:nvSpPr>
         <p:spPr>
           <a:xfrm>
-            <a:off x="3335959" y="1874520"/>
-            <a:ext cx="2604439" cy="566928"/>
+            <a:off x="3335959" y="1856232"/>
+            <a:ext cx="2604439" cy="585216"/>
           </a:xfrm>
           <a:prstGeom prst="rect">
             <a:avLst/>
@@ -27102,7 +27343,7 @@
           <a:p>
             <a:pPr algn="ctr"/>
             <a:r>
-              <a:rPr sz="1550">
+              <a:rPr sz="1700">
                 <a:solidFill>
                   <a:srgbClr val="9AA5B1"/>
                 </a:solidFill>
@@ -27113,7 +27354,7 @@
           <a:p>
             <a:pPr algn="ctr"/>
             <a:r>
-              <a:rPr sz="1550">
+              <a:rPr sz="1700">
                 <a:solidFill>
                   <a:srgbClr val="9AA5B1"/>
                 </a:solidFill>
@@ -27176,8 +27417,8 @@
         </p:nvSpPr>
         <p:spPr>
           <a:xfrm>
-            <a:off x="6196431" y="1280160"/>
-            <a:ext cx="2714167" cy="658368"/>
+            <a:off x="6196431" y="1261872"/>
+            <a:ext cx="2714167" cy="685800"/>
           </a:xfrm>
           <a:prstGeom prst="rect">
             <a:avLst/>
@@ -27192,7 +27433,7 @@
           <a:p>
             <a:pPr algn="ctr"/>
             <a:r>
-              <a:rPr sz="3800" b="1">
+              <a:rPr sz="4200" b="1">
                 <a:solidFill>
                   <a:srgbClr val="FF5E3A"/>
                 </a:solidFill>
@@ -27210,8 +27451,8 @@
         </p:nvSpPr>
         <p:spPr>
           <a:xfrm>
-            <a:off x="6251295" y="1874520"/>
-            <a:ext cx="2604439" cy="566928"/>
+            <a:off x="6251295" y="1856232"/>
+            <a:ext cx="2604439" cy="585216"/>
           </a:xfrm>
           <a:prstGeom prst="rect">
             <a:avLst/>
@@ -27226,7 +27467,7 @@
           <a:p>
             <a:pPr algn="ctr"/>
             <a:r>
-              <a:rPr sz="1550">
+              <a:rPr sz="1700">
                 <a:solidFill>
                   <a:srgbClr val="9AA5B1"/>
                 </a:solidFill>
@@ -27237,7 +27478,7 @@
           <a:p>
             <a:pPr algn="ctr"/>
             <a:r>
-              <a:rPr sz="1550">
+              <a:rPr sz="1700">
                 <a:solidFill>
                   <a:srgbClr val="9AA5B1"/>
                 </a:solidFill>
@@ -27300,8 +27541,8 @@
         </p:nvSpPr>
         <p:spPr>
           <a:xfrm>
-            <a:off x="9111767" y="1280160"/>
-            <a:ext cx="2714167" cy="658368"/>
+            <a:off x="9111767" y="1261872"/>
+            <a:ext cx="2714167" cy="685800"/>
           </a:xfrm>
           <a:prstGeom prst="rect">
             <a:avLst/>
@@ -27316,7 +27557,7 @@
           <a:p>
             <a:pPr algn="ctr"/>
             <a:r>
-              <a:rPr sz="3800" b="1">
+              <a:rPr sz="4200" b="1">
                 <a:solidFill>
                   <a:srgbClr val="2ECC71"/>
                 </a:solidFill>
@@ -27334,8 +27575,8 @@
         </p:nvSpPr>
         <p:spPr>
           <a:xfrm>
-            <a:off x="9166631" y="1874520"/>
-            <a:ext cx="2604439" cy="566928"/>
+            <a:off x="9166631" y="1856232"/>
+            <a:ext cx="2604439" cy="585216"/>
           </a:xfrm>
           <a:prstGeom prst="rect">
             <a:avLst/>
@@ -27350,7 +27591,7 @@
           <a:p>
             <a:pPr algn="ctr"/>
             <a:r>
-              <a:rPr sz="1550">
+              <a:rPr sz="1700">
                 <a:solidFill>
                   <a:srgbClr val="9AA5B1"/>
                 </a:solidFill>
@@ -27361,7 +27602,7 @@
           <a:p>
             <a:pPr algn="ctr"/>
             <a:r>
-              <a:rPr sz="1550">
+              <a:rPr sz="1700">
                 <a:solidFill>
                   <a:srgbClr val="9AA5B1"/>
                 </a:solidFill>
@@ -27521,7 +27762,7 @@
               </a:lnSpc>
             </a:pPr>
             <a:r>
-              <a:rPr sz="1700">
+              <a:rPr sz="1800">
                 <a:solidFill>
                   <a:srgbClr val="FBFCFD"/>
                 </a:solidFill>
@@ -27529,7 +27770,7 @@
               <a:t>• Campaña experimental del </a:t>
             </a:r>
             <a:r>
-              <a:rPr sz="1700" b="1">
+              <a:rPr sz="1800" b="1">
                 <a:solidFill>
                   <a:srgbClr val="FBFCFD"/>
                 </a:solidFill>
@@ -27537,7 +27778,7 @@
               <a:t>NREL</a:t>
             </a:r>
             <a:r>
-              <a:rPr sz="1700">
+              <a:rPr sz="1800">
                 <a:solidFill>
                   <a:srgbClr val="FBFCFD"/>
                 </a:solidFill>
@@ -27559,7 +27800,7 @@
               </a:lnSpc>
             </a:pPr>
             <a:r>
-              <a:rPr sz="1700">
+              <a:rPr sz="1800">
                 <a:solidFill>
                   <a:srgbClr val="FBFCFD"/>
                 </a:solidFill>
@@ -27567,7 +27808,7 @@
               <a:t>• Sitio: </a:t>
             </a:r>
             <a:r>
-              <a:rPr sz="1700" b="1">
+              <a:rPr sz="1800" b="1">
                 <a:solidFill>
                   <a:srgbClr val="FBFCFD"/>
                 </a:solidFill>
@@ -27575,7 +27816,7 @@
               <a:t>Cocoa, Florida</a:t>
             </a:r>
             <a:r>
-              <a:rPr sz="1700">
+              <a:rPr sz="1800">
                 <a:solidFill>
                   <a:srgbClr val="FBFCFD"/>
                 </a:solidFill>
@@ -27597,7 +27838,7 @@
               </a:lnSpc>
             </a:pPr>
             <a:r>
-              <a:rPr sz="1700">
+              <a:rPr sz="1800">
                 <a:solidFill>
                   <a:srgbClr val="FBFCFD"/>
                 </a:solidFill>
@@ -27619,7 +27860,7 @@
               </a:lnSpc>
             </a:pPr>
             <a:r>
-              <a:rPr sz="1700">
+              <a:rPr sz="1800">
                 <a:solidFill>
                   <a:srgbClr val="FBFCFD"/>
                 </a:solidFill>
@@ -27627,7 +27868,7 @@
               <a:t>• </a:t>
             </a:r>
             <a:r>
-              <a:rPr sz="1700" b="1">
+              <a:rPr sz="1800" b="1">
                 <a:solidFill>
                   <a:srgbClr val="FBFCFD"/>
                 </a:solidFill>
@@ -27635,7 +27876,7 @@
               <a:t>Cada registro = una curva I-V completa</a:t>
             </a:r>
             <a:r>
-              <a:rPr sz="1700">
+              <a:rPr sz="1800">
                 <a:solidFill>
                   <a:srgbClr val="FBFCFD"/>
                 </a:solidFill>
@@ -27795,16 +28036,16 @@
               </a:lnSpc>
             </a:pPr>
             <a:r>
+              <a:rPr sz="1800">
+                <a:solidFill>
+                  <a:srgbClr val="FBFCFD"/>
+                </a:solidFill>
+              </a:rPr>
+              <a:t>• </a:t>
+            </a:r>
+            <a:r>
               <a:rPr sz="1700">
                 <a:solidFill>
-                  <a:srgbClr val="FBFCFD"/>
-                </a:solidFill>
-              </a:rPr>
-              <a:t>• </a:t>
-            </a:r>
-            <a:r>
-              <a:rPr sz="1600">
-                <a:solidFill>
                   <a:srgbClr val="7FDBFF"/>
                 </a:solidFill>
                 <a:latin typeface="Consolas"/>
@@ -27812,7 +28053,7 @@
               <a:t>mSi0166</a:t>
             </a:r>
             <a:r>
-              <a:rPr sz="1700">
+              <a:rPr sz="1800">
                 <a:solidFill>
                   <a:srgbClr val="FBFCFD"/>
                 </a:solidFill>
@@ -27827,7 +28068,7 @@
               </a:lnSpc>
             </a:pPr>
             <a:r>
-              <a:rPr sz="1700">
+              <a:rPr sz="1800">
                 <a:solidFill>
                   <a:srgbClr val="FBFCFD"/>
                 </a:solidFill>
@@ -27835,7 +28076,7 @@
               <a:t>  </a:t>
             </a:r>
             <a:r>
-              <a:rPr sz="1700" b="1">
+              <a:rPr sz="1800" b="1">
                 <a:solidFill>
                   <a:srgbClr val="FBFCFD"/>
                 </a:solidFill>
@@ -27843,7 +28084,7 @@
               <a:t>36,765 curvas</a:t>
             </a:r>
             <a:r>
-              <a:rPr sz="1700">
+              <a:rPr sz="1800">
                 <a:solidFill>
                   <a:srgbClr val="FBFCFD"/>
                 </a:solidFill>
@@ -27865,16 +28106,16 @@
               </a:lnSpc>
             </a:pPr>
             <a:r>
+              <a:rPr sz="1800">
+                <a:solidFill>
+                  <a:srgbClr val="FBFCFD"/>
+                </a:solidFill>
+              </a:rPr>
+              <a:t>• </a:t>
+            </a:r>
+            <a:r>
               <a:rPr sz="1700">
                 <a:solidFill>
-                  <a:srgbClr val="FBFCFD"/>
-                </a:solidFill>
-              </a:rPr>
-              <a:t>• </a:t>
-            </a:r>
-            <a:r>
-              <a:rPr sz="1600">
-                <a:solidFill>
                   <a:srgbClr val="7FDBFF"/>
                 </a:solidFill>
                 <a:latin typeface="Consolas"/>
@@ -27882,7 +28123,7 @@
               <a:t>HIT05667</a:t>
             </a:r>
             <a:r>
-              <a:rPr sz="1700">
+              <a:rPr sz="1800">
                 <a:solidFill>
                   <a:srgbClr val="FBFCFD"/>
                 </a:solidFill>
@@ -27897,7 +28138,7 @@
               </a:lnSpc>
             </a:pPr>
             <a:r>
-              <a:rPr sz="1700">
+              <a:rPr sz="1800">
                 <a:solidFill>
                   <a:srgbClr val="FBFCFD"/>
                 </a:solidFill>
@@ -27905,7 +28146,7 @@
               <a:t>  </a:t>
             </a:r>
             <a:r>
-              <a:rPr sz="1700" b="1">
+              <a:rPr sz="1800" b="1">
                 <a:solidFill>
                   <a:srgbClr val="FBFCFD"/>
                 </a:solidFill>
@@ -27913,7 +28154,7 @@
               <a:t>38,377 curvas</a:t>
             </a:r>
             <a:r>
-              <a:rPr sz="1700">
+              <a:rPr sz="1800">
                 <a:solidFill>
                   <a:srgbClr val="FBFCFD"/>
                 </a:solidFill>
@@ -27935,7 +28176,7 @@
               </a:lnSpc>
             </a:pPr>
             <a:r>
-              <a:rPr sz="1700">
+              <a:rPr sz="1800">
                 <a:solidFill>
                   <a:srgbClr val="FBFCFD"/>
                 </a:solidFill>
@@ -28282,11 +28523,11 @@
           <a:p>
             <a:pPr algn="l">
               <a:lnSpc>
-                <a:spcPct val="110000"/>
+                <a:spcPct val="115000"/>
               </a:lnSpc>
             </a:pPr>
             <a:r>
-              <a:rPr sz="1700">
+              <a:rPr sz="1850">
                 <a:solidFill>
                   <a:srgbClr val="FBFCFD"/>
                 </a:solidFill>
@@ -28294,7 +28535,7 @@
               <a:t>• </a:t>
             </a:r>
             <a:r>
-              <a:rPr sz="1700" b="1">
+              <a:rPr sz="1850" b="1">
                 <a:solidFill>
                   <a:srgbClr val="FBFCFD"/>
                 </a:solidFill>
@@ -28302,7 +28543,7 @@
               <a:t>Eléctricas:</a:t>
             </a:r>
             <a:r>
-              <a:rPr sz="1700">
+              <a:rPr sz="1850">
                 <a:solidFill>
                   <a:srgbClr val="FBFCFD"/>
                 </a:solidFill>
@@ -28313,18 +28554,18 @@
           <a:p>
             <a:pPr algn="l">
               <a:lnSpc>
-                <a:spcPct val="110000"/>
+                <a:spcPct val="115000"/>
               </a:lnSpc>
             </a:pPr>
           </a:p>
           <a:p>
             <a:pPr algn="l">
               <a:lnSpc>
-                <a:spcPct val="110000"/>
+                <a:spcPct val="115000"/>
               </a:lnSpc>
             </a:pPr>
             <a:r>
-              <a:rPr sz="1700">
+              <a:rPr sz="1850">
                 <a:solidFill>
                   <a:srgbClr val="FBFCFD"/>
                 </a:solidFill>
@@ -28332,7 +28573,7 @@
               <a:t>• </a:t>
             </a:r>
             <a:r>
-              <a:rPr sz="1700" b="1">
+              <a:rPr sz="1850" b="1">
                 <a:solidFill>
                   <a:srgbClr val="FBFCFD"/>
                 </a:solidFill>
@@ -28340,7 +28581,7 @@
               <a:t>Meteorológicas:</a:t>
             </a:r>
             <a:r>
-              <a:rPr sz="1700">
+              <a:rPr sz="1850">
                 <a:solidFill>
                   <a:srgbClr val="FBFCFD"/>
                 </a:solidFill>
@@ -28351,18 +28592,18 @@
           <a:p>
             <a:pPr algn="l">
               <a:lnSpc>
-                <a:spcPct val="110000"/>
+                <a:spcPct val="115000"/>
               </a:lnSpc>
             </a:pPr>
           </a:p>
           <a:p>
             <a:pPr algn="l">
               <a:lnSpc>
-                <a:spcPct val="110000"/>
+                <a:spcPct val="115000"/>
               </a:lnSpc>
             </a:pPr>
             <a:r>
-              <a:rPr sz="1700">
+              <a:rPr sz="1850">
                 <a:solidFill>
                   <a:srgbClr val="FBFCFD"/>
                 </a:solidFill>
@@ -28370,7 +28611,7 @@
               <a:t>• </a:t>
             </a:r>
             <a:r>
-              <a:rPr sz="1700" b="1">
+              <a:rPr sz="1850" b="1">
                 <a:solidFill>
                   <a:srgbClr val="FBFCFD"/>
                 </a:solidFill>
@@ -28378,7 +28619,7 @@
               <a:t>Referencia POA:</a:t>
             </a:r>
             <a:r>
-              <a:rPr sz="1700">
+              <a:rPr sz="1850">
                 <a:solidFill>
                   <a:srgbClr val="FBFCFD"/>
                 </a:solidFill>
@@ -28389,18 +28630,18 @@
           <a:p>
             <a:pPr algn="l">
               <a:lnSpc>
-                <a:spcPct val="110000"/>
+                <a:spcPct val="115000"/>
               </a:lnSpc>
             </a:pPr>
           </a:p>
           <a:p>
             <a:pPr algn="l">
               <a:lnSpc>
-                <a:spcPct val="110000"/>
+                <a:spcPct val="115000"/>
               </a:lnSpc>
             </a:pPr>
             <a:r>
-              <a:rPr sz="1700">
+              <a:rPr sz="1850">
                 <a:solidFill>
                   <a:srgbClr val="FBFCFD"/>
                 </a:solidFill>
@@ -28408,7 +28649,7 @@
               <a:t>• </a:t>
             </a:r>
             <a:r>
-              <a:rPr sz="1700" b="1">
+              <a:rPr sz="1850" b="1">
                 <a:solidFill>
                   <a:srgbClr val="FBFCFD"/>
                 </a:solidFill>
@@ -28416,7 +28657,7 @@
               <a:t>Calidad / operación:</a:t>
             </a:r>
             <a:r>
-              <a:rPr sz="1700">
+              <a:rPr sz="1850">
                 <a:solidFill>
                   <a:srgbClr val="FBFCFD"/>
                 </a:solidFill>
@@ -28572,11 +28813,11 @@
           <a:p>
             <a:pPr algn="l">
               <a:lnSpc>
-                <a:spcPct val="110000"/>
+                <a:spcPct val="115000"/>
               </a:lnSpc>
             </a:pPr>
             <a:r>
-              <a:rPr sz="1700">
+              <a:rPr sz="1850">
                 <a:solidFill>
                   <a:srgbClr val="FBFCFD"/>
                 </a:solidFill>
@@ -28584,7 +28825,7 @@
               <a:t>• </a:t>
             </a:r>
             <a:r>
-              <a:rPr sz="1700" b="1">
+              <a:rPr sz="1850" b="1">
                 <a:solidFill>
                   <a:srgbClr val="FBFCFD"/>
                 </a:solidFill>
@@ -28592,7 +28833,7 @@
               <a:t>Usadas (11 columnas):</a:t>
             </a:r>
             <a:r>
-              <a:rPr sz="1700">
+              <a:rPr sz="1850">
                 <a:solidFill>
                   <a:srgbClr val="FBFCFD"/>
                 </a:solidFill>
@@ -28603,18 +28844,18 @@
           <a:p>
             <a:pPr algn="l">
               <a:lnSpc>
-                <a:spcPct val="110000"/>
+                <a:spcPct val="115000"/>
               </a:lnSpc>
             </a:pPr>
           </a:p>
           <a:p>
             <a:pPr algn="l">
               <a:lnSpc>
-                <a:spcPct val="110000"/>
+                <a:spcPct val="115000"/>
               </a:lnSpc>
             </a:pPr>
             <a:r>
-              <a:rPr sz="1700">
+              <a:rPr sz="1850">
                 <a:solidFill>
                   <a:srgbClr val="FBFCFD"/>
                 </a:solidFill>
@@ -28622,7 +28863,7 @@
               <a:t>• </a:t>
             </a:r>
             <a:r>
-              <a:rPr sz="1700" b="1">
+              <a:rPr sz="1850" b="1">
                 <a:solidFill>
                   <a:srgbClr val="FBFCFD"/>
                 </a:solidFill>
@@ -28630,7 +28871,7 @@
               <a:t>Verificación:</a:t>
             </a:r>
             <a:r>
-              <a:rPr sz="1700">
+              <a:rPr sz="1850">
                 <a:solidFill>
                   <a:srgbClr val="FBFCFD"/>
                 </a:solidFill>
@@ -28641,18 +28882,18 @@
           <a:p>
             <a:pPr algn="l">
               <a:lnSpc>
-                <a:spcPct val="110000"/>
+                <a:spcPct val="115000"/>
               </a:lnSpc>
             </a:pPr>
           </a:p>
           <a:p>
             <a:pPr algn="l">
               <a:lnSpc>
-                <a:spcPct val="110000"/>
+                <a:spcPct val="115000"/>
               </a:lnSpc>
             </a:pPr>
             <a:r>
-              <a:rPr sz="1700">
+              <a:rPr sz="1850">
                 <a:solidFill>
                   <a:srgbClr val="FBFCFD"/>
                 </a:solidFill>
@@ -28660,7 +28901,7 @@
               <a:t>• </a:t>
             </a:r>
             <a:r>
-              <a:rPr sz="1700" b="1">
+              <a:rPr sz="1850" b="1">
                 <a:solidFill>
                   <a:srgbClr val="FBFCFD"/>
                 </a:solidFill>
@@ -28668,7 +28909,7 @@
               <a:t>Descartadas:</a:t>
             </a:r>
             <a:r>
-              <a:rPr sz="1700">
+              <a:rPr sz="1850">
                 <a:solidFill>
                   <a:srgbClr val="FBFCFD"/>
                 </a:solidFill>
@@ -28679,18 +28920,18 @@
           <a:p>
             <a:pPr algn="l">
               <a:lnSpc>
-                <a:spcPct val="110000"/>
+                <a:spcPct val="115000"/>
               </a:lnSpc>
             </a:pPr>
           </a:p>
           <a:p>
             <a:pPr algn="l">
               <a:lnSpc>
-                <a:spcPct val="110000"/>
+                <a:spcPct val="115000"/>
               </a:lnSpc>
             </a:pPr>
             <a:r>
-              <a:rPr sz="1700">
+              <a:rPr sz="1850">
                 <a:solidFill>
                   <a:srgbClr val="FBFCFD"/>
                 </a:solidFill>
@@ -28907,8 +29148,8 @@
         </p:blipFill>
         <p:spPr>
           <a:xfrm>
-            <a:off x="380847" y="1097280"/>
-            <a:ext cx="11430000" cy="4019340"/>
+            <a:off x="895197" y="1097280"/>
+            <a:ext cx="10401300" cy="3657600"/>
           </a:xfrm>
           <a:prstGeom prst="rect">
             <a:avLst/>
@@ -28923,8 +29164,8 @@
         </p:nvSpPr>
         <p:spPr>
           <a:xfrm>
-            <a:off x="365760" y="5212080"/>
-            <a:ext cx="11460175" cy="1234440"/>
+            <a:off x="365760" y="4846320"/>
+            <a:ext cx="11460175" cy="1554480"/>
           </a:xfrm>
           <a:prstGeom prst="rect">
             <a:avLst/>
@@ -28968,8 +29209,8 @@
         </p:nvSpPr>
         <p:spPr>
           <a:xfrm>
-            <a:off x="548640" y="5248656"/>
-            <a:ext cx="11094415" cy="1161288"/>
+            <a:off x="548640" y="4882896"/>
+            <a:ext cx="11094415" cy="1481328"/>
           </a:xfrm>
           <a:prstGeom prst="rect">
             <a:avLst/>
@@ -28988,7 +29229,7 @@
               </a:lnSpc>
             </a:pPr>
             <a:r>
-              <a:rPr sz="1750" b="1">
+              <a:rPr sz="1700" b="1">
                 <a:solidFill>
                   <a:srgbClr val="FBFCFD"/>
                 </a:solidFill>
@@ -28996,7 +29237,7 @@
               <a:t>Estructura y lectura de datos:</a:t>
             </a:r>
             <a:r>
-              <a:rPr sz="1750">
+              <a:rPr sz="1700">
                 <a:solidFill>
                   <a:srgbClr val="FBFCFD"/>
                 </a:solidFill>
@@ -29213,8 +29454,8 @@
         </p:blipFill>
         <p:spPr>
           <a:xfrm>
-            <a:off x="380847" y="1097280"/>
-            <a:ext cx="11430000" cy="4019340"/>
+            <a:off x="895197" y="1097280"/>
+            <a:ext cx="10401300" cy="3657600"/>
           </a:xfrm>
           <a:prstGeom prst="rect">
             <a:avLst/>
@@ -29229,8 +29470,8 @@
         </p:nvSpPr>
         <p:spPr>
           <a:xfrm>
-            <a:off x="365760" y="5212080"/>
-            <a:ext cx="11460175" cy="1234440"/>
+            <a:off x="365760" y="4846320"/>
+            <a:ext cx="11460175" cy="1600200"/>
           </a:xfrm>
           <a:prstGeom prst="rect">
             <a:avLst/>
@@ -29274,8 +29515,8 @@
         </p:nvSpPr>
         <p:spPr>
           <a:xfrm>
-            <a:off x="548640" y="5248656"/>
-            <a:ext cx="11094415" cy="1161288"/>
+            <a:off x="548640" y="4882896"/>
+            <a:ext cx="11094415" cy="1527048"/>
           </a:xfrm>
           <a:prstGeom prst="rect">
             <a:avLst/>
@@ -29294,7 +29535,7 @@
               </a:lnSpc>
             </a:pPr>
             <a:r>
-              <a:rPr sz="1750" b="1">
+              <a:rPr sz="1700" b="1">
                 <a:solidFill>
                   <a:srgbClr val="FBFCFD"/>
                 </a:solidFill>
@@ -29302,7 +29543,7 @@
               <a:t>Proceso de ingesta y depuración:</a:t>
             </a:r>
             <a:r>
-              <a:rPr sz="1750">
+              <a:rPr sz="1700">
                 <a:solidFill>
                   <a:srgbClr val="FBFCFD"/>
                 </a:solidFill>
@@ -29310,7 +29551,7 @@
               <a:t> El gran volumen de datos (~110 MB por archivo) y el ancho de fila variable debido a la cola de curvas I-V impiden el uso de métodos convencionales como </a:t>
             </a:r>
             <a:r>
-              <a:rPr sz="1650">
+              <a:rPr sz="1600">
                 <a:solidFill>
                   <a:srgbClr val="7FDBFF"/>
                 </a:solidFill>
@@ -29319,7 +29560,7 @@
               <a:t>pandas.read_csv</a:t>
             </a:r>
             <a:r>
-              <a:rPr sz="1750">
+              <a:rPr sz="1700">
                 <a:solidFill>
                   <a:srgbClr val="FBFCFD"/>
                 </a:solidFill>
@@ -29327,7 +29568,7 @@
               <a:t>. El pipeline implementa un lector en flujo (streaming) nativo que indexa selectivamente solo las 11 variables útiles. Posteriormente, se reemplazan los valores centinela </a:t>
             </a:r>
             <a:r>
-              <a:rPr sz="1650">
+              <a:rPr sz="1600">
                 <a:solidFill>
                   <a:srgbClr val="7FDBFF"/>
                 </a:solidFill>
@@ -29336,7 +29577,7 @@
               <a:t>-9999</a:t>
             </a:r>
             <a:r>
-              <a:rPr sz="1750">
+              <a:rPr sz="1700">
                 <a:solidFill>
                   <a:srgbClr val="FBFCFD"/>
                 </a:solidFill>
@@ -29344,7 +29585,7 @@
               <a:t> por </a:t>
             </a:r>
             <a:r>
-              <a:rPr sz="1650">
+              <a:rPr sz="1600">
                 <a:solidFill>
                   <a:srgbClr val="7FDBFF"/>
                 </a:solidFill>
@@ -29353,7 +29594,7 @@
               <a:t>NaN</a:t>
             </a:r>
             <a:r>
-              <a:rPr sz="1750">
+              <a:rPr sz="1700">
                 <a:solidFill>
                   <a:srgbClr val="FBFCFD"/>
                 </a:solidFill>

--- a/output/Presentacion_Final_ELI556_Atacama_POA_Tarea2_revisado.pptx
+++ b/output/Presentacion_Final_ELI556_Atacama_POA_Tarea2_revisado.pptx
@@ -7114,7 +7114,7 @@
               <a:tr h="420624">
                 <a:tc>
                   <a:txBody>
-                    <a:bodyPr wrap="square"/>
+                    <a:bodyPr wrap="square" lIns="54864" rIns="54864" tIns="36576" bIns="36576"/>
                     <a:lstStyle/>
                     <a:p>
                       <a:pPr algn="ctr"/>
@@ -7136,7 +7136,7 @@
                 </a:tc>
                 <a:tc>
                   <a:txBody>
-                    <a:bodyPr wrap="square"/>
+                    <a:bodyPr wrap="square" lIns="54864" rIns="54864" tIns="36576" bIns="36576"/>
                     <a:lstStyle/>
                     <a:p>
                       <a:pPr algn="ctr"/>
@@ -7158,7 +7158,7 @@
                 </a:tc>
                 <a:tc>
                   <a:txBody>
-                    <a:bodyPr wrap="square"/>
+                    <a:bodyPr wrap="square" lIns="54864" rIns="54864" tIns="36576" bIns="36576"/>
                     <a:lstStyle/>
                     <a:p>
                       <a:pPr algn="ctr"/>
@@ -7182,7 +7182,7 @@
               <a:tr h="420624">
                 <a:tc>
                   <a:txBody>
-                    <a:bodyPr wrap="square"/>
+                    <a:bodyPr wrap="square" lIns="54864" rIns="54864" tIns="36576" bIns="36576"/>
                     <a:lstStyle/>
                     <a:p>
                       <a:pPr algn="l"/>
@@ -7220,7 +7220,7 @@
                 </a:tc>
                 <a:tc>
                   <a:txBody>
-                    <a:bodyPr wrap="square"/>
+                    <a:bodyPr wrap="square" lIns="54864" rIns="54864" tIns="36576" bIns="36576"/>
                     <a:lstStyle/>
                     <a:p>
                       <a:pPr algn="ctr"/>
@@ -7242,7 +7242,7 @@
                 </a:tc>
                 <a:tc>
                   <a:txBody>
-                    <a:bodyPr wrap="square"/>
+                    <a:bodyPr wrap="square" lIns="54864" rIns="54864" tIns="36576" bIns="36576"/>
                     <a:lstStyle/>
                     <a:p>
                       <a:pPr algn="ctr"/>
@@ -7266,7 +7266,7 @@
               <a:tr h="420624">
                 <a:tc>
                   <a:txBody>
-                    <a:bodyPr wrap="square"/>
+                    <a:bodyPr wrap="square" lIns="54864" rIns="54864" tIns="36576" bIns="36576"/>
                     <a:lstStyle/>
                     <a:p>
                       <a:pPr algn="l"/>
@@ -7304,7 +7304,7 @@
                 </a:tc>
                 <a:tc>
                   <a:txBody>
-                    <a:bodyPr wrap="square"/>
+                    <a:bodyPr wrap="square" lIns="54864" rIns="54864" tIns="36576" bIns="36576"/>
                     <a:lstStyle/>
                     <a:p>
                       <a:pPr algn="ctr"/>
@@ -7334,7 +7334,7 @@
                 </a:tc>
                 <a:tc>
                   <a:txBody>
-                    <a:bodyPr wrap="square"/>
+                    <a:bodyPr wrap="square" lIns="54864" rIns="54864" tIns="36576" bIns="36576"/>
                     <a:lstStyle/>
                     <a:p>
                       <a:pPr algn="ctr"/>
@@ -7366,7 +7366,7 @@
               <a:tr h="420624">
                 <a:tc>
                   <a:txBody>
-                    <a:bodyPr wrap="square"/>
+                    <a:bodyPr wrap="square" lIns="54864" rIns="54864" tIns="36576" bIns="36576"/>
                     <a:lstStyle/>
                     <a:p>
                       <a:pPr algn="l"/>
@@ -7404,7 +7404,7 @@
                 </a:tc>
                 <a:tc>
                   <a:txBody>
-                    <a:bodyPr wrap="square"/>
+                    <a:bodyPr wrap="square" lIns="54864" rIns="54864" tIns="36576" bIns="36576"/>
                     <a:lstStyle/>
                     <a:p>
                       <a:pPr algn="ctr"/>
@@ -7426,7 +7426,7 @@
                 </a:tc>
                 <a:tc>
                   <a:txBody>
-                    <a:bodyPr wrap="square"/>
+                    <a:bodyPr wrap="square" lIns="54864" rIns="54864" tIns="36576" bIns="36576"/>
                     <a:lstStyle/>
                     <a:p>
                       <a:pPr algn="ctr"/>
@@ -7450,7 +7450,7 @@
               <a:tr h="420624">
                 <a:tc>
                   <a:txBody>
-                    <a:bodyPr wrap="square"/>
+                    <a:bodyPr wrap="square" lIns="54864" rIns="54864" tIns="36576" bIns="36576"/>
                     <a:lstStyle/>
                     <a:p>
                       <a:pPr algn="l"/>
@@ -7488,7 +7488,7 @@
                 </a:tc>
                 <a:tc>
                   <a:txBody>
-                    <a:bodyPr wrap="square"/>
+                    <a:bodyPr wrap="square" lIns="54864" rIns="54864" tIns="36576" bIns="36576"/>
                     <a:lstStyle/>
                     <a:p>
                       <a:pPr algn="ctr"/>
@@ -7510,7 +7510,7 @@
                 </a:tc>
                 <a:tc>
                   <a:txBody>
-                    <a:bodyPr wrap="square"/>
+                    <a:bodyPr wrap="square" lIns="54864" rIns="54864" tIns="36576" bIns="36576"/>
                     <a:lstStyle/>
                     <a:p>
                       <a:pPr algn="ctr"/>
@@ -7534,7 +7534,7 @@
               <a:tr h="420624">
                 <a:tc>
                   <a:txBody>
-                    <a:bodyPr wrap="square"/>
+                    <a:bodyPr wrap="square" lIns="54864" rIns="54864" tIns="36576" bIns="36576"/>
                     <a:lstStyle/>
                     <a:p>
                       <a:pPr algn="l"/>
@@ -7572,7 +7572,7 @@
                 </a:tc>
                 <a:tc>
                   <a:txBody>
-                    <a:bodyPr wrap="square"/>
+                    <a:bodyPr wrap="square" lIns="54864" rIns="54864" tIns="36576" bIns="36576"/>
                     <a:lstStyle/>
                     <a:p>
                       <a:pPr algn="ctr"/>
@@ -7594,7 +7594,7 @@
                 </a:tc>
                 <a:tc>
                   <a:txBody>
-                    <a:bodyPr wrap="square"/>
+                    <a:bodyPr wrap="square" lIns="54864" rIns="54864" tIns="36576" bIns="36576"/>
                     <a:lstStyle/>
                     <a:p>
                       <a:pPr algn="ctr"/>
@@ -7618,7 +7618,7 @@
               <a:tr h="420624">
                 <a:tc>
                   <a:txBody>
-                    <a:bodyPr wrap="square"/>
+                    <a:bodyPr wrap="square" lIns="54864" rIns="54864" tIns="36576" bIns="36576"/>
                     <a:lstStyle/>
                     <a:p>
                       <a:pPr algn="l"/>
@@ -7656,7 +7656,7 @@
                 </a:tc>
                 <a:tc>
                   <a:txBody>
-                    <a:bodyPr wrap="square"/>
+                    <a:bodyPr wrap="square" lIns="54864" rIns="54864" tIns="36576" bIns="36576"/>
                     <a:lstStyle/>
                     <a:p>
                       <a:pPr algn="ctr"/>
@@ -7678,7 +7678,7 @@
                 </a:tc>
                 <a:tc>
                   <a:txBody>
-                    <a:bodyPr wrap="square"/>
+                    <a:bodyPr wrap="square" lIns="54864" rIns="54864" tIns="36576" bIns="36576"/>
                     <a:lstStyle/>
                     <a:p>
                       <a:pPr algn="ctr"/>
@@ -7702,7 +7702,7 @@
               <a:tr h="420624">
                 <a:tc>
                   <a:txBody>
-                    <a:bodyPr wrap="square"/>
+                    <a:bodyPr wrap="square" lIns="54864" rIns="54864" tIns="36576" bIns="36576"/>
                     <a:lstStyle/>
                     <a:p>
                       <a:pPr algn="l"/>
@@ -7740,7 +7740,7 @@
                 </a:tc>
                 <a:tc>
                   <a:txBody>
-                    <a:bodyPr wrap="square"/>
+                    <a:bodyPr wrap="square" lIns="54864" rIns="54864" tIns="36576" bIns="36576"/>
                     <a:lstStyle/>
                     <a:p>
                       <a:pPr algn="ctr"/>
@@ -7762,7 +7762,7 @@
                 </a:tc>
                 <a:tc>
                   <a:txBody>
-                    <a:bodyPr wrap="square"/>
+                    <a:bodyPr wrap="square" lIns="54864" rIns="54864" tIns="36576" bIns="36576"/>
                     <a:lstStyle/>
                     <a:p>
                       <a:pPr algn="ctr"/>
@@ -7786,7 +7786,7 @@
               <a:tr h="420624">
                 <a:tc>
                   <a:txBody>
-                    <a:bodyPr wrap="square"/>
+                    <a:bodyPr wrap="square" lIns="54864" rIns="54864" tIns="36576" bIns="36576"/>
                     <a:lstStyle/>
                     <a:p>
                       <a:pPr algn="l"/>
@@ -7832,7 +7832,7 @@
                 </a:tc>
                 <a:tc>
                   <a:txBody>
-                    <a:bodyPr wrap="square"/>
+                    <a:bodyPr wrap="square" lIns="54864" rIns="54864" tIns="36576" bIns="36576"/>
                     <a:lstStyle/>
                     <a:p>
                       <a:pPr algn="ctr"/>
@@ -7854,7 +7854,7 @@
                 </a:tc>
                 <a:tc>
                   <a:txBody>
-                    <a:bodyPr wrap="square"/>
+                    <a:bodyPr wrap="square" lIns="54864" rIns="54864" tIns="36576" bIns="36576"/>
                     <a:lstStyle/>
                     <a:p>
                       <a:pPr algn="ctr"/>
@@ -7878,7 +7878,7 @@
               <a:tr h="420624">
                 <a:tc>
                   <a:txBody>
-                    <a:bodyPr wrap="square"/>
+                    <a:bodyPr wrap="square" lIns="54864" rIns="54864" tIns="36576" bIns="36576"/>
                     <a:lstStyle/>
                     <a:p>
                       <a:pPr algn="l"/>
@@ -7916,7 +7916,7 @@
                 </a:tc>
                 <a:tc>
                   <a:txBody>
-                    <a:bodyPr wrap="square"/>
+                    <a:bodyPr wrap="square" lIns="54864" rIns="54864" tIns="36576" bIns="36576"/>
                     <a:lstStyle/>
                     <a:p>
                       <a:pPr algn="ctr"/>
@@ -7938,7 +7938,7 @@
                 </a:tc>
                 <a:tc>
                   <a:txBody>
-                    <a:bodyPr wrap="square"/>
+                    <a:bodyPr wrap="square" lIns="54864" rIns="54864" tIns="36576" bIns="36576"/>
                     <a:lstStyle/>
                     <a:p>
                       <a:pPr algn="ctr"/>
@@ -17920,7 +17920,7 @@
         <p:spPr>
           <a:xfrm>
             <a:off x="365760" y="1188720"/>
-            <a:ext cx="11460175" cy="5029200"/>
+            <a:ext cx="11460175" cy="5212080"/>
           </a:xfrm>
           <a:prstGeom prst="rect">
             <a:avLst/>
@@ -17965,7 +17965,7 @@
         <p:spPr>
           <a:xfrm>
             <a:off x="365760" y="1188720"/>
-            <a:ext cx="73152" cy="5029200"/>
+            <a:ext cx="73152" cy="5212080"/>
           </a:xfrm>
           <a:prstGeom prst="rect">
             <a:avLst/>
@@ -18042,8 +18042,8 @@
           <p:nvPr/>
         </p:nvGraphicFramePr>
         <p:xfrm>
-          <a:off x="594360" y="1755648"/>
-          <a:ext cx="11002973" cy="3886200"/>
+          <a:off x="594360" y="1691640"/>
+          <a:ext cx="11002973" cy="3017520"/>
         </p:xfrm>
         <a:graphic>
           <a:graphicData uri="http://schemas.openxmlformats.org/drawingml/2006/table">
@@ -18058,15 +18058,15 @@
                 <a:gridCol w="3143707"/>
                 <a:gridCol w="2297324"/>
               </a:tblGrid>
-              <a:tr h="647700">
+              <a:tr h="502920">
                 <a:tc>
                   <a:txBody>
-                    <a:bodyPr wrap="square"/>
+                    <a:bodyPr wrap="square" lIns="54864" rIns="54864" tIns="36576" bIns="36576"/>
                     <a:lstStyle/>
                     <a:p>
                       <a:pPr algn="ctr"/>
                       <a:r>
-                        <a:rPr sz="1800" b="1">
+                        <a:rPr sz="1700" b="1">
                           <a:solidFill>
                             <a:srgbClr val="F1C40F"/>
                           </a:solidFill>
@@ -18083,12 +18083,12 @@
                 </a:tc>
                 <a:tc>
                   <a:txBody>
-                    <a:bodyPr wrap="square"/>
+                    <a:bodyPr wrap="square" lIns="54864" rIns="54864" tIns="36576" bIns="36576"/>
                     <a:lstStyle/>
                     <a:p>
                       <a:pPr algn="ctr"/>
                       <a:r>
-                        <a:rPr sz="1800" b="1">
+                        <a:rPr sz="1700" b="1">
                           <a:solidFill>
                             <a:srgbClr val="F1C40F"/>
                           </a:solidFill>
@@ -18105,12 +18105,12 @@
                 </a:tc>
                 <a:tc>
                   <a:txBody>
-                    <a:bodyPr wrap="square"/>
+                    <a:bodyPr wrap="square" lIns="54864" rIns="54864" tIns="36576" bIns="36576"/>
                     <a:lstStyle/>
                     <a:p>
                       <a:pPr algn="ctr"/>
                       <a:r>
-                        <a:rPr sz="1800" b="1">
+                        <a:rPr sz="1700" b="1">
                           <a:solidFill>
                             <a:srgbClr val="F1C40F"/>
                           </a:solidFill>
@@ -18127,12 +18127,12 @@
                 </a:tc>
                 <a:tc>
                   <a:txBody>
-                    <a:bodyPr wrap="square"/>
+                    <a:bodyPr wrap="square" lIns="54864" rIns="54864" tIns="36576" bIns="36576"/>
                     <a:lstStyle/>
                     <a:p>
                       <a:pPr algn="ctr"/>
                       <a:r>
-                        <a:rPr sz="1800" b="1">
+                        <a:rPr sz="1700" b="1">
                           <a:solidFill>
                             <a:srgbClr val="F1C40F"/>
                           </a:solidFill>
@@ -18149,12 +18149,12 @@
                 </a:tc>
                 <a:tc>
                   <a:txBody>
-                    <a:bodyPr wrap="square"/>
+                    <a:bodyPr wrap="square" lIns="54864" rIns="54864" tIns="36576" bIns="36576"/>
                     <a:lstStyle/>
                     <a:p>
                       <a:pPr algn="ctr"/>
                       <a:r>
-                        <a:rPr sz="1800" b="1">
+                        <a:rPr sz="1700" b="1">
                           <a:solidFill>
                             <a:srgbClr val="F1C40F"/>
                           </a:solidFill>
@@ -18170,15 +18170,15 @@
                   </a:tcPr>
                 </a:tc>
               </a:tr>
-              <a:tr h="647700">
+              <a:tr h="502920">
                 <a:tc>
                   <a:txBody>
-                    <a:bodyPr wrap="square"/>
+                    <a:bodyPr wrap="square" lIns="54864" rIns="54864" tIns="36576" bIns="36576"/>
                     <a:lstStyle/>
                     <a:p>
                       <a:pPr algn="l"/>
                       <a:r>
-                        <a:rPr sz="1650">
+                        <a:rPr sz="1500">
                           <a:solidFill>
                             <a:srgbClr val="FBFCFD"/>
                           </a:solidFill>
@@ -18196,12 +18196,12 @@
                 </a:tc>
                 <a:tc>
                   <a:txBody>
-                    <a:bodyPr wrap="square"/>
+                    <a:bodyPr wrap="square" lIns="54864" rIns="54864" tIns="36576" bIns="36576"/>
                     <a:lstStyle/>
                     <a:p>
                       <a:pPr algn="ctr"/>
                       <a:r>
-                        <a:rPr sz="1650">
+                        <a:rPr sz="1500">
                           <a:solidFill>
                             <a:srgbClr val="FBFCFD"/>
                           </a:solidFill>
@@ -18218,12 +18218,12 @@
                 </a:tc>
                 <a:tc>
                   <a:txBody>
-                    <a:bodyPr wrap="square"/>
+                    <a:bodyPr wrap="square" lIns="54864" rIns="54864" tIns="36576" bIns="36576"/>
                     <a:lstStyle/>
                     <a:p>
                       <a:pPr algn="ctr"/>
                       <a:r>
-                        <a:rPr sz="1650">
+                        <a:rPr sz="1500">
                           <a:solidFill>
                             <a:srgbClr val="FBFCFD"/>
                           </a:solidFill>
@@ -18240,12 +18240,12 @@
                 </a:tc>
                 <a:tc>
                   <a:txBody>
-                    <a:bodyPr wrap="square"/>
+                    <a:bodyPr wrap="square" lIns="54864" rIns="54864" tIns="36576" bIns="36576"/>
                     <a:lstStyle/>
                     <a:p>
                       <a:pPr algn="ctr"/>
                       <a:r>
-                        <a:rPr sz="1650">
+                        <a:rPr sz="1500">
                           <a:solidFill>
                             <a:srgbClr val="FBFCFD"/>
                           </a:solidFill>
@@ -18262,12 +18262,12 @@
                 </a:tc>
                 <a:tc>
                   <a:txBody>
-                    <a:bodyPr wrap="square"/>
+                    <a:bodyPr wrap="square" lIns="54864" rIns="54864" tIns="36576" bIns="36576"/>
                     <a:lstStyle/>
                     <a:p>
                       <a:pPr algn="ctr"/>
                       <a:r>
-                        <a:rPr sz="1650">
+                        <a:rPr sz="1500">
                           <a:solidFill>
                             <a:srgbClr val="FBFCFD"/>
                           </a:solidFill>
@@ -18283,15 +18283,15 @@
                   </a:tcPr>
                 </a:tc>
               </a:tr>
-              <a:tr h="647700">
+              <a:tr h="502920">
                 <a:tc>
                   <a:txBody>
-                    <a:bodyPr wrap="square"/>
+                    <a:bodyPr wrap="square" lIns="54864" rIns="54864" tIns="36576" bIns="36576"/>
                     <a:lstStyle/>
                     <a:p>
                       <a:pPr algn="l"/>
                       <a:r>
-                        <a:rPr sz="1650">
+                        <a:rPr sz="1500">
                           <a:solidFill>
                             <a:srgbClr val="FBFCFD"/>
                           </a:solidFill>
@@ -18309,12 +18309,12 @@
                 </a:tc>
                 <a:tc>
                   <a:txBody>
-                    <a:bodyPr wrap="square"/>
+                    <a:bodyPr wrap="square" lIns="54864" rIns="54864" tIns="36576" bIns="36576"/>
                     <a:lstStyle/>
                     <a:p>
                       <a:pPr algn="ctr"/>
                       <a:r>
-                        <a:rPr sz="1650">
+                        <a:rPr sz="1500">
                           <a:solidFill>
                             <a:srgbClr val="FBFCFD"/>
                           </a:solidFill>
@@ -18331,12 +18331,12 @@
                 </a:tc>
                 <a:tc>
                   <a:txBody>
-                    <a:bodyPr wrap="square"/>
+                    <a:bodyPr wrap="square" lIns="54864" rIns="54864" tIns="36576" bIns="36576"/>
                     <a:lstStyle/>
                     <a:p>
                       <a:pPr algn="ctr"/>
                       <a:r>
-                        <a:rPr sz="1650">
+                        <a:rPr sz="1500">
                           <a:solidFill>
                             <a:srgbClr val="FBFCFD"/>
                           </a:solidFill>
@@ -18353,12 +18353,12 @@
                 </a:tc>
                 <a:tc>
                   <a:txBody>
-                    <a:bodyPr wrap="square"/>
+                    <a:bodyPr wrap="square" lIns="54864" rIns="54864" tIns="36576" bIns="36576"/>
                     <a:lstStyle/>
                     <a:p>
                       <a:pPr algn="ctr"/>
                       <a:r>
-                        <a:rPr sz="1650">
+                        <a:rPr sz="1500">
                           <a:solidFill>
                             <a:srgbClr val="FBFCFD"/>
                           </a:solidFill>
@@ -18375,12 +18375,12 @@
                 </a:tc>
                 <a:tc>
                   <a:txBody>
-                    <a:bodyPr wrap="square"/>
+                    <a:bodyPr wrap="square" lIns="54864" rIns="54864" tIns="36576" bIns="36576"/>
                     <a:lstStyle/>
                     <a:p>
                       <a:pPr algn="ctr"/>
                       <a:r>
-                        <a:rPr sz="1650">
+                        <a:rPr sz="1500">
                           <a:solidFill>
                             <a:srgbClr val="FBFCFD"/>
                           </a:solidFill>
@@ -18396,15 +18396,15 @@
                   </a:tcPr>
                 </a:tc>
               </a:tr>
-              <a:tr h="647700">
+              <a:tr h="502920">
                 <a:tc>
                   <a:txBody>
-                    <a:bodyPr wrap="square"/>
+                    <a:bodyPr wrap="square" lIns="54864" rIns="54864" tIns="36576" bIns="36576"/>
                     <a:lstStyle/>
                     <a:p>
                       <a:pPr algn="l"/>
                       <a:r>
-                        <a:rPr sz="1650">
+                        <a:rPr sz="1500">
                           <a:solidFill>
                             <a:srgbClr val="FBFCFD"/>
                           </a:solidFill>
@@ -18422,12 +18422,12 @@
                 </a:tc>
                 <a:tc>
                   <a:txBody>
-                    <a:bodyPr wrap="square"/>
+                    <a:bodyPr wrap="square" lIns="54864" rIns="54864" tIns="36576" bIns="36576"/>
                     <a:lstStyle/>
                     <a:p>
                       <a:pPr algn="ctr"/>
                       <a:r>
-                        <a:rPr sz="1650">
+                        <a:rPr sz="1500">
                           <a:solidFill>
                             <a:srgbClr val="FBFCFD"/>
                           </a:solidFill>
@@ -18444,12 +18444,12 @@
                 </a:tc>
                 <a:tc>
                   <a:txBody>
-                    <a:bodyPr wrap="square"/>
+                    <a:bodyPr wrap="square" lIns="54864" rIns="54864" tIns="36576" bIns="36576"/>
                     <a:lstStyle/>
                     <a:p>
                       <a:pPr algn="ctr"/>
                       <a:r>
-                        <a:rPr sz="1650">
+                        <a:rPr sz="1500">
                           <a:solidFill>
                             <a:srgbClr val="FBFCFD"/>
                           </a:solidFill>
@@ -18466,12 +18466,12 @@
                 </a:tc>
                 <a:tc>
                   <a:txBody>
-                    <a:bodyPr wrap="square"/>
+                    <a:bodyPr wrap="square" lIns="54864" rIns="54864" tIns="36576" bIns="36576"/>
                     <a:lstStyle/>
                     <a:p>
                       <a:pPr algn="ctr"/>
                       <a:r>
-                        <a:rPr sz="1650">
+                        <a:rPr sz="1500">
                           <a:solidFill>
                             <a:srgbClr val="FBFCFD"/>
                           </a:solidFill>
@@ -18488,12 +18488,12 @@
                 </a:tc>
                 <a:tc>
                   <a:txBody>
-                    <a:bodyPr wrap="square"/>
+                    <a:bodyPr wrap="square" lIns="54864" rIns="54864" tIns="36576" bIns="36576"/>
                     <a:lstStyle/>
                     <a:p>
                       <a:pPr algn="ctr"/>
                       <a:r>
-                        <a:rPr sz="1650">
+                        <a:rPr sz="1500">
                           <a:solidFill>
                             <a:srgbClr val="FBFCFD"/>
                           </a:solidFill>
@@ -18509,15 +18509,15 @@
                   </a:tcPr>
                 </a:tc>
               </a:tr>
-              <a:tr h="647700">
+              <a:tr h="502920">
                 <a:tc>
                   <a:txBody>
-                    <a:bodyPr wrap="square"/>
+                    <a:bodyPr wrap="square" lIns="54864" rIns="54864" tIns="36576" bIns="36576"/>
                     <a:lstStyle/>
                     <a:p>
                       <a:pPr algn="l"/>
                       <a:r>
-                        <a:rPr sz="1650">
+                        <a:rPr sz="1500">
                           <a:solidFill>
                             <a:srgbClr val="FBFCFD"/>
                           </a:solidFill>
@@ -18535,12 +18535,12 @@
                 </a:tc>
                 <a:tc>
                   <a:txBody>
-                    <a:bodyPr wrap="square"/>
+                    <a:bodyPr wrap="square" lIns="54864" rIns="54864" tIns="36576" bIns="36576"/>
                     <a:lstStyle/>
                     <a:p>
                       <a:pPr algn="ctr"/>
                       <a:r>
-                        <a:rPr sz="1650">
+                        <a:rPr sz="1500">
                           <a:solidFill>
                             <a:srgbClr val="FBFCFD"/>
                           </a:solidFill>
@@ -18557,12 +18557,12 @@
                 </a:tc>
                 <a:tc>
                   <a:txBody>
-                    <a:bodyPr wrap="square"/>
+                    <a:bodyPr wrap="square" lIns="54864" rIns="54864" tIns="36576" bIns="36576"/>
                     <a:lstStyle/>
                     <a:p>
                       <a:pPr algn="ctr"/>
                       <a:r>
-                        <a:rPr sz="1650">
+                        <a:rPr sz="1500">
                           <a:solidFill>
                             <a:srgbClr val="FBFCFD"/>
                           </a:solidFill>
@@ -18579,12 +18579,12 @@
                 </a:tc>
                 <a:tc>
                   <a:txBody>
-                    <a:bodyPr wrap="square"/>
+                    <a:bodyPr wrap="square" lIns="54864" rIns="54864" tIns="36576" bIns="36576"/>
                     <a:lstStyle/>
                     <a:p>
                       <a:pPr algn="ctr"/>
                       <a:r>
-                        <a:rPr sz="1650">
+                        <a:rPr sz="1500">
                           <a:solidFill>
                             <a:srgbClr val="FBFCFD"/>
                           </a:solidFill>
@@ -18601,12 +18601,12 @@
                 </a:tc>
                 <a:tc>
                   <a:txBody>
-                    <a:bodyPr wrap="square"/>
+                    <a:bodyPr wrap="square" lIns="54864" rIns="54864" tIns="36576" bIns="36576"/>
                     <a:lstStyle/>
                     <a:p>
                       <a:pPr algn="ctr"/>
                       <a:r>
-                        <a:rPr sz="1650">
+                        <a:rPr sz="1500">
                           <a:solidFill>
                             <a:srgbClr val="FBFCFD"/>
                           </a:solidFill>
@@ -18622,15 +18622,15 @@
                   </a:tcPr>
                 </a:tc>
               </a:tr>
-              <a:tr h="647700">
+              <a:tr h="502920">
                 <a:tc>
                   <a:txBody>
-                    <a:bodyPr wrap="square"/>
+                    <a:bodyPr wrap="square" lIns="54864" rIns="54864" tIns="36576" bIns="36576"/>
                     <a:lstStyle/>
                     <a:p>
                       <a:pPr algn="l"/>
                       <a:r>
-                        <a:rPr sz="1650">
+                        <a:rPr sz="1500">
                           <a:solidFill>
                             <a:srgbClr val="FBFCFD"/>
                           </a:solidFill>
@@ -18648,12 +18648,12 @@
                 </a:tc>
                 <a:tc>
                   <a:txBody>
-                    <a:bodyPr wrap="square"/>
+                    <a:bodyPr wrap="square" lIns="54864" rIns="54864" tIns="36576" bIns="36576"/>
                     <a:lstStyle/>
                     <a:p>
                       <a:pPr algn="ctr"/>
                       <a:r>
-                        <a:rPr sz="1650">
+                        <a:rPr sz="1500">
                           <a:solidFill>
                             <a:srgbClr val="FBFCFD"/>
                           </a:solidFill>
@@ -18670,12 +18670,12 @@
                 </a:tc>
                 <a:tc>
                   <a:txBody>
-                    <a:bodyPr wrap="square"/>
+                    <a:bodyPr wrap="square" lIns="54864" rIns="54864" tIns="36576" bIns="36576"/>
                     <a:lstStyle/>
                     <a:p>
                       <a:pPr algn="ctr"/>
                       <a:r>
-                        <a:rPr sz="1650">
+                        <a:rPr sz="1500">
                           <a:solidFill>
                             <a:srgbClr val="FBFCFD"/>
                           </a:solidFill>
@@ -18692,12 +18692,12 @@
                 </a:tc>
                 <a:tc>
                   <a:txBody>
-                    <a:bodyPr wrap="square"/>
+                    <a:bodyPr wrap="square" lIns="54864" rIns="54864" tIns="36576" bIns="36576"/>
                     <a:lstStyle/>
                     <a:p>
                       <a:pPr algn="ctr"/>
                       <a:r>
-                        <a:rPr sz="1650">
+                        <a:rPr sz="1500">
                           <a:solidFill>
                             <a:srgbClr val="FBFCFD"/>
                           </a:solidFill>
@@ -18714,12 +18714,12 @@
                 </a:tc>
                 <a:tc>
                   <a:txBody>
-                    <a:bodyPr wrap="square"/>
+                    <a:bodyPr wrap="square" lIns="54864" rIns="54864" tIns="36576" bIns="36576"/>
                     <a:lstStyle/>
                     <a:p>
                       <a:pPr algn="ctr"/>
                       <a:r>
-                        <a:rPr sz="1650">
+                        <a:rPr sz="1500">
                           <a:solidFill>
                             <a:srgbClr val="FBFCFD"/>
                           </a:solidFill>
@@ -18747,7 +18747,7 @@
         </p:nvSpPr>
         <p:spPr>
           <a:xfrm>
-            <a:off x="594360" y="5742432"/>
+            <a:off x="594360" y="5349240"/>
             <a:ext cx="11002975" cy="457200"/>
           </a:xfrm>
           <a:prstGeom prst="rect">
@@ -18763,7 +18763,7 @@
           <a:p>
             <a:pPr algn="l"/>
             <a:r>
-              <a:rPr sz="1700">
+              <a:rPr sz="1550">
                 <a:solidFill>
                   <a:srgbClr val="9AA5B1"/>
                 </a:solidFill>
@@ -18771,7 +18771,7 @@
               <a:t>Criterio: máximo contraste térmico entre tecnologías comerciales viables, con datos experimentales completos en el dataset (</a:t>
             </a:r>
             <a:r>
-              <a:rPr sz="1600">
+              <a:rPr sz="1450">
                 <a:solidFill>
                   <a:srgbClr val="7FDBFF"/>
                 </a:solidFill>
@@ -18780,7 +18780,7 @@
               <a:t>mSi0166</a:t>
             </a:r>
             <a:r>
-              <a:rPr sz="1700">
+              <a:rPr sz="1550">
                 <a:solidFill>
                   <a:srgbClr val="9AA5B1"/>
                 </a:solidFill>
@@ -18788,7 +18788,7 @@
               <a:t> y </a:t>
             </a:r>
             <a:r>
-              <a:rPr sz="1600">
+              <a:rPr sz="1450">
                 <a:solidFill>
                   <a:srgbClr val="7FDBFF"/>
                 </a:solidFill>
@@ -18797,7 +18797,7 @@
               <a:t>HIT05667</a:t>
             </a:r>
             <a:r>
-              <a:rPr sz="1700">
+              <a:rPr sz="1550">
                 <a:solidFill>
                   <a:srgbClr val="9AA5B1"/>
                 </a:solidFill>

--- a/output/Presentacion_Final_ELI556_Atacama_POA_Tarea2_revisado.pptx
+++ b/output/Presentacion_Final_ELI556_Atacama_POA_Tarea2_revisado.pptx
@@ -5619,8 +5619,8 @@
         </p:nvSpPr>
         <p:spPr>
           <a:xfrm>
-            <a:off x="365760" y="2788920"/>
-            <a:ext cx="5592927" cy="3337560"/>
+            <a:off x="365760" y="2724912"/>
+            <a:ext cx="5592927" cy="3584448"/>
           </a:xfrm>
           <a:prstGeom prst="rect">
             <a:avLst/>
@@ -5664,8 +5664,8 @@
         </p:nvSpPr>
         <p:spPr>
           <a:xfrm>
-            <a:off x="365760" y="2788920"/>
-            <a:ext cx="73152" cy="3337560"/>
+            <a:off x="365760" y="2724912"/>
+            <a:ext cx="73152" cy="3584448"/>
           </a:xfrm>
           <a:prstGeom prst="rect">
             <a:avLst/>
@@ -5707,7 +5707,7 @@
         </p:nvSpPr>
         <p:spPr>
           <a:xfrm>
-            <a:off x="530352" y="2880360"/>
+            <a:off x="530352" y="2816352"/>
             <a:ext cx="5318607" cy="411480"/>
           </a:xfrm>
           <a:prstGeom prst="rect">
@@ -5741,8 +5741,8 @@
         </p:nvSpPr>
         <p:spPr>
           <a:xfrm>
-            <a:off x="566928" y="3429000"/>
-            <a:ext cx="5190591" cy="2532888"/>
+            <a:off x="566928" y="3364992"/>
+            <a:ext cx="5190591" cy="2779776"/>
           </a:xfrm>
           <a:prstGeom prst="rect">
             <a:avLst/>
@@ -5761,7 +5761,7 @@
               </a:lnSpc>
             </a:pPr>
             <a:r>
-              <a:rPr sz="1750">
+              <a:rPr sz="1500">
                 <a:solidFill>
                   <a:srgbClr val="FBFCFD"/>
                 </a:solidFill>
@@ -5769,7 +5769,7 @@
               <a:t>• </a:t>
             </a:r>
             <a:r>
-              <a:rPr sz="1750" b="1">
+              <a:rPr sz="1500" b="1">
                 <a:solidFill>
                   <a:srgbClr val="FBFCFD"/>
                 </a:solidFill>
@@ -5777,12 +5777,12 @@
               <a:t>Superposición de mediciones:</a:t>
             </a:r>
             <a:r>
-              <a:rPr sz="1750">
-                <a:solidFill>
-                  <a:srgbClr val="FBFCFD"/>
-                </a:solidFill>
-              </a:rPr>
-              <a:t> Las curvas de irradiancia diaria de los 11 archivos se superponen con exactitud, confirmando la consistencia del instrumental experimental.</a:t>
+              <a:rPr sz="1500">
+                <a:solidFill>
+                  <a:srgbClr val="FBFCFD"/>
+                </a:solidFill>
+              </a:rPr>
+              <a:t> Las curvas de irradiancia diaria se superponen con exactitud, confirmando la consistencia instrumental.</a:t>
             </a:r>
           </a:p>
           <a:p>
@@ -5799,7 +5799,7 @@
               </a:lnSpc>
             </a:pPr>
             <a:r>
-              <a:rPr sz="1750">
+              <a:rPr sz="1500">
                 <a:solidFill>
                   <a:srgbClr val="FBFCFD"/>
                 </a:solidFill>
@@ -5807,7 +5807,7 @@
               <a:t>• </a:t>
             </a:r>
             <a:r>
-              <a:rPr sz="1750" b="1">
+              <a:rPr sz="1500" b="1">
                 <a:solidFill>
                   <a:srgbClr val="FBFCFD"/>
                 </a:solidFill>
@@ -5815,7 +5815,7 @@
               <a:t>Rango temporal:</a:t>
             </a:r>
             <a:r>
-              <a:rPr sz="1750">
+              <a:rPr sz="1500">
                 <a:solidFill>
                   <a:srgbClr val="FBFCFD"/>
                 </a:solidFill>
@@ -5823,7 +5823,7 @@
               <a:t> Campaña desde el </a:t>
             </a:r>
             <a:r>
-              <a:rPr sz="1750" b="1">
+              <a:rPr sz="1500" b="1">
                 <a:solidFill>
                   <a:srgbClr val="FBFCFD"/>
                 </a:solidFill>
@@ -5831,15 +5831,15 @@
               <a:t>21 de enero de 2011</a:t>
             </a:r>
             <a:r>
-              <a:rPr sz="1750">
-                <a:solidFill>
-                  <a:srgbClr val="FBFCFD"/>
-                </a:solidFill>
-              </a:rPr>
-              <a:t> hasta el </a:t>
-            </a:r>
-            <a:r>
-              <a:rPr sz="1750" b="1">
+              <a:rPr sz="1500">
+                <a:solidFill>
+                  <a:srgbClr val="FBFCFD"/>
+                </a:solidFill>
+              </a:rPr>
+              <a:t> al </a:t>
+            </a:r>
+            <a:r>
+              <a:rPr sz="1500" b="1">
                 <a:solidFill>
                   <a:srgbClr val="FBFCFD"/>
                 </a:solidFill>
@@ -5847,7 +5847,7 @@
               <a:t>4 de marzo de 2012</a:t>
             </a:r>
             <a:r>
-              <a:rPr sz="1750">
+              <a:rPr sz="1500">
                 <a:solidFill>
                   <a:srgbClr val="FBFCFD"/>
                 </a:solidFill>
@@ -5869,7 +5869,7 @@
               </a:lnSpc>
             </a:pPr>
             <a:r>
-              <a:rPr sz="1750">
+              <a:rPr sz="1500">
                 <a:solidFill>
                   <a:srgbClr val="FBFCFD"/>
                 </a:solidFill>
@@ -5877,7 +5877,7 @@
               <a:t>• </a:t>
             </a:r>
             <a:r>
-              <a:rPr sz="1750" b="1">
+              <a:rPr sz="1500" b="1">
                 <a:solidFill>
                   <a:srgbClr val="FBFCFD"/>
                 </a:solidFill>
@@ -5885,12 +5885,12 @@
               <a:t>Tratamiento:</a:t>
             </a:r>
             <a:r>
-              <a:rPr sz="1750">
-                <a:solidFill>
-                  <a:srgbClr val="FBFCFD"/>
-                </a:solidFill>
-              </a:rPr>
-              <a:t> Se calcula la mediana diaria suavizada con una ventana de 7 días por cada archivo para aislar ruidos y nubes transitorias.</a:t>
+              <a:rPr sz="1500">
+                <a:solidFill>
+                  <a:srgbClr val="FBFCFD"/>
+                </a:solidFill>
+              </a:rPr>
+              <a:t> Mediana diaria suavizada (ventana 7 días) por archivo para aislar ruidos y nubes transitorias.</a:t>
             </a:r>
           </a:p>
         </p:txBody>
@@ -5903,8 +5903,8 @@
         </p:nvSpPr>
         <p:spPr>
           <a:xfrm>
-            <a:off x="6233007" y="2788920"/>
-            <a:ext cx="5592927" cy="3337560"/>
+            <a:off x="6233007" y="2724912"/>
+            <a:ext cx="5592927" cy="3584448"/>
           </a:xfrm>
           <a:prstGeom prst="rect">
             <a:avLst/>
@@ -5948,8 +5948,8 @@
         </p:nvSpPr>
         <p:spPr>
           <a:xfrm>
-            <a:off x="6233007" y="2788920"/>
-            <a:ext cx="73152" cy="3337560"/>
+            <a:off x="6233007" y="2724912"/>
+            <a:ext cx="73152" cy="3584448"/>
           </a:xfrm>
           <a:prstGeom prst="rect">
             <a:avLst/>
@@ -5991,7 +5991,7 @@
         </p:nvSpPr>
         <p:spPr>
           <a:xfrm>
-            <a:off x="6397599" y="2880360"/>
+            <a:off x="6397599" y="2816352"/>
             <a:ext cx="5318607" cy="411480"/>
           </a:xfrm>
           <a:prstGeom prst="rect">
@@ -6025,8 +6025,8 @@
         </p:nvSpPr>
         <p:spPr>
           <a:xfrm>
-            <a:off x="6434175" y="3429000"/>
-            <a:ext cx="5190591" cy="2532888"/>
+            <a:off x="6434175" y="3364992"/>
+            <a:ext cx="5190591" cy="2779776"/>
           </a:xfrm>
           <a:prstGeom prst="rect">
             <a:avLst/>
@@ -6045,7 +6045,7 @@
               </a:lnSpc>
             </a:pPr>
             <a:r>
-              <a:rPr sz="1750">
+              <a:rPr sz="1500">
                 <a:solidFill>
                   <a:srgbClr val="FBFCFD"/>
                 </a:solidFill>
@@ -6053,7 +6053,7 @@
               <a:t>• </a:t>
             </a:r>
             <a:r>
-              <a:rPr sz="1750" b="1">
+              <a:rPr sz="1500" b="1">
                 <a:solidFill>
                   <a:srgbClr val="FBFCFD"/>
                 </a:solidFill>
@@ -6061,15 +6061,15 @@
               <a:t>Validación previa:</a:t>
             </a:r>
             <a:r>
-              <a:rPr sz="1750">
-                <a:solidFill>
-                  <a:srgbClr val="FBFCFD"/>
-                </a:solidFill>
-              </a:rPr>
-              <a:t> El objetivo es validar la homogeneidad física de la radiación medida </a:t>
-            </a:r>
-            <a:r>
-              <a:rPr sz="1750" b="1">
+              <a:rPr sz="1500">
+                <a:solidFill>
+                  <a:srgbClr val="FBFCFD"/>
+                </a:solidFill>
+              </a:rPr>
+              <a:t> Confirmar la homogeneidad física de la radiación </a:t>
+            </a:r>
+            <a:r>
+              <a:rPr sz="1500" b="1">
                 <a:solidFill>
                   <a:srgbClr val="FBFCFD"/>
                 </a:solidFill>
@@ -6077,12 +6077,12 @@
               <a:t>antes</a:t>
             </a:r>
             <a:r>
-              <a:rPr sz="1750">
-                <a:solidFill>
-                  <a:srgbClr val="FBFCFD"/>
-                </a:solidFill>
-              </a:rPr>
-              <a:t> de procesar la emulación geográfica y el modelado de celdas.</a:t>
+              <a:rPr sz="1500">
+                <a:solidFill>
+                  <a:srgbClr val="FBFCFD"/>
+                </a:solidFill>
+              </a:rPr>
+              <a:t> de la emulación geográfica y el modelado.</a:t>
             </a:r>
           </a:p>
           <a:p>
@@ -6099,7 +6099,7 @@
               </a:lnSpc>
             </a:pPr>
             <a:r>
-              <a:rPr sz="1750">
+              <a:rPr sz="1500">
                 <a:solidFill>
                   <a:srgbClr val="FBFCFD"/>
                 </a:solidFill>
@@ -6107,20 +6107,20 @@
               <a:t>• </a:t>
             </a:r>
             <a:r>
-              <a:rPr sz="1750" b="1">
-                <a:solidFill>
-                  <a:srgbClr val="FBFCFD"/>
-                </a:solidFill>
-              </a:rPr>
-              <a:t>Evidencia de soiling y mantenimiento:</a:t>
-            </a:r>
-            <a:r>
-              <a:rPr sz="1750">
-                <a:solidFill>
-                  <a:srgbClr val="FBFCFD"/>
-                </a:solidFill>
-              </a:rPr>
-              <a:t> La perfecta coincidencia de las curvas demuestra que no hay desviaciones locales significativas en los sensores de referencia.</a:t>
+              <a:rPr sz="1500" b="1">
+                <a:solidFill>
+                  <a:srgbClr val="FBFCFD"/>
+                </a:solidFill>
+              </a:rPr>
+              <a:t>Soiling y mantenimiento:</a:t>
+            </a:r>
+            <a:r>
+              <a:rPr sz="1500">
+                <a:solidFill>
+                  <a:srgbClr val="FBFCFD"/>
+                </a:solidFill>
+              </a:rPr>
+              <a:t> La coincidencia de curvas demuestra que no hay desviaciones locales significativas en los sensores de referencia.</a:t>
             </a:r>
           </a:p>
           <a:p>
@@ -6137,7 +6137,7 @@
               </a:lnSpc>
             </a:pPr>
             <a:r>
-              <a:rPr sz="1750">
+              <a:rPr sz="1500">
                 <a:solidFill>
                   <a:srgbClr val="FBFCFD"/>
                 </a:solidFill>
@@ -6145,7 +6145,7 @@
               <a:t>• </a:t>
             </a:r>
             <a:r>
-              <a:rPr sz="1750" b="1">
+              <a:rPr sz="1500" b="1">
                 <a:solidFill>
                   <a:srgbClr val="FBFCFD"/>
                 </a:solidFill>
@@ -6153,12 +6153,12 @@
               <a:t>Alineación de sensores:</a:t>
             </a:r>
             <a:r>
-              <a:rPr sz="1750">
-                <a:solidFill>
-                  <a:srgbClr val="FBFCFD"/>
-                </a:solidFill>
-              </a:rPr>
-              <a:t> Se asegura que la irradiancia incidente en los 11 planos de módulo sea idéntica para una comparación tecnológica justa.</a:t>
+              <a:rPr sz="1500">
+                <a:solidFill>
+                  <a:srgbClr val="FBFCFD"/>
+                </a:solidFill>
+              </a:rPr>
+              <a:t> Garantizar que la irradiancia incidente en los 11 planos sea idéntica para una comparación justa.</a:t>
             </a:r>
           </a:p>
         </p:txBody>
@@ -26709,7 +26709,7 @@
                   <a:srgbClr val="F1C40F"/>
                 </a:solidFill>
               </a:rPr>
-              <a:t>Procedimiento: Arquitectura del Pipeline de Simulación (Fases 0–7)</a:t>
+              <a:t>Procedimiento: Arquitectura del Pipeline de Simulación (Fases 0–4)</a:t>
             </a:r>
           </a:p>
         </p:txBody>
@@ -26826,8 +26826,8 @@
         </p:blipFill>
         <p:spPr>
           <a:xfrm>
-            <a:off x="2529687" y="1188720"/>
-            <a:ext cx="7132320" cy="3566160"/>
+            <a:off x="380847" y="1188720"/>
+            <a:ext cx="11430000" cy="3325090"/>
           </a:xfrm>
           <a:prstGeom prst="rect">
             <a:avLst/>
@@ -26842,8 +26842,8 @@
         </p:nvSpPr>
         <p:spPr>
           <a:xfrm>
-            <a:off x="365760" y="4846320"/>
-            <a:ext cx="11460175" cy="1554480"/>
+            <a:off x="365760" y="5120640"/>
+            <a:ext cx="11460175" cy="1188720"/>
           </a:xfrm>
           <a:prstGeom prst="rect">
             <a:avLst/>
@@ -26887,8 +26887,8 @@
         </p:nvSpPr>
         <p:spPr>
           <a:xfrm>
-            <a:off x="548640" y="4882896"/>
-            <a:ext cx="11094415" cy="1481328"/>
+            <a:off x="548640" y="5157216"/>
+            <a:ext cx="11094415" cy="1115568"/>
           </a:xfrm>
           <a:prstGeom prst="rect">
             <a:avLst/>
@@ -26912,7 +26912,7 @@
                   <a:srgbClr val="FBFCFD"/>
                 </a:solidFill>
               </a:rPr>
-              <a:t>Flujo lógico de la simulación:</a:t>
+              <a:t>Flujo lógico de la simulación (Fases 0-4):</a:t>
             </a:r>
             <a:r>
               <a:rPr sz="1700">
@@ -26920,7 +26920,7 @@
                   <a:srgbClr val="FBFCFD"/>
                 </a:solidFill>
               </a:rPr>
-              <a:t> El proceso inicia con la exploración y emulación estacional de los datos (Fases 0-1) para adaptarlos al hemisferio sur. Luego, se limpia y calcula el recurso solar efectivo (Fase 2) y se extraen los parámetros físicos de los módulos (Fase 3). Finalmente, se realiza la simulación horaria (Fase 4) para graficar, documentar y exportar los resultados (Fases 5-7).</a:t>
+              <a:t> El proceso inicia con la exploración y emulación estacional de los datos (Fases 0-1) para adaptarlos al hemisferio sur. Luego, se limpia y calcula el recurso solar efectivo (Fase 2) y se extraen los parámetros físicos de los módulos (Fase 3). Finalmente, se realiza la simulación horaria dinámica (Fase 4) para obtener las series temporales de potencia y PR.</a:t>
             </a:r>
           </a:p>
         </p:txBody>
@@ -29148,8 +29148,8 @@
         </p:blipFill>
         <p:spPr>
           <a:xfrm>
-            <a:off x="895197" y="1097280"/>
-            <a:ext cx="10401300" cy="3657600"/>
+            <a:off x="570156" y="1143000"/>
+            <a:ext cx="11051381" cy="3886200"/>
           </a:xfrm>
           <a:prstGeom prst="rect">
             <a:avLst/>
@@ -29164,8 +29164,8 @@
         </p:nvSpPr>
         <p:spPr>
           <a:xfrm>
-            <a:off x="365760" y="4846320"/>
-            <a:ext cx="11460175" cy="1554480"/>
+            <a:off x="365760" y="5120640"/>
+            <a:ext cx="11460175" cy="1188720"/>
           </a:xfrm>
           <a:prstGeom prst="rect">
             <a:avLst/>
@@ -29209,8 +29209,8 @@
         </p:nvSpPr>
         <p:spPr>
           <a:xfrm>
-            <a:off x="548640" y="4882896"/>
-            <a:ext cx="11094415" cy="1481328"/>
+            <a:off x="548640" y="5157216"/>
+            <a:ext cx="11094415" cy="1115568"/>
           </a:xfrm>
           <a:prstGeom prst="rect">
             <a:avLst/>
@@ -29454,8 +29454,8 @@
         </p:blipFill>
         <p:spPr>
           <a:xfrm>
-            <a:off x="895197" y="1097280"/>
-            <a:ext cx="10401300" cy="3657600"/>
+            <a:off x="380847" y="1097280"/>
+            <a:ext cx="11430000" cy="2909454"/>
           </a:xfrm>
           <a:prstGeom prst="rect">
             <a:avLst/>
@@ -29471,7 +29471,7 @@
         <p:spPr>
           <a:xfrm>
             <a:off x="365760" y="4846320"/>
-            <a:ext cx="11460175" cy="1600200"/>
+            <a:ext cx="11460175" cy="1463040"/>
           </a:xfrm>
           <a:prstGeom prst="rect">
             <a:avLst/>
@@ -29516,7 +29516,7 @@
         <p:spPr>
           <a:xfrm>
             <a:off x="548640" y="4882896"/>
-            <a:ext cx="11094415" cy="1527048"/>
+            <a:ext cx="11094415" cy="1389888"/>
           </a:xfrm>
           <a:prstGeom prst="rect">
             <a:avLst/>

--- a/output/Presentacion_Final_ELI556_Atacama_POA_Tarea2_revisado.pptx
+++ b/output/Presentacion_Final_ELI556_Atacama_POA_Tarea2_revisado.pptx
@@ -13778,7 +13778,7 @@
                   <a:srgbClr val="FBFCFD"/>
                 </a:solidFill>
               </a:rPr>
-              <a:t>, máx. simulado 73.3 °C).</a:t>
+              <a:t>).</a:t>
             </a:r>
           </a:p>
           <a:p>
@@ -19719,11 +19719,11 @@
           <a:p>
             <a:pPr algn="l">
               <a:lnSpc>
-                <a:spcPct val="108000"/>
+                <a:spcPct val="105000"/>
               </a:lnSpc>
             </a:pPr>
             <a:r>
-              <a:rPr sz="1550">
+              <a:rPr sz="1450">
                 <a:solidFill>
                   <a:srgbClr val="FBFCFD"/>
                 </a:solidFill>
@@ -19734,18 +19734,18 @@
           <a:p>
             <a:pPr algn="l">
               <a:lnSpc>
-                <a:spcPct val="108000"/>
+                <a:spcPct val="105000"/>
               </a:lnSpc>
             </a:pPr>
           </a:p>
           <a:p>
             <a:pPr algn="l">
               <a:lnSpc>
-                <a:spcPct val="108000"/>
+                <a:spcPct val="105000"/>
               </a:lnSpc>
             </a:pPr>
             <a:r>
-              <a:rPr sz="1550">
+              <a:rPr sz="1450">
                 <a:solidFill>
                   <a:srgbClr val="FBFCFD"/>
                 </a:solidFill>
@@ -19756,18 +19756,18 @@
           <a:p>
             <a:pPr algn="l">
               <a:lnSpc>
-                <a:spcPct val="108000"/>
+                <a:spcPct val="105000"/>
               </a:lnSpc>
             </a:pPr>
           </a:p>
           <a:p>
             <a:pPr algn="l">
               <a:lnSpc>
-                <a:spcPct val="108000"/>
+                <a:spcPct val="105000"/>
               </a:lnSpc>
             </a:pPr>
             <a:r>
-              <a:rPr sz="1550">
+              <a:rPr sz="1450">
                 <a:solidFill>
                   <a:srgbClr val="FBFCFD"/>
                 </a:solidFill>
@@ -19778,18 +19778,18 @@
           <a:p>
             <a:pPr algn="l">
               <a:lnSpc>
-                <a:spcPct val="108000"/>
+                <a:spcPct val="105000"/>
               </a:lnSpc>
             </a:pPr>
           </a:p>
           <a:p>
             <a:pPr algn="l">
               <a:lnSpc>
-                <a:spcPct val="108000"/>
+                <a:spcPct val="105000"/>
               </a:lnSpc>
             </a:pPr>
             <a:r>
-              <a:rPr sz="1550">
+              <a:rPr sz="1450">
                 <a:solidFill>
                   <a:srgbClr val="FBFCFD"/>
                 </a:solidFill>
@@ -19800,18 +19800,18 @@
           <a:p>
             <a:pPr algn="l">
               <a:lnSpc>
-                <a:spcPct val="108000"/>
+                <a:spcPct val="105000"/>
               </a:lnSpc>
             </a:pPr>
           </a:p>
           <a:p>
             <a:pPr algn="l">
               <a:lnSpc>
-                <a:spcPct val="108000"/>
+                <a:spcPct val="105000"/>
               </a:lnSpc>
             </a:pPr>
             <a:r>
-              <a:rPr sz="1550">
+              <a:rPr sz="1450">
                 <a:solidFill>
                   <a:srgbClr val="FBFCFD"/>
                 </a:solidFill>
@@ -19822,18 +19822,18 @@
           <a:p>
             <a:pPr algn="l">
               <a:lnSpc>
-                <a:spcPct val="108000"/>
+                <a:spcPct val="105000"/>
               </a:lnSpc>
             </a:pPr>
           </a:p>
           <a:p>
             <a:pPr algn="l">
               <a:lnSpc>
-                <a:spcPct val="108000"/>
+                <a:spcPct val="105000"/>
               </a:lnSpc>
             </a:pPr>
             <a:r>
-              <a:rPr sz="1550">
+              <a:rPr sz="1450">
                 <a:solidFill>
                   <a:srgbClr val="FBFCFD"/>
                 </a:solidFill>
@@ -19844,18 +19844,40 @@
           <a:p>
             <a:pPr algn="l">
               <a:lnSpc>
-                <a:spcPct val="108000"/>
+                <a:spcPct val="105000"/>
               </a:lnSpc>
             </a:pPr>
           </a:p>
           <a:p>
             <a:pPr algn="l">
               <a:lnSpc>
-                <a:spcPct val="108000"/>
+                <a:spcPct val="105000"/>
               </a:lnSpc>
             </a:pPr>
             <a:r>
-              <a:rPr sz="1550">
+              <a:rPr sz="1450">
+                <a:solidFill>
+                  <a:srgbClr val="FBFCFD"/>
+                </a:solidFill>
+              </a:rPr>
+              <a:t>7. PVGIS — Photovoltaic Geographical Information System, Joint Research Centre (Comisión Europea), base SARAH — recurso TMY de Atacama (Fase 8).</a:t>
+            </a:r>
+          </a:p>
+          <a:p>
+            <a:pPr algn="l">
+              <a:lnSpc>
+                <a:spcPct val="105000"/>
+              </a:lnSpc>
+            </a:pPr>
+          </a:p>
+          <a:p>
+            <a:pPr algn="l">
+              <a:lnSpc>
+                <a:spcPct val="105000"/>
+              </a:lnSpc>
+            </a:pPr>
+            <a:r>
+              <a:rPr sz="1450">
                 <a:solidFill>
                   <a:srgbClr val="FBFCFD"/>
                 </a:solidFill>
@@ -28215,7 +28237,7 @@
                   <a:srgbClr val="F1C40F"/>
                 </a:solidFill>
               </a:rPr>
-              <a:t> = 1.121 eV (Si, 25 °C); S = G</a:t>
+              <a:t> = 1.121 eV (Si); S = irradiancia efectiva = G</a:t>
             </a:r>
             <a:r>
               <a:rPr sz="1150">
@@ -28231,7 +28253,7 @@
                   <a:srgbClr val="F1C40F"/>
                 </a:solidFill>
               </a:rPr>
-              <a:t> (Anexo II).</a:t>
+              <a:t>·IAM·M (Anexo II).</a:t>
             </a:r>
           </a:p>
           <a:p>
@@ -29074,7 +29096,7 @@
               </a:lnSpc>
             </a:pPr>
             <a:r>
-              <a:rPr sz="1800">
+              <a:rPr sz="1600">
                 <a:solidFill>
                   <a:srgbClr val="FBFCFD"/>
                 </a:solidFill>
@@ -29082,7 +29104,7 @@
               <a:t>• </a:t>
             </a:r>
             <a:r>
-              <a:rPr sz="1800" b="1">
+              <a:rPr sz="1600" b="1">
                 <a:solidFill>
                   <a:srgbClr val="FBFCFD"/>
                 </a:solidFill>
@@ -29090,7 +29112,7 @@
               <a:t>Térmicas:</a:t>
             </a:r>
             <a:r>
-              <a:rPr sz="1800">
+              <a:rPr sz="1600">
                 <a:solidFill>
                   <a:srgbClr val="FBFCFD"/>
                 </a:solidFill>
@@ -29098,7 +29120,7 @@
               <a:t> caídas por elevada T</a:t>
             </a:r>
             <a:r>
-              <a:rPr sz="1400">
+              <a:rPr sz="1200">
                 <a:solidFill>
                   <a:srgbClr val="FBFCFD"/>
                 </a:solidFill>
@@ -29106,7 +29128,7 @@
               <a:t>c</a:t>
             </a:r>
             <a:r>
-              <a:rPr sz="1800">
+              <a:rPr sz="1600">
                 <a:solidFill>
                   <a:srgbClr val="FBFCFD"/>
                 </a:solidFill>
@@ -29121,7 +29143,7 @@
               </a:lnSpc>
             </a:pPr>
             <a:r>
-              <a:rPr sz="1800">
+              <a:rPr sz="1600">
                 <a:solidFill>
                   <a:srgbClr val="FBFCFD"/>
                 </a:solidFill>
@@ -29129,7 +29151,7 @@
               <a:t>• </a:t>
             </a:r>
             <a:r>
-              <a:rPr sz="1800" b="1">
+              <a:rPr sz="1600" b="1">
                 <a:solidFill>
                   <a:srgbClr val="FBFCFD"/>
                 </a:solidFill>
@@ -29137,7 +29159,7 @@
               <a:t>Óhmicas:</a:t>
             </a:r>
             <a:r>
-              <a:rPr sz="1800">
+              <a:rPr sz="1600">
                 <a:solidFill>
                   <a:srgbClr val="FBFCFD"/>
                 </a:solidFill>
@@ -29145,7 +29167,7 @@
               <a:t> pérdidas resistivas en R</a:t>
             </a:r>
             <a:r>
-              <a:rPr sz="1400">
+              <a:rPr sz="1200">
                 <a:solidFill>
                   <a:srgbClr val="FBFCFD"/>
                 </a:solidFill>
@@ -29153,7 +29175,7 @@
               <a:t>s</a:t>
             </a:r>
             <a:r>
-              <a:rPr sz="1800">
+              <a:rPr sz="1600">
                 <a:solidFill>
                   <a:srgbClr val="FBFCFD"/>
                 </a:solidFill>
@@ -29168,7 +29190,7 @@
               </a:lnSpc>
             </a:pPr>
             <a:r>
-              <a:rPr sz="1800">
+              <a:rPr sz="1600">
                 <a:solidFill>
                   <a:srgbClr val="FBFCFD"/>
                 </a:solidFill>
@@ -29176,7 +29198,7 @@
               <a:t>• </a:t>
             </a:r>
             <a:r>
-              <a:rPr sz="1800" b="1">
+              <a:rPr sz="1600" b="1">
                 <a:solidFill>
                   <a:srgbClr val="FBFCFD"/>
                 </a:solidFill>
@@ -29184,15 +29206,15 @@
               <a:t>De bajo G:</a:t>
             </a:r>
             <a:r>
-              <a:rPr sz="1800">
-                <a:solidFill>
-                  <a:srgbClr val="FBFCFD"/>
-                </a:solidFill>
-              </a:rPr>
-              <a:t> comportamiento no lineal a baja irradiancia (R</a:t>
-            </a:r>
-            <a:r>
-              <a:rPr sz="1400">
+              <a:rPr sz="1600">
+                <a:solidFill>
+                  <a:srgbClr val="FBFCFD"/>
+                </a:solidFill>
+              </a:rPr>
+              <a:t> no linealidad a baja irradiancia (R</a:t>
+            </a:r>
+            <a:r>
+              <a:rPr sz="1200">
                 <a:solidFill>
                   <a:srgbClr val="FBFCFD"/>
                 </a:solidFill>
@@ -29200,7 +29222,7 @@
               <a:t>sh</a:t>
             </a:r>
             <a:r>
-              <a:rPr sz="1800">
+              <a:rPr sz="1600">
                 <a:solidFill>
                   <a:srgbClr val="FBFCFD"/>
                 </a:solidFill>
@@ -29215,12 +29237,43 @@
               </a:lnSpc>
             </a:pPr>
             <a:r>
-              <a:rPr sz="1800">
-                <a:solidFill>
-                  <a:srgbClr val="FBFCFD"/>
-                </a:solidFill>
-              </a:rPr>
-              <a:t>• NO penaliza pérdidas ópticas/espectrales (no modeladas) ni de planta (cableado, inversor, soiling).</a:t>
+              <a:rPr sz="1600">
+                <a:solidFill>
+                  <a:srgbClr val="FBFCFD"/>
+                </a:solidFill>
+              </a:rPr>
+              <a:t>• </a:t>
+            </a:r>
+            <a:r>
+              <a:rPr sz="1600" b="1">
+                <a:solidFill>
+                  <a:srgbClr val="FBFCFD"/>
+                </a:solidFill>
+              </a:rPr>
+              <a:t>Ópticas/espectrales:</a:t>
+            </a:r>
+            <a:r>
+              <a:rPr sz="1600">
+                <a:solidFill>
+                  <a:srgbClr val="FBFCFD"/>
+                </a:solidFill>
+              </a:rPr>
+              <a:t> ahora penalizadas vía la irradiancia efectiva (IAM + factor espectral, ≈3 % en Atacama).</a:t>
+            </a:r>
+          </a:p>
+          <a:p>
+            <a:pPr algn="l">
+              <a:lnSpc>
+                <a:spcPct val="110000"/>
+              </a:lnSpc>
+            </a:pPr>
+            <a:r>
+              <a:rPr sz="1600">
+                <a:solidFill>
+                  <a:srgbClr val="FBFCFD"/>
+                </a:solidFill>
+              </a:rPr>
+              <a:t>• NO penaliza pérdidas de planta (cableado, inversor, soiling).</a:t>
             </a:r>
           </a:p>
         </p:txBody>
@@ -30066,6 +30119,23 @@
                 </a:solidFill>
                 <a:latin typeface="Consolas"/>
               </a:rPr>
+              <a:t>Relative humidity</a:t>
+            </a:r>
+            <a:r>
+              <a:rPr sz="1550">
+                <a:solidFill>
+                  <a:srgbClr val="FBFCFD"/>
+                </a:solidFill>
+              </a:rPr>
+              <a:t> (22), </a:t>
+            </a:r>
+            <a:r>
+              <a:rPr sz="1450">
+                <a:solidFill>
+                  <a:srgbClr val="7FDBFF"/>
+                </a:solidFill>
+                <a:latin typeface="Consolas"/>
+              </a:rPr>
               <a:t>Atmospheric pressure</a:t>
             </a:r>
             <a:r>
@@ -30140,7 +30210,7 @@
                   <a:srgbClr val="FBFCFD"/>
                 </a:solidFill>
               </a:rPr>
-              <a:t> (33) — c/u con incertidumbre y desv. estándar de muestras de 1 s.</a:t>
+              <a:t> (33) — c/u con incertidumbre.</a:t>
             </a:r>
           </a:p>
           <a:p>
@@ -30172,7 +30242,7 @@
                   <a:srgbClr val="FBFCFD"/>
                 </a:solidFill>
               </a:rPr>
-              <a:t> (1): referencia para verificar el recurso.</a:t>
+              <a:t> (1): referencia para verificar el recurso. Humedad+T+presión → factor espectral.</a:t>
             </a:r>
           </a:p>
         </p:txBody>
@@ -30381,7 +30451,7 @@
                   <a:srgbClr val="FBFCFD"/>
                 </a:solidFill>
               </a:rPr>
-              <a:t>, lluvia, humedad relativa, T dorso, T gabinete MT5, horarios de mantención (</a:t>
+              <a:t>, lluvia, T dorso, T gabinete MT5, horarios de mantención (</a:t>
             </a:r>
             <a:r>
               <a:rPr sz="1450">
@@ -32333,7 +32403,7 @@
                   <a:srgbClr val="FBFCFD"/>
                 </a:solidFill>
               </a:rPr>
-              <a:t> Mediana diaria suavizada (ventana 7 días) por archivo para aislar ruidos y nubes transitorias.</a:t>
+              <a:t> Mediana diaria (descartando días parciales con &lt;40 registros) suavizada a 7 días por archivo, para aislar ruidos, nubes transitorias y caídas del datalogger.</a:t>
             </a:r>
           </a:p>
         </p:txBody>
@@ -37176,7 +37246,7 @@
         </p:blipFill>
         <p:spPr>
           <a:xfrm>
-            <a:off x="380847" y="1097280"/>
+            <a:off x="380847" y="1554480"/>
             <a:ext cx="11430000" cy="2909454"/>
           </a:xfrm>
           <a:prstGeom prst="rect">

--- a/output/Presentacion_Final_ELI556_Atacama_POA_Tarea2_revisado.pptx
+++ b/output/Presentacion_Final_ELI556_Atacama_POA_Tarea2_revisado.pptx
@@ -8173,7 +8173,7 @@
                   <a:srgbClr val="F1C40F"/>
                 </a:solidFill>
               </a:rPr>
-              <a:t>Procedimiento: Modificadores Ópticos APLICADOS — IAM y Espectral (Fase 2)</a:t>
+              <a:t>Procedimiento: Modificadores Ópticos (IAM y Espectral)</a:t>
             </a:r>
           </a:p>
         </p:txBody>
@@ -8376,7 +8376,7 @@
                   <a:srgbClr val="FBFCFD"/>
                 </a:solidFill>
               </a:rPr>
-              <a:t>Pérdidas ópticas y espectrales ahora ejecutadas en el pipeline:</a:t>
+              <a:t>¿Qué hacen?</a:t>
             </a:r>
             <a:r>
               <a:rPr sz="1550">
@@ -8384,7 +8384,7 @@
                   <a:srgbClr val="FBFCFD"/>
                 </a:solidFill>
               </a:rPr>
-              <a:t> sobre la POA de Perez (albedo </a:t>
+              <a:t> Sobre la POA de Perez (albedo </a:t>
             </a:r>
             <a:r>
               <a:rPr sz="1550" b="1">
@@ -8400,7 +8400,7 @@
                   <a:srgbClr val="FBFCFD"/>
                 </a:solidFill>
               </a:rPr>
-              <a:t>) se aplica el </a:t>
+              <a:t>) se descuentan dos pérdidas reales: el </a:t>
             </a:r>
             <a:r>
               <a:rPr sz="1550" b="1">
@@ -8408,7 +8408,7 @@
                   <a:srgbClr val="FBFCFD"/>
                 </a:solidFill>
               </a:rPr>
-              <a:t>IAM físico</a:t>
+              <a:t>IAM</a:t>
             </a:r>
             <a:r>
               <a:rPr sz="1550">
@@ -8416,7 +8416,71 @@
                   <a:srgbClr val="FBFCFD"/>
                 </a:solidFill>
               </a:rPr>
-              <a:t> de Snell-Bouguer (</a:t>
+              <a:t> quita la luz que se refleja en el vidrio cuando el sol llega muy inclinado (ángulos rasantes), y el </a:t>
+            </a:r>
+            <a:r>
+              <a:rPr sz="1550" b="1">
+                <a:solidFill>
+                  <a:srgbClr val="FBFCFD"/>
+                </a:solidFill>
+              </a:rPr>
+              <a:t>factor espectral</a:t>
+            </a:r>
+            <a:r>
+              <a:rPr sz="1550">
+                <a:solidFill>
+                  <a:srgbClr val="FBFCFD"/>
+                </a:solidFill>
+              </a:rPr>
+              <a:t> ajusta según el color de la luz solar. El resultado es la </a:t>
+            </a:r>
+            <a:r>
+              <a:rPr sz="1550" b="1">
+                <a:solidFill>
+                  <a:srgbClr val="FBFCFD"/>
+                </a:solidFill>
+              </a:rPr>
+              <a:t>irradiancia efectiva</a:t>
+            </a:r>
+            <a:r>
+              <a:rPr sz="1550">
+                <a:solidFill>
+                  <a:srgbClr val="FBFCFD"/>
+                </a:solidFill>
+              </a:rPr>
+              <a:t> que realmente genera corriente en la Fase 4. Efecto en Atacama: pérdida óptica ≈ </a:t>
+            </a:r>
+            <a:r>
+              <a:rPr sz="1550" b="1">
+                <a:solidFill>
+                  <a:srgbClr val="FBFCFD"/>
+                </a:solidFill>
+              </a:rPr>
+              <a:t>3.0 %</a:t>
+            </a:r>
+            <a:r>
+              <a:rPr sz="1550">
+                <a:solidFill>
+                  <a:srgbClr val="FBFCFD"/>
+                </a:solidFill>
+              </a:rPr>
+              <a:t> y espectral ≈ </a:t>
+            </a:r>
+            <a:r>
+              <a:rPr sz="1550" b="1">
+                <a:solidFill>
+                  <a:srgbClr val="FBFCFD"/>
+                </a:solidFill>
+              </a:rPr>
+              <a:t>neutra</a:t>
+            </a:r>
+            <a:r>
+              <a:rPr sz="1550">
+                <a:solidFill>
+                  <a:srgbClr val="FBFCFD"/>
+                </a:solidFill>
+              </a:rPr>
+              <a:t> (cielo seco y limpio). Ecuaciones, constantes y funciones </a:t>
             </a:r>
             <a:r>
               <a:rPr sz="1450">
@@ -8425,7 +8489,7 @@
                 </a:solidFill>
                 <a:latin typeface="Consolas"/>
               </a:rPr>
-              <a:t>pvlib.iam.physical</a:t>
+              <a:t>pvlib</a:t>
             </a:r>
             <a:r>
               <a:rPr sz="1550">
@@ -8433,104 +8497,7 @@
                   <a:srgbClr val="FBFCFD"/>
                 </a:solidFill>
               </a:rPr>
-              <a:t>, n=1.526, K=4 m⁻¹, L=2 mm) a la directa y los factores de Marion a la difusa, y el </a:t>
-            </a:r>
-            <a:r>
-              <a:rPr sz="1550" b="1">
-                <a:solidFill>
-                  <a:srgbClr val="FBFCFD"/>
-                </a:solidFill>
-              </a:rPr>
-              <a:t>factor espectral</a:t>
-            </a:r>
-            <a:r>
-              <a:rPr sz="1550">
-                <a:solidFill>
-                  <a:srgbClr val="FBFCFD"/>
-                </a:solidFill>
-              </a:rPr>
-              <a:t> First Solar (</a:t>
-            </a:r>
-            <a:r>
-              <a:rPr sz="1450">
-                <a:solidFill>
-                  <a:srgbClr val="7FDBFF"/>
-                </a:solidFill>
-                <a:latin typeface="Consolas"/>
-              </a:rPr>
-              <a:t>spectral_factor_firstsolar</a:t>
-            </a:r>
-            <a:r>
-              <a:rPr sz="1550">
-                <a:solidFill>
-                  <a:srgbClr val="FBFCFD"/>
-                </a:solidFill>
-              </a:rPr>
-              <a:t>, agua precipitable + masa de aire). El resultado es la </a:t>
-            </a:r>
-            <a:r>
-              <a:rPr sz="1550" b="1">
-                <a:solidFill>
-                  <a:srgbClr val="FBFCFD"/>
-                </a:solidFill>
-              </a:rPr>
-              <a:t>irradiancia efectiva</a:t>
-            </a:r>
-            <a:r>
-              <a:rPr sz="1550">
-                <a:solidFill>
-                  <a:srgbClr val="FBFCFD"/>
-                </a:solidFill>
-              </a:rPr>
-              <a:t> que fotogenera I</a:t>
-            </a:r>
-            <a:r>
-              <a:rPr sz="1150">
-                <a:solidFill>
-                  <a:srgbClr val="FBFCFD"/>
-                </a:solidFill>
-              </a:rPr>
-              <a:t>L</a:t>
-            </a:r>
-            <a:r>
-              <a:rPr sz="1550">
-                <a:solidFill>
-                  <a:srgbClr val="FBFCFD"/>
-                </a:solidFill>
-              </a:rPr>
-              <a:t> en la Fase 4. Efecto en Atacama: pérdida óptica ≈ </a:t>
-            </a:r>
-            <a:r>
-              <a:rPr sz="1550" b="1">
-                <a:solidFill>
-                  <a:srgbClr val="FBFCFD"/>
-                </a:solidFill>
-              </a:rPr>
-              <a:t>3.0 %</a:t>
-            </a:r>
-            <a:r>
-              <a:rPr sz="1550">
-                <a:solidFill>
-                  <a:srgbClr val="FBFCFD"/>
-                </a:solidFill>
-              </a:rPr>
-              <a:t> (ángulos rasantes) y espectral ≈ </a:t>
-            </a:r>
-            <a:r>
-              <a:rPr sz="1550" b="1">
-                <a:solidFill>
-                  <a:srgbClr val="FBFCFD"/>
-                </a:solidFill>
-              </a:rPr>
-              <a:t>neutra</a:t>
-            </a:r>
-            <a:r>
-              <a:rPr sz="1550">
-                <a:solidFill>
-                  <a:srgbClr val="FBFCFD"/>
-                </a:solidFill>
-              </a:rPr>
-              <a:t> (cielo seco y limpio) — ecuaciones en (Anexo II, Lám. 29).</a:t>
+              <a:t> en (Anexo II, Lám. 29).</a:t>
             </a:r>
           </a:p>
         </p:txBody>
@@ -15659,7 +15626,7 @@
                   <a:srgbClr val="F1C40F"/>
                 </a:solidFill>
               </a:rPr>
-              <a:t>Resultado: Recurso REAL de Atacama (PVGIS TMY) — Magnitudes Absolutas</a:t>
+              <a:t>Resultado: Recurso REAL de Atacama (PVGIS TMY)</a:t>
             </a:r>
           </a:p>
         </p:txBody>
@@ -16003,7 +15970,7 @@
                   <a:srgbClr val="9AA5B1"/>
                 </a:solidFill>
               </a:rPr>
-              <a:t>(kWh/m²·año, albedo 0.20)</a:t>
+              <a:t>(kWh/m²·año)</a:t>
             </a:r>
           </a:p>
         </p:txBody>
@@ -17001,7 +16968,7 @@
         </p:nvGraphicFramePr>
         <p:xfrm>
           <a:off x="594360" y="1737360"/>
-          <a:ext cx="11002972" cy="4434840"/>
+          <a:ext cx="11002972" cy="4160520"/>
         </p:xfrm>
         <a:graphic>
           <a:graphicData uri="http://schemas.openxmlformats.org/drawingml/2006/table">
@@ -17015,7 +16982,7 @@
                 <a:gridCol w="2089172"/>
                 <a:gridCol w="2367728"/>
               </a:tblGrid>
-              <a:tr h="633548">
+              <a:tr h="594360">
                 <a:tc>
                   <a:txBody>
                     <a:bodyPr wrap="square" lIns="54864" rIns="54864" tIns="36576" bIns="36576"/>
@@ -17023,7 +16990,7 @@
                     <a:p>
                       <a:pPr algn="ctr"/>
                       <a:r>
-                        <a:rPr sz="1500" b="1">
+                        <a:rPr sz="1400" b="1">
                           <a:solidFill>
                             <a:srgbClr val="F1C40F"/>
                           </a:solidFill>
@@ -17045,7 +17012,7 @@
                     <a:p>
                       <a:pPr algn="ctr"/>
                       <a:r>
-                        <a:rPr sz="1500" b="1">
+                        <a:rPr sz="1400" b="1">
                           <a:solidFill>
                             <a:srgbClr val="F1C40F"/>
                           </a:solidFill>
@@ -17067,7 +17034,7 @@
                     <a:p>
                       <a:pPr algn="ctr"/>
                       <a:r>
-                        <a:rPr sz="1500" b="1">
+                        <a:rPr sz="1400" b="1">
                           <a:solidFill>
                             <a:srgbClr val="F1C40F"/>
                           </a:solidFill>
@@ -17089,7 +17056,7 @@
                     <a:p>
                       <a:pPr algn="ctr"/>
                       <a:r>
-                        <a:rPr sz="1500" b="1">
+                        <a:rPr sz="1400" b="1">
                           <a:solidFill>
                             <a:srgbClr val="F1C40F"/>
                           </a:solidFill>
@@ -17105,7 +17072,7 @@
                   </a:tcPr>
                 </a:tc>
               </a:tr>
-              <a:tr h="633548">
+              <a:tr h="594360">
                 <a:tc>
                   <a:txBody>
                     <a:bodyPr wrap="square" lIns="54864" rIns="54864" tIns="36576" bIns="36576"/>
@@ -17113,7 +17080,7 @@
                     <a:p>
                       <a:pPr algn="l"/>
                       <a:r>
-                        <a:rPr sz="1350">
+                        <a:rPr sz="1250">
                           <a:solidFill>
                             <a:srgbClr val="FBFCFD"/>
                           </a:solidFill>
@@ -17121,7 +17088,7 @@
                         <a:t>Recurso solar: G</a:t>
                       </a:r>
                       <a:r>
-                        <a:rPr sz="950">
+                        <a:rPr sz="850">
                           <a:solidFill>
                             <a:srgbClr val="FBFCFD"/>
                           </a:solidFill>
@@ -17129,7 +17096,7 @@
                         <a:t>poa</a:t>
                       </a:r>
                       <a:r>
-                        <a:rPr sz="1350">
+                        <a:rPr sz="1250">
                           <a:solidFill>
                             <a:srgbClr val="FBFCFD"/>
                           </a:solidFill>
@@ -17151,7 +17118,7 @@
                     <a:p>
                       <a:pPr algn="ctr"/>
                       <a:r>
-                        <a:rPr sz="1350">
+                        <a:rPr sz="1250">
                           <a:solidFill>
                             <a:srgbClr val="FBFCFD"/>
                           </a:solidFill>
@@ -17173,7 +17140,7 @@
                     <a:p>
                       <a:pPr algn="ctr"/>
                       <a:r>
-                        <a:rPr sz="1350">
+                        <a:rPr sz="1250">
                           <a:solidFill>
                             <a:srgbClr val="FBFCFD"/>
                           </a:solidFill>
@@ -17195,7 +17162,7 @@
                     <a:p>
                       <a:pPr algn="ctr"/>
                       <a:r>
-                        <a:rPr sz="1350">
+                        <a:rPr sz="1250">
                           <a:solidFill>
                             <a:srgbClr val="FBFCFD"/>
                           </a:solidFill>
@@ -17211,7 +17178,7 @@
                   </a:tcPr>
                 </a:tc>
               </a:tr>
-              <a:tr h="633548">
+              <a:tr h="594360">
                 <a:tc>
                   <a:txBody>
                     <a:bodyPr wrap="square" lIns="54864" rIns="54864" tIns="36576" bIns="36576"/>
@@ -17219,7 +17186,7 @@
                     <a:p>
                       <a:pPr algn="l"/>
                       <a:r>
-                        <a:rPr sz="1350">
+                        <a:rPr sz="1250">
                           <a:solidFill>
                             <a:srgbClr val="FBFCFD"/>
                           </a:solidFill>
@@ -17227,7 +17194,7 @@
                         <a:t>Perfil térmico T</a:t>
                       </a:r>
                       <a:r>
-                        <a:rPr sz="950">
+                        <a:rPr sz="850">
                           <a:solidFill>
                             <a:srgbClr val="FBFCFD"/>
                           </a:solidFill>
@@ -17235,7 +17202,7 @@
                         <a:t>c</a:t>
                       </a:r>
                       <a:r>
-                        <a:rPr sz="1350">
+                        <a:rPr sz="1250">
                           <a:solidFill>
                             <a:srgbClr val="FBFCFD"/>
                           </a:solidFill>
@@ -17257,7 +17224,7 @@
                     <a:p>
                       <a:pPr algn="ctr"/>
                       <a:r>
-                        <a:rPr sz="1350">
+                        <a:rPr sz="1250">
                           <a:solidFill>
                             <a:srgbClr val="FBFCFD"/>
                           </a:solidFill>
@@ -17279,7 +17246,7 @@
                     <a:p>
                       <a:pPr algn="ctr"/>
                       <a:r>
-                        <a:rPr sz="1350">
+                        <a:rPr sz="1250">
                           <a:solidFill>
                             <a:srgbClr val="FBFCFD"/>
                           </a:solidFill>
@@ -17301,7 +17268,7 @@
                     <a:p>
                       <a:pPr algn="ctr"/>
                       <a:r>
-                        <a:rPr sz="1350">
+                        <a:rPr sz="1250">
                           <a:solidFill>
                             <a:srgbClr val="FBFCFD"/>
                           </a:solidFill>
@@ -17309,7 +17276,7 @@
                         <a:t>T</a:t>
                       </a:r>
                       <a:r>
-                        <a:rPr sz="950">
+                        <a:rPr sz="850">
                           <a:solidFill>
                             <a:srgbClr val="FBFCFD"/>
                           </a:solidFill>
@@ -17317,7 +17284,7 @@
                         <a:t>c</a:t>
                       </a:r>
                       <a:r>
-                        <a:rPr sz="1350">
+                        <a:rPr sz="1250">
                           <a:solidFill>
                             <a:srgbClr val="FBFCFD"/>
                           </a:solidFill>
@@ -17333,7 +17300,7 @@
                   </a:tcPr>
                 </a:tc>
               </a:tr>
-              <a:tr h="633548">
+              <a:tr h="594360">
                 <a:tc>
                   <a:txBody>
                     <a:bodyPr wrap="square" lIns="54864" rIns="54864" tIns="36576" bIns="36576"/>
@@ -17341,7 +17308,7 @@
                     <a:p>
                       <a:pPr algn="l"/>
                       <a:r>
-                        <a:rPr sz="1350">
+                        <a:rPr sz="1250">
                           <a:solidFill>
                             <a:srgbClr val="FBFCFD"/>
                           </a:solidFill>
@@ -17363,7 +17330,7 @@
                     <a:p>
                       <a:pPr algn="ctr"/>
                       <a:r>
-                        <a:rPr sz="1250">
+                        <a:rPr sz="1150">
                           <a:solidFill>
                             <a:srgbClr val="7FDBFF"/>
                           </a:solidFill>
@@ -17372,7 +17339,7 @@
                         <a:t>minimize</a:t>
                       </a:r>
                       <a:r>
-                        <a:rPr sz="1350">
+                        <a:rPr sz="1250">
                           <a:solidFill>
                             <a:srgbClr val="FBFCFD"/>
                           </a:solidFill>
@@ -17394,7 +17361,7 @@
                     <a:p>
                       <a:pPr algn="ctr"/>
                       <a:r>
-                        <a:rPr sz="1350">
+                        <a:rPr sz="1250">
                           <a:solidFill>
                             <a:srgbClr val="FBFCFD"/>
                           </a:solidFill>
@@ -17416,7 +17383,7 @@
                     <a:p>
                       <a:pPr algn="ctr"/>
                       <a:r>
-                        <a:rPr sz="1350">
+                        <a:rPr sz="1250">
                           <a:solidFill>
                             <a:srgbClr val="FBFCFD"/>
                           </a:solidFill>
@@ -17432,7 +17399,7 @@
                   </a:tcPr>
                 </a:tc>
               </a:tr>
-              <a:tr h="633548">
+              <a:tr h="594360">
                 <a:tc>
                   <a:txBody>
                     <a:bodyPr wrap="square" lIns="54864" rIns="54864" tIns="36576" bIns="36576"/>
@@ -17440,7 +17407,7 @@
                     <a:p>
                       <a:pPr algn="l"/>
                       <a:r>
-                        <a:rPr sz="1350">
+                        <a:rPr sz="1250">
                           <a:solidFill>
                             <a:srgbClr val="FBFCFD"/>
                           </a:solidFill>
@@ -17448,7 +17415,7 @@
                         <a:t>Discusión R</a:t>
                       </a:r>
                       <a:r>
-                        <a:rPr sz="950">
+                        <a:rPr sz="850">
                           <a:solidFill>
                             <a:srgbClr val="FBFCFD"/>
                           </a:solidFill>
@@ -17456,7 +17423,7 @@
                         <a:t>s</a:t>
                       </a:r>
                       <a:r>
-                        <a:rPr sz="1350">
+                        <a:rPr sz="1250">
                           <a:solidFill>
                             <a:srgbClr val="FBFCFD"/>
                           </a:solidFill>
@@ -17478,7 +17445,7 @@
                     <a:p>
                       <a:pPr algn="ctr"/>
                       <a:r>
-                        <a:rPr sz="1350">
+                        <a:rPr sz="1250">
                           <a:solidFill>
                             <a:srgbClr val="FBFCFD"/>
                           </a:solidFill>
@@ -17500,7 +17467,7 @@
                     <a:p>
                       <a:pPr algn="ctr"/>
                       <a:r>
-                        <a:rPr sz="1350">
+                        <a:rPr sz="1250">
                           <a:solidFill>
                             <a:srgbClr val="FBFCFD"/>
                           </a:solidFill>
@@ -17522,7 +17489,7 @@
                     <a:p>
                       <a:pPr algn="ctr"/>
                       <a:r>
-                        <a:rPr sz="1350">
+                        <a:rPr sz="1250">
                           <a:solidFill>
                             <a:srgbClr val="FBFCFD"/>
                           </a:solidFill>
@@ -17530,7 +17497,7 @@
                         <a:t>n</a:t>
                       </a:r>
                       <a:r>
-                        <a:rPr sz="950">
+                        <a:rPr sz="850">
                           <a:solidFill>
                             <a:srgbClr val="FBFCFD"/>
                           </a:solidFill>
@@ -17538,7 +17505,7 @@
                         <a:t>I</a:t>
                       </a:r>
                       <a:r>
-                        <a:rPr sz="1350">
+                        <a:rPr sz="1250">
                           <a:solidFill>
                             <a:srgbClr val="FBFCFD"/>
                           </a:solidFill>
@@ -17554,7 +17521,7 @@
                   </a:tcPr>
                 </a:tc>
               </a:tr>
-              <a:tr h="633548">
+              <a:tr h="594360">
                 <a:tc>
                   <a:txBody>
                     <a:bodyPr wrap="square" lIns="54864" rIns="54864" tIns="36576" bIns="36576"/>
@@ -17562,7 +17529,7 @@
                     <a:p>
                       <a:pPr algn="l"/>
                       <a:r>
-                        <a:rPr sz="1350">
+                        <a:rPr sz="1250">
                           <a:solidFill>
                             <a:srgbClr val="FBFCFD"/>
                           </a:solidFill>
@@ -17584,7 +17551,7 @@
                     <a:p>
                       <a:pPr algn="ctr"/>
                       <a:r>
-                        <a:rPr sz="1350">
+                        <a:rPr sz="1250">
                           <a:solidFill>
                             <a:srgbClr val="FBFCFD"/>
                           </a:solidFill>
@@ -17592,7 +17559,7 @@
                         <a:t>Σ P</a:t>
                       </a:r>
                       <a:r>
-                        <a:rPr sz="950">
+                        <a:rPr sz="850">
                           <a:solidFill>
                             <a:srgbClr val="FBFCFD"/>
                           </a:solidFill>
@@ -17600,7 +17567,7 @@
                         <a:t>mp</a:t>
                       </a:r>
                       <a:r>
-                        <a:rPr sz="1350">
+                        <a:rPr sz="1250">
                           <a:solidFill>
                             <a:srgbClr val="FBFCFD"/>
                           </a:solidFill>
@@ -17608,7 +17575,7 @@
                         <a:t> / Σ P</a:t>
                       </a:r>
                       <a:r>
-                        <a:rPr sz="950">
+                        <a:rPr sz="850">
                           <a:solidFill>
                             <a:srgbClr val="FBFCFD"/>
                           </a:solidFill>
@@ -17616,7 +17583,7 @@
                         <a:t>STC</a:t>
                       </a:r>
                       <a:r>
-                        <a:rPr sz="1350">
+                        <a:rPr sz="1250">
                           <a:solidFill>
                             <a:srgbClr val="FBFCFD"/>
                           </a:solidFill>
@@ -17638,7 +17605,7 @@
                     <a:p>
                       <a:pPr algn="ctr"/>
                       <a:r>
-                        <a:rPr sz="1350">
+                        <a:rPr sz="1250">
                           <a:solidFill>
                             <a:srgbClr val="FBFCFD"/>
                           </a:solidFill>
@@ -17660,7 +17627,7 @@
                     <a:p>
                       <a:pPr algn="ctr"/>
                       <a:r>
-                        <a:rPr sz="1350">
+                        <a:rPr sz="1250">
                           <a:solidFill>
                             <a:srgbClr val="FBFCFD"/>
                           </a:solidFill>
@@ -17676,7 +17643,7 @@
                   </a:tcPr>
                 </a:tc>
               </a:tr>
-              <a:tr h="633552">
+              <a:tr h="594360">
                 <a:tc>
                   <a:txBody>
                     <a:bodyPr wrap="square" lIns="54864" rIns="54864" tIns="36576" bIns="36576"/>
@@ -17684,7 +17651,7 @@
                     <a:p>
                       <a:pPr algn="l"/>
                       <a:r>
-                        <a:rPr sz="1350">
+                        <a:rPr sz="1250">
                           <a:solidFill>
                             <a:srgbClr val="FBFCFD"/>
                           </a:solidFill>
@@ -17706,7 +17673,7 @@
                     <a:p>
                       <a:pPr algn="ctr"/>
                       <a:r>
-                        <a:rPr sz="1350">
+                        <a:rPr sz="1250">
                           <a:solidFill>
                             <a:srgbClr val="FBFCFD"/>
                           </a:solidFill>
@@ -17728,7 +17695,7 @@
                     <a:p>
                       <a:pPr algn="ctr"/>
                       <a:r>
-                        <a:rPr sz="1350">
+                        <a:rPr sz="1250">
                           <a:solidFill>
                             <a:srgbClr val="FBFCFD"/>
                           </a:solidFill>
@@ -17750,7 +17717,7 @@
                     <a:p>
                       <a:pPr algn="ctr"/>
                       <a:r>
-                        <a:rPr sz="1350">
+                        <a:rPr sz="1250">
                           <a:solidFill>
                             <a:srgbClr val="FBFCFD"/>
                           </a:solidFill>
@@ -20087,7 +20054,7 @@
         <p:spPr>
           <a:xfrm>
             <a:off x="365760" y="1188720"/>
-            <a:ext cx="5592927" cy="2395728"/>
+            <a:ext cx="5592927" cy="2194560"/>
           </a:xfrm>
           <a:prstGeom prst="rect">
             <a:avLst/>
@@ -20132,7 +20099,7 @@
         <p:spPr>
           <a:xfrm>
             <a:off x="365760" y="1188720"/>
-            <a:ext cx="73152" cy="2395728"/>
+            <a:ext cx="73152" cy="2194560"/>
           </a:xfrm>
           <a:prstGeom prst="rect">
             <a:avLst/>
@@ -20209,7 +20176,7 @@
         <p:spPr>
           <a:xfrm>
             <a:off x="566928" y="1828800"/>
-            <a:ext cx="5190591" cy="1591056"/>
+            <a:ext cx="5190591" cy="1389888"/>
           </a:xfrm>
           <a:prstGeom prst="rect">
             <a:avLst/>
@@ -20224,11 +20191,11 @@
           <a:p>
             <a:pPr algn="l">
               <a:lnSpc>
-                <a:spcPct val="106000"/>
+                <a:spcPct val="105000"/>
               </a:lnSpc>
             </a:pPr>
             <a:r>
-              <a:rPr sz="1400">
+              <a:rPr sz="1300">
                 <a:solidFill>
                   <a:srgbClr val="FBFCFD"/>
                 </a:solidFill>
@@ -20236,7 +20203,7 @@
               <a:t>• </a:t>
             </a:r>
             <a:r>
-              <a:rPr sz="1400" b="1">
+              <a:rPr sz="1300" b="1">
                 <a:solidFill>
                   <a:srgbClr val="FBFCFD"/>
                 </a:solidFill>
@@ -20244,7 +20211,7 @@
               <a:t>Python 3.12</a:t>
             </a:r>
             <a:r>
-              <a:rPr sz="1400">
+              <a:rPr sz="1300">
                 <a:solidFill>
                   <a:srgbClr val="FBFCFD"/>
                 </a:solidFill>
@@ -20252,16 +20219,16 @@
               <a:t> en entorno virtual (</a:t>
             </a:r>
             <a:r>
+              <a:rPr sz="1200">
+                <a:solidFill>
+                  <a:srgbClr val="7FDBFF"/>
+                </a:solidFill>
+                <a:latin typeface="Consolas"/>
+              </a:rPr>
+              <a:t>venv</a:t>
+            </a:r>
+            <a:r>
               <a:rPr sz="1300">
-                <a:solidFill>
-                  <a:srgbClr val="7FDBFF"/>
-                </a:solidFill>
-                <a:latin typeface="Consolas"/>
-              </a:rPr>
-              <a:t>venv</a:t>
-            </a:r>
-            <a:r>
-              <a:rPr sz="1400">
                 <a:solidFill>
                   <a:srgbClr val="FBFCFD"/>
                 </a:solidFill>
@@ -20272,11 +20239,11 @@
           <a:p>
             <a:pPr algn="l">
               <a:lnSpc>
-                <a:spcPct val="106000"/>
+                <a:spcPct val="105000"/>
               </a:lnSpc>
             </a:pPr>
             <a:r>
-              <a:rPr sz="1400">
+              <a:rPr sz="1300">
                 <a:solidFill>
                   <a:srgbClr val="FBFCFD"/>
                 </a:solidFill>
@@ -20284,7 +20251,7 @@
               <a:t>• </a:t>
             </a:r>
             <a:r>
-              <a:rPr sz="1400" b="1">
+              <a:rPr sz="1300" b="1">
                 <a:solidFill>
                   <a:srgbClr val="FBFCFD"/>
                 </a:solidFill>
@@ -20292,22 +20259,22 @@
               <a:t>pvlib 0.15</a:t>
             </a:r>
             <a:r>
-              <a:rPr sz="1400">
-                <a:solidFill>
-                  <a:srgbClr val="FBFCFD"/>
-                </a:solidFill>
-              </a:rPr>
-              <a:t> — modelado fotovoltaico (transposición, IAM, espectral, térmico, modelo de diodo, lectura PVGIS).</a:t>
+              <a:rPr sz="1300">
+                <a:solidFill>
+                  <a:srgbClr val="FBFCFD"/>
+                </a:solidFill>
+              </a:rPr>
+              <a:t> — modelado fotovoltaico (transposición, IAM, espectral, térmico, diodo, lectura PVGIS).</a:t>
             </a:r>
           </a:p>
           <a:p>
             <a:pPr algn="l">
               <a:lnSpc>
-                <a:spcPct val="106000"/>
+                <a:spcPct val="105000"/>
               </a:lnSpc>
             </a:pPr>
             <a:r>
-              <a:rPr sz="1400">
+              <a:rPr sz="1300">
                 <a:solidFill>
                   <a:srgbClr val="FBFCFD"/>
                 </a:solidFill>
@@ -20315,7 +20282,7 @@
               <a:t>• </a:t>
             </a:r>
             <a:r>
-              <a:rPr sz="1400" b="1">
+              <a:rPr sz="1300" b="1">
                 <a:solidFill>
                   <a:srgbClr val="FBFCFD"/>
                 </a:solidFill>
@@ -20323,7 +20290,7 @@
               <a:t>NumPy 2.4</a:t>
             </a:r>
             <a:r>
-              <a:rPr sz="1400">
+              <a:rPr sz="1300">
                 <a:solidFill>
                   <a:srgbClr val="FBFCFD"/>
                 </a:solidFill>
@@ -20334,11 +20301,11 @@
           <a:p>
             <a:pPr algn="l">
               <a:lnSpc>
-                <a:spcPct val="106000"/>
+                <a:spcPct val="105000"/>
               </a:lnSpc>
             </a:pPr>
             <a:r>
-              <a:rPr sz="1400">
+              <a:rPr sz="1300">
                 <a:solidFill>
                   <a:srgbClr val="FBFCFD"/>
                 </a:solidFill>
@@ -20346,7 +20313,7 @@
               <a:t>• </a:t>
             </a:r>
             <a:r>
-              <a:rPr sz="1400" b="1">
+              <a:rPr sz="1300" b="1">
                 <a:solidFill>
                   <a:srgbClr val="FBFCFD"/>
                 </a:solidFill>
@@ -20354,7 +20321,7 @@
               <a:t>pandas 3.0</a:t>
             </a:r>
             <a:r>
-              <a:rPr sz="1400">
+              <a:rPr sz="1300">
                 <a:solidFill>
                   <a:srgbClr val="FBFCFD"/>
                 </a:solidFill>
@@ -20362,16 +20329,16 @@
               <a:t> — series temporales, </a:t>
             </a:r>
             <a:r>
+              <a:rPr sz="1200">
+                <a:solidFill>
+                  <a:srgbClr val="7FDBFF"/>
+                </a:solidFill>
+                <a:latin typeface="Consolas"/>
+              </a:rPr>
+              <a:t>resample</a:t>
+            </a:r>
+            <a:r>
               <a:rPr sz="1300">
-                <a:solidFill>
-                  <a:srgbClr val="7FDBFF"/>
-                </a:solidFill>
-                <a:latin typeface="Consolas"/>
-              </a:rPr>
-              <a:t>resample</a:t>
-            </a:r>
-            <a:r>
-              <a:rPr sz="1400">
                 <a:solidFill>
                   <a:srgbClr val="FBFCFD"/>
                 </a:solidFill>
@@ -20382,11 +20349,11 @@
           <a:p>
             <a:pPr algn="l">
               <a:lnSpc>
-                <a:spcPct val="106000"/>
+                <a:spcPct val="105000"/>
               </a:lnSpc>
             </a:pPr>
             <a:r>
-              <a:rPr sz="1400">
+              <a:rPr sz="1300">
                 <a:solidFill>
                   <a:srgbClr val="FBFCFD"/>
                 </a:solidFill>
@@ -20394,7 +20361,7 @@
               <a:t>• </a:t>
             </a:r>
             <a:r>
-              <a:rPr sz="1400" b="1">
+              <a:rPr sz="1300" b="1">
                 <a:solidFill>
                   <a:srgbClr val="FBFCFD"/>
                 </a:solidFill>
@@ -20402,7 +20369,7 @@
               <a:t>SciPy</a:t>
             </a:r>
             <a:r>
-              <a:rPr sz="1400">
+              <a:rPr sz="1300">
                 <a:solidFill>
                   <a:srgbClr val="FBFCFD"/>
                 </a:solidFill>
@@ -20410,38 +20377,38 @@
               <a:t> — </a:t>
             </a:r>
             <a:r>
+              <a:rPr sz="1200">
+                <a:solidFill>
+                  <a:srgbClr val="7FDBFF"/>
+                </a:solidFill>
+                <a:latin typeface="Consolas"/>
+              </a:rPr>
+              <a:t>optimize.minimize</a:t>
+            </a:r>
+            <a:r>
               <a:rPr sz="1300">
                 <a:solidFill>
+                  <a:srgbClr val="FBFCFD"/>
+                </a:solidFill>
+              </a:rPr>
+              <a:t>/</a:t>
+            </a:r>
+            <a:r>
+              <a:rPr sz="1200">
+                <a:solidFill>
                   <a:srgbClr val="7FDBFF"/>
                 </a:solidFill>
                 <a:latin typeface="Consolas"/>
               </a:rPr>
-              <a:t>optimize.minimize</a:t>
-            </a:r>
-            <a:r>
-              <a:rPr sz="1400">
-                <a:solidFill>
-                  <a:srgbClr val="FBFCFD"/>
-                </a:solidFill>
-              </a:rPr>
-              <a:t>/</a:t>
+              <a:t>fsolve</a:t>
             </a:r>
             <a:r>
               <a:rPr sz="1300">
                 <a:solidFill>
-                  <a:srgbClr val="7FDBFF"/>
-                </a:solidFill>
-                <a:latin typeface="Consolas"/>
-              </a:rPr>
-              <a:t>fsolve</a:t>
-            </a:r>
-            <a:r>
-              <a:rPr sz="1400">
-                <a:solidFill>
-                  <a:srgbClr val="FBFCFD"/>
-                </a:solidFill>
-              </a:rPr>
-              <a:t> (ajuste de 5 parámetros).</a:t>
+                  <a:srgbClr val="FBFCFD"/>
+                </a:solidFill>
+              </a:rPr>
+              <a:t> (5 parámetros).</a:t>
             </a:r>
           </a:p>
         </p:txBody>
@@ -20454,8 +20421,8 @@
         </p:nvSpPr>
         <p:spPr>
           <a:xfrm>
-            <a:off x="365760" y="3785616"/>
-            <a:ext cx="5592927" cy="2395728"/>
+            <a:off x="365760" y="3584448"/>
+            <a:ext cx="5592927" cy="2724912"/>
           </a:xfrm>
           <a:prstGeom prst="rect">
             <a:avLst/>
@@ -20499,8 +20466,8 @@
         </p:nvSpPr>
         <p:spPr>
           <a:xfrm>
-            <a:off x="365760" y="3785616"/>
-            <a:ext cx="73152" cy="2395728"/>
+            <a:off x="365760" y="3584448"/>
+            <a:ext cx="73152" cy="2724912"/>
           </a:xfrm>
           <a:prstGeom prst="rect">
             <a:avLst/>
@@ -20542,7 +20509,7 @@
         </p:nvSpPr>
         <p:spPr>
           <a:xfrm>
-            <a:off x="530352" y="3877056"/>
+            <a:off x="530352" y="3675888"/>
             <a:ext cx="5318607" cy="411480"/>
           </a:xfrm>
           <a:prstGeom prst="rect">
@@ -20576,8 +20543,8 @@
         </p:nvSpPr>
         <p:spPr>
           <a:xfrm>
-            <a:off x="566928" y="4425696"/>
-            <a:ext cx="5190591" cy="1591056"/>
+            <a:off x="566928" y="4224528"/>
+            <a:ext cx="5190591" cy="1920240"/>
           </a:xfrm>
           <a:prstGeom prst="rect">
             <a:avLst/>
@@ -20592,11 +20559,11 @@
           <a:p>
             <a:pPr algn="l">
               <a:lnSpc>
-                <a:spcPct val="106000"/>
+                <a:spcPct val="105000"/>
               </a:lnSpc>
             </a:pPr>
             <a:r>
-              <a:rPr sz="1400">
+              <a:rPr sz="1300">
                 <a:solidFill>
                   <a:srgbClr val="FBFCFD"/>
                 </a:solidFill>
@@ -20604,50 +20571,50 @@
               <a:t>• </a:t>
             </a:r>
             <a:r>
+              <a:rPr sz="1200">
+                <a:solidFill>
+                  <a:srgbClr val="7FDBFF"/>
+                </a:solidFill>
+                <a:latin typeface="Consolas"/>
+              </a:rPr>
+              <a:t>get_total_irradiance</a:t>
+            </a:r>
+            <a:r>
               <a:rPr sz="1300">
                 <a:solidFill>
+                  <a:srgbClr val="FBFCFD"/>
+                </a:solidFill>
+              </a:rPr>
+              <a:t> (Perez), </a:t>
+            </a:r>
+            <a:r>
+              <a:rPr sz="1200">
+                <a:solidFill>
                   <a:srgbClr val="7FDBFF"/>
                 </a:solidFill>
                 <a:latin typeface="Consolas"/>
               </a:rPr>
-              <a:t>irradiance.get_total_irradiance</a:t>
-            </a:r>
-            <a:r>
-              <a:rPr sz="1400">
-                <a:solidFill>
-                  <a:srgbClr val="FBFCFD"/>
-                </a:solidFill>
-              </a:rPr>
-              <a:t> (Perez), </a:t>
+              <a:t>aoi</a:t>
             </a:r>
             <a:r>
               <a:rPr sz="1300">
                 <a:solidFill>
+                  <a:srgbClr val="FBFCFD"/>
+                </a:solidFill>
+              </a:rPr>
+              <a:t>, </a:t>
+            </a:r>
+            <a:r>
+              <a:rPr sz="1200">
+                <a:solidFill>
                   <a:srgbClr val="7FDBFF"/>
                 </a:solidFill>
                 <a:latin typeface="Consolas"/>
               </a:rPr>
-              <a:t>aoi</a:t>
-            </a:r>
-            <a:r>
-              <a:rPr sz="1400">
-                <a:solidFill>
-                  <a:srgbClr val="FBFCFD"/>
-                </a:solidFill>
-              </a:rPr>
-              <a:t>, </a:t>
+              <a:t>get_extra_radiation</a:t>
             </a:r>
             <a:r>
               <a:rPr sz="1300">
-                <a:solidFill>
-                  <a:srgbClr val="7FDBFF"/>
-                </a:solidFill>
-                <a:latin typeface="Consolas"/>
-              </a:rPr>
-              <a:t>get_extra_radiation</a:t>
-            </a:r>
-            <a:r>
-              <a:rPr sz="1400">
                 <a:solidFill>
                   <a:srgbClr val="FBFCFD"/>
                 </a:solidFill>
@@ -20658,11 +20625,11 @@
           <a:p>
             <a:pPr algn="l">
               <a:lnSpc>
-                <a:spcPct val="106000"/>
+                <a:spcPct val="105000"/>
               </a:lnSpc>
             </a:pPr>
             <a:r>
-              <a:rPr sz="1400">
+              <a:rPr sz="1300">
                 <a:solidFill>
                   <a:srgbClr val="FBFCFD"/>
                 </a:solidFill>
@@ -20670,48 +20637,48 @@
               <a:t>• </a:t>
             </a:r>
             <a:r>
+              <a:rPr sz="1200">
+                <a:solidFill>
+                  <a:srgbClr val="7FDBFF"/>
+                </a:solidFill>
+                <a:latin typeface="Consolas"/>
+              </a:rPr>
+              <a:t>iam.physical</a:t>
+            </a:r>
+            <a:r>
               <a:rPr sz="1300">
                 <a:solidFill>
+                  <a:srgbClr val="FBFCFD"/>
+                </a:solidFill>
+              </a:rPr>
+              <a:t> + </a:t>
+            </a:r>
+            <a:r>
+              <a:rPr sz="1200">
+                <a:solidFill>
                   <a:srgbClr val="7FDBFF"/>
                 </a:solidFill>
                 <a:latin typeface="Consolas"/>
               </a:rPr>
-              <a:t>iam.physical</a:t>
-            </a:r>
-            <a:r>
-              <a:rPr sz="1400">
-                <a:solidFill>
-                  <a:srgbClr val="FBFCFD"/>
-                </a:solidFill>
-              </a:rPr>
-              <a:t> + </a:t>
+              <a:t>iam.marion_diffuse</a:t>
             </a:r>
             <a:r>
               <a:rPr sz="1300">
                 <a:solidFill>
-                  <a:srgbClr val="7FDBFF"/>
-                </a:solidFill>
-                <a:latin typeface="Consolas"/>
-              </a:rPr>
-              <a:t>iam.marion_diffuse</a:t>
-            </a:r>
-            <a:r>
-              <a:rPr sz="1400">
-                <a:solidFill>
-                  <a:srgbClr val="FBFCFD"/>
-                </a:solidFill>
-              </a:rPr>
-              <a:t> (IAM directo y difuso).</a:t>
+                  <a:srgbClr val="FBFCFD"/>
+                </a:solidFill>
+              </a:rPr>
+              <a:t> (directo y difuso).</a:t>
             </a:r>
           </a:p>
           <a:p>
             <a:pPr algn="l">
               <a:lnSpc>
-                <a:spcPct val="106000"/>
+                <a:spcPct val="105000"/>
               </a:lnSpc>
             </a:pPr>
             <a:r>
-              <a:rPr sz="1400">
+              <a:rPr sz="1300">
                 <a:solidFill>
                   <a:srgbClr val="FBFCFD"/>
                 </a:solidFill>
@@ -20719,48 +20686,48 @@
               <a:t>• </a:t>
             </a:r>
             <a:r>
+              <a:rPr sz="1200">
+                <a:solidFill>
+                  <a:srgbClr val="7FDBFF"/>
+                </a:solidFill>
+                <a:latin typeface="Consolas"/>
+              </a:rPr>
+              <a:t>spectral_factor_firstsolar</a:t>
+            </a:r>
+            <a:r>
               <a:rPr sz="1300">
                 <a:solidFill>
+                  <a:srgbClr val="FBFCFD"/>
+                </a:solidFill>
+              </a:rPr>
+              <a:t> + </a:t>
+            </a:r>
+            <a:r>
+              <a:rPr sz="1200">
+                <a:solidFill>
                   <a:srgbClr val="7FDBFF"/>
                 </a:solidFill>
                 <a:latin typeface="Consolas"/>
               </a:rPr>
-              <a:t>spectrum.spectral_factor_firstsolar</a:t>
-            </a:r>
-            <a:r>
-              <a:rPr sz="1400">
-                <a:solidFill>
-                  <a:srgbClr val="FBFCFD"/>
-                </a:solidFill>
-              </a:rPr>
-              <a:t>, </a:t>
+              <a:t>gueymard94_pw</a:t>
             </a:r>
             <a:r>
               <a:rPr sz="1300">
                 <a:solidFill>
-                  <a:srgbClr val="7FDBFF"/>
-                </a:solidFill>
-                <a:latin typeface="Consolas"/>
-              </a:rPr>
-              <a:t>atmosphere.gueymard94_pw</a:t>
-            </a:r>
-            <a:r>
-              <a:rPr sz="1400">
-                <a:solidFill>
-                  <a:srgbClr val="FBFCFD"/>
-                </a:solidFill>
-              </a:rPr>
-              <a:t> + airmass.</a:t>
+                  <a:srgbClr val="FBFCFD"/>
+                </a:solidFill>
+              </a:rPr>
+              <a:t> (espectral).</a:t>
             </a:r>
           </a:p>
           <a:p>
             <a:pPr algn="l">
               <a:lnSpc>
-                <a:spcPct val="106000"/>
+                <a:spcPct val="105000"/>
               </a:lnSpc>
             </a:pPr>
             <a:r>
-              <a:rPr sz="1400">
+              <a:rPr sz="1300">
                 <a:solidFill>
                   <a:srgbClr val="FBFCFD"/>
                 </a:solidFill>
@@ -20768,31 +20735,31 @@
               <a:t>• </a:t>
             </a:r>
             <a:r>
+              <a:rPr sz="1200">
+                <a:solidFill>
+                  <a:srgbClr val="7FDBFF"/>
+                </a:solidFill>
+                <a:latin typeface="Consolas"/>
+              </a:rPr>
+              <a:t>temperature.sapm_cell</a:t>
+            </a:r>
+            <a:r>
               <a:rPr sz="1300">
                 <a:solidFill>
-                  <a:srgbClr val="7FDBFF"/>
-                </a:solidFill>
-                <a:latin typeface="Consolas"/>
-              </a:rPr>
-              <a:t>temperature.sapm_cell</a:t>
-            </a:r>
-            <a:r>
-              <a:rPr sz="1400">
-                <a:solidFill>
-                  <a:srgbClr val="FBFCFD"/>
-                </a:solidFill>
-              </a:rPr>
-              <a:t> (modelo térmico Sandia).</a:t>
+                  <a:srgbClr val="FBFCFD"/>
+                </a:solidFill>
+              </a:rPr>
+              <a:t> (térmico Sandia).</a:t>
             </a:r>
           </a:p>
           <a:p>
             <a:pPr algn="l">
               <a:lnSpc>
-                <a:spcPct val="106000"/>
+                <a:spcPct val="105000"/>
               </a:lnSpc>
             </a:pPr>
             <a:r>
-              <a:rPr sz="1400">
+              <a:rPr sz="1300">
                 <a:solidFill>
                   <a:srgbClr val="FBFCFD"/>
                 </a:solidFill>
@@ -20800,50 +20767,50 @@
               <a:t>• </a:t>
             </a:r>
             <a:r>
+              <a:rPr sz="1200">
+                <a:solidFill>
+                  <a:srgbClr val="7FDBFF"/>
+                </a:solidFill>
+                <a:latin typeface="Consolas"/>
+              </a:rPr>
+              <a:t>calcparams_desoto</a:t>
+            </a:r>
+            <a:r>
               <a:rPr sz="1300">
                 <a:solidFill>
+                  <a:srgbClr val="FBFCFD"/>
+                </a:solidFill>
+              </a:rPr>
+              <a:t>, </a:t>
+            </a:r>
+            <a:r>
+              <a:rPr sz="1200">
+                <a:solidFill>
                   <a:srgbClr val="7FDBFF"/>
                 </a:solidFill>
                 <a:latin typeface="Consolas"/>
               </a:rPr>
-              <a:t>pvsystem.calcparams_desoto</a:t>
-            </a:r>
-            <a:r>
-              <a:rPr sz="1400">
-                <a:solidFill>
-                  <a:srgbClr val="FBFCFD"/>
-                </a:solidFill>
-              </a:rPr>
-              <a:t> · </a:t>
+              <a:t>singlediode</a:t>
             </a:r>
             <a:r>
               <a:rPr sz="1300">
                 <a:solidFill>
+                  <a:srgbClr val="FBFCFD"/>
+                </a:solidFill>
+              </a:rPr>
+              <a:t>, </a:t>
+            </a:r>
+            <a:r>
+              <a:rPr sz="1200">
+                <a:solidFill>
                   <a:srgbClr val="7FDBFF"/>
                 </a:solidFill>
                 <a:latin typeface="Consolas"/>
               </a:rPr>
-              <a:t>singlediode</a:t>
-            </a:r>
-            <a:r>
-              <a:rPr sz="1400">
-                <a:solidFill>
-                  <a:srgbClr val="FBFCFD"/>
-                </a:solidFill>
-              </a:rPr>
-              <a:t> · </a:t>
+              <a:t>i_from_v</a:t>
             </a:r>
             <a:r>
               <a:rPr sz="1300">
-                <a:solidFill>
-                  <a:srgbClr val="7FDBFF"/>
-                </a:solidFill>
-                <a:latin typeface="Consolas"/>
-              </a:rPr>
-              <a:t>i_from_v</a:t>
-            </a:r>
-            <a:r>
-              <a:rPr sz="1400">
                 <a:solidFill>
                   <a:srgbClr val="FBFCFD"/>
                 </a:solidFill>
@@ -20854,11 +20821,11 @@
           <a:p>
             <a:pPr algn="l">
               <a:lnSpc>
-                <a:spcPct val="106000"/>
+                <a:spcPct val="105000"/>
               </a:lnSpc>
             </a:pPr>
             <a:r>
-              <a:rPr sz="1400">
+              <a:rPr sz="1300">
                 <a:solidFill>
                   <a:srgbClr val="FBFCFD"/>
                 </a:solidFill>
@@ -20866,33 +20833,33 @@
               <a:t>• </a:t>
             </a:r>
             <a:r>
+              <a:rPr sz="1200">
+                <a:solidFill>
+                  <a:srgbClr val="7FDBFF"/>
+                </a:solidFill>
+                <a:latin typeface="Consolas"/>
+              </a:rPr>
+              <a:t>iotools.get_pvgis_tmy</a:t>
+            </a:r>
+            <a:r>
               <a:rPr sz="1300">
                 <a:solidFill>
+                  <a:srgbClr val="FBFCFD"/>
+                </a:solidFill>
+              </a:rPr>
+              <a:t>, </a:t>
+            </a:r>
+            <a:r>
+              <a:rPr sz="1200">
+                <a:solidFill>
                   <a:srgbClr val="7FDBFF"/>
                 </a:solidFill>
                 <a:latin typeface="Consolas"/>
               </a:rPr>
-              <a:t>iotools.get_pvgis_tmy</a:t>
-            </a:r>
-            <a:r>
-              <a:rPr sz="1400">
-                <a:solidFill>
-                  <a:srgbClr val="FBFCFD"/>
-                </a:solidFill>
-              </a:rPr>
-              <a:t> · </a:t>
+              <a:t>location.Location</a:t>
             </a:r>
             <a:r>
               <a:rPr sz="1300">
-                <a:solidFill>
-                  <a:srgbClr val="7FDBFF"/>
-                </a:solidFill>
-                <a:latin typeface="Consolas"/>
-              </a:rPr>
-              <a:t>location.Location</a:t>
-            </a:r>
-            <a:r>
-              <a:rPr sz="1400">
                 <a:solidFill>
                   <a:srgbClr val="FBFCFD"/>
                 </a:solidFill>
@@ -20911,7 +20878,7 @@
         <p:spPr>
           <a:xfrm>
             <a:off x="6233007" y="1188720"/>
-            <a:ext cx="5592927" cy="2395728"/>
+            <a:ext cx="5592927" cy="2194560"/>
           </a:xfrm>
           <a:prstGeom prst="rect">
             <a:avLst/>
@@ -20956,7 +20923,7 @@
         <p:spPr>
           <a:xfrm>
             <a:off x="6233007" y="1188720"/>
-            <a:ext cx="73152" cy="2395728"/>
+            <a:ext cx="73152" cy="2194560"/>
           </a:xfrm>
           <a:prstGeom prst="rect">
             <a:avLst/>
@@ -21033,7 +21000,7 @@
         <p:spPr>
           <a:xfrm>
             <a:off x="6434175" y="1828800"/>
-            <a:ext cx="5190591" cy="1591056"/>
+            <a:ext cx="5190591" cy="1389888"/>
           </a:xfrm>
           <a:prstGeom prst="rect">
             <a:avLst/>
@@ -21048,11 +21015,11 @@
           <a:p>
             <a:pPr algn="l">
               <a:lnSpc>
-                <a:spcPct val="106000"/>
+                <a:spcPct val="105000"/>
               </a:lnSpc>
             </a:pPr>
             <a:r>
-              <a:rPr sz="1400">
+              <a:rPr sz="1300">
                 <a:solidFill>
                   <a:srgbClr val="FBFCFD"/>
                 </a:solidFill>
@@ -21060,7 +21027,7 @@
               <a:t>• </a:t>
             </a:r>
             <a:r>
-              <a:rPr sz="1400" b="1">
+              <a:rPr sz="1300" b="1">
                 <a:solidFill>
                   <a:srgbClr val="FBFCFD"/>
                 </a:solidFill>
@@ -21068,7 +21035,7 @@
               <a:t>Matplotlib</a:t>
             </a:r>
             <a:r>
-              <a:rPr sz="1400">
+              <a:rPr sz="1300">
                 <a:solidFill>
                   <a:srgbClr val="FBFCFD"/>
                 </a:solidFill>
@@ -21076,16 +21043,16 @@
               <a:t> — gráficos (modo oscuro, </a:t>
             </a:r>
             <a:r>
+              <a:rPr sz="1200">
+                <a:solidFill>
+                  <a:srgbClr val="7FDBFF"/>
+                </a:solidFill>
+                <a:latin typeface="Consolas"/>
+              </a:rPr>
+              <a:t>mathtext</a:t>
+            </a:r>
+            <a:r>
               <a:rPr sz="1300">
-                <a:solidFill>
-                  <a:srgbClr val="7FDBFF"/>
-                </a:solidFill>
-                <a:latin typeface="Consolas"/>
-              </a:rPr>
-              <a:t>mathtext</a:t>
-            </a:r>
-            <a:r>
-              <a:rPr sz="1400">
                 <a:solidFill>
                   <a:srgbClr val="FBFCFD"/>
                 </a:solidFill>
@@ -21096,11 +21063,11 @@
           <a:p>
             <a:pPr algn="l">
               <a:lnSpc>
-                <a:spcPct val="106000"/>
+                <a:spcPct val="105000"/>
               </a:lnSpc>
             </a:pPr>
             <a:r>
-              <a:rPr sz="1400">
+              <a:rPr sz="1300">
                 <a:solidFill>
                   <a:srgbClr val="FBFCFD"/>
                 </a:solidFill>
@@ -21108,7 +21075,7 @@
               <a:t>• </a:t>
             </a:r>
             <a:r>
-              <a:rPr sz="1400" b="1">
+              <a:rPr sz="1300" b="1">
                 <a:solidFill>
                   <a:srgbClr val="FBFCFD"/>
                 </a:solidFill>
@@ -21116,7 +21083,7 @@
               <a:t>python-pptx</a:t>
             </a:r>
             <a:r>
-              <a:rPr sz="1400">
+              <a:rPr sz="1300">
                 <a:solidFill>
                   <a:srgbClr val="FBFCFD"/>
                 </a:solidFill>
@@ -21127,11 +21094,11 @@
           <a:p>
             <a:pPr algn="l">
               <a:lnSpc>
-                <a:spcPct val="106000"/>
+                <a:spcPct val="105000"/>
               </a:lnSpc>
             </a:pPr>
             <a:r>
-              <a:rPr sz="1400">
+              <a:rPr sz="1300">
                 <a:solidFill>
                   <a:srgbClr val="FBFCFD"/>
                 </a:solidFill>
@@ -21139,7 +21106,7 @@
               <a:t>• </a:t>
             </a:r>
             <a:r>
-              <a:rPr sz="1400" b="1">
+              <a:rPr sz="1300" b="1">
                 <a:solidFill>
                   <a:srgbClr val="FBFCFD"/>
                 </a:solidFill>
@@ -21147,7 +21114,7 @@
               <a:t>Pillow (PIL)</a:t>
             </a:r>
             <a:r>
-              <a:rPr sz="1400">
+              <a:rPr sz="1300">
                 <a:solidFill>
                   <a:srgbClr val="FBFCFD"/>
                 </a:solidFill>
@@ -21158,11 +21125,11 @@
           <a:p>
             <a:pPr algn="l">
               <a:lnSpc>
-                <a:spcPct val="106000"/>
+                <a:spcPct val="105000"/>
               </a:lnSpc>
             </a:pPr>
             <a:r>
-              <a:rPr sz="1400">
+              <a:rPr sz="1300">
                 <a:solidFill>
                   <a:srgbClr val="FBFCFD"/>
                 </a:solidFill>
@@ -21170,7 +21137,7 @@
               <a:t>• </a:t>
             </a:r>
             <a:r>
-              <a:rPr sz="1400" b="1">
+              <a:rPr sz="1300" b="1">
                 <a:solidFill>
                   <a:srgbClr val="FBFCFD"/>
                 </a:solidFill>
@@ -21178,7 +21145,7 @@
               <a:t>pywin32</a:t>
             </a:r>
             <a:r>
-              <a:rPr sz="1400">
+              <a:rPr sz="1300">
                 <a:solidFill>
                   <a:srgbClr val="FBFCFD"/>
                 </a:solidFill>
@@ -21186,16 +21153,16 @@
               <a:t> (</a:t>
             </a:r>
             <a:r>
+              <a:rPr sz="1200">
+                <a:solidFill>
+                  <a:srgbClr val="7FDBFF"/>
+                </a:solidFill>
+                <a:latin typeface="Consolas"/>
+              </a:rPr>
+              <a:t>win32com</a:t>
+            </a:r>
+            <a:r>
               <a:rPr sz="1300">
-                <a:solidFill>
-                  <a:srgbClr val="7FDBFF"/>
-                </a:solidFill>
-                <a:latin typeface="Consolas"/>
-              </a:rPr>
-              <a:t>win32com</a:t>
-            </a:r>
-            <a:r>
-              <a:rPr sz="1400">
                 <a:solidFill>
                   <a:srgbClr val="FBFCFD"/>
                 </a:solidFill>
@@ -21213,8 +21180,8 @@
         </p:nvSpPr>
         <p:spPr>
           <a:xfrm>
-            <a:off x="6233007" y="3785616"/>
-            <a:ext cx="5592927" cy="2395728"/>
+            <a:off x="6233007" y="3584448"/>
+            <a:ext cx="5592927" cy="2724912"/>
           </a:xfrm>
           <a:prstGeom prst="rect">
             <a:avLst/>
@@ -21258,8 +21225,8 @@
         </p:nvSpPr>
         <p:spPr>
           <a:xfrm>
-            <a:off x="6233007" y="3785616"/>
-            <a:ext cx="73152" cy="2395728"/>
+            <a:off x="6233007" y="3584448"/>
+            <a:ext cx="73152" cy="2724912"/>
           </a:xfrm>
           <a:prstGeom prst="rect">
             <a:avLst/>
@@ -21301,7 +21268,7 @@
         </p:nvSpPr>
         <p:spPr>
           <a:xfrm>
-            <a:off x="6397599" y="3877056"/>
+            <a:off x="6397599" y="3675888"/>
             <a:ext cx="5318607" cy="411480"/>
           </a:xfrm>
           <a:prstGeom prst="rect">
@@ -21335,8 +21302,8 @@
         </p:nvSpPr>
         <p:spPr>
           <a:xfrm>
-            <a:off x="6434175" y="4425696"/>
-            <a:ext cx="5190591" cy="1591056"/>
+            <a:off x="6434175" y="4224528"/>
+            <a:ext cx="5190591" cy="1920240"/>
           </a:xfrm>
           <a:prstGeom prst="rect">
             <a:avLst/>
@@ -21351,11 +21318,11 @@
           <a:p>
             <a:pPr algn="l">
               <a:lnSpc>
-                <a:spcPct val="106000"/>
+                <a:spcPct val="105000"/>
               </a:lnSpc>
             </a:pPr>
             <a:r>
-              <a:rPr sz="1400">
+              <a:rPr sz="1300">
                 <a:solidFill>
                   <a:srgbClr val="FBFCFD"/>
                 </a:solidFill>
@@ -21363,7 +21330,7 @@
               <a:t>• </a:t>
             </a:r>
             <a:r>
-              <a:rPr sz="1400" b="1">
+              <a:rPr sz="1300" b="1">
                 <a:solidFill>
                   <a:srgbClr val="FBFCFD"/>
                 </a:solidFill>
@@ -21371,7 +21338,7 @@
               <a:t>python-dateutil</a:t>
             </a:r>
             <a:r>
-              <a:rPr sz="1400">
+              <a:rPr sz="1300">
                 <a:solidFill>
                   <a:srgbClr val="FBFCFD"/>
                 </a:solidFill>
@@ -21379,16 +21346,16 @@
               <a:t> (</a:t>
             </a:r>
             <a:r>
+              <a:rPr sz="1200">
+                <a:solidFill>
+                  <a:srgbClr val="7FDBFF"/>
+                </a:solidFill>
+                <a:latin typeface="Consolas"/>
+              </a:rPr>
+              <a:t>relativedelta</a:t>
+            </a:r>
+            <a:r>
               <a:rPr sz="1300">
-                <a:solidFill>
-                  <a:srgbClr val="7FDBFF"/>
-                </a:solidFill>
-                <a:latin typeface="Consolas"/>
-              </a:rPr>
-              <a:t>relativedelta</a:t>
-            </a:r>
-            <a:r>
-              <a:rPr sz="1400">
                 <a:solidFill>
                   <a:srgbClr val="FBFCFD"/>
                 </a:solidFill>
@@ -21399,11 +21366,11 @@
           <a:p>
             <a:pPr algn="l">
               <a:lnSpc>
-                <a:spcPct val="106000"/>
+                <a:spcPct val="105000"/>
               </a:lnSpc>
             </a:pPr>
             <a:r>
-              <a:rPr sz="1400">
+              <a:rPr sz="1300">
                 <a:solidFill>
                   <a:srgbClr val="FBFCFD"/>
                 </a:solidFill>
@@ -21411,7 +21378,7 @@
               <a:t>• </a:t>
             </a:r>
             <a:r>
-              <a:rPr sz="1400" b="1">
+              <a:rPr sz="1300" b="1">
                 <a:solidFill>
                   <a:srgbClr val="FBFCFD"/>
                 </a:solidFill>
@@ -21419,7 +21386,7 @@
               <a:t>stdlib:</a:t>
             </a:r>
             <a:r>
-              <a:rPr sz="1400">
+              <a:rPr sz="1300">
                 <a:solidFill>
                   <a:srgbClr val="FBFCFD"/>
                 </a:solidFill>
@@ -21427,16 +21394,33 @@
               <a:t> </a:t>
             </a:r>
             <a:r>
+              <a:rPr sz="1200">
+                <a:solidFill>
+                  <a:srgbClr val="7FDBFF"/>
+                </a:solidFill>
+                <a:latin typeface="Consolas"/>
+              </a:rPr>
+              <a:t>csv</a:t>
+            </a:r>
+            <a:r>
               <a:rPr sz="1300">
                 <a:solidFill>
+                  <a:srgbClr val="FBFCFD"/>
+                </a:solidFill>
+              </a:rPr>
+              <a:t>, </a:t>
+            </a:r>
+            <a:r>
+              <a:rPr sz="1200">
+                <a:solidFill>
                   <a:srgbClr val="7FDBFF"/>
                 </a:solidFill>
                 <a:latin typeface="Consolas"/>
               </a:rPr>
-              <a:t>csv</a:t>
-            </a:r>
-            <a:r>
-              <a:rPr sz="1400">
+              <a:t>json</a:t>
+            </a:r>
+            <a:r>
+              <a:rPr sz="1300">
                 <a:solidFill>
                   <a:srgbClr val="FBFCFD"/>
                 </a:solidFill>
@@ -21444,16 +21428,33 @@
               <a:t>, </a:t>
             </a:r>
             <a:r>
+              <a:rPr sz="1200">
+                <a:solidFill>
+                  <a:srgbClr val="7FDBFF"/>
+                </a:solidFill>
+                <a:latin typeface="Consolas"/>
+              </a:rPr>
+              <a:t>os</a:t>
+            </a:r>
+            <a:r>
               <a:rPr sz="1300">
                 <a:solidFill>
+                  <a:srgbClr val="FBFCFD"/>
+                </a:solidFill>
+              </a:rPr>
+              <a:t>, </a:t>
+            </a:r>
+            <a:r>
+              <a:rPr sz="1200">
+                <a:solidFill>
                   <a:srgbClr val="7FDBFF"/>
                 </a:solidFill>
                 <a:latin typeface="Consolas"/>
               </a:rPr>
-              <a:t>json</a:t>
-            </a:r>
-            <a:r>
-              <a:rPr sz="1400">
+              <a:t>re</a:t>
+            </a:r>
+            <a:r>
+              <a:rPr sz="1300">
                 <a:solidFill>
                   <a:srgbClr val="FBFCFD"/>
                 </a:solidFill>
@@ -21461,16 +21462,33 @@
               <a:t>, </a:t>
             </a:r>
             <a:r>
+              <a:rPr sz="1200">
+                <a:solidFill>
+                  <a:srgbClr val="7FDBFF"/>
+                </a:solidFill>
+                <a:latin typeface="Consolas"/>
+              </a:rPr>
+              <a:t>datetime</a:t>
+            </a:r>
+            <a:r>
               <a:rPr sz="1300">
                 <a:solidFill>
+                  <a:srgbClr val="FBFCFD"/>
+                </a:solidFill>
+              </a:rPr>
+              <a:t>, </a:t>
+            </a:r>
+            <a:r>
+              <a:rPr sz="1200">
+                <a:solidFill>
                   <a:srgbClr val="7FDBFF"/>
                 </a:solidFill>
                 <a:latin typeface="Consolas"/>
               </a:rPr>
-              <a:t>os</a:t>
-            </a:r>
-            <a:r>
-              <a:rPr sz="1400">
+              <a:t>hashlib</a:t>
+            </a:r>
+            <a:r>
+              <a:rPr sz="1300">
                 <a:solidFill>
                   <a:srgbClr val="FBFCFD"/>
                 </a:solidFill>
@@ -21478,67 +21496,16 @@
               <a:t>, </a:t>
             </a:r>
             <a:r>
+              <a:rPr sz="1200">
+                <a:solidFill>
+                  <a:srgbClr val="7FDBFF"/>
+                </a:solidFill>
+                <a:latin typeface="Consolas"/>
+              </a:rPr>
+              <a:t>math</a:t>
+            </a:r>
+            <a:r>
               <a:rPr sz="1300">
-                <a:solidFill>
-                  <a:srgbClr val="7FDBFF"/>
-                </a:solidFill>
-                <a:latin typeface="Consolas"/>
-              </a:rPr>
-              <a:t>re</a:t>
-            </a:r>
-            <a:r>
-              <a:rPr sz="1400">
-                <a:solidFill>
-                  <a:srgbClr val="FBFCFD"/>
-                </a:solidFill>
-              </a:rPr>
-              <a:t>, </a:t>
-            </a:r>
-            <a:r>
-              <a:rPr sz="1300">
-                <a:solidFill>
-                  <a:srgbClr val="7FDBFF"/>
-                </a:solidFill>
-                <a:latin typeface="Consolas"/>
-              </a:rPr>
-              <a:t>datetime</a:t>
-            </a:r>
-            <a:r>
-              <a:rPr sz="1400">
-                <a:solidFill>
-                  <a:srgbClr val="FBFCFD"/>
-                </a:solidFill>
-              </a:rPr>
-              <a:t>, </a:t>
-            </a:r>
-            <a:r>
-              <a:rPr sz="1300">
-                <a:solidFill>
-                  <a:srgbClr val="7FDBFF"/>
-                </a:solidFill>
-                <a:latin typeface="Consolas"/>
-              </a:rPr>
-              <a:t>hashlib</a:t>
-            </a:r>
-            <a:r>
-              <a:rPr sz="1400">
-                <a:solidFill>
-                  <a:srgbClr val="FBFCFD"/>
-                </a:solidFill>
-              </a:rPr>
-              <a:t>, </a:t>
-            </a:r>
-            <a:r>
-              <a:rPr sz="1300">
-                <a:solidFill>
-                  <a:srgbClr val="7FDBFF"/>
-                </a:solidFill>
-                <a:latin typeface="Consolas"/>
-              </a:rPr>
-              <a:t>math</a:t>
-            </a:r>
-            <a:r>
-              <a:rPr sz="1400">
                 <a:solidFill>
                   <a:srgbClr val="FBFCFD"/>
                 </a:solidFill>
@@ -21549,11 +21516,11 @@
           <a:p>
             <a:pPr algn="l">
               <a:lnSpc>
-                <a:spcPct val="106000"/>
+                <a:spcPct val="105000"/>
               </a:lnSpc>
             </a:pPr>
             <a:r>
-              <a:rPr sz="1400">
+              <a:rPr sz="1300">
                 <a:solidFill>
                   <a:srgbClr val="FBFCFD"/>
                 </a:solidFill>
@@ -21561,7 +21528,7 @@
               <a:t>• </a:t>
             </a:r>
             <a:r>
-              <a:rPr sz="1400" b="1">
+              <a:rPr sz="1300" b="1">
                 <a:solidFill>
                   <a:srgbClr val="FBFCFD"/>
                 </a:solidFill>
@@ -21569,7 +21536,7 @@
               <a:t>Dataset NREL Cocoa</a:t>
             </a:r>
             <a:r>
-              <a:rPr sz="1400">
+              <a:rPr sz="1300">
                 <a:solidFill>
                   <a:srgbClr val="FBFCFD"/>
                 </a:solidFill>
@@ -21580,11 +21547,11 @@
           <a:p>
             <a:pPr algn="l">
               <a:lnSpc>
-                <a:spcPct val="106000"/>
+                <a:spcPct val="105000"/>
               </a:lnSpc>
             </a:pPr>
             <a:r>
-              <a:rPr sz="1400">
+              <a:rPr sz="1300">
                 <a:solidFill>
                   <a:srgbClr val="FBFCFD"/>
                 </a:solidFill>
@@ -21592,7 +21559,7 @@
               <a:t>• </a:t>
             </a:r>
             <a:r>
-              <a:rPr sz="1400" b="1">
+              <a:rPr sz="1300" b="1">
                 <a:solidFill>
                   <a:srgbClr val="FBFCFD"/>
                 </a:solidFill>
@@ -21600,7 +21567,7 @@
               <a:t>PVGIS TMY</a:t>
             </a:r>
             <a:r>
-              <a:rPr sz="1400">
+              <a:rPr sz="1300">
                 <a:solidFill>
                   <a:srgbClr val="FBFCFD"/>
                 </a:solidFill>
@@ -34011,7 +33978,7 @@
                   <a:srgbClr val="FBFCFD"/>
                 </a:solidFill>
               </a:rPr>
-              <a:t> IAM físico de Snell-Bouguer y factor espectral por masa de aire [King et al., 2004] — ejecutados en la Fase 2 sobre la POA. (Anexo II, Lám. 29)</a:t>
+              <a:t> descuentan la luz que se refleja en el vidrio cuando el sol llega muy inclinado (IAM) y la corrigen según el espectro solar; aplicados en la Fase 2 — fórmulas y parámetros en (Anexo II, Lám. 29).</a:t>
             </a:r>
           </a:p>
         </p:txBody>
@@ -34975,7 +34942,7 @@
         <p:spPr>
           <a:xfrm>
             <a:off x="365760" y="2788920"/>
-            <a:ext cx="5592927" cy="3383280"/>
+            <a:ext cx="5592927" cy="3566160"/>
           </a:xfrm>
           <a:prstGeom prst="rect">
             <a:avLst/>
@@ -35020,7 +34987,7 @@
         <p:spPr>
           <a:xfrm>
             <a:off x="365760" y="2788920"/>
-            <a:ext cx="73152" cy="3383280"/>
+            <a:ext cx="73152" cy="3566160"/>
           </a:xfrm>
           <a:prstGeom prst="rect">
             <a:avLst/>
@@ -35097,7 +35064,7 @@
         <p:spPr>
           <a:xfrm>
             <a:off x="566928" y="3429000"/>
-            <a:ext cx="5190591" cy="2578608"/>
+            <a:ext cx="5190591" cy="2761488"/>
           </a:xfrm>
           <a:prstGeom prst="rect">
             <a:avLst/>
@@ -35116,7 +35083,7 @@
               </a:lnSpc>
             </a:pPr>
             <a:r>
-              <a:rPr sz="1650">
+              <a:rPr sz="1550">
                 <a:solidFill>
                   <a:srgbClr val="FBFCFD"/>
                 </a:solidFill>
@@ -35124,7 +35091,7 @@
               <a:t>• </a:t>
             </a:r>
             <a:r>
-              <a:rPr sz="1650" b="1">
+              <a:rPr sz="1550" b="1">
                 <a:solidFill>
                   <a:srgbClr val="FBFCFD"/>
                 </a:solidFill>
@@ -35132,7 +35099,7 @@
               <a:t>Recurso REAL (no escalado):</a:t>
             </a:r>
             <a:r>
-              <a:rPr sz="1650">
+              <a:rPr sz="1550">
                 <a:solidFill>
                   <a:srgbClr val="FBFCFD"/>
                 </a:solidFill>
@@ -35154,7 +35121,7 @@
               </a:lnSpc>
             </a:pPr>
             <a:r>
-              <a:rPr sz="1650">
+              <a:rPr sz="1550">
                 <a:solidFill>
                   <a:srgbClr val="FBFCFD"/>
                 </a:solidFill>
@@ -35176,7 +35143,7 @@
               </a:lnSpc>
             </a:pPr>
             <a:r>
-              <a:rPr sz="1650">
+              <a:rPr sz="1550">
                 <a:solidFill>
                   <a:srgbClr val="FBFCFD"/>
                 </a:solidFill>
@@ -35184,7 +35151,7 @@
               <a:t>• 33 kWh/kWp × 100,000 kWp = </a:t>
             </a:r>
             <a:r>
-              <a:rPr sz="1650" b="1">
+              <a:rPr sz="1550" b="1">
                 <a:solidFill>
                   <a:srgbClr val="FBFCFD"/>
                 </a:solidFill>
@@ -35192,7 +35159,7 @@
               <a:t>+3,294 MWh/año</a:t>
             </a:r>
             <a:r>
-              <a:rPr sz="1650">
+              <a:rPr sz="1550">
                 <a:solidFill>
                   <a:srgbClr val="FBFCFD"/>
                 </a:solidFill>
@@ -35214,7 +35181,7 @@
               </a:lnSpc>
             </a:pPr>
             <a:r>
-              <a:rPr sz="1650">
+              <a:rPr sz="1550">
                 <a:solidFill>
                   <a:srgbClr val="FBFCFD"/>
                 </a:solidFill>
@@ -35222,7 +35189,7 @@
               <a:t>• Precio de venta ≈ 45 USD/MWh → </a:t>
             </a:r>
             <a:r>
-              <a:rPr sz="1650" b="1">
+              <a:rPr sz="1550" b="1">
                 <a:solidFill>
                   <a:srgbClr val="FBFCFD"/>
                 </a:solidFill>
@@ -35230,7 +35197,7 @@
               <a:t>+USD 148k/año</a:t>
             </a:r>
             <a:r>
-              <a:rPr sz="1650">
+              <a:rPr sz="1550">
                 <a:solidFill>
                   <a:srgbClr val="FBFCFD"/>
                 </a:solidFill>
@@ -35249,7 +35216,7 @@
         <p:spPr>
           <a:xfrm>
             <a:off x="6233007" y="2788920"/>
-            <a:ext cx="5592927" cy="3383280"/>
+            <a:ext cx="5592927" cy="3566160"/>
           </a:xfrm>
           <a:prstGeom prst="rect">
             <a:avLst/>
@@ -35294,7 +35261,7 @@
         <p:spPr>
           <a:xfrm>
             <a:off x="6233007" y="2788920"/>
-            <a:ext cx="73152" cy="3383280"/>
+            <a:ext cx="73152" cy="3566160"/>
           </a:xfrm>
           <a:prstGeom prst="rect">
             <a:avLst/>
@@ -35371,7 +35338,7 @@
         <p:spPr>
           <a:xfrm>
             <a:off x="6434175" y="3429000"/>
-            <a:ext cx="5190591" cy="2578608"/>
+            <a:ext cx="5190591" cy="2761488"/>
           </a:xfrm>
           <a:prstGeom prst="rect">
             <a:avLst/>
@@ -35390,7 +35357,7 @@
               </a:lnSpc>
             </a:pPr>
             <a:r>
-              <a:rPr sz="1650">
+              <a:rPr sz="1550">
                 <a:solidFill>
                   <a:srgbClr val="FBFCFD"/>
                 </a:solidFill>
@@ -35398,7 +35365,7 @@
               <a:t>• La prima CAPEX de los módulos HIT se </a:t>
             </a:r>
             <a:r>
-              <a:rPr sz="1650" b="1">
+              <a:rPr sz="1550" b="1">
                 <a:solidFill>
                   <a:srgbClr val="FBFCFD"/>
                 </a:solidFill>
@@ -35406,7 +35373,7 @@
               <a:t>amortiza</a:t>
             </a:r>
             <a:r>
-              <a:rPr sz="1650">
+              <a:rPr sz="1550">
                 <a:solidFill>
                   <a:srgbClr val="FBFCFD"/>
                 </a:solidFill>
@@ -35428,7 +35395,7 @@
               </a:lnSpc>
             </a:pPr>
             <a:r>
-              <a:rPr sz="1650">
+              <a:rPr sz="1550">
                 <a:solidFill>
                   <a:srgbClr val="FBFCFD"/>
                 </a:solidFill>
@@ -35436,7 +35403,7 @@
               <a:t>• La ventaja relativa de HIT es </a:t>
             </a:r>
             <a:r>
-              <a:rPr sz="1650" b="1">
+              <a:rPr sz="1550" b="1">
                 <a:solidFill>
                   <a:srgbClr val="FBFCFD"/>
                 </a:solidFill>
@@ -35444,7 +35411,7 @@
               <a:t>menor</a:t>
             </a:r>
             <a:r>
-              <a:rPr sz="1650">
+              <a:rPr sz="1550">
                 <a:solidFill>
                   <a:srgbClr val="FBFCFD"/>
                 </a:solidFill>
@@ -35466,7 +35433,7 @@
               </a:lnSpc>
             </a:pPr>
             <a:r>
-              <a:rPr sz="1650">
+              <a:rPr sz="1550">
                 <a:solidFill>
                   <a:srgbClr val="FBFCFD"/>
                 </a:solidFill>
